--- a/презентация/Тілашар-қорғау.pptx
+++ b/презентация/Тілашар-қорғау.pptx
@@ -1081,7 +1081,12 @@
           <a:lstStyle/>
           <a:p>
             <a:r>
-              <a:t>Про вес: 192 килобайта — это меньше одной фотографии. Важно для школьного телефона</a:t>
+              <a:t>Про вес: код и стили — 199 килобайт, всё приложение целиком около 1,4 мегабайта.</a:t>
+            </a:r>
+          </a:p>
+          <a:p>
+            <a:r>
+              <a:t>Это меньше одной фотографии с телефона. Важно для школьного телефона</a:t>
             </a:r>
           </a:p>
           <a:p>
@@ -15552,7 +15557,7 @@
                 <a:cs typeface="GQ Text Bold"/>
                 <a:ea typeface="GQ Text Bold"/>
               </a:rPr>
-              <a:t>192</a:t>
+              <a:t>199</a:t>
             </a:r>
           </a:p>
         </p:txBody>
@@ -15634,7 +15639,7 @@
                 <a:cs typeface="GQ Text"/>
                 <a:ea typeface="GQ Text"/>
               </a:rPr>
-              <a:t>қосымшаның сығылған салмағы</a:t>
+              <a:t>сығылған код пен стиль</a:t>
             </a:r>
           </a:p>
         </p:txBody>
@@ -15921,7 +15926,7 @@
                 <a:cs typeface="GQ Text"/>
                 <a:ea typeface="GQ Text"/>
               </a:rPr>
-              <a:t>Интернетсіз жұмыс тексерілді: барлық файл, оның ішінде қаріп те, қосымшаның ішінде жатыр.</a:t>
+              <a:t>Қосымша қаріпті және суреттерді қоса алғанда шамамен 1,4 МБ орын алады. Ол бір рет жүктеліп, әрі қарай интернетсіз жұмыс істейді — тексерілді: желіге бірде-бір сұрау кетпейді.</a:t>
             </a:r>
           </a:p>
         </p:txBody>

--- a/презентация/Тілашар-қорғау.pptx
+++ b/презентация/Тілашар-қорғау.pptx
@@ -633,7 +633,7 @@
           </a:p>
           <a:p>
             <a:r>
-              <a:t>«ты делаешь» вместо «я делаю». Ученик получал похвалу за неверную форму — это хуже,</a:t>
+              <a:t>«ты читаешь» вместо «я читаю». Ученик получал похвалу за неверную форму — это хуже,</a:t>
             </a:r>
           </a:p>
           <a:p>
@@ -9916,7 +9916,7 @@
         <p:spPr>
           <a:xfrm>
             <a:off x="749808" y="2937764"/>
-            <a:ext cx="5245455" cy="2533903"/>
+            <a:ext cx="5245455" cy="2737103"/>
           </a:xfrm>
           <a:prstGeom prst="rect">
             <a:avLst/>
@@ -10205,7 +10205,7 @@
                 <a:cs typeface="IBM Plex Mono SemiBold"/>
                 <a:ea typeface="IBM Plex Mono SemiBold"/>
               </a:rPr>
-              <a:t>жатырмын</a:t>
+              <a:t>оқимын</a:t>
             </a:r>
           </a:p>
         </p:txBody>
@@ -10246,7 +10246,7 @@
                 <a:cs typeface="GQ Text"/>
                 <a:ea typeface="GQ Text"/>
               </a:rPr>
-              <a:t>мен істеп жатырмын</a:t>
+              <a:t>мен оқимын</a:t>
             </a:r>
           </a:p>
         </p:txBody>
@@ -10287,7 +10287,7 @@
                 <a:cs typeface="IBM Plex Mono SemiBold"/>
                 <a:ea typeface="IBM Plex Mono SemiBold"/>
               </a:rPr>
-              <a:t>жатырсың</a:t>
+              <a:t>оқисың</a:t>
             </a:r>
           </a:p>
         </p:txBody>
@@ -10328,7 +10328,7 @@
                 <a:cs typeface="GQ Text"/>
                 <a:ea typeface="GQ Text"/>
               </a:rPr>
-              <a:t>сен істеп жатырсың</a:t>
+              <a:t>сен оқисың</a:t>
             </a:r>
           </a:p>
         </p:txBody>
@@ -10342,7 +10342,7 @@
         <p:spPr>
           <a:xfrm>
             <a:off x="1024127" y="4758435"/>
-            <a:ext cx="4696815" cy="491744"/>
+            <a:ext cx="4696815" cy="694944"/>
           </a:xfrm>
           <a:prstGeom prst="rect">
             <a:avLst/>
@@ -10369,7 +10369,7 @@
                 <a:cs typeface="GQ Text"/>
                 <a:ea typeface="GQ Text"/>
               </a:rPr>
-              <a:t>Бұл формалардың арасы — дәл бір таңба. Кәдімгі қате</a:t>
+              <a:t>Формалар бір әріппен ажыратылады: «м» мен «с». Кәдімгі қате</a:t>
             </a:r>
           </a:p>
           <a:p>
@@ -10387,7 +10387,25 @@
                 <a:cs typeface="GQ Text"/>
                 <a:ea typeface="GQ Text"/>
               </a:rPr>
-              <a:t>басудағыдай.</a:t>
+              <a:t>басудағыдай — оларды арақашықтық бойынша ажырату мүмкін</a:t>
+            </a:r>
+          </a:p>
+          <a:p>
+            <a:pPr algn="l">
+              <a:lnSpc>
+                <a:spcPts val="1600"/>
+              </a:lnSpc>
+            </a:pPr>
+            <a:r>
+              <a:rPr sz="1100">
+                <a:solidFill>
+                  <a:srgbClr val="A6ADB6"/>
+                </a:solidFill>
+                <a:latin typeface="GQ Text"/>
+                <a:cs typeface="GQ Text"/>
+                <a:ea typeface="GQ Text"/>
+              </a:rPr>
+              <a:t>емес.</a:t>
             </a:r>
           </a:p>
         </p:txBody>
@@ -11223,6 +11241,47 @@
         </p:nvSpPr>
         <p:spPr>
           <a:xfrm>
+            <a:off x="8011972" y="3071515"/>
+            <a:ext cx="1009192" cy="243278"/>
+          </a:xfrm>
+          <a:prstGeom prst="rect">
+            <a:avLst/>
+          </a:prstGeom>
+          <a:noFill/>
+        </p:spPr>
+        <p:txBody>
+          <a:bodyPr wrap="none" lIns="0" rIns="0" tIns="0" bIns="0" anchor="t">
+            <a:spAutoFit/>
+          </a:bodyPr>
+          <a:lstStyle/>
+          <a:p>
+            <a:pPr algn="l">
+              <a:lnSpc>
+                <a:spcPts val="1349"/>
+              </a:lnSpc>
+            </a:pPr>
+            <a:r>
+              <a:rPr sz="950">
+                <a:solidFill>
+                  <a:srgbClr val="535C66"/>
+                </a:solidFill>
+                <a:latin typeface="GQ Text"/>
+                <a:cs typeface="GQ Text"/>
+                <a:ea typeface="GQ Text"/>
+              </a:rPr>
+              <a:t>қазақ тіліндегі</a:t>
+            </a:r>
+          </a:p>
+        </p:txBody>
+      </p:sp>
+      <p:sp>
+        <p:nvSpPr>
+          <p:cNvPr id="18" name="TextBox 17"/>
+          <p:cNvSpPr txBox="1"/>
+          <p:nvPr/>
+        </p:nvSpPr>
+        <p:spPr>
+          <a:xfrm>
             <a:off x="9222333" y="2330526"/>
             <a:ext cx="1009192" cy="530199"/>
           </a:xfrm>
@@ -11258,7 +11317,7 @@
       </p:sp>
       <p:sp>
         <p:nvSpPr>
-          <p:cNvPr id="18" name="TextBox 17"/>
+          <p:cNvPr id="19" name="TextBox 18"/>
           <p:cNvSpPr txBox="1"/>
           <p:nvPr/>
         </p:nvSpPr>
@@ -11299,7 +11358,66 @@
       </p:sp>
       <p:sp>
         <p:nvSpPr>
-          <p:cNvPr id="19" name="TextBox 18"/>
+          <p:cNvPr id="20" name="TextBox 19"/>
+          <p:cNvSpPr txBox="1"/>
+          <p:nvPr/>
+        </p:nvSpPr>
+        <p:spPr>
+          <a:xfrm>
+            <a:off x="9222333" y="3071515"/>
+            <a:ext cx="1009192" cy="414601"/>
+          </a:xfrm>
+          <a:prstGeom prst="rect">
+            <a:avLst/>
+          </a:prstGeom>
+          <a:noFill/>
+        </p:spPr>
+        <p:txBody>
+          <a:bodyPr wrap="none" lIns="0" rIns="0" tIns="0" bIns="0" anchor="t">
+            <a:spAutoFit/>
+          </a:bodyPr>
+          <a:lstStyle/>
+          <a:p>
+            <a:pPr algn="l">
+              <a:lnSpc>
+                <a:spcPts val="1349"/>
+              </a:lnSpc>
+            </a:pPr>
+            <a:r>
+              <a:rPr sz="950">
+                <a:solidFill>
+                  <a:srgbClr val="535C66"/>
+                </a:solidFill>
+                <a:latin typeface="GQ Text"/>
+                <a:cs typeface="GQ Text"/>
+                <a:ea typeface="GQ Text"/>
+              </a:rPr>
+              <a:t>оқулық</a:t>
+            </a:r>
+          </a:p>
+          <a:p>
+            <a:pPr algn="l">
+              <a:lnSpc>
+                <a:spcPts val="1349"/>
+              </a:lnSpc>
+            </a:pPr>
+            <a:r>
+              <a:rPr sz="950">
+                <a:solidFill>
+                  <a:srgbClr val="535C66"/>
+                </a:solidFill>
+                <a:latin typeface="GQ Text"/>
+                <a:cs typeface="GQ Text"/>
+                <a:ea typeface="GQ Text"/>
+              </a:rPr>
+              <a:t>формаларына</a:t>
+            </a:r>
+          </a:p>
+        </p:txBody>
+      </p:sp>
+      <p:sp>
+        <p:nvSpPr>
+          <p:cNvPr id="21" name="TextBox 20"/>
           <p:cNvSpPr txBox="1"/>
           <p:nvPr/>
         </p:nvSpPr>
@@ -11340,7 +11458,7 @@
       </p:sp>
       <p:sp>
         <p:nvSpPr>
-          <p:cNvPr id="20" name="TextBox 19"/>
+          <p:cNvPr id="22" name="TextBox 21"/>
           <p:cNvSpPr txBox="1"/>
           <p:nvPr/>
         </p:nvSpPr>
@@ -11381,7 +11499,66 @@
       </p:sp>
       <p:sp>
         <p:nvSpPr>
-          <p:cNvPr id="21" name="Rectangle 20"/>
+          <p:cNvPr id="23" name="TextBox 22"/>
+          <p:cNvSpPr txBox="1"/>
+          <p:nvPr/>
+        </p:nvSpPr>
+        <p:spPr>
+          <a:xfrm>
+            <a:off x="10432694" y="3071515"/>
+            <a:ext cx="1009192" cy="414601"/>
+          </a:xfrm>
+          <a:prstGeom prst="rect">
+            <a:avLst/>
+          </a:prstGeom>
+          <a:noFill/>
+        </p:spPr>
+        <p:txBody>
+          <a:bodyPr wrap="none" lIns="0" rIns="0" tIns="0" bIns="0" anchor="t">
+            <a:spAutoFit/>
+          </a:bodyPr>
+          <a:lstStyle/>
+          <a:p>
+            <a:pPr algn="l">
+              <a:lnSpc>
+                <a:spcPts val="1349"/>
+              </a:lnSpc>
+            </a:pPr>
+            <a:r>
+              <a:rPr sz="950">
+                <a:solidFill>
+                  <a:srgbClr val="535C66"/>
+                </a:solidFill>
+                <a:latin typeface="GQ Text"/>
+                <a:cs typeface="GQ Text"/>
+                <a:ea typeface="GQ Text"/>
+              </a:rPr>
+              <a:t>және кез келген</a:t>
+            </a:r>
+          </a:p>
+          <a:p>
+            <a:pPr algn="l">
+              <a:lnSpc>
+                <a:spcPts val="1349"/>
+              </a:lnSpc>
+            </a:pPr>
+            <a:r>
+              <a:rPr sz="950">
+                <a:solidFill>
+                  <a:srgbClr val="535C66"/>
+                </a:solidFill>
+                <a:latin typeface="GQ Text"/>
+                <a:cs typeface="GQ Text"/>
+                <a:ea typeface="GQ Text"/>
+              </a:rPr>
+              <a:t>өз сөзің</a:t>
+            </a:r>
+          </a:p>
+        </p:txBody>
+      </p:sp>
+      <p:sp>
+        <p:nvSpPr>
+          <p:cNvPr id="24" name="Rectangle 23"/>
           <p:cNvSpPr/>
           <p:nvPr/>
         </p:nvSpPr>
@@ -11411,7 +11588,7 @@
       </p:sp>
       <p:sp>
         <p:nvSpPr>
-          <p:cNvPr id="22" name="TextBox 21"/>
+          <p:cNvPr id="25" name="TextBox 24"/>
           <p:cNvSpPr txBox="1"/>
           <p:nvPr/>
         </p:nvSpPr>
@@ -15981,14 +16158,14 @@
       </p:sp>
       <p:sp>
         <p:nvSpPr>
-          <p:cNvPr id="28" name="Rectangle 27"/>
+          <p:cNvPr id="30" name="Rectangle 29"/>
           <p:cNvSpPr/>
           <p:nvPr/>
         </p:nvSpPr>
         <p:spPr>
           <a:xfrm>
             <a:off x="6196431" y="2448306"/>
-            <a:ext cx="5245455" cy="2037587"/>
+            <a:ext cx="5245455" cy="2361183"/>
           </a:xfrm>
           <a:prstGeom prst="rect">
             <a:avLst/>
@@ -16013,14 +16190,14 @@
       </p:sp>
       <p:sp>
         <p:nvSpPr>
-          <p:cNvPr id="29" name="Rectangle 28"/>
+          <p:cNvPr id="31" name="Rectangle 30"/>
           <p:cNvSpPr/>
           <p:nvPr/>
         </p:nvSpPr>
         <p:spPr>
           <a:xfrm>
             <a:off x="6196431" y="2448306"/>
-            <a:ext cx="32004" cy="2037587"/>
+            <a:ext cx="32004" cy="2361183"/>
           </a:xfrm>
           <a:prstGeom prst="rect">
             <a:avLst/>
@@ -17067,6 +17244,88 @@
                 <a:ea typeface="GQ Text"/>
               </a:rPr>
               <a:t>Осы презентацияның беттелуін қайта жинағанда тексеру</a:t>
+            </a:r>
+          </a:p>
+        </p:txBody>
+      </p:sp>
+      <p:sp>
+        <p:nvSpPr>
+          <p:cNvPr id="28" name="TextBox 27"/>
+          <p:cNvSpPr txBox="1"/>
+          <p:nvPr/>
+        </p:nvSpPr>
+        <p:spPr>
+          <a:xfrm>
+            <a:off x="6452463" y="4308297"/>
+            <a:ext cx="210566" cy="277723"/>
+          </a:xfrm>
+          <a:prstGeom prst="rect">
+            <a:avLst/>
+          </a:prstGeom>
+          <a:noFill/>
+        </p:spPr>
+        <p:txBody>
+          <a:bodyPr wrap="none" lIns="0" rIns="0" tIns="0" bIns="0" anchor="t">
+            <a:spAutoFit/>
+          </a:bodyPr>
+          <a:lstStyle/>
+          <a:p>
+            <a:pPr algn="l">
+              <a:lnSpc>
+                <a:spcPts val="1540"/>
+              </a:lnSpc>
+            </a:pPr>
+            <a:r>
+              <a:rPr sz="1100">
+                <a:solidFill>
+                  <a:srgbClr val="00793D"/>
+                </a:solidFill>
+                <a:latin typeface="IBM Plex Mono Medium"/>
+                <a:cs typeface="IBM Plex Mono Medium"/>
+                <a:ea typeface="IBM Plex Mono Medium"/>
+              </a:rPr>
+              <a:t>—</a:t>
+            </a:r>
+          </a:p>
+        </p:txBody>
+      </p:sp>
+      <p:sp>
+        <p:nvSpPr>
+          <p:cNvPr id="29" name="TextBox 28"/>
+          <p:cNvSpPr txBox="1"/>
+          <p:nvPr/>
+        </p:nvSpPr>
+        <p:spPr>
+          <a:xfrm>
+            <a:off x="6663029" y="4308297"/>
+            <a:ext cx="4522825" cy="277723"/>
+          </a:xfrm>
+          <a:prstGeom prst="rect">
+            <a:avLst/>
+          </a:prstGeom>
+          <a:noFill/>
+        </p:spPr>
+        <p:txBody>
+          <a:bodyPr wrap="none" lIns="0" rIns="0" tIns="0" bIns="0" anchor="t">
+            <a:spAutoFit/>
+          </a:bodyPr>
+          <a:lstStyle/>
+          <a:p>
+            <a:pPr algn="l">
+              <a:lnSpc>
+                <a:spcPts val="1540"/>
+              </a:lnSpc>
+            </a:pPr>
+            <a:r>
+              <a:rPr sz="1100">
+                <a:solidFill>
+                  <a:srgbClr val="535C66"/>
+                </a:solidFill>
+                <a:latin typeface="GQ Text"/>
+                <a:cs typeface="GQ Text"/>
+                <a:ea typeface="GQ Text"/>
+              </a:rPr>
+              <a:t>Баяндамадағы әр санды жоба деректерімен салыстыру</a:t>
             </a:r>
           </a:p>
         </p:txBody>
@@ -23413,7 +23672,7 @@
                 <a:cs typeface="GQ Text SemiBold"/>
                 <a:ea typeface="GQ Text SemiBold"/>
               </a:rPr>
-              <a:t>ә ғ қ ң ұ жоқ</a:t>
+              <a:t>тоғыздың бесеуі жоқ: ә ғ қ ң ұ</a:t>
             </a:r>
           </a:p>
         </p:txBody>
@@ -23566,7 +23825,7 @@
                 <a:cs typeface="GQ Text SemiBold"/>
                 <a:ea typeface="GQ Text SemiBold"/>
               </a:rPr>
-              <a:t>тоғыздың жетеуі жоқ</a:t>
+              <a:t>тоғыздың жетеуі жоқ: ә ғ қ ң ө ү һ</a:t>
             </a:r>
           </a:p>
         </p:txBody>
@@ -23879,7 +24138,7 @@
                 <a:cs typeface="GQ Text"/>
                 <a:ea typeface="GQ Text"/>
               </a:rPr>
-              <a:t>Көзбен емес, қаріп файлдарының cmap кестесін талдау арқылы тексерілді.</a:t>
+              <a:t>Көзбен емес, қаріп файлдарының таңба кестесін талдау арқылы тексерілді. Бір командамен қайталанады: tools/check_fonts.py</a:t>
             </a:r>
           </a:p>
         </p:txBody>
@@ -25035,7 +25294,7 @@
                 <a:cs typeface="GQ Text"/>
                 <a:ea typeface="GQ Text"/>
               </a:rPr>
-              <a:t>Жолдарды салыстыру «сәйкес келді ме, жоқ па» дегенге ғана жауап береді. Мұғалімге бұл аз: ол оқушының дәл</a:t>
+              <a:t>Жолдарды салыстыру «сәйкес келді ме, жоқ па» дегенге ғана жауап береді. Тірі мұғалім басқаша жауап береді:</a:t>
             </a:r>
           </a:p>
           <a:p>
@@ -25053,7 +25312,7 @@
                 <a:cs typeface="GQ Text"/>
                 <a:ea typeface="GQ Text"/>
               </a:rPr>
-              <a:t>нені қате істегенін көреді. Мен төрт жағдайды ажырататын тексеру құрдым.</a:t>
+              <a:t>ол оқушының дәл нені қате істегенін көреді. Мен төрт жағдайды ажырататын тексеру құрдым.</a:t>
             </a:r>
           </a:p>
         </p:txBody>

--- a/презентация/Тілашар-қорғау.pptx
+++ b/презентация/Тілашар-қорғау.pptx
@@ -15666,7 +15666,7 @@
         <p:spPr>
           <a:xfrm>
             <a:off x="6672173" y="2823349"/>
-            <a:ext cx="4513681" cy="277723"/>
+            <a:ext cx="4513681" cy="473303"/>
           </a:xfrm>
           <a:prstGeom prst="rect">
             <a:avLst/>
@@ -15693,40 +15693,141 @@
                 <a:cs typeface="GQ Text"/>
                 <a:ea typeface="GQ Text"/>
               </a:rPr>
-              <a:t>Жобаның әр жаңаруында автоматты түрде жиналады</a:t>
-            </a:r>
-          </a:p>
-        </p:txBody>
-      </p:sp>
-      <p:sp>
-        <p:nvSpPr>
-          <p:cNvPr id="16" name="TextBox 15"/>
-          <p:cNvSpPr txBox="1"/>
-          <p:nvPr/>
-        </p:nvSpPr>
-        <p:spPr>
-          <a:xfrm>
-            <a:off x="749808" y="3836464"/>
-            <a:ext cx="3381146" cy="600892"/>
-          </a:xfrm>
-          <a:prstGeom prst="rect">
-            <a:avLst/>
-          </a:prstGeom>
-          <a:noFill/>
-        </p:spPr>
-        <p:txBody>
-          <a:bodyPr wrap="none" lIns="0" rIns="0" tIns="0" bIns="0" anchor="t">
-            <a:spAutoFit/>
-          </a:bodyPr>
-          <a:lstStyle/>
-          <a:p>
-            <a:pPr algn="l">
-              <a:lnSpc>
-                <a:spcPts val="3332"/>
-              </a:lnSpc>
-            </a:pPr>
-            <a:r>
-              <a:rPr sz="3400" spc="-102">
+              <a:t>Автоматты түрде жиналады. Дайын файл — Releases бөлімінде:</a:t>
+            </a:r>
+          </a:p>
+          <a:p>
+            <a:pPr algn="l">
+              <a:lnSpc>
+                <a:spcPts val="1540"/>
+              </a:lnSpc>
+            </a:pPr>
+            <a:r>
+              <a:rPr sz="1100">
+                <a:solidFill>
+                  <a:srgbClr val="EEEBE5"/>
+                </a:solidFill>
+                <a:latin typeface="GQ Text"/>
+                <a:cs typeface="GQ Text"/>
+                <a:ea typeface="GQ Text"/>
+              </a:rPr>
+              <a:t>github.com/s-chaikovskiy/grammarquest-web/releases</a:t>
+            </a:r>
+          </a:p>
+        </p:txBody>
+      </p:sp>
+      <p:pic>
+        <p:nvPicPr>
+          <p:cNvPr id="16" name="Picture 15" descr="image.png"/>
+          <p:cNvPicPr>
+            <a:picLocks noChangeAspect="1"/>
+          </p:cNvPicPr>
+          <p:nvPr/>
+        </p:nvPicPr>
+        <p:blipFill>
+          <a:blip r:embed="rId2"/>
+          <a:stretch>
+            <a:fillRect/>
+          </a:stretch>
+        </p:blipFill>
+        <p:spPr>
+          <a:xfrm>
+            <a:off x="749808" y="3904170"/>
+            <a:ext cx="1225296" cy="1225296"/>
+          </a:xfrm>
+          <a:prstGeom prst="rect">
+            <a:avLst/>
+          </a:prstGeom>
+        </p:spPr>
+      </p:pic>
+      <p:sp>
+        <p:nvSpPr>
+          <p:cNvPr id="17" name="TextBox 16"/>
+          <p:cNvSpPr txBox="1"/>
+          <p:nvPr/>
+        </p:nvSpPr>
+        <p:spPr>
+          <a:xfrm>
+            <a:off x="749808" y="5230050"/>
+            <a:ext cx="1682496" cy="414909"/>
+          </a:xfrm>
+          <a:prstGeom prst="rect">
+            <a:avLst/>
+          </a:prstGeom>
+          <a:noFill/>
+        </p:spPr>
+        <p:txBody>
+          <a:bodyPr wrap="none" lIns="0" rIns="0" tIns="0" bIns="0" anchor="t">
+            <a:spAutoFit/>
+          </a:bodyPr>
+          <a:lstStyle/>
+          <a:p>
+            <a:pPr algn="l">
+              <a:lnSpc>
+                <a:spcPts val="1350"/>
+              </a:lnSpc>
+            </a:pPr>
+            <a:r>
+              <a:rPr sz="950">
+                <a:solidFill>
+                  <a:srgbClr val="A6ADB6"/>
+                </a:solidFill>
+                <a:latin typeface="GQ Text"/>
+                <a:cs typeface="GQ Text"/>
+                <a:ea typeface="GQ Text"/>
+              </a:rPr>
+              <a:t>Қосымшаны ашу:</a:t>
+            </a:r>
+          </a:p>
+          <a:p>
+            <a:pPr algn="l">
+              <a:lnSpc>
+                <a:spcPts val="1350"/>
+              </a:lnSpc>
+            </a:pPr>
+            <a:r>
+              <a:rPr sz="950">
+                <a:solidFill>
+                  <a:srgbClr val="A6ADB6"/>
+                </a:solidFill>
+                <a:latin typeface="GQ Text"/>
+                <a:cs typeface="GQ Text"/>
+                <a:ea typeface="GQ Text"/>
+              </a:rPr>
+              <a:t>tilashar-kz.vercel.app</a:t>
+            </a:r>
+          </a:p>
+        </p:txBody>
+      </p:sp>
+      <p:sp>
+        <p:nvSpPr>
+          <p:cNvPr id="18" name="TextBox 17"/>
+          <p:cNvSpPr txBox="1"/>
+          <p:nvPr/>
+        </p:nvSpPr>
+        <p:spPr>
+          <a:xfrm>
+            <a:off x="2542032" y="3895310"/>
+            <a:ext cx="2783738" cy="565546"/>
+          </a:xfrm>
+          <a:prstGeom prst="rect">
+            <a:avLst/>
+          </a:prstGeom>
+          <a:noFill/>
+        </p:spPr>
+        <p:txBody>
+          <a:bodyPr wrap="none" lIns="0" rIns="0" tIns="0" bIns="0" anchor="t">
+            <a:spAutoFit/>
+          </a:bodyPr>
+          <a:lstStyle/>
+          <a:p>
+            <a:pPr algn="l">
+              <a:lnSpc>
+                <a:spcPts val="3136"/>
+              </a:lnSpc>
+            </a:pPr>
+            <a:r>
+              <a:rPr sz="3200" spc="-96">
                 <a:solidFill>
                   <a:srgbClr val="EEEBE5"/>
                 </a:solidFill>
@@ -15741,14 +15842,14 @@
       </p:sp>
       <p:sp>
         <p:nvSpPr>
-          <p:cNvPr id="17" name="TextBox 16"/>
-          <p:cNvSpPr txBox="1"/>
-          <p:nvPr/>
-        </p:nvSpPr>
-        <p:spPr>
-          <a:xfrm>
-            <a:off x="749808" y="4394390"/>
-            <a:ext cx="3381146" cy="216408"/>
+          <p:cNvPr id="19" name="TextBox 18"/>
+          <p:cNvSpPr txBox="1"/>
+          <p:nvPr/>
+        </p:nvSpPr>
+        <p:spPr>
+          <a:xfrm>
+            <a:off x="2542032" y="4424362"/>
+            <a:ext cx="2783738" cy="216408"/>
           </a:xfrm>
           <a:prstGeom prst="rect">
             <a:avLst/>
@@ -15782,14 +15883,14 @@
       </p:sp>
       <p:sp>
         <p:nvSpPr>
-          <p:cNvPr id="18" name="TextBox 17"/>
-          <p:cNvSpPr txBox="1"/>
-          <p:nvPr/>
-        </p:nvSpPr>
-        <p:spPr>
-          <a:xfrm>
-            <a:off x="749808" y="4635202"/>
-            <a:ext cx="3381146" cy="243278"/>
+          <p:cNvPr id="20" name="TextBox 19"/>
+          <p:cNvSpPr txBox="1"/>
+          <p:nvPr/>
+        </p:nvSpPr>
+        <p:spPr>
+          <a:xfrm>
+            <a:off x="2542032" y="4665174"/>
+            <a:ext cx="2783738" cy="243278"/>
           </a:xfrm>
           <a:prstGeom prst="rect">
             <a:avLst/>
@@ -15823,33 +15924,33 @@
       </p:sp>
       <p:sp>
         <p:nvSpPr>
-          <p:cNvPr id="19" name="TextBox 18"/>
-          <p:cNvSpPr txBox="1"/>
-          <p:nvPr/>
-        </p:nvSpPr>
-        <p:spPr>
-          <a:xfrm>
-            <a:off x="4405274" y="3836464"/>
-            <a:ext cx="3381146" cy="600892"/>
-          </a:xfrm>
-          <a:prstGeom prst="rect">
-            <a:avLst/>
-          </a:prstGeom>
-          <a:noFill/>
-        </p:spPr>
-        <p:txBody>
-          <a:bodyPr wrap="none" lIns="0" rIns="0" tIns="0" bIns="0" anchor="t">
-            <a:spAutoFit/>
-          </a:bodyPr>
-          <a:lstStyle/>
-          <a:p>
-            <a:pPr algn="l">
-              <a:lnSpc>
-                <a:spcPts val="3332"/>
-              </a:lnSpc>
-            </a:pPr>
-            <a:r>
-              <a:rPr sz="3400" spc="-102">
+          <p:cNvPr id="21" name="TextBox 20"/>
+          <p:cNvSpPr txBox="1"/>
+          <p:nvPr/>
+        </p:nvSpPr>
+        <p:spPr>
+          <a:xfrm>
+            <a:off x="5600090" y="3895310"/>
+            <a:ext cx="2783738" cy="565546"/>
+          </a:xfrm>
+          <a:prstGeom prst="rect">
+            <a:avLst/>
+          </a:prstGeom>
+          <a:noFill/>
+        </p:spPr>
+        <p:txBody>
+          <a:bodyPr wrap="none" lIns="0" rIns="0" tIns="0" bIns="0" anchor="t">
+            <a:spAutoFit/>
+          </a:bodyPr>
+          <a:lstStyle/>
+          <a:p>
+            <a:pPr algn="l">
+              <a:lnSpc>
+                <a:spcPts val="3136"/>
+              </a:lnSpc>
+            </a:pPr>
+            <a:r>
+              <a:rPr sz="3200" spc="-96">
                 <a:solidFill>
                   <a:srgbClr val="EEEBE5"/>
                 </a:solidFill>
@@ -15864,14 +15965,14 @@
       </p:sp>
       <p:sp>
         <p:nvSpPr>
-          <p:cNvPr id="20" name="TextBox 19"/>
-          <p:cNvSpPr txBox="1"/>
-          <p:nvPr/>
-        </p:nvSpPr>
-        <p:spPr>
-          <a:xfrm>
-            <a:off x="4405274" y="4394390"/>
-            <a:ext cx="3381146" cy="216408"/>
+          <p:cNvPr id="22" name="TextBox 21"/>
+          <p:cNvSpPr txBox="1"/>
+          <p:nvPr/>
+        </p:nvSpPr>
+        <p:spPr>
+          <a:xfrm>
+            <a:off x="5600090" y="4424362"/>
+            <a:ext cx="2783738" cy="216408"/>
           </a:xfrm>
           <a:prstGeom prst="rect">
             <a:avLst/>
@@ -15905,14 +16006,14 @@
       </p:sp>
       <p:sp>
         <p:nvSpPr>
-          <p:cNvPr id="21" name="TextBox 20"/>
-          <p:cNvSpPr txBox="1"/>
-          <p:nvPr/>
-        </p:nvSpPr>
-        <p:spPr>
-          <a:xfrm>
-            <a:off x="4405274" y="4635202"/>
-            <a:ext cx="3381146" cy="243278"/>
+          <p:cNvPr id="23" name="TextBox 22"/>
+          <p:cNvSpPr txBox="1"/>
+          <p:nvPr/>
+        </p:nvSpPr>
+        <p:spPr>
+          <a:xfrm>
+            <a:off x="5600090" y="4665174"/>
+            <a:ext cx="2783738" cy="243278"/>
           </a:xfrm>
           <a:prstGeom prst="rect">
             <a:avLst/>
@@ -15946,33 +16047,33 @@
       </p:sp>
       <p:sp>
         <p:nvSpPr>
-          <p:cNvPr id="22" name="TextBox 21"/>
-          <p:cNvSpPr txBox="1"/>
-          <p:nvPr/>
-        </p:nvSpPr>
-        <p:spPr>
-          <a:xfrm>
-            <a:off x="8060740" y="3836464"/>
-            <a:ext cx="3381146" cy="600892"/>
-          </a:xfrm>
-          <a:prstGeom prst="rect">
-            <a:avLst/>
-          </a:prstGeom>
-          <a:noFill/>
-        </p:spPr>
-        <p:txBody>
-          <a:bodyPr wrap="none" lIns="0" rIns="0" tIns="0" bIns="0" anchor="t">
-            <a:spAutoFit/>
-          </a:bodyPr>
-          <a:lstStyle/>
-          <a:p>
-            <a:pPr algn="l">
-              <a:lnSpc>
-                <a:spcPts val="3332"/>
-              </a:lnSpc>
-            </a:pPr>
-            <a:r>
-              <a:rPr sz="3400" spc="-102">
+          <p:cNvPr id="24" name="TextBox 23"/>
+          <p:cNvSpPr txBox="1"/>
+          <p:nvPr/>
+        </p:nvSpPr>
+        <p:spPr>
+          <a:xfrm>
+            <a:off x="8658148" y="3895310"/>
+            <a:ext cx="2783738" cy="565546"/>
+          </a:xfrm>
+          <a:prstGeom prst="rect">
+            <a:avLst/>
+          </a:prstGeom>
+          <a:noFill/>
+        </p:spPr>
+        <p:txBody>
+          <a:bodyPr wrap="none" lIns="0" rIns="0" tIns="0" bIns="0" anchor="t">
+            <a:spAutoFit/>
+          </a:bodyPr>
+          <a:lstStyle/>
+          <a:p>
+            <a:pPr algn="l">
+              <a:lnSpc>
+                <a:spcPts val="3136"/>
+              </a:lnSpc>
+            </a:pPr>
+            <a:r>
+              <a:rPr sz="3200" spc="-96">
                 <a:solidFill>
                   <a:srgbClr val="EEEBE5"/>
                 </a:solidFill>
@@ -15987,14 +16088,14 @@
       </p:sp>
       <p:sp>
         <p:nvSpPr>
-          <p:cNvPr id="23" name="TextBox 22"/>
-          <p:cNvSpPr txBox="1"/>
-          <p:nvPr/>
-        </p:nvSpPr>
-        <p:spPr>
-          <a:xfrm>
-            <a:off x="8060740" y="4394390"/>
-            <a:ext cx="3381146" cy="216408"/>
+          <p:cNvPr id="25" name="TextBox 24"/>
+          <p:cNvSpPr txBox="1"/>
+          <p:nvPr/>
+        </p:nvSpPr>
+        <p:spPr>
+          <a:xfrm>
+            <a:off x="8658148" y="4424362"/>
+            <a:ext cx="2783738" cy="216408"/>
           </a:xfrm>
           <a:prstGeom prst="rect">
             <a:avLst/>
@@ -16028,14 +16129,14 @@
       </p:sp>
       <p:sp>
         <p:nvSpPr>
-          <p:cNvPr id="24" name="TextBox 23"/>
-          <p:cNvSpPr txBox="1"/>
-          <p:nvPr/>
-        </p:nvSpPr>
-        <p:spPr>
-          <a:xfrm>
-            <a:off x="8060740" y="4635202"/>
-            <a:ext cx="3381146" cy="243278"/>
+          <p:cNvPr id="26" name="TextBox 25"/>
+          <p:cNvSpPr txBox="1"/>
+          <p:nvPr/>
+        </p:nvSpPr>
+        <p:spPr>
+          <a:xfrm>
+            <a:off x="8658148" y="4665174"/>
+            <a:ext cx="2783738" cy="243278"/>
           </a:xfrm>
           <a:prstGeom prst="rect">
             <a:avLst/>
@@ -16069,7 +16170,7 @@
       </p:sp>
       <p:sp>
         <p:nvSpPr>
-          <p:cNvPr id="25" name="TextBox 24"/>
+          <p:cNvPr id="27" name="TextBox 26"/>
           <p:cNvSpPr txBox="1"/>
           <p:nvPr/>
         </p:nvSpPr>
@@ -18985,7 +19086,7 @@
                 <a:cs typeface="IBM Plex Mono Medium"/>
                 <a:ea typeface="IBM Plex Mono Medium"/>
               </a:rPr>
-              <a:t>GRAMMARQUEST-WEB.VERCEL.APP  ·  ФАМИЛИЯ ИМЯ · __ СЫНЫП · №__ МЕКТЕП, ____ ҚАЛАСЫ · ҒЫЛЫМИ ЖЕТЕКШІ: ____</a:t>
+              <a:t>TILASHAR-KZ.VERCEL.APP  ·  ФАМИЛИЯ ИМЯ · __ СЫНЫП · №__ МЕКТЕП, ____ ҚАЛАСЫ · ҒЫЛЫМИ ЖЕТЕКШІ: ____</a:t>
             </a:r>
           </a:p>
         </p:txBody>

--- a/презентация/Тілашар-қорғау.pptx
+++ b/презентация/Тілашар-қорғау.pptx
@@ -806,12 +806,17 @@
           <a:lstStyle/>
           <a:p>
             <a:r>
-              <a:t>Честный момент, который лучше сказать самому, не дожидаясь вопроса: базовые уроки</a:t>
-            </a:r>
-          </a:p>
-          <a:p>
-            <a:r>
-              <a:t>писал я, а не носитель языка, поэтому они идут на проверку учителю.</a:t>
+              <a:t>Честный момент, который лучше сказать самому, не дожидаясь вопроса: казахский</a:t>
+            </a:r>
+          </a:p>
+          <a:p>
+            <a:r>
+              <a:t>текст курса писал не носитель языка — ни новые уроки, ни исходные. Весь текст</a:t>
+            </a:r>
+          </a:p>
+          <a:p>
+            <a:r>
+              <a:t>выгружен учителю на проверку: уроки, правила и справочник — 168 тысяч знаков.</a:t>
             </a:r>
           </a:p>
           <a:p/>
@@ -1447,12 +1452,37 @@
           </a:p>
           <a:p>
             <a:r>
-              <a:t>   Восемь базовых уроков написал я, они помечены в проекте и проходят проверку</a:t>
-            </a:r>
-          </a:p>
-          <a:p>
-            <a:r>
-              <a:t>   у учителя казахского языка. Остальные взяты из прежней версии курса.</a:t>
+              <a:t>   Нет, и это относится ко всему курсу. Восемь базовых уроков написал я,</a:t>
+            </a:r>
+          </a:p>
+          <a:p>
+            <a:r>
+              <a:t>   остальные восемнадцать сгенерировала прежняя программа, а я внёс в них</a:t>
+            </a:r>
+          </a:p>
+          <a:p>
+            <a:r>
+              <a:t>   44 исправления. Носитель языка не видел ни один урок — поэтому весь</a:t>
+            </a:r>
+          </a:p>
+          <a:p>
+            <a:r>
+              <a:t>   казахский текст выгружен учителю на проверку: 94 тысячи знаков в уроках</a:t>
+            </a:r>
+          </a:p>
+          <a:p>
+            <a:r>
+              <a:t>   и ещё 74 тысячи в правилах и справочнике — всего 168 тысяч.</a:t>
+            </a:r>
+          </a:p>
+          <a:p>
+            <a:r>
+              <a:t>   Говорить именно так: сказать «остальные взяты из прежней версии» значит</a:t>
+            </a:r>
+          </a:p>
+          <a:p>
+            <a:r>
+              <a:t>   намекнуть, что они проверены. Они не проверены.</a:t>
             </a:r>
           </a:p>
           <a:p/>
@@ -11451,7 +11481,7 @@
                 <a:cs typeface="GQ Text Bold"/>
                 <a:ea typeface="GQ Text Bold"/>
               </a:rPr>
-              <a:t>174</a:t>
+              <a:t>162</a:t>
             </a:r>
           </a:p>
         </p:txBody>
@@ -11465,7 +11495,7 @@
         <p:spPr>
           <a:xfrm>
             <a:off x="10432694" y="2830703"/>
-            <a:ext cx="1009192" cy="216408"/>
+            <a:ext cx="1009192" cy="368808"/>
           </a:xfrm>
           <a:prstGeom prst="rect">
             <a:avLst/>
@@ -11492,7 +11522,25 @@
                 <a:cs typeface="IBM Plex Mono Medium"/>
                 <a:ea typeface="IBM Plex Mono Medium"/>
               </a:rPr>
-              <a:t>СӨЗДІКТЕГІ СӨЗ</a:t>
+              <a:t>СӨЗДІК</a:t>
+            </a:r>
+          </a:p>
+          <a:p>
+            <a:pPr algn="l">
+              <a:lnSpc>
+                <a:spcPts val="1200"/>
+              </a:lnSpc>
+            </a:pPr>
+            <a:r>
+              <a:rPr sz="800" spc="64">
+                <a:solidFill>
+                  <a:srgbClr val="535C66"/>
+                </a:solidFill>
+                <a:latin typeface="IBM Plex Mono Medium"/>
+                <a:cs typeface="IBM Plex Mono Medium"/>
+                <a:ea typeface="IBM Plex Mono Medium"/>
+              </a:rPr>
+              <a:t>МАҚАЛАСЫ</a:t>
             </a:r>
           </a:p>
         </p:txBody>
@@ -11505,7 +11553,7 @@
         </p:nvSpPr>
         <p:spPr>
           <a:xfrm>
-            <a:off x="10432694" y="3071515"/>
+            <a:off x="10432694" y="3223915"/>
             <a:ext cx="1009192" cy="414601"/>
           </a:xfrm>
           <a:prstGeom prst="rect">
@@ -11564,7 +11612,7 @@
         </p:nvSpPr>
         <p:spPr>
           <a:xfrm>
-            <a:off x="749808" y="4049395"/>
+            <a:off x="749808" y="4069461"/>
             <a:ext cx="10692079" cy="710247"/>
           </a:xfrm>
           <a:prstGeom prst="rect">
@@ -11594,7 +11642,7 @@
         </p:nvSpPr>
         <p:spPr>
           <a:xfrm>
-            <a:off x="1024127" y="4248480"/>
+            <a:off x="1024127" y="4268546"/>
             <a:ext cx="10143439" cy="345281"/>
           </a:xfrm>
           <a:prstGeom prst="rect">
@@ -12799,7 +12847,7 @@
                 <a:cs typeface="GQ Text"/>
                 <a:ea typeface="GQ Text"/>
               </a:rPr>
-              <a:t>Сегіз жаңа сабақты мен жаздым, қорғауға дейін оларды қазақ тілі мұғалімі тексереді — олар жобада бөлек белгіленген.</a:t>
+              <a:t>Курстың бүкіл қазақ мәтіні — сегіз жаңа сабақ та, қалған он сегізі де — тіл иесінің қатысуынсыз жазылған және мұғалімнің тексеруінен өтуде. Тексеруге арналған толық тізім жобада жатыр.</a:t>
             </a:r>
           </a:p>
         </p:txBody>
@@ -13389,7 +13437,7 @@
                 <a:cs typeface="GQ Text"/>
                 <a:ea typeface="GQ Text"/>
               </a:rPr>
-              <a:t>Сабақтардан жиналған 174</a:t>
+              <a:t>Сабақтардан жиналған 162</a:t>
             </a:r>
           </a:p>
           <a:p>
@@ -13407,7 +13455,7 @@
                 <a:cs typeface="GQ Text"/>
                 <a:ea typeface="GQ Text"/>
               </a:rPr>
-              <a:t>сөз, іздеу орыс</a:t>
+              <a:t>мақала, іздеу орыс</a:t>
             </a:r>
           </a:p>
           <a:p>
@@ -16328,7 +16376,7 @@
         <p:spPr>
           <a:xfrm>
             <a:off x="749808" y="2448306"/>
-            <a:ext cx="5245455" cy="2233167"/>
+            <a:ext cx="5245455" cy="2428748"/>
           </a:xfrm>
           <a:prstGeom prst="rect">
             <a:avLst/>
@@ -16360,7 +16408,7 @@
         <p:spPr>
           <a:xfrm>
             <a:off x="749808" y="2448306"/>
-            <a:ext cx="32004" cy="2233167"/>
+            <a:ext cx="32004" cy="2428748"/>
           </a:xfrm>
           <a:prstGeom prst="rect">
             <a:avLst/>
@@ -16948,7 +16996,7 @@
         <p:spPr>
           <a:xfrm>
             <a:off x="1216406" y="4180281"/>
-            <a:ext cx="4522825" cy="277723"/>
+            <a:ext cx="4522825" cy="473303"/>
           </a:xfrm>
           <a:prstGeom prst="rect">
             <a:avLst/>
@@ -16975,7 +17023,25 @@
                 <a:cs typeface="GQ Text"/>
                 <a:ea typeface="GQ Text"/>
               </a:rPr>
-              <a:t>Негізгі курс мазмұнын құрап, мұғалімнің тексеруіне бердім</a:t>
+              <a:t>Негізгі курс мазмұнын құрап, бүкіл курсты мұғалімнің</a:t>
+            </a:r>
+          </a:p>
+          <a:p>
+            <a:pPr algn="l">
+              <a:lnSpc>
+                <a:spcPts val="1540"/>
+              </a:lnSpc>
+            </a:pPr>
+            <a:r>
+              <a:rPr sz="1100">
+                <a:solidFill>
+                  <a:srgbClr val="1B222B"/>
+                </a:solidFill>
+                <a:latin typeface="GQ Text"/>
+                <a:cs typeface="GQ Text"/>
+                <a:ea typeface="GQ Text"/>
+              </a:rPr>
+              <a:t>тексеруіне бердім</a:t>
             </a:r>
           </a:p>
         </p:txBody>
@@ -18267,7 +18333,7 @@
         <p:spPr>
           <a:xfrm>
             <a:off x="7104202" y="1960626"/>
-            <a:ext cx="4337684" cy="2651760"/>
+            <a:ext cx="4337684" cy="2847340"/>
           </a:xfrm>
           <a:prstGeom prst="rect">
             <a:avLst/>
@@ -18718,7 +18784,7 @@
         <p:spPr>
           <a:xfrm>
             <a:off x="7589088" y="2526233"/>
-            <a:ext cx="3578479" cy="277723"/>
+            <a:ext cx="3578479" cy="473303"/>
           </a:xfrm>
           <a:prstGeom prst="rect">
             <a:avLst/>
@@ -18745,7 +18811,25 @@
                 <a:cs typeface="GQ Text"/>
                 <a:ea typeface="GQ Text"/>
               </a:rPr>
-              <a:t>Негізгі курсты қазақ тілі мұғалімінің тексеруі</a:t>
+              <a:t>Бүкіл қазақ мәтінін мұғалімнің тексеруі — 168 мың</a:t>
+            </a:r>
+          </a:p>
+          <a:p>
+            <a:pPr algn="l">
+              <a:lnSpc>
+                <a:spcPts val="1540"/>
+              </a:lnSpc>
+            </a:pPr>
+            <a:r>
+              <a:rPr sz="1100">
+                <a:solidFill>
+                  <a:srgbClr val="EEEBE5"/>
+                </a:solidFill>
+                <a:latin typeface="GQ Text"/>
+                <a:cs typeface="GQ Text"/>
+                <a:ea typeface="GQ Text"/>
+              </a:rPr>
+              <a:t>таңба</a:t>
             </a:r>
           </a:p>
         </p:txBody>
@@ -18758,7 +18842,7 @@
         </p:nvSpPr>
         <p:spPr>
           <a:xfrm>
-            <a:off x="7378522" y="2858973"/>
+            <a:off x="7378522" y="3054553"/>
             <a:ext cx="210566" cy="277723"/>
           </a:xfrm>
           <a:prstGeom prst="rect">
@@ -18799,7 +18883,7 @@
         </p:nvSpPr>
         <p:spPr>
           <a:xfrm>
-            <a:off x="7589088" y="2858973"/>
+            <a:off x="7589088" y="3054553"/>
             <a:ext cx="3578479" cy="473303"/>
           </a:xfrm>
           <a:prstGeom prst="rect">
@@ -18858,7 +18942,7 @@
         </p:nvSpPr>
         <p:spPr>
           <a:xfrm>
-            <a:off x="7378522" y="3387293"/>
+            <a:off x="7378522" y="3582873"/>
             <a:ext cx="210566" cy="277723"/>
           </a:xfrm>
           <a:prstGeom prst="rect">
@@ -18899,7 +18983,7 @@
         </p:nvSpPr>
         <p:spPr>
           <a:xfrm>
-            <a:off x="7589088" y="3387293"/>
+            <a:off x="7589088" y="3582873"/>
             <a:ext cx="3578479" cy="473303"/>
           </a:xfrm>
           <a:prstGeom prst="rect">
@@ -18958,7 +19042,7 @@
         </p:nvSpPr>
         <p:spPr>
           <a:xfrm>
-            <a:off x="7378522" y="3915613"/>
+            <a:off x="7378522" y="4111193"/>
             <a:ext cx="210566" cy="277723"/>
           </a:xfrm>
           <a:prstGeom prst="rect">
@@ -18999,7 +19083,7 @@
         </p:nvSpPr>
         <p:spPr>
           <a:xfrm>
-            <a:off x="7589088" y="3915613"/>
+            <a:off x="7589088" y="4111193"/>
             <a:ext cx="3578479" cy="473303"/>
           </a:xfrm>
           <a:prstGeom prst="rect">

--- a/презентация/Тілашар-қорғау.pptx
+++ b/презентация/Тілашар-қорғау.pptx
@@ -525,17 +525,28 @@
           <a:p/>
           <a:p>
             <a:r>
-              <a:t>Проект начался не с идеи, а с раздражения: я занимался казахским в приложении</a:t>
-            </a:r>
-          </a:p>
-          <a:p>
-            <a:r>
-              <a:t>и раз за разом получал «неверно» там, где ответ был правильный. Я решил разобраться</a:t>
-            </a:r>
-          </a:p>
-          <a:p>
-            <a:r>
-              <a:t>почему — и оказалось, что причина техническая, и её можно устранить.</a:t>
+              <a:t>Сразу скажу, откуда взялся проект. Первая версия этого тренажёра победила</a:t>
+            </a:r>
+          </a:p>
+          <a:p>
+            <a:r>
+              <a:t>на школьной олимпиаде — жюри убедил замысел. Но когда я стал смотреть, как им</a:t>
+            </a:r>
+          </a:p>
+          <a:p>
+            <a:r>
+              <a:t>пользуются, оказалось, что до конца доходят единицы. Сегодня я рассказываю,</a:t>
+            </a:r>
+          </a:p>
+          <a:p>
+            <a:r>
+              <a:t>что я за это время выяснил и какой стала вторая версия.</a:t>
+            </a:r>
+          </a:p>
+          <a:p/>
+          <a:p>
+            <a:r>
+              <a:t>Это важная рамка: я не переделываю чужую неудачу, я развиваю свою работу.</a:t>
             </a:r>
           </a:p>
           <a:p/>
@@ -1086,7 +1097,7 @@
           <a:lstStyle/>
           <a:p>
             <a:r>
-              <a:t>Про вес: код и стили — 199 килобайт, всё приложение целиком около 1,4 мегабайта.</a:t>
+              <a:t>Про вес: код и стили — 201 килобайт, всё приложение целиком около 1,4 мегабайта.</a:t>
             </a:r>
           </a:p>
           <a:p>
@@ -1398,6 +1409,17 @@
           <a:p/>
           <a:p>
             <a:r>
+              <a:t>И вторая, не менее важная: прототип победил на школьном этапе за идею. Вторая</a:t>
+            </a:r>
+          </a:p>
+          <a:p>
+            <a:r>
+              <a:t>версия — про то, как идею довели до состояния, когда ею действительно пользуются.</a:t>
+            </a:r>
+          </a:p>
+          <a:p/>
+          <a:p>
+            <a:r>
               <a:t>ЧАСТЫЕ ВОПРОСЫ ЖЮРИ</a:t>
             </a:r>
           </a:p>
@@ -1414,7 +1436,33 @@
           </a:p>
           <a:p>
             <a:r>
-              <a:t>   результат. Прежняя версия была написана без проверки — она и не работала.</a:t>
+              <a:t>   результат. Первая версия писалась без такой проверки — потому и не доходила</a:t>
+            </a:r>
+          </a:p>
+          <a:p>
+            <a:r>
+              <a:t>   до конца ни у кого, кроме меня.</a:t>
+            </a:r>
+          </a:p>
+          <a:p/>
+          <a:p>
+            <a:r>
+              <a:t>0. «А чем это отличается от прошлогодней работы?»</a:t>
+            </a:r>
+          </a:p>
+          <a:p>
+            <a:r>
+              <a:t>   Прошлый раз я показывал замысел, и он победил. В этот раз я показываю проверку</a:t>
+            </a:r>
+          </a:p>
+          <a:p>
+            <a:r>
+              <a:t>   этого замысла на данных и то, что из проверки вышло: движок сверки ответов,</a:t>
+            </a:r>
+          </a:p>
+          <a:p>
+            <a:r>
+              <a:t>   базовый курс для 5–7 класса, интервальное повторение, работа без интернета.</a:t>
             </a:r>
           </a:p>
           <a:p/>
@@ -1655,18 +1703,28 @@
           <a:lstStyle/>
           <a:p>
             <a:r>
-              <a:t>Ключевая мысль: я не стал сразу переделывать программу. Сначала вопрос и гипотеза,</a:t>
-            </a:r>
-          </a:p>
-          <a:p>
-            <a:r>
-              <a:t>потом проверка.</a:t>
+              <a:t>Ключевая мысль слайда: победа на школьном этапе — это признание идеи, а не</a:t>
+            </a:r>
+          </a:p>
+          <a:p>
+            <a:r>
+              <a:t>доказательство, что продукт работает. Разница между этими двумя вещами</a:t>
+            </a:r>
+          </a:p>
+          <a:p>
+            <a:r>
+              <a:t>и есть содержание моей второй версии.</a:t>
             </a:r>
           </a:p>
           <a:p/>
           <a:p>
             <a:r>
-              <a:t>Гипотезу я сформулировал так, чтобы её можно было опровергнуть. Если бы барьеры</a:t>
+              <a:t>Я не стал сразу дописывать программу. Сначала вопрос и гипотеза, потом проверка.</a:t>
+            </a:r>
+          </a:p>
+          <a:p>
+            <a:r>
+              <a:t>Гипотезу сформулировал так, чтобы её можно было опровергнуть: если бы барьеры</a:t>
             </a:r>
           </a:p>
           <a:p>
@@ -1746,7 +1804,12 @@
           </a:p>
           <a:p>
             <a:r>
-              <a:t>а не «улучшить»: пока не знаешь причину, улучшать нечего.</a:t>
+              <a:t>а не «улучшить»: пока не знаешь причину, улучшать нечего. Это и отличает вторую</a:t>
+            </a:r>
+          </a:p>
+          <a:p>
+            <a:r>
+              <a:t>версию от простого «дописал ещё уроков».</a:t>
             </a:r>
           </a:p>
           <a:p/>
@@ -2102,23 +2165,23 @@
           <a:lstStyle/>
           <a:p>
             <a:r>
-              <a:t>Здесь важно не злорадствовать над прежней версией — её писал я же, только раньше</a:t>
-            </a:r>
-          </a:p>
-          <a:p>
-            <a:r>
-              <a:t>и с помощью нейросети, которая уверенно описывала то, чего не сделала.</a:t>
+              <a:t>Тон здесь важен. Это не разбор чужих ошибок и не самобичевание: у первой версии</a:t>
+            </a:r>
+          </a:p>
+          <a:p>
+            <a:r>
+              <a:t>замысел был шире того, что успело заработать, — так бывает с любым прототипом.</a:t>
+            </a:r>
+          </a:p>
+          <a:p>
+            <a:r>
+              <a:t>Ценность в том, что я это проверил, а не поверил описанию.</a:t>
             </a:r>
           </a:p>
           <a:p/>
           <a:p>
             <a:r>
-              <a:t>Главный вывод для меня: описание в документации ничего не доказывает. Проверять</a:t>
-            </a:r>
-          </a:p>
-          <a:p>
-            <a:r>
-              <a:t>надо код и данные.</a:t>
+              <a:t>Главный вывод: описание ничего не доказывает. Проверять надо код и данные.</a:t>
             </a:r>
           </a:p>
         </p:txBody>
@@ -9337,7 +9400,7 @@
                 <a:cs typeface="GQ Text Bold"/>
                 <a:ea typeface="GQ Text Bold"/>
               </a:rPr>
-              <a:t>Оқушымен таласпайтын</a:t>
+              <a:t>Нобайдан</a:t>
             </a:r>
           </a:p>
         </p:txBody>
@@ -9378,7 +9441,7 @@
                 <a:cs typeface="GQ Text Bold"/>
                 <a:ea typeface="GQ Text Bold"/>
               </a:rPr>
-              <a:t>жаттықтырғыш</a:t>
+              <a:t>жұмыс істейтін құралға</a:t>
             </a:r>
           </a:p>
         </p:txBody>
@@ -9437,7 +9500,7 @@
                 <a:cs typeface="GQ Text"/>
                 <a:ea typeface="GQ Text"/>
               </a:rPr>
-              <a:t>Бұрынғы нұсқа неге жұмыс істемегенін, нені өлшегенімді және не</a:t>
+              <a:t>Бірінші нұсқа мектеп олимпиадасында жеңді. Осы уақытта не білгенімді</a:t>
             </a:r>
           </a:p>
           <a:p>
@@ -9455,7 +9518,7 @@
                 <a:cs typeface="GQ Text"/>
                 <a:ea typeface="GQ Text"/>
               </a:rPr>
-              <a:t>істегенімді айтамын.</a:t>
+              <a:t>және екінші нұсқа қандай болғанын айтамын.</a:t>
             </a:r>
           </a:p>
         </p:txBody>
@@ -15883,7 +15946,7 @@
                 <a:cs typeface="GQ Text Bold"/>
                 <a:ea typeface="GQ Text Bold"/>
               </a:rPr>
-              <a:t>199</a:t>
+              <a:t>201</a:t>
             </a:r>
           </a:p>
         </p:txBody>
@@ -16618,7 +16681,7 @@
                 <a:cs typeface="GQ Text"/>
                 <a:ea typeface="GQ Text"/>
               </a:rPr>
-              <a:t>Кодты нейрожелінің көмегімен жаздым — сондықтан оның әр тұжырымын тексердім. Бұрынғы нұсқа тексерусіз</a:t>
+              <a:t>Кодты нейрожелінің көмегімен жаздым — сондықтан оның әр тұжырымын тексердім. Нобай тексерусіз сенімнің</a:t>
             </a:r>
           </a:p>
           <a:p>
@@ -16636,7 +16699,7 @@
                 <a:cs typeface="GQ Text"/>
                 <a:ea typeface="GQ Text"/>
               </a:rPr>
-              <a:t>сенімнің немен бітетінін көрсетті.</a:t>
+              <a:t>немен бітетінін көрсетті.</a:t>
             </a:r>
           </a:p>
         </p:txBody>
@@ -18365,7 +18428,7 @@
         <p:spPr>
           <a:xfrm>
             <a:off x="749808" y="1960626"/>
-            <a:ext cx="6153226" cy="2440432"/>
+            <a:ext cx="6153226" cy="2757932"/>
           </a:xfrm>
           <a:prstGeom prst="rect">
             <a:avLst/>
@@ -18589,7 +18652,7 @@
         <p:spPr>
           <a:xfrm>
             <a:off x="1024127" y="2488438"/>
-            <a:ext cx="5604586" cy="1720850"/>
+            <a:ext cx="5604586" cy="2038349"/>
           </a:xfrm>
           <a:prstGeom prst="rect">
             <a:avLst/>
@@ -18616,7 +18679,7 @@
                 <a:cs typeface="GQ Text Bold"/>
                 <a:ea typeface="GQ Text Bold"/>
               </a:rPr>
-              <a:t>Болжам расталды: басты кедергі қазақ</a:t>
+              <a:t>Болжам расталды: оқушыларға қазақ тілінің</a:t>
             </a:r>
           </a:p>
           <a:p>
@@ -18634,7 +18697,7 @@
                 <a:cs typeface="GQ Text Bold"/>
                 <a:ea typeface="GQ Text Bold"/>
               </a:rPr>
-              <a:t>тілінің қиындығы емес, техникалық бөгеттер</a:t>
+              <a:t>қиындығы емес, техникалық бөгеттер</a:t>
             </a:r>
           </a:p>
           <a:p>
@@ -18652,7 +18715,7 @@
                 <a:cs typeface="GQ Text Bold"/>
                 <a:ea typeface="GQ Text Bold"/>
               </a:rPr>
-              <a:t>болып шықты. Оларды алып тастауға болды,</a:t>
+              <a:t>кедергі болды. Оларды алып тастауға болды,</a:t>
             </a:r>
           </a:p>
           <a:p>
@@ -18688,7 +18751,25 @@
                 <a:cs typeface="GQ Text Bold"/>
                 <a:ea typeface="GQ Text Bold"/>
               </a:rPr>
-              <a:t>етпеді.</a:t>
+              <a:t>етпеді. Нобай дұрыс ой еді — екінші нұсқа</a:t>
+            </a:r>
+          </a:p>
+          <a:p>
+            <a:pPr algn="l">
+              <a:lnSpc>
+                <a:spcPts val="2500"/>
+              </a:lnSpc>
+            </a:pPr>
+            <a:r>
+              <a:rPr sz="1900" spc="-34">
+                <a:solidFill>
+                  <a:srgbClr val="EEEBE5"/>
+                </a:solidFill>
+                <a:latin typeface="GQ Text Bold"/>
+                <a:cs typeface="GQ Text Bold"/>
+                <a:ea typeface="GQ Text Bold"/>
+              </a:rPr>
+              <a:t>оны жұмыс істейтін күйге жеткізді.</a:t>
             </a:r>
           </a:p>
         </p:txBody>
@@ -19966,7 +20047,7 @@
                 <a:cs typeface="IBM Plex Mono SemiBold"/>
                 <a:ea typeface="IBM Plex Mono SemiBold"/>
               </a:rPr>
-              <a:t>ЗЕРТТЕУ МӘСЕЛЕСІ</a:t>
+              <a:t>ЕКІНШІ НҰСҚА НЕДЕН БАСТАЛДЫ</a:t>
             </a:r>
           </a:p>
         </p:txBody>
@@ -20048,7 +20129,7 @@
                 <a:cs typeface="GQ Text Bold"/>
                 <a:ea typeface="GQ Text Bold"/>
               </a:rPr>
-              <a:t>Менде бағдарлама бұрыннан бар еді. Ол жұмыс</a:t>
+              <a:t>Нобай мектеп олимпиадасында жеңді. Содан</a:t>
             </a:r>
           </a:p>
           <a:p>
@@ -20066,7 +20147,7 @@
                 <a:cs typeface="GQ Text Bold"/>
                 <a:ea typeface="GQ Text Bold"/>
               </a:rPr>
-              <a:t>істемеді — мен себебін білгім келді</a:t>
+              <a:t>кейін оны қалай қолданатынын қарай бастадым</a:t>
             </a:r>
           </a:p>
         </p:txBody>
@@ -20107,7 +20188,7 @@
                 <a:cs typeface="GQ Text"/>
                 <a:ea typeface="GQ Text"/>
               </a:rPr>
-              <a:t>Бұрын жазылған нұсқа болды, бірақ оқушылар бірнеше тапсырмадан кейін тастап кететін. Соқыр қайта</a:t>
+              <a:t>Ой қазылар алқасын сендірді. Бірақ экранның артында басқасы шықты: оқушылар бірнеше тапсырмадан кейін</a:t>
             </a:r>
           </a:p>
           <a:p>
@@ -20125,7 +20206,7 @@
                 <a:cs typeface="GQ Text"/>
                 <a:ea typeface="GQ Text"/>
               </a:rPr>
-              <a:t>жазудың орнына мен сұрақты зерттеу сұрағы ретінде қойдым.</a:t>
+              <a:t>тоқтайтын. Соқыр толықтырудың орнына мен сұрақты зерттеу сұрағы ретінде қойдым.</a:t>
             </a:r>
           </a:p>
         </p:txBody>
@@ -20630,7 +20711,7 @@
                 <a:cs typeface="GQ Text Bold"/>
                 <a:ea typeface="GQ Text Bold"/>
               </a:rPr>
-              <a:t>Мақсат: жұмыс істемейтін нобайды күн сайын</a:t>
+              <a:t>Мақсат: нобайды күн сайын шұғылданатын</a:t>
             </a:r>
           </a:p>
           <a:p>
@@ -20648,7 +20729,7 @@
                 <a:cs typeface="GQ Text Bold"/>
                 <a:ea typeface="GQ Text Bold"/>
               </a:rPr>
-              <a:t>қолдануға болатын жаттықтырғышқа айналдыру</a:t>
+              <a:t>жаттықтырғышқа жеткізу</a:t>
             </a:r>
           </a:p>
         </p:txBody>
@@ -20774,7 +20855,7 @@
         <p:spPr>
           <a:xfrm>
             <a:off x="966724" y="2585516"/>
-            <a:ext cx="5936310" cy="511174"/>
+            <a:ext cx="5936310" cy="306705"/>
           </a:xfrm>
           <a:prstGeom prst="rect">
             <a:avLst/>
@@ -20812,15 +20893,90 @@
                 <a:cs typeface="GQ Text"/>
                 <a:ea typeface="GQ Text"/>
               </a:rPr>
-              <a:t> Бұрынғы нұсқаның әрбір мәлімделген қасиетін көзбен емес,</a:t>
-            </a:r>
-          </a:p>
+              <a:t> Нобайдың әрбір қасиетін көзбен емес, деректермен тексеру.</a:t>
+            </a:r>
+          </a:p>
+        </p:txBody>
+      </p:sp>
+      <p:sp>
+        <p:nvSpPr>
+          <p:cNvPr id="11" name="TextBox 10"/>
+          <p:cNvSpPr txBox="1"/>
+          <p:nvPr/>
+        </p:nvSpPr>
+        <p:spPr>
+          <a:xfrm>
+            <a:off x="749808" y="2945434"/>
+            <a:ext cx="216916" cy="290347"/>
+          </a:xfrm>
+          <a:prstGeom prst="rect">
+            <a:avLst/>
+          </a:prstGeom>
+          <a:noFill/>
+        </p:spPr>
+        <p:txBody>
+          <a:bodyPr wrap="none" lIns="0" rIns="0" tIns="0" bIns="0" anchor="t">
+            <a:spAutoFit/>
+          </a:bodyPr>
+          <a:lstStyle/>
           <a:p>
             <a:pPr algn="l">
               <a:lnSpc>
                 <a:spcPts val="1610"/>
               </a:lnSpc>
             </a:pPr>
+            <a:r>
+              <a:rPr sz="1150">
+                <a:solidFill>
+                  <a:srgbClr val="0064B9"/>
+                </a:solidFill>
+                <a:latin typeface="IBM Plex Mono Medium"/>
+                <a:cs typeface="IBM Plex Mono Medium"/>
+                <a:ea typeface="IBM Plex Mono Medium"/>
+              </a:rPr>
+              <a:t>→</a:t>
+            </a:r>
+          </a:p>
+        </p:txBody>
+      </p:sp>
+      <p:sp>
+        <p:nvSpPr>
+          <p:cNvPr id="12" name="TextBox 11"/>
+          <p:cNvSpPr txBox="1"/>
+          <p:nvPr/>
+        </p:nvSpPr>
+        <p:spPr>
+          <a:xfrm>
+            <a:off x="966724" y="2945434"/>
+            <a:ext cx="5936310" cy="511174"/>
+          </a:xfrm>
+          <a:prstGeom prst="rect">
+            <a:avLst/>
+          </a:prstGeom>
+          <a:noFill/>
+        </p:spPr>
+        <p:txBody>
+          <a:bodyPr wrap="none" lIns="0" rIns="0" tIns="0" bIns="0" anchor="t">
+            <a:spAutoFit/>
+          </a:bodyPr>
+          <a:lstStyle/>
+          <a:p>
+            <a:pPr algn="l">
+              <a:lnSpc>
+                <a:spcPts val="1610"/>
+              </a:lnSpc>
+            </a:pPr>
+            <a:r>
+              <a:rPr sz="1150">
+                <a:solidFill>
+                  <a:srgbClr val="1B222B"/>
+                </a:solidFill>
+                <a:latin typeface="GQ Text SemiBold"/>
+                <a:cs typeface="GQ Text SemiBold"/>
+                <a:ea typeface="GQ Text SemiBold"/>
+              </a:rPr>
+              <a:t>Енгізу бөгетін алу. </a:t>
+            </a:r>
             <a:r>
               <a:rPr sz="1150">
                 <a:solidFill>
@@ -20830,20 +20986,38 @@
                 <a:cs typeface="GQ Text"/>
                 <a:ea typeface="GQ Text"/>
               </a:rPr>
-              <a:t>деректермен тексеру.</a:t>
-            </a:r>
-          </a:p>
-        </p:txBody>
-      </p:sp>
-      <p:sp>
-        <p:nvSpPr>
-          <p:cNvPr id="11" name="TextBox 10"/>
-          <p:cNvSpPr txBox="1"/>
-          <p:nvPr/>
-        </p:nvSpPr>
-        <p:spPr>
-          <a:xfrm>
-            <a:off x="749808" y="3149904"/>
+              <a:t> Дұрыс жауап кәдімгі орыс пернетақтасынан да есептелетін</a:t>
+            </a:r>
+          </a:p>
+          <a:p>
+            <a:pPr algn="l">
+              <a:lnSpc>
+                <a:spcPts val="1610"/>
+              </a:lnSpc>
+            </a:pPr>
+            <a:r>
+              <a:rPr sz="1150">
+                <a:solidFill>
+                  <a:srgbClr val="1B222B"/>
+                </a:solidFill>
+                <a:latin typeface="GQ Text"/>
+                <a:cs typeface="GQ Text"/>
+                <a:ea typeface="GQ Text"/>
+              </a:rPr>
+              <a:t>болсын.</a:t>
+            </a:r>
+          </a:p>
+        </p:txBody>
+      </p:sp>
+      <p:sp>
+        <p:nvSpPr>
+          <p:cNvPr id="13" name="TextBox 12"/>
+          <p:cNvSpPr txBox="1"/>
+          <p:nvPr/>
+        </p:nvSpPr>
+        <p:spPr>
+          <a:xfrm>
+            <a:off x="749808" y="3509822"/>
             <a:ext cx="216916" cy="290347"/>
           </a:xfrm>
           <a:prstGeom prst="rect">
@@ -20878,13 +21052,13 @@
       </p:sp>
       <p:sp>
         <p:nvSpPr>
-          <p:cNvPr id="12" name="TextBox 11"/>
-          <p:cNvSpPr txBox="1"/>
-          <p:nvPr/>
-        </p:nvSpPr>
-        <p:spPr>
-          <a:xfrm>
-            <a:off x="966724" y="3149904"/>
+          <p:cNvPr id="14" name="TextBox 13"/>
+          <p:cNvSpPr txBox="1"/>
+          <p:nvPr/>
+        </p:nvSpPr>
+        <p:spPr>
+          <a:xfrm>
+            <a:off x="966724" y="3509822"/>
             <a:ext cx="5936310" cy="511174"/>
           </a:xfrm>
           <a:prstGeom prst="rect">
@@ -20912,7 +21086,7 @@
                 <a:cs typeface="GQ Text SemiBold"/>
                 <a:ea typeface="GQ Text SemiBold"/>
               </a:rPr>
-              <a:t>Енгізу бөгетін алу. </a:t>
+              <a:t>Мазмұнды толықтыру. </a:t>
             </a:r>
             <a:r>
               <a:rPr sz="1150">
@@ -20923,7 +21097,7 @@
                 <a:cs typeface="GQ Text"/>
                 <a:ea typeface="GQ Text"/>
               </a:rPr>
-              <a:t> Дұрыс жауап кәдімгі орыс пернетақтасынан да есептелетін</a:t>
+              <a:t> Курс 8–11 сынып деңгейінен басталатын — бесінші сынып</a:t>
             </a:r>
           </a:p>
           <a:p>
@@ -20941,20 +21115,20 @@
                 <a:cs typeface="GQ Text"/>
                 <a:ea typeface="GQ Text"/>
               </a:rPr>
-              <a:t>болсын.</a:t>
-            </a:r>
-          </a:p>
-        </p:txBody>
-      </p:sp>
-      <p:sp>
-        <p:nvSpPr>
-          <p:cNvPr id="13" name="TextBox 12"/>
-          <p:cNvSpPr txBox="1"/>
-          <p:nvPr/>
-        </p:nvSpPr>
-        <p:spPr>
-          <a:xfrm>
-            <a:off x="749808" y="3714292"/>
+              <a:t>оқушысына тірек жоқ еді.</a:t>
+            </a:r>
+          </a:p>
+        </p:txBody>
+      </p:sp>
+      <p:sp>
+        <p:nvSpPr>
+          <p:cNvPr id="15" name="TextBox 14"/>
+          <p:cNvSpPr txBox="1"/>
+          <p:nvPr/>
+        </p:nvSpPr>
+        <p:spPr>
+          <a:xfrm>
+            <a:off x="749808" y="4074210"/>
             <a:ext cx="216916" cy="290347"/>
           </a:xfrm>
           <a:prstGeom prst="rect">
@@ -20989,13 +21163,13 @@
       </p:sp>
       <p:sp>
         <p:nvSpPr>
-          <p:cNvPr id="14" name="TextBox 13"/>
-          <p:cNvSpPr txBox="1"/>
-          <p:nvPr/>
-        </p:nvSpPr>
-        <p:spPr>
-          <a:xfrm>
-            <a:off x="966724" y="3714292"/>
+          <p:cNvPr id="16" name="TextBox 15"/>
+          <p:cNvSpPr txBox="1"/>
+          <p:nvPr/>
+        </p:nvSpPr>
+        <p:spPr>
+          <a:xfrm>
+            <a:off x="966724" y="4074210"/>
             <a:ext cx="5936310" cy="511174"/>
           </a:xfrm>
           <a:prstGeom prst="rect">
@@ -21023,7 +21197,7 @@
                 <a:cs typeface="GQ Text SemiBold"/>
                 <a:ea typeface="GQ Text SemiBold"/>
               </a:rPr>
-              <a:t>Мазмұнды толықтыру. </a:t>
+              <a:t>Телефонға жеткізу. </a:t>
             </a:r>
             <a:r>
               <a:rPr sz="1150">
@@ -21034,7 +21208,7 @@
                 <a:cs typeface="GQ Text"/>
                 <a:ea typeface="GQ Text"/>
               </a:rPr>
-              <a:t> Курс 8–11 сынып деңгейінен басталатын — бесінші сынып</a:t>
+              <a:t> Қосымша негізгі экраннан ашылып, интернетсіз жұмыс</a:t>
             </a:r>
           </a:p>
           <a:p>
@@ -21052,20 +21226,20 @@
                 <a:cs typeface="GQ Text"/>
                 <a:ea typeface="GQ Text"/>
               </a:rPr>
-              <a:t>оқушысына тірек жоқ еді.</a:t>
-            </a:r>
-          </a:p>
-        </p:txBody>
-      </p:sp>
-      <p:sp>
-        <p:nvSpPr>
-          <p:cNvPr id="15" name="TextBox 14"/>
-          <p:cNvSpPr txBox="1"/>
-          <p:nvPr/>
-        </p:nvSpPr>
-        <p:spPr>
-          <a:xfrm>
-            <a:off x="749808" y="4278680"/>
+              <a:t>істеуі керек.</a:t>
+            </a:r>
+          </a:p>
+        </p:txBody>
+      </p:sp>
+      <p:sp>
+        <p:nvSpPr>
+          <p:cNvPr id="17" name="TextBox 16"/>
+          <p:cNvSpPr txBox="1"/>
+          <p:nvPr/>
+        </p:nvSpPr>
+        <p:spPr>
+          <a:xfrm>
+            <a:off x="749808" y="4638598"/>
             <a:ext cx="216916" cy="290347"/>
           </a:xfrm>
           <a:prstGeom prst="rect">
@@ -21100,124 +21274,13 @@
       </p:sp>
       <p:sp>
         <p:nvSpPr>
-          <p:cNvPr id="16" name="TextBox 15"/>
-          <p:cNvSpPr txBox="1"/>
-          <p:nvPr/>
-        </p:nvSpPr>
-        <p:spPr>
-          <a:xfrm>
-            <a:off x="966724" y="4278680"/>
-            <a:ext cx="5936310" cy="511174"/>
-          </a:xfrm>
-          <a:prstGeom prst="rect">
-            <a:avLst/>
-          </a:prstGeom>
-          <a:noFill/>
-        </p:spPr>
-        <p:txBody>
-          <a:bodyPr wrap="none" lIns="0" rIns="0" tIns="0" bIns="0" anchor="t">
-            <a:spAutoFit/>
-          </a:bodyPr>
-          <a:lstStyle/>
-          <a:p>
-            <a:pPr algn="l">
-              <a:lnSpc>
-                <a:spcPts val="1610"/>
-              </a:lnSpc>
-            </a:pPr>
-            <a:r>
-              <a:rPr sz="1150">
-                <a:solidFill>
-                  <a:srgbClr val="1B222B"/>
-                </a:solidFill>
-                <a:latin typeface="GQ Text SemiBold"/>
-                <a:cs typeface="GQ Text SemiBold"/>
-                <a:ea typeface="GQ Text SemiBold"/>
-              </a:rPr>
-              <a:t>Телефонға жеткізу. </a:t>
-            </a:r>
-            <a:r>
-              <a:rPr sz="1150">
-                <a:solidFill>
-                  <a:srgbClr val="1B222B"/>
-                </a:solidFill>
-                <a:latin typeface="GQ Text"/>
-                <a:cs typeface="GQ Text"/>
-                <a:ea typeface="GQ Text"/>
-              </a:rPr>
-              <a:t> Қосымша негізгі экраннан ашылып, интернетсіз жұмыс</a:t>
-            </a:r>
-          </a:p>
-          <a:p>
-            <a:pPr algn="l">
-              <a:lnSpc>
-                <a:spcPts val="1610"/>
-              </a:lnSpc>
-            </a:pPr>
-            <a:r>
-              <a:rPr sz="1150">
-                <a:solidFill>
-                  <a:srgbClr val="1B222B"/>
-                </a:solidFill>
-                <a:latin typeface="GQ Text"/>
-                <a:cs typeface="GQ Text"/>
-                <a:ea typeface="GQ Text"/>
-              </a:rPr>
-              <a:t>істеуі керек.</a:t>
-            </a:r>
-          </a:p>
-        </p:txBody>
-      </p:sp>
-      <p:sp>
-        <p:nvSpPr>
-          <p:cNvPr id="17" name="TextBox 16"/>
-          <p:cNvSpPr txBox="1"/>
-          <p:nvPr/>
-        </p:nvSpPr>
-        <p:spPr>
-          <a:xfrm>
-            <a:off x="749808" y="4843068"/>
-            <a:ext cx="216916" cy="290347"/>
-          </a:xfrm>
-          <a:prstGeom prst="rect">
-            <a:avLst/>
-          </a:prstGeom>
-          <a:noFill/>
-        </p:spPr>
-        <p:txBody>
-          <a:bodyPr wrap="none" lIns="0" rIns="0" tIns="0" bIns="0" anchor="t">
-            <a:spAutoFit/>
-          </a:bodyPr>
-          <a:lstStyle/>
-          <a:p>
-            <a:pPr algn="l">
-              <a:lnSpc>
-                <a:spcPts val="1610"/>
-              </a:lnSpc>
-            </a:pPr>
-            <a:r>
-              <a:rPr sz="1150">
-                <a:solidFill>
-                  <a:srgbClr val="0064B9"/>
-                </a:solidFill>
-                <a:latin typeface="IBM Plex Mono Medium"/>
-                <a:cs typeface="IBM Plex Mono Medium"/>
-                <a:ea typeface="IBM Plex Mono Medium"/>
-              </a:rPr>
-              <a:t>→</a:t>
-            </a:r>
-          </a:p>
-        </p:txBody>
-      </p:sp>
-      <p:sp>
-        <p:nvSpPr>
           <p:cNvPr id="18" name="TextBox 17"/>
           <p:cNvSpPr txBox="1"/>
           <p:nvPr/>
         </p:nvSpPr>
         <p:spPr>
           <a:xfrm>
-            <a:off x="966724" y="4843068"/>
+            <a:off x="966724" y="4638598"/>
             <a:ext cx="5936310" cy="511174"/>
           </a:xfrm>
           <a:prstGeom prst="rect">
@@ -21670,7 +21733,7 @@
                 <a:cs typeface="GQ Text"/>
                 <a:ea typeface="GQ Text"/>
               </a:rPr>
-              <a:t>Бұрынғы нұсқа туралы әрбір тұжырымды жобаның өз деректерімен тексердім. Барлық тексеру —</a:t>
+              <a:t>Нобай туралы әрбір тұжырымды жобаның өз деректерімен тексердім. Барлық тексеру — репозиторийде</a:t>
             </a:r>
           </a:p>
           <a:p>
@@ -21688,7 +21751,7 @@
                 <a:cs typeface="GQ Text"/>
                 <a:ea typeface="GQ Text"/>
               </a:rPr>
-              <a:t>репозиторийде жатқан және қайта іске қосылатын скрипттермен.</a:t>
+              <a:t>жатқан және қайта іске қосылатын скрипттермен.</a:t>
             </a:r>
           </a:p>
         </p:txBody>
@@ -22168,7 +22231,7 @@
         <p:spPr>
           <a:xfrm>
             <a:off x="5114422" y="3118358"/>
-            <a:ext cx="1962851" cy="1032510"/>
+            <a:ext cx="1962851" cy="651509"/>
           </a:xfrm>
           <a:prstGeom prst="rect">
             <a:avLst/>
@@ -22195,7 +22258,7 @@
                 <a:cs typeface="GQ Text"/>
                 <a:ea typeface="GQ Text"/>
               </a:rPr>
-              <a:t>Мәлімделген тапсырма</a:t>
+              <a:t>Ойластырылған тапсырма</a:t>
             </a:r>
           </a:p>
           <a:p>
@@ -22213,7 +22276,7 @@
                 <a:cs typeface="GQ Text"/>
                 <a:ea typeface="GQ Text"/>
               </a:rPr>
-              <a:t>түрлері еш жерде</a:t>
+              <a:t>түрлерінің қайсысын нобай</a:t>
             </a:r>
           </a:p>
           <a:p>
@@ -22231,43 +22294,7 @@
                 <a:cs typeface="GQ Text"/>
                 <a:ea typeface="GQ Text"/>
               </a:rPr>
-              <a:t>қосылмағанын, ал біреуі</a:t>
-            </a:r>
-          </a:p>
-          <a:p>
-            <a:pPr algn="l">
-              <a:lnSpc>
-                <a:spcPts val="1500"/>
-              </a:lnSpc>
-            </a:pPr>
-            <a:r>
-              <a:rPr sz="1050">
-                <a:solidFill>
-                  <a:srgbClr val="535C66"/>
-                </a:solidFill>
-                <a:latin typeface="GQ Text"/>
-                <a:cs typeface="GQ Text"/>
-                <a:ea typeface="GQ Text"/>
-              </a:rPr>
-              <a:t>экранды құлататынын</a:t>
-            </a:r>
-          </a:p>
-          <a:p>
-            <a:pPr algn="l">
-              <a:lnSpc>
-                <a:spcPts val="1500"/>
-              </a:lnSpc>
-            </a:pPr>
-            <a:r>
-              <a:rPr sz="1050">
-                <a:solidFill>
-                  <a:srgbClr val="535C66"/>
-                </a:solidFill>
-                <a:latin typeface="GQ Text"/>
-                <a:cs typeface="GQ Text"/>
-                <a:ea typeface="GQ Text"/>
-              </a:rPr>
-              <a:t>таптым.</a:t>
+              <a:t>қосып үлгермегенін таптым.</a:t>
             </a:r>
           </a:p>
         </p:txBody>
@@ -22827,7 +22854,7 @@
                 <a:cs typeface="GQ Text"/>
                 <a:ea typeface="GQ Text"/>
               </a:rPr>
-              <a:t>Қазақ тілінде ә ғ қ ң ө ұ ү һ і әріптері бар. Орыс пернетақтасында оларды алатын жер жоқ. Ал бұрынғы</a:t>
+              <a:t>Қазақ тілінде ә ғ қ ң ө ұ ү һ і әріптері бар. Орыс пернетақтасында оларды алатын жер жоқ. Ал нобайдағы</a:t>
             </a:r>
           </a:p>
           <a:p>
@@ -23214,7 +23241,7 @@
                 <a:cs typeface="GQ Text"/>
                 <a:ea typeface="GQ Text"/>
               </a:rPr>
-              <a:t>бұрынғы нұсқа бірде-бірін бермеді</a:t>
+              <a:t>нобай бірде-бірін бермеді</a:t>
             </a:r>
           </a:p>
         </p:txBody>
@@ -23504,7 +23531,7 @@
                 <a:cs typeface="GQ Text Bold"/>
                 <a:ea typeface="GQ Text Bold"/>
               </a:rPr>
-              <a:t>Қазақ тіліне арналған қосымша қазақ әріптері</a:t>
+              <a:t>Қазақ тіліне арналған нобай қазақ әріптері жоқ</a:t>
             </a:r>
           </a:p>
           <a:p>
@@ -23522,7 +23549,7 @@
                 <a:cs typeface="GQ Text Bold"/>
                 <a:ea typeface="GQ Text Bold"/>
               </a:rPr>
-              <a:t>жоқ қаріппен терілген еді</a:t>
+              <a:t>қаріппен терілген еді</a:t>
             </a:r>
           </a:p>
         </p:txBody>
@@ -24442,7 +24469,7 @@
                 <a:cs typeface="IBM Plex Mono SemiBold"/>
                 <a:ea typeface="IBM Plex Mono SemiBold"/>
               </a:rPr>
-              <a:t>3-ТАБЫС · МӘЛІМДЕЛГЕНІ МЕН ШЫНДЫҒЫ</a:t>
+              <a:t>3-ТАБЫС · ОЙ МЕН ОРЫНДАЛУЫ</a:t>
             </a:r>
           </a:p>
         </p:txBody>
@@ -24496,27 +24523,27 @@
         </p:nvSpPr>
         <p:spPr>
           <a:xfrm>
-            <a:off x="749808" y="813683"/>
-            <a:ext cx="10692079" cy="569243"/>
-          </a:xfrm>
-          <a:prstGeom prst="rect">
-            <a:avLst/>
-          </a:prstGeom>
-          <a:noFill/>
-        </p:spPr>
-        <p:txBody>
-          <a:bodyPr wrap="none" lIns="0" rIns="0" tIns="0" bIns="0" anchor="t">
-            <a:spAutoFit/>
-          </a:bodyPr>
-          <a:lstStyle/>
-          <a:p>
-            <a:pPr algn="l">
-              <a:lnSpc>
-                <a:spcPts val="3156"/>
-              </a:lnSpc>
-            </a:pPr>
-            <a:r>
-              <a:rPr sz="2950" spc="-65">
+            <a:off x="749808" y="801725"/>
+            <a:ext cx="10692079" cy="675373"/>
+          </a:xfrm>
+          <a:prstGeom prst="rect">
+            <a:avLst/>
+          </a:prstGeom>
+          <a:noFill/>
+        </p:spPr>
+        <p:txBody>
+          <a:bodyPr wrap="none" lIns="0" rIns="0" tIns="0" bIns="0" anchor="t">
+            <a:spAutoFit/>
+          </a:bodyPr>
+          <a:lstStyle/>
+          <a:p>
+            <a:pPr algn="l">
+              <a:lnSpc>
+                <a:spcPts val="3745"/>
+              </a:lnSpc>
+            </a:pPr>
+            <a:r>
+              <a:rPr sz="3500" spc="-77">
                 <a:solidFill>
                   <a:srgbClr val="EEEBE5"/>
                 </a:solidFill>
@@ -24524,7 +24551,7 @@
                 <a:cs typeface="GQ Text Bold"/>
                 <a:ea typeface="GQ Text Bold"/>
               </a:rPr>
-              <a:t>Мәлімделген мүмкіндіктердің жартысы жоқ болып шықты</a:t>
+              <a:t>Нобай нені ойластырды және неге жетпей қалды</a:t>
             </a:r>
           </a:p>
         </p:txBody>
@@ -24537,8 +24564,8 @@
         </p:nvSpPr>
         <p:spPr>
           <a:xfrm>
-            <a:off x="749808" y="1387492"/>
-            <a:ext cx="8553663" cy="332907"/>
+            <a:off x="749808" y="1462232"/>
+            <a:ext cx="8553663" cy="567349"/>
           </a:xfrm>
           <a:prstGeom prst="rect">
             <a:avLst/>
@@ -24565,7 +24592,25 @@
                 <a:cs typeface="GQ Text"/>
                 <a:ea typeface="GQ Text"/>
               </a:rPr>
-              <a:t>Бұрынғы нұсқаның құжаттамасын оның кодымен салыстырдым. Барлығы дерлік сәйкес келмеді.</a:t>
+              <a:t>Нобайдың сипаттамасын оның кодымен салыстырдым. Ой іске асқаннан кең болды — бірінші нұсқа үшін</a:t>
+            </a:r>
+          </a:p>
+          <a:p>
+            <a:pPr algn="l">
+              <a:lnSpc>
+                <a:spcPts val="1846"/>
+              </a:lnSpc>
+            </a:pPr>
+            <a:r>
+              <a:rPr sz="1300">
+                <a:solidFill>
+                  <a:srgbClr val="A6ADB6"/>
+                </a:solidFill>
+                <a:latin typeface="GQ Text"/>
+                <a:cs typeface="GQ Text"/>
+                <a:ea typeface="GQ Text"/>
+              </a:rPr>
+              <a:t>бұл әдеттегі жағдай, бірақ тексеруге тұрарлық еді.</a:t>
             </a:r>
           </a:p>
         </p:txBody>
@@ -24578,7 +24623,7 @@
         </p:nvSpPr>
         <p:spPr>
           <a:xfrm>
-            <a:off x="749808" y="2135339"/>
+            <a:off x="749808" y="2444521"/>
             <a:ext cx="4455033" cy="199275"/>
           </a:xfrm>
           <a:prstGeom prst="rect">
@@ -24606,7 +24651,7 @@
                 <a:cs typeface="IBM Plex Mono SemiBold"/>
                 <a:ea typeface="IBM Plex Mono SemiBold"/>
               </a:rPr>
-              <a:t>НЕ МӘЛІМДЕЛДІ</a:t>
+              <a:t>НЕ ОЙЛАСТЫРЫЛДЫ</a:t>
             </a:r>
           </a:p>
         </p:txBody>
@@ -24619,7 +24664,7 @@
         </p:nvSpPr>
         <p:spPr>
           <a:xfrm>
-            <a:off x="5204841" y="2135339"/>
+            <a:off x="5204841" y="2444521"/>
             <a:ext cx="6237046" cy="199275"/>
           </a:xfrm>
           <a:prstGeom prst="rect">
@@ -24647,7 +24692,7 @@
                 <a:cs typeface="IBM Plex Mono SemiBold"/>
                 <a:ea typeface="IBM Plex Mono SemiBold"/>
               </a:rPr>
-              <a:t>КОДТА НЕ БОЛДЫ</a:t>
+              <a:t>НЕ ІСТЕЙ АЛДЫ</a:t>
             </a:r>
           </a:p>
         </p:txBody>
@@ -24660,7 +24705,7 @@
         </p:nvSpPr>
         <p:spPr>
           <a:xfrm>
-            <a:off x="749808" y="2390965"/>
+            <a:off x="749808" y="2700147"/>
             <a:ext cx="10692079" cy="7315"/>
           </a:xfrm>
           <a:prstGeom prst="rect">
@@ -24690,7 +24735,7 @@
         </p:nvSpPr>
         <p:spPr>
           <a:xfrm>
-            <a:off x="749808" y="2519918"/>
+            <a:off x="749808" y="2829100"/>
             <a:ext cx="4455033" cy="253738"/>
           </a:xfrm>
           <a:prstGeom prst="rect">
@@ -24731,7 +24776,7 @@
         </p:nvSpPr>
         <p:spPr>
           <a:xfrm>
-            <a:off x="5204841" y="2519918"/>
+            <a:off x="5204841" y="2829100"/>
             <a:ext cx="6237046" cy="253738"/>
           </a:xfrm>
           <a:prstGeom prst="rect">
@@ -24759,7 +24804,7 @@
                 <a:cs typeface="GQ Text"/>
                 <a:ea typeface="GQ Text"/>
               </a:rPr>
-              <a:t>Біреуі ғана жұмыс істеді. Түр белгісі мүлде жоқ еді</a:t>
+              <a:t>Біреуі. Тапсырмаларда түр белгісі жоқ еді</a:t>
             </a:r>
           </a:p>
         </p:txBody>
@@ -24772,7 +24817,7 @@
         </p:nvSpPr>
         <p:spPr>
           <a:xfrm>
-            <a:off x="749808" y="2829877"/>
+            <a:off x="749808" y="3139058"/>
             <a:ext cx="10692079" cy="7315"/>
           </a:xfrm>
           <a:prstGeom prst="rect">
@@ -24802,7 +24847,7 @@
         </p:nvSpPr>
         <p:spPr>
           <a:xfrm>
-            <a:off x="749808" y="2958830"/>
+            <a:off x="749808" y="3268012"/>
             <a:ext cx="4455033" cy="253738"/>
           </a:xfrm>
           <a:prstGeom prst="rect">
@@ -24843,7 +24888,7 @@
         </p:nvSpPr>
         <p:spPr>
           <a:xfrm>
-            <a:off x="5204841" y="2958830"/>
+            <a:off x="5204841" y="3268012"/>
             <a:ext cx="6237046" cy="253738"/>
           </a:xfrm>
           <a:prstGeom prst="rect">
@@ -24871,7 +24916,7 @@
                 <a:cs typeface="GQ Text"/>
                 <a:ea typeface="GQ Text"/>
               </a:rPr>
-              <a:t>Экранды құлатар еді: React ережелері бұзылған</a:t>
+              <a:t>Қосылмайтын: экран көтермес еді</a:t>
             </a:r>
           </a:p>
         </p:txBody>
@@ -24884,7 +24929,7 @@
         </p:nvSpPr>
         <p:spPr>
           <a:xfrm>
-            <a:off x="749808" y="3268789"/>
+            <a:off x="749808" y="3577970"/>
             <a:ext cx="10692079" cy="7315"/>
           </a:xfrm>
           <a:prstGeom prst="rect">
@@ -24914,7 +24959,7 @@
         </p:nvSpPr>
         <p:spPr>
           <a:xfrm>
-            <a:off x="749808" y="3397742"/>
+            <a:off x="749808" y="3706924"/>
             <a:ext cx="4455033" cy="253738"/>
           </a:xfrm>
           <a:prstGeom prst="rect">
@@ -24955,7 +25000,7 @@
         </p:nvSpPr>
         <p:spPr>
           <a:xfrm>
-            <a:off x="5204841" y="3397742"/>
+            <a:off x="5204841" y="3706924"/>
             <a:ext cx="6237046" cy="253738"/>
           </a:xfrm>
           <a:prstGeom prst="rect">
@@ -24983,7 +25028,7 @@
                 <a:cs typeface="GQ Text"/>
                 <a:ea typeface="GQ Text"/>
               </a:rPr>
-              <a:t>Экран бар, алгоритм жоқ — өтілгенді қатарынан айдайтын</a:t>
+              <a:t>Экран бар, алгоритм жоқ — тапсырмалар қатарынан жүретін</a:t>
             </a:r>
           </a:p>
         </p:txBody>
@@ -24996,7 +25041,7 @@
         </p:nvSpPr>
         <p:spPr>
           <a:xfrm>
-            <a:off x="749808" y="3707701"/>
+            <a:off x="749808" y="4016882"/>
             <a:ext cx="10692079" cy="7315"/>
           </a:xfrm>
           <a:prstGeom prst="rect">
@@ -25026,7 +25071,7 @@
         </p:nvSpPr>
         <p:spPr>
           <a:xfrm>
-            <a:off x="749808" y="3836654"/>
+            <a:off x="749808" y="4145836"/>
             <a:ext cx="4455033" cy="253738"/>
           </a:xfrm>
           <a:prstGeom prst="rect">
@@ -25067,7 +25112,7 @@
         </p:nvSpPr>
         <p:spPr>
           <a:xfrm>
-            <a:off x="5204841" y="3836654"/>
+            <a:off x="5204841" y="4145836"/>
             <a:ext cx="6237046" cy="253738"/>
           </a:xfrm>
           <a:prstGeom prst="rect">
@@ -25095,7 +25140,7 @@
                 <a:cs typeface="GQ Text"/>
                 <a:ea typeface="GQ Text"/>
               </a:rPr>
-              <a:t>Қаріп желіден жүктелетін</a:t>
+              <a:t>Қаріп желіден келетін</a:t>
             </a:r>
           </a:p>
         </p:txBody>
@@ -25108,7 +25153,7 @@
         </p:nvSpPr>
         <p:spPr>
           <a:xfrm>
-            <a:off x="749808" y="4146613"/>
+            <a:off x="749808" y="4455794"/>
             <a:ext cx="10692079" cy="7315"/>
           </a:xfrm>
           <a:prstGeom prst="rect">
@@ -25138,7 +25183,7 @@
         </p:nvSpPr>
         <p:spPr>
           <a:xfrm>
-            <a:off x="749808" y="4275566"/>
+            <a:off x="749808" y="4584748"/>
             <a:ext cx="4455033" cy="253738"/>
           </a:xfrm>
           <a:prstGeom prst="rect">
@@ -25179,7 +25224,7 @@
         </p:nvSpPr>
         <p:spPr>
           <a:xfrm>
-            <a:off x="5204841" y="4275566"/>
+            <a:off x="5204841" y="4584748"/>
             <a:ext cx="6237046" cy="253738"/>
           </a:xfrm>
           <a:prstGeom prst="rect">
@@ -25220,7 +25265,7 @@
         </p:nvSpPr>
         <p:spPr>
           <a:xfrm>
-            <a:off x="749808" y="4585525"/>
+            <a:off x="749808" y="4894706"/>
             <a:ext cx="10692079" cy="7315"/>
           </a:xfrm>
           <a:prstGeom prst="rect">

--- a/презентация/Тілашар-қорғау.pptx
+++ b/презентация/Тілашар-қорғау.pptx
@@ -13,8 +13,6 @@
     <p:sldId id="261" r:id="rId13"/>
     <p:sldId id="262" r:id="rId14"/>
     <p:sldId id="263" r:id="rId15"/>
-    <p:sldId id="264" r:id="rId16"/>
-    <p:sldId id="265" r:id="rId17"/>
   </p:sldIdLst>
   <p:sldSz cx="12191695" cy="6858000" type="screen4x3"/>
   <p:notesSz cx="6858000" cy="9144000"/>
@@ -563,178 +561,6 @@
 </p:notes>
 </file>
 
-<file path=ppt/notesSlides/notesSlide10.xml><?xml version="1.0" encoding="utf-8"?>
-<p:notes xmlns:a="http://schemas.openxmlformats.org/drawingml/2006/main" xmlns:p="http://schemas.openxmlformats.org/presentationml/2006/main" xmlns:r="http://schemas.openxmlformats.org/officeDocument/2006/relationships">
-  <p:cSld>
-    <p:spTree>
-      <p:nvGrpSpPr>
-        <p:cNvPr id="1" name=""/>
-        <p:cNvGrpSpPr/>
-        <p:nvPr/>
-      </p:nvGrpSpPr>
-      <p:grpSpPr>
-        <a:xfrm>
-          <a:off x="0" y="0"/>
-          <a:ext cx="0" cy="0"/>
-          <a:chOff x="0" y="0"/>
-          <a:chExt cx="0" cy="0"/>
-        </a:xfrm>
-      </p:grpSpPr>
-      <p:sp>
-        <p:nvSpPr>
-          <p:cNvPr id="2" name="Slide Image Placeholder 1"/>
-          <p:cNvSpPr>
-            <a:spLocks noGrp="1"/>
-          </p:cNvSpPr>
-          <p:nvPr>
-            <p:ph type="sldImg" idx="2"/>
-          </p:nvPr>
-        </p:nvSpPr>
-        <p:spPr/>
-      </p:sp>
-      <p:sp>
-        <p:nvSpPr>
-          <p:cNvPr id="3" name="Notes Placeholder 2"/>
-          <p:cNvSpPr>
-            <a:spLocks noGrp="1"/>
-          </p:cNvSpPr>
-          <p:nvPr>
-            <p:ph type="body" idx="3" sz="quarter"/>
-          </p:nvPr>
-        </p:nvSpPr>
-        <p:spPr/>
-        <p:txBody>
-          <a:bodyPr/>
-          <a:lstStyle/>
-          <a:p>
-            <a:r>
-              <a:t>Финал. Не читать по бумажке — сказать своими словами.</a:t>
-            </a:r>
-          </a:p>
-          <a:p/>
-          <a:p>
-            <a:r>
-              <a:t>Главная мысль на прощание: казахский не сложнее других языков. Ученику</a:t>
-            </a:r>
-          </a:p>
-          <a:p>
-            <a:r>
-              <a:t>мешало то, что он не мог нажать нужную букву.</a:t>
-            </a:r>
-          </a:p>
-          <a:p/>
-          <a:p>
-            <a:r>
-              <a:t>ЧАСТЫЕ ВОПРОСЫ ЖЮРИ</a:t>
-            </a:r>
-          </a:p>
-          <a:p/>
-          <a:p>
-            <a:r>
-              <a:t>1. «Что здесь сделал ты, а что нейросеть?»</a:t>
-            </a:r>
-          </a:p>
-          <a:p>
-            <a:r>
-              <a:t>   Код помогала писать нейросеть. Я поставил вопрос, измерил, нашёл причины</a:t>
-            </a:r>
-          </a:p>
-          <a:p>
-            <a:r>
-              <a:t>   и проверил результат. Первая версия писалась без такой проверки — потому</a:t>
-            </a:r>
-          </a:p>
-          <a:p>
-            <a:r>
-              <a:t>   в ней половина задуманного и не работала.</a:t>
-            </a:r>
-          </a:p>
-          <a:p/>
-          <a:p>
-            <a:r>
-              <a:t>2. «Чем это отличается от прошлогодней работы?»</a:t>
-            </a:r>
-          </a:p>
-          <a:p>
-            <a:r>
-              <a:t>   Тогда я показывал замысел, и он победил. Сейчас показываю проверку этого</a:t>
-            </a:r>
-          </a:p>
-          <a:p>
-            <a:r>
-              <a:t>   замысла на данных и то, что из неё вышло.</a:t>
-            </a:r>
-          </a:p>
-          <a:p/>
-          <a:p>
-            <a:r>
-              <a:t>3. «Результаты апробации есть?»</a:t>
-            </a:r>
-          </a:p>
-          <a:p>
-            <a:r>
-              <a:t>   Нет. Эксперимент запланирован, сбор данных встроен в приложение,</a:t>
-            </a:r>
-          </a:p>
-          <a:p>
-            <a:r>
-              <a:t>   данных пока нет. Придумывать проценты я не стал.</a:t>
-            </a:r>
-          </a:p>
-          <a:p/>
-          <a:p>
-            <a:r>
-              <a:t>4. «Уроки писал носитель языка?»</a:t>
-            </a:r>
-          </a:p>
-          <a:p>
-            <a:r>
-              <a:t>   Нет, и это касается всего текста. Носитель языка не видел ни одной строки,</a:t>
-            </a:r>
-          </a:p>
-          <a:p>
-            <a:r>
-              <a:t>   поэтому весь казахский текст — 168 тысяч знаков — выгружен учителю</a:t>
-            </a:r>
-          </a:p>
-          <a:p>
-            <a:r>
-              <a:t>   на проверку.</a:t>
-            </a:r>
-          </a:p>
-          <a:p/>
-          <a:p>
-            <a:r>
-              <a:t>5. «Приложение платное?»</a:t>
-            </a:r>
-          </a:p>
-          <a:p>
-            <a:r>
-              <a:t>   Нет. Открывается по ссылке, работает без интернета, ставится на телефон.</a:t>
-            </a:r>
-          </a:p>
-        </p:txBody>
-      </p:sp>
-      <p:sp>
-        <p:nvSpPr>
-          <p:cNvPr id="4" name="Slide Number Placeholder 3"/>
-          <p:cNvSpPr>
-            <a:spLocks noGrp="1"/>
-          </p:cNvSpPr>
-          <p:nvPr>
-            <p:ph type="sldNum" idx="5" sz="quarter"/>
-          </p:nvPr>
-        </p:nvSpPr>
-        <p:spPr/>
-      </p:sp>
-    </p:spTree>
-  </p:cSld>
-  <p:clrMapOvr>
-    <a:masterClrMapping/>
-  </p:clrMapOvr>
-</p:notes>
-</file>
-
 <file path=ppt/notesSlides/notesSlide2.xml><?xml version="1.0" encoding="utf-8"?>
 <p:notes xmlns:a="http://schemas.openxmlformats.org/drawingml/2006/main" xmlns:p="http://schemas.openxmlformats.org/presentationml/2006/main" xmlns:r="http://schemas.openxmlformats.org/officeDocument/2006/relationships">
   <p:cSld>
@@ -1054,34 +880,44 @@
           <a:lstStyle/>
           <a:p>
             <a:r>
-              <a:t>Это главная находка проекта. Здесь стоит сделать паузу.</a:t>
+              <a:t>Это ядро доклада. Не читать по пунктам — рассказать про первый и третий,</a:t>
+            </a:r>
+          </a:p>
+          <a:p>
+            <a:r>
+              <a:t>остальные видны на слайде.</a:t>
             </a:r>
           </a:p>
           <a:p/>
           <a:p>
             <a:r>
-              <a:t>Скажите фразу целиком: «ученик отвечал верно и получал ошибку». Дайте жюри</a:t>
-            </a:r>
-          </a:p>
-          <a:p>
-            <a:r>
-              <a:t>секунду. Именно из-за этого первую версию и бросали.</a:t>
+              <a:t>Про первый стоит сделать паузу: в казахском есть буквы, которых физически</a:t>
+            </a:r>
+          </a:p>
+          <a:p>
+            <a:r>
+              <a:t>нет на русской клавиатуре. Обычный тренажёр сравнивает ответ буква в букву,</a:t>
+            </a:r>
+          </a:p>
+          <a:p>
+            <a:r>
+              <a:t>и ученик получает «неверно» за правильный ответ. Именно из-за этого первую</a:t>
+            </a:r>
+          </a:p>
+          <a:p>
+            <a:r>
+              <a:t>версию бросали.</a:t>
             </a:r>
           </a:p>
           <a:p/>
           <a:p>
             <a:r>
-              <a:t>Если спросят «а нельзя поставить казахскую раскладку» — можно, но школьник</a:t>
-            </a:r>
-          </a:p>
-          <a:p>
-            <a:r>
-              <a:t>не будет переключать раскладку на каждое задание, а на телефоне это ещё</a:t>
-            </a:r>
-          </a:p>
-          <a:p>
-            <a:r>
-              <a:t>и лишние касания.</a:t>
+              <a:t>Если спросят подробнее про окончания — можно показать вживую на слайде 07:</a:t>
+            </a:r>
+          </a:p>
+          <a:p>
+            <a:r>
+              <a:t>подставить любое слово прямо при жюри.</a:t>
             </a:r>
           </a:p>
         </p:txBody>
@@ -1151,34 +987,23 @@
           <a:lstStyle/>
           <a:p>
             <a:r>
-              <a:t>Этот слайд показывает, что задача была не программистская, а языковая.</a:t>
+              <a:t>Коротко: это не список уроков, а система, которая возвращает материал тогда,</a:t>
+            </a:r>
+          </a:p>
+          <a:p>
+            <a:r>
+              <a:t>когда он начинает забываться.</a:t>
             </a:r>
           </a:p>
           <a:p/>
           <a:p>
             <a:r>
-              <a:t>Сначала я сделал «как у всех» — допуск в один-два символа. И проверка стала</a:t>
-            </a:r>
-          </a:p>
-          <a:p>
-            <a:r>
-              <a:t>засчитывать «ты читаешь» вместо «я читаю». Ученик получал похвалу за неверную</a:t>
-            </a:r>
-          </a:p>
-          <a:p>
-            <a:r>
-              <a:t>форму — это хуже, чем строгий отказ.</a:t>
-            </a:r>
-          </a:p>
-          <a:p/>
-          <a:p>
-            <a:r>
-              <a:t>Если спросят, откуда правило: из свойства казахского языка. Окончание —</a:t>
-            </a:r>
-          </a:p>
-          <a:p>
-            <a:r>
-              <a:t>отдельная часть слова, а не часть корня.</a:t>
+              <a:t>Если останется время — можно показать «Таблицы окончаний»: подставить любое</a:t>
+            </a:r>
+          </a:p>
+          <a:p>
+            <a:r>
+              <a:t>слово прямо при жюри.</a:t>
             </a:r>
           </a:p>
         </p:txBody>
@@ -1248,24 +1073,54 @@
           <a:lstStyle/>
           <a:p>
             <a:r>
-              <a:t>Самая содержательная часть с точки зрения языка.</a:t>
+              <a:t>Живую демонстрацию готовить заранее: открыть приложение до выступления,</a:t>
+            </a:r>
+          </a:p>
+          <a:p>
+            <a:r>
+              <a:t>выбрать короткий урок, проверить, что телефон заряжен.</a:t>
             </a:r>
           </a:p>
           <a:p/>
           <a:p>
             <a:r>
-              <a:t>Пример с «кітабым» стоит проговорить вслух: в учебнике это отдельное правило,</a:t>
-            </a:r>
-          </a:p>
-          <a:p>
-            <a:r>
-              <a:t>а у меня оно работает на любом слове, которое введёт ученик.</a:t>
+              <a:t>Что показать за минуту:</a:t>
+            </a:r>
+          </a:p>
+          <a:p>
+            <a:r>
+              <a:t>1. Дорожку уроков — видно, где я сейчас.</a:t>
+            </a:r>
+          </a:p>
+          <a:p>
+            <a:r>
+              <a:t>2. Открыть урок, дойти до задания.</a:t>
+            </a:r>
+          </a:p>
+          <a:p>
+            <a:r>
+              <a:t>3. Набрать ответ РУССКИМИ буквами — например «аке» вместо «әке».</a:t>
+            </a:r>
+          </a:p>
+          <a:p>
+            <a:r>
+              <a:t>   Приложение ответит «Грамматика верна» и покажет правильное написание.</a:t>
+            </a:r>
+          </a:p>
+          <a:p>
+            <a:r>
+              <a:t>   Это и есть главное.</a:t>
+            </a:r>
+          </a:p>
+          <a:p>
+            <a:r>
+              <a:t>4. Показать ряд казахских букв под полем.</a:t>
             </a:r>
           </a:p>
           <a:p/>
           <a:p>
             <a:r>
-              <a:t>Если спросят про тесты: 21 тест именно на морфологии, всего в проекте 70.</a:t>
+              <a:t>Запасной вариант, если проектор не покажет телефон: слайды с картинками.</a:t>
             </a:r>
           </a:p>
         </p:txBody>
@@ -1335,140 +1190,109 @@
           <a:lstStyle/>
           <a:p>
             <a:r>
-              <a:t>Коротко: это не список уроков, а система, которая возвращает материал тогда,</a:t>
-            </a:r>
-          </a:p>
-          <a:p>
-            <a:r>
-              <a:t>когда он начинает забываться.</a:t>
+              <a:t>Финал. Не читать по бумажке — сказать своими словами.</a:t>
             </a:r>
           </a:p>
           <a:p/>
           <a:p>
             <a:r>
-              <a:t>Если останется время — можно показать «Таблицы окончаний»: подставить любое</a:t>
-            </a:r>
-          </a:p>
-          <a:p>
-            <a:r>
-              <a:t>слово прямо при жюри.</a:t>
-            </a:r>
-          </a:p>
-        </p:txBody>
-      </p:sp>
-      <p:sp>
-        <p:nvSpPr>
-          <p:cNvPr id="4" name="Slide Number Placeholder 3"/>
-          <p:cNvSpPr>
-            <a:spLocks noGrp="1"/>
-          </p:cNvSpPr>
-          <p:nvPr>
-            <p:ph type="sldNum" idx="5" sz="quarter"/>
-          </p:nvPr>
-        </p:nvSpPr>
-        <p:spPr/>
-      </p:sp>
-    </p:spTree>
-  </p:cSld>
-  <p:clrMapOvr>
-    <a:masterClrMapping/>
-  </p:clrMapOvr>
-</p:notes>
-</file>
-
-<file path=ppt/notesSlides/notesSlide9.xml><?xml version="1.0" encoding="utf-8"?>
-<p:notes xmlns:a="http://schemas.openxmlformats.org/drawingml/2006/main" xmlns:p="http://schemas.openxmlformats.org/presentationml/2006/main" xmlns:r="http://schemas.openxmlformats.org/officeDocument/2006/relationships">
-  <p:cSld>
-    <p:spTree>
-      <p:nvGrpSpPr>
-        <p:cNvPr id="1" name=""/>
-        <p:cNvGrpSpPr/>
-        <p:nvPr/>
-      </p:nvGrpSpPr>
-      <p:grpSpPr>
-        <a:xfrm>
-          <a:off x="0" y="0"/>
-          <a:ext cx="0" cy="0"/>
-          <a:chOff x="0" y="0"/>
-          <a:chExt cx="0" cy="0"/>
-        </a:xfrm>
-      </p:grpSpPr>
-      <p:sp>
-        <p:nvSpPr>
-          <p:cNvPr id="2" name="Slide Image Placeholder 1"/>
-          <p:cNvSpPr>
-            <a:spLocks noGrp="1"/>
-          </p:cNvSpPr>
-          <p:nvPr>
-            <p:ph type="sldImg" idx="2"/>
-          </p:nvPr>
-        </p:nvSpPr>
-        <p:spPr/>
-      </p:sp>
-      <p:sp>
-        <p:nvSpPr>
-          <p:cNvPr id="3" name="Notes Placeholder 2"/>
-          <p:cNvSpPr>
-            <a:spLocks noGrp="1"/>
-          </p:cNvSpPr>
-          <p:nvPr>
-            <p:ph type="body" idx="3" sz="quarter"/>
-          </p:nvPr>
-        </p:nvSpPr>
-        <p:spPr/>
-        <p:txBody>
-          <a:bodyPr/>
-          <a:lstStyle/>
-          <a:p>
-            <a:r>
-              <a:t>Живую демонстрацию готовить заранее: открыть приложение до выступления,</a:t>
-            </a:r>
-          </a:p>
-          <a:p>
-            <a:r>
-              <a:t>выбрать короткий урок, проверить, что телефон заряжен.</a:t>
+              <a:t>Главная мысль на прощание: казахский не сложнее других языков. Ученику</a:t>
+            </a:r>
+          </a:p>
+          <a:p>
+            <a:r>
+              <a:t>мешало то, что он не мог нажать нужную букву.</a:t>
             </a:r>
           </a:p>
           <a:p/>
           <a:p>
             <a:r>
-              <a:t>Что показать за минуту:</a:t>
-            </a:r>
-          </a:p>
-          <a:p>
-            <a:r>
-              <a:t>1. Дорожку уроков — видно, где я сейчас.</a:t>
-            </a:r>
-          </a:p>
-          <a:p>
-            <a:r>
-              <a:t>2. Открыть урок, дойти до задания.</a:t>
-            </a:r>
-          </a:p>
-          <a:p>
-            <a:r>
-              <a:t>3. Набрать ответ РУССКИМИ буквами — например «аке» вместо «әке».</a:t>
-            </a:r>
-          </a:p>
-          <a:p>
-            <a:r>
-              <a:t>   Приложение ответит «Грамматика верна» и покажет правильное написание.</a:t>
-            </a:r>
-          </a:p>
-          <a:p>
-            <a:r>
-              <a:t>   Это и есть главное.</a:t>
-            </a:r>
-          </a:p>
-          <a:p>
-            <a:r>
-              <a:t>4. Показать ряд казахских букв под полем.</a:t>
+              <a:t>ЧАСТЫЕ ВОПРОСЫ ЖЮРИ</a:t>
             </a:r>
           </a:p>
           <a:p/>
           <a:p>
             <a:r>
-              <a:t>Запасной вариант, если проектор не покажет телефон: слайды с картинками.</a:t>
+              <a:t>1. «Что здесь сделал ты, а что нейросеть?»</a:t>
+            </a:r>
+          </a:p>
+          <a:p>
+            <a:r>
+              <a:t>   Код помогала писать нейросеть. Я поставил вопрос, измерил, нашёл причины</a:t>
+            </a:r>
+          </a:p>
+          <a:p>
+            <a:r>
+              <a:t>   и проверил результат. Первая версия писалась без такой проверки — потому</a:t>
+            </a:r>
+          </a:p>
+          <a:p>
+            <a:r>
+              <a:t>   в ней половина задуманного и не работала.</a:t>
+            </a:r>
+          </a:p>
+          <a:p/>
+          <a:p>
+            <a:r>
+              <a:t>2. «Чем это отличается от прошлогодней работы?»</a:t>
+            </a:r>
+          </a:p>
+          <a:p>
+            <a:r>
+              <a:t>   Тогда я показывал замысел, и он победил. Сейчас показываю проверку этого</a:t>
+            </a:r>
+          </a:p>
+          <a:p>
+            <a:r>
+              <a:t>   замысла на данных и то, что из неё вышло.</a:t>
+            </a:r>
+          </a:p>
+          <a:p/>
+          <a:p>
+            <a:r>
+              <a:t>3. «Результаты апробации есть?»</a:t>
+            </a:r>
+          </a:p>
+          <a:p>
+            <a:r>
+              <a:t>   Нет. Эксперимент запланирован, сбор данных встроен в приложение,</a:t>
+            </a:r>
+          </a:p>
+          <a:p>
+            <a:r>
+              <a:t>   данных пока нет. Придумывать проценты я не стал.</a:t>
+            </a:r>
+          </a:p>
+          <a:p/>
+          <a:p>
+            <a:r>
+              <a:t>4. «Уроки писал носитель языка?»</a:t>
+            </a:r>
+          </a:p>
+          <a:p>
+            <a:r>
+              <a:t>   Нет, и это касается всего текста. Носитель языка не видел ни одной строки,</a:t>
+            </a:r>
+          </a:p>
+          <a:p>
+            <a:r>
+              <a:t>   поэтому весь казахский текст — 168 тысяч знаков — выгружен учителю</a:t>
+            </a:r>
+          </a:p>
+          <a:p>
+            <a:r>
+              <a:t>   на проверку.</a:t>
+            </a:r>
+          </a:p>
+          <a:p/>
+          <a:p>
+            <a:r>
+              <a:t>5. «Приложение платное?»</a:t>
+            </a:r>
+          </a:p>
+          <a:p>
+            <a:r>
+              <a:t>   Нет. Открывается по ссылке, работает без интернета, ставится на телефон.</a:t>
             </a:r>
           </a:p>
         </p:txBody>
@@ -9018,7 +8842,7 @@
                 <a:cs typeface="GQ Text Bold"/>
                 <a:ea typeface="GQ Text Bold"/>
               </a:rPr>
-              <a:t>86%</a:t>
+              <a:t>3</a:t>
             </a:r>
           </a:p>
         </p:txBody>
@@ -9059,7 +8883,7 @@
                 <a:cs typeface="IBM Plex Mono Medium"/>
                 <a:ea typeface="IBM Plex Mono Medium"/>
               </a:rPr>
-              <a:t>ЖАУАПТА ЕРЕКШЕ ӘРІП БАР</a:t>
+              <a:t>СЫНЫП БОЙЫНША ДЕҢГЕЙ</a:t>
             </a:r>
           </a:p>
         </p:txBody>
@@ -9101,851 +8925,6 @@
                 <a:ea typeface="IBM Plex Mono Medium"/>
               </a:rPr>
               <a:t>МАЛЫШКО МАКАР ЕВГЕНЬЕВИЧ · 6 «Б» СЫНЫП · №35 МЕКТЕП</a:t>
-            </a:r>
-          </a:p>
-        </p:txBody>
-      </p:sp>
-    </p:spTree>
-  </p:cSld>
-  <p:clrMapOvr>
-    <a:masterClrMapping/>
-  </p:clrMapOvr>
-</p:sld>
-</file>
-
-<file path=ppt/slides/slide10.xml><?xml version="1.0" encoding="utf-8"?>
-<p:sld xmlns:a="http://schemas.openxmlformats.org/drawingml/2006/main" xmlns:p="http://schemas.openxmlformats.org/presentationml/2006/main" xmlns:r="http://schemas.openxmlformats.org/officeDocument/2006/relationships">
-  <p:cSld>
-    <p:spTree>
-      <p:nvGrpSpPr>
-        <p:cNvPr id="1" name=""/>
-        <p:cNvGrpSpPr/>
-        <p:nvPr/>
-      </p:nvGrpSpPr>
-      <p:grpSpPr/>
-      <p:sp>
-        <p:nvSpPr>
-          <p:cNvPr id="2" name="Rectangle 1"/>
-          <p:cNvSpPr/>
-          <p:nvPr/>
-        </p:nvSpPr>
-        <p:spPr>
-          <a:xfrm>
-            <a:off x="0" y="0"/>
-            <a:ext cx="12191695" cy="6858000"/>
-          </a:xfrm>
-          <a:prstGeom prst="rect">
-            <a:avLst/>
-          </a:prstGeom>
-          <a:solidFill>
-            <a:srgbClr val="1B222B"/>
-          </a:solidFill>
-          <a:ln>
-            <a:noFill/>
-          </a:ln>
-          <a:effectLst/>
-        </p:spPr>
-        <p:txBody>
-          <a:bodyPr rtlCol="0" anchor="ctr" wrap="none"/>
-          <a:lstStyle/>
-          <a:p>
-            <a:pPr algn="ctr"/>
-          </a:p>
-        </p:txBody>
-      </p:sp>
-      <p:sp>
-        <p:nvSpPr>
-          <p:cNvPr id="19" name="Rectangle 18"/>
-          <p:cNvSpPr/>
-          <p:nvPr/>
-        </p:nvSpPr>
-        <p:spPr>
-          <a:xfrm>
-            <a:off x="7104202" y="1960626"/>
-            <a:ext cx="4337684" cy="2260599"/>
-          </a:xfrm>
-          <a:prstGeom prst="rect">
-            <a:avLst/>
-          </a:prstGeom>
-          <a:solidFill>
-            <a:srgbClr val="11161E"/>
-          </a:solidFill>
-          <a:ln w="9525">
-            <a:solidFill>
-              <a:srgbClr val="3B434D"/>
-            </a:solidFill>
-          </a:ln>
-          <a:effectLst/>
-        </p:spPr>
-        <p:txBody>
-          <a:bodyPr rtlCol="0" anchor="ctr" wrap="none"/>
-          <a:lstStyle/>
-          <a:p>
-            <a:pPr algn="ctr"/>
-          </a:p>
-        </p:txBody>
-      </p:sp>
-      <p:sp>
-        <p:nvSpPr>
-          <p:cNvPr id="9" name="Rectangle 8"/>
-          <p:cNvSpPr/>
-          <p:nvPr/>
-        </p:nvSpPr>
-        <p:spPr>
-          <a:xfrm>
-            <a:off x="749808" y="1960626"/>
-            <a:ext cx="6153226" cy="2440432"/>
-          </a:xfrm>
-          <a:prstGeom prst="rect">
-            <a:avLst/>
-          </a:prstGeom>
-          <a:solidFill>
-            <a:srgbClr val="0064B9"/>
-          </a:solidFill>
-          <a:ln>
-            <a:noFill/>
-          </a:ln>
-          <a:effectLst/>
-        </p:spPr>
-        <p:txBody>
-          <a:bodyPr rtlCol="0" anchor="ctr" wrap="none"/>
-          <a:lstStyle/>
-          <a:p>
-            <a:pPr algn="ctr"/>
-          </a:p>
-        </p:txBody>
-      </p:sp>
-      <p:sp>
-        <p:nvSpPr>
-          <p:cNvPr id="3" name="Rectangle 2"/>
-          <p:cNvSpPr/>
-          <p:nvPr/>
-        </p:nvSpPr>
-        <p:spPr>
-          <a:xfrm>
-            <a:off x="749808" y="475488"/>
-            <a:ext cx="10692079" cy="7315"/>
-          </a:xfrm>
-          <a:prstGeom prst="rect">
-            <a:avLst/>
-          </a:prstGeom>
-          <a:solidFill>
-            <a:srgbClr val="3B434D"/>
-          </a:solidFill>
-          <a:ln>
-            <a:noFill/>
-          </a:ln>
-          <a:effectLst/>
-        </p:spPr>
-        <p:txBody>
-          <a:bodyPr rtlCol="0" anchor="ctr" wrap="none"/>
-          <a:lstStyle/>
-          <a:p>
-            <a:pPr algn="ctr"/>
-          </a:p>
-        </p:txBody>
-      </p:sp>
-      <p:sp>
-        <p:nvSpPr>
-          <p:cNvPr id="4" name="TextBox 3"/>
-          <p:cNvSpPr txBox="1"/>
-          <p:nvPr/>
-        </p:nvSpPr>
-        <p:spPr>
-          <a:xfrm>
-            <a:off x="749808" y="559308"/>
-            <a:ext cx="7484455" cy="189357"/>
-          </a:xfrm>
-          <a:prstGeom prst="rect">
-            <a:avLst/>
-          </a:prstGeom>
-          <a:noFill/>
-        </p:spPr>
-        <p:txBody>
-          <a:bodyPr wrap="none" lIns="0" rIns="0" tIns="0" bIns="0" anchor="t">
-            <a:spAutoFit/>
-          </a:bodyPr>
-          <a:lstStyle/>
-          <a:p>
-            <a:pPr algn="l">
-              <a:lnSpc>
-                <a:spcPts val="1050"/>
-              </a:lnSpc>
-            </a:pPr>
-            <a:r>
-              <a:rPr sz="850" spc="136">
-                <a:solidFill>
-                  <a:srgbClr val="59AAF8"/>
-                </a:solidFill>
-                <a:latin typeface="IBM Plex Mono SemiBold"/>
-                <a:cs typeface="IBM Plex Mono SemiBold"/>
-                <a:ea typeface="IBM Plex Mono SemiBold"/>
-              </a:rPr>
-              <a:t>ҚОРЫТЫНДЫ</a:t>
-            </a:r>
-          </a:p>
-        </p:txBody>
-      </p:sp>
-      <p:sp>
-        <p:nvSpPr>
-          <p:cNvPr id="5" name="TextBox 4"/>
-          <p:cNvSpPr txBox="1"/>
-          <p:nvPr/>
-        </p:nvSpPr>
-        <p:spPr>
-          <a:xfrm>
-            <a:off x="10914329" y="559308"/>
-            <a:ext cx="618998" cy="189357"/>
-          </a:xfrm>
-          <a:prstGeom prst="rect">
-            <a:avLst/>
-          </a:prstGeom>
-          <a:noFill/>
-        </p:spPr>
-        <p:txBody>
-          <a:bodyPr wrap="none" lIns="0" rIns="0" tIns="0" bIns="0" anchor="t">
-            <a:spAutoFit/>
-          </a:bodyPr>
-          <a:lstStyle/>
-          <a:p>
-            <a:pPr algn="l">
-              <a:lnSpc>
-                <a:spcPts val="1050"/>
-              </a:lnSpc>
-            </a:pPr>
-            <a:r>
-              <a:rPr sz="850" spc="85">
-                <a:solidFill>
-                  <a:srgbClr val="A6ADB6"/>
-                </a:solidFill>
-                <a:latin typeface="IBM Plex Mono Medium"/>
-                <a:cs typeface="IBM Plex Mono Medium"/>
-                <a:ea typeface="IBM Plex Mono Medium"/>
-              </a:rPr>
-              <a:t>10 / 10</a:t>
-            </a:r>
-          </a:p>
-        </p:txBody>
-      </p:sp>
-      <p:sp>
-        <p:nvSpPr>
-          <p:cNvPr id="6" name="TextBox 5"/>
-          <p:cNvSpPr txBox="1"/>
-          <p:nvPr/>
-        </p:nvSpPr>
-        <p:spPr>
-          <a:xfrm>
-            <a:off x="749808" y="786505"/>
-            <a:ext cx="10692079" cy="810447"/>
-          </a:xfrm>
-          <a:prstGeom prst="rect">
-            <a:avLst/>
-          </a:prstGeom>
-          <a:noFill/>
-        </p:spPr>
-        <p:txBody>
-          <a:bodyPr wrap="none" lIns="0" rIns="0" tIns="0" bIns="0" anchor="t">
-            <a:spAutoFit/>
-          </a:bodyPr>
-          <a:lstStyle/>
-          <a:p>
-            <a:pPr algn="l">
-              <a:lnSpc>
-                <a:spcPts val="4494"/>
-              </a:lnSpc>
-            </a:pPr>
-            <a:r>
-              <a:rPr sz="4200" spc="-92">
-                <a:solidFill>
-                  <a:srgbClr val="EEEBE5"/>
-                </a:solidFill>
-                <a:latin typeface="GQ Text Bold"/>
-                <a:cs typeface="GQ Text Bold"/>
-                <a:ea typeface="GQ Text Bold"/>
-              </a:rPr>
-              <a:t>Не шықты және әрі қарай не істеу керек</a:t>
-            </a:r>
-          </a:p>
-        </p:txBody>
-      </p:sp>
-      <p:sp>
-        <p:nvSpPr>
-          <p:cNvPr id="7" name="TextBox 6"/>
-          <p:cNvSpPr txBox="1"/>
-          <p:nvPr/>
-        </p:nvSpPr>
-        <p:spPr>
-          <a:xfrm>
-            <a:off x="1024127" y="2212594"/>
-            <a:ext cx="5604586" cy="198374"/>
-          </a:xfrm>
-          <a:prstGeom prst="rect">
-            <a:avLst/>
-          </a:prstGeom>
-          <a:noFill/>
-        </p:spPr>
-        <p:txBody>
-          <a:bodyPr wrap="none" lIns="0" rIns="0" tIns="0" bIns="0" anchor="t">
-            <a:spAutoFit/>
-          </a:bodyPr>
-          <a:lstStyle/>
-          <a:p>
-            <a:pPr algn="l">
-              <a:lnSpc>
-                <a:spcPts val="1100"/>
-              </a:lnSpc>
-            </a:pPr>
-            <a:r>
-              <a:rPr sz="850" spc="136">
-                <a:solidFill>
-                  <a:srgbClr val="59AAF8"/>
-                </a:solidFill>
-                <a:latin typeface="IBM Plex Mono SemiBold"/>
-                <a:cs typeface="IBM Plex Mono SemiBold"/>
-                <a:ea typeface="IBM Plex Mono SemiBold"/>
-              </a:rPr>
-              <a:t>ҚОРЫТЫНДЫ</a:t>
-            </a:r>
-          </a:p>
-        </p:txBody>
-      </p:sp>
-      <p:sp>
-        <p:nvSpPr>
-          <p:cNvPr id="8" name="TextBox 7"/>
-          <p:cNvSpPr txBox="1"/>
-          <p:nvPr/>
-        </p:nvSpPr>
-        <p:spPr>
-          <a:xfrm>
-            <a:off x="1024127" y="2488438"/>
-            <a:ext cx="5604586" cy="1720850"/>
-          </a:xfrm>
-          <a:prstGeom prst="rect">
-            <a:avLst/>
-          </a:prstGeom>
-          <a:noFill/>
-        </p:spPr>
-        <p:txBody>
-          <a:bodyPr wrap="none" lIns="0" rIns="0" tIns="0" bIns="0" anchor="t">
-            <a:spAutoFit/>
-          </a:bodyPr>
-          <a:lstStyle/>
-          <a:p>
-            <a:pPr algn="l">
-              <a:lnSpc>
-                <a:spcPts val="2500"/>
-              </a:lnSpc>
-            </a:pPr>
-            <a:r>
-              <a:rPr sz="1900" spc="-34">
-                <a:solidFill>
-                  <a:srgbClr val="EEEBE5"/>
-                </a:solidFill>
-                <a:latin typeface="GQ Text Bold"/>
-                <a:cs typeface="GQ Text Bold"/>
-                <a:ea typeface="GQ Text Bold"/>
-              </a:rPr>
-              <a:t>Оқушыларға қазақ тілінің қиындығы емес,</a:t>
-            </a:r>
-          </a:p>
-          <a:p>
-            <a:pPr algn="l">
-              <a:lnSpc>
-                <a:spcPts val="2500"/>
-              </a:lnSpc>
-            </a:pPr>
-            <a:r>
-              <a:rPr sz="1900" spc="-34">
-                <a:solidFill>
-                  <a:srgbClr val="EEEBE5"/>
-                </a:solidFill>
-                <a:latin typeface="GQ Text Bold"/>
-                <a:cs typeface="GQ Text Bold"/>
-                <a:ea typeface="GQ Text Bold"/>
-              </a:rPr>
-              <a:t>техникалық бөгеттер кедергі болды: дұрыс</a:t>
-            </a:r>
-          </a:p>
-          <a:p>
-            <a:pPr algn="l">
-              <a:lnSpc>
-                <a:spcPts val="2500"/>
-              </a:lnSpc>
-            </a:pPr>
-            <a:r>
-              <a:rPr sz="1900" spc="-34">
-                <a:solidFill>
-                  <a:srgbClr val="EEEBE5"/>
-                </a:solidFill>
-                <a:latin typeface="GQ Text Bold"/>
-                <a:cs typeface="GQ Text Bold"/>
-                <a:ea typeface="GQ Text Bold"/>
-              </a:rPr>
-              <a:t>жауапты теру мүмкін емес еді. Оларды алып</a:t>
-            </a:r>
-          </a:p>
-          <a:p>
-            <a:pPr algn="l">
-              <a:lnSpc>
-                <a:spcPts val="2500"/>
-              </a:lnSpc>
-            </a:pPr>
-            <a:r>
-              <a:rPr sz="1900" spc="-34">
-                <a:solidFill>
-                  <a:srgbClr val="EEEBE5"/>
-                </a:solidFill>
-                <a:latin typeface="GQ Text Bold"/>
-                <a:cs typeface="GQ Text Bold"/>
-                <a:ea typeface="GQ Text Bold"/>
-              </a:rPr>
-              <a:t>тастауға болды, әрі бірде-бірі тілдің өзін</a:t>
-            </a:r>
-          </a:p>
-          <a:p>
-            <a:pPr algn="l">
-              <a:lnSpc>
-                <a:spcPts val="2500"/>
-              </a:lnSpc>
-            </a:pPr>
-            <a:r>
-              <a:rPr sz="1900" spc="-34">
-                <a:solidFill>
-                  <a:srgbClr val="EEEBE5"/>
-                </a:solidFill>
-                <a:latin typeface="GQ Text Bold"/>
-                <a:cs typeface="GQ Text Bold"/>
-                <a:ea typeface="GQ Text Bold"/>
-              </a:rPr>
-              <a:t>жеңілдетуді талап етпеді.</a:t>
-            </a:r>
-          </a:p>
-        </p:txBody>
-      </p:sp>
-      <p:sp>
-        <p:nvSpPr>
-          <p:cNvPr id="10" name="TextBox 9"/>
-          <p:cNvSpPr txBox="1"/>
-          <p:nvPr/>
-        </p:nvSpPr>
-        <p:spPr>
-          <a:xfrm>
-            <a:off x="7378522" y="2212594"/>
-            <a:ext cx="3789045" cy="198374"/>
-          </a:xfrm>
-          <a:prstGeom prst="rect">
-            <a:avLst/>
-          </a:prstGeom>
-          <a:noFill/>
-        </p:spPr>
-        <p:txBody>
-          <a:bodyPr wrap="none" lIns="0" rIns="0" tIns="0" bIns="0" anchor="t">
-            <a:spAutoFit/>
-          </a:bodyPr>
-          <a:lstStyle/>
-          <a:p>
-            <a:pPr algn="l">
-              <a:lnSpc>
-                <a:spcPts val="1100"/>
-              </a:lnSpc>
-            </a:pPr>
-            <a:r>
-              <a:rPr sz="850" spc="136">
-                <a:solidFill>
-                  <a:srgbClr val="59AAF8"/>
-                </a:solidFill>
-                <a:latin typeface="IBM Plex Mono SemiBold"/>
-                <a:cs typeface="IBM Plex Mono SemiBold"/>
-                <a:ea typeface="IBM Plex Mono SemiBold"/>
-              </a:rPr>
-              <a:t>ӘРІ ҚАРАЙ</a:t>
-            </a:r>
-          </a:p>
-        </p:txBody>
-      </p:sp>
-      <p:sp>
-        <p:nvSpPr>
-          <p:cNvPr id="11" name="TextBox 10"/>
-          <p:cNvSpPr txBox="1"/>
-          <p:nvPr/>
-        </p:nvSpPr>
-        <p:spPr>
-          <a:xfrm>
-            <a:off x="7378522" y="2526233"/>
-            <a:ext cx="210566" cy="277723"/>
-          </a:xfrm>
-          <a:prstGeom prst="rect">
-            <a:avLst/>
-          </a:prstGeom>
-          <a:noFill/>
-        </p:spPr>
-        <p:txBody>
-          <a:bodyPr wrap="none" lIns="0" rIns="0" tIns="0" bIns="0" anchor="t">
-            <a:spAutoFit/>
-          </a:bodyPr>
-          <a:lstStyle/>
-          <a:p>
-            <a:pPr algn="l">
-              <a:lnSpc>
-                <a:spcPts val="1540"/>
-              </a:lnSpc>
-            </a:pPr>
-            <a:r>
-              <a:rPr sz="1100">
-                <a:solidFill>
-                  <a:srgbClr val="59AAF8"/>
-                </a:solidFill>
-                <a:latin typeface="IBM Plex Mono Medium"/>
-                <a:cs typeface="IBM Plex Mono Medium"/>
-                <a:ea typeface="IBM Plex Mono Medium"/>
-              </a:rPr>
-              <a:t>—</a:t>
-            </a:r>
-          </a:p>
-        </p:txBody>
-      </p:sp>
-      <p:sp>
-        <p:nvSpPr>
-          <p:cNvPr id="12" name="TextBox 11"/>
-          <p:cNvSpPr txBox="1"/>
-          <p:nvPr/>
-        </p:nvSpPr>
-        <p:spPr>
-          <a:xfrm>
-            <a:off x="7589088" y="2526233"/>
-            <a:ext cx="3578479" cy="277723"/>
-          </a:xfrm>
-          <a:prstGeom prst="rect">
-            <a:avLst/>
-          </a:prstGeom>
-          <a:noFill/>
-        </p:spPr>
-        <p:txBody>
-          <a:bodyPr wrap="none" lIns="0" rIns="0" tIns="0" bIns="0" anchor="t">
-            <a:spAutoFit/>
-          </a:bodyPr>
-          <a:lstStyle/>
-          <a:p>
-            <a:pPr algn="l">
-              <a:lnSpc>
-                <a:spcPts val="1540"/>
-              </a:lnSpc>
-            </a:pPr>
-            <a:r>
-              <a:rPr sz="1100">
-                <a:solidFill>
-                  <a:srgbClr val="EEEBE5"/>
-                </a:solidFill>
-                <a:latin typeface="GQ Text"/>
-                <a:cs typeface="GQ Text"/>
-                <a:ea typeface="GQ Text"/>
-              </a:rPr>
-              <a:t>Бүкіл қазақ мәтінін мұғалімнің тексеруі</a:t>
-            </a:r>
-          </a:p>
-        </p:txBody>
-      </p:sp>
-      <p:sp>
-        <p:nvSpPr>
-          <p:cNvPr id="13" name="TextBox 12"/>
-          <p:cNvSpPr txBox="1"/>
-          <p:nvPr/>
-        </p:nvSpPr>
-        <p:spPr>
-          <a:xfrm>
-            <a:off x="7378522" y="2858973"/>
-            <a:ext cx="210566" cy="277723"/>
-          </a:xfrm>
-          <a:prstGeom prst="rect">
-            <a:avLst/>
-          </a:prstGeom>
-          <a:noFill/>
-        </p:spPr>
-        <p:txBody>
-          <a:bodyPr wrap="none" lIns="0" rIns="0" tIns="0" bIns="0" anchor="t">
-            <a:spAutoFit/>
-          </a:bodyPr>
-          <a:lstStyle/>
-          <a:p>
-            <a:pPr algn="l">
-              <a:lnSpc>
-                <a:spcPts val="1540"/>
-              </a:lnSpc>
-            </a:pPr>
-            <a:r>
-              <a:rPr sz="1100">
-                <a:solidFill>
-                  <a:srgbClr val="59AAF8"/>
-                </a:solidFill>
-                <a:latin typeface="IBM Plex Mono Medium"/>
-                <a:cs typeface="IBM Plex Mono Medium"/>
-                <a:ea typeface="IBM Plex Mono Medium"/>
-              </a:rPr>
-              <a:t>—</a:t>
-            </a:r>
-          </a:p>
-        </p:txBody>
-      </p:sp>
-      <p:sp>
-        <p:nvSpPr>
-          <p:cNvPr id="14" name="TextBox 13"/>
-          <p:cNvSpPr txBox="1"/>
-          <p:nvPr/>
-        </p:nvSpPr>
-        <p:spPr>
-          <a:xfrm>
-            <a:off x="7589088" y="2858973"/>
-            <a:ext cx="3578479" cy="277723"/>
-          </a:xfrm>
-          <a:prstGeom prst="rect">
-            <a:avLst/>
-          </a:prstGeom>
-          <a:noFill/>
-        </p:spPr>
-        <p:txBody>
-          <a:bodyPr wrap="none" lIns="0" rIns="0" tIns="0" bIns="0" anchor="t">
-            <a:spAutoFit/>
-          </a:bodyPr>
-          <a:lstStyle/>
-          <a:p>
-            <a:pPr algn="l">
-              <a:lnSpc>
-                <a:spcPts val="1540"/>
-              </a:lnSpc>
-            </a:pPr>
-            <a:r>
-              <a:rPr sz="1100">
-                <a:solidFill>
-                  <a:srgbClr val="EEEBE5"/>
-                </a:solidFill>
-                <a:latin typeface="GQ Text"/>
-                <a:cs typeface="GQ Text"/>
-                <a:ea typeface="GQ Text"/>
-              </a:rPr>
-              <a:t>Сыныпта сынақтан өткізу және нақты сандар</a:t>
-            </a:r>
-          </a:p>
-        </p:txBody>
-      </p:sp>
-      <p:sp>
-        <p:nvSpPr>
-          <p:cNvPr id="15" name="TextBox 14"/>
-          <p:cNvSpPr txBox="1"/>
-          <p:nvPr/>
-        </p:nvSpPr>
-        <p:spPr>
-          <a:xfrm>
-            <a:off x="7378522" y="3191713"/>
-            <a:ext cx="210566" cy="277723"/>
-          </a:xfrm>
-          <a:prstGeom prst="rect">
-            <a:avLst/>
-          </a:prstGeom>
-          <a:noFill/>
-        </p:spPr>
-        <p:txBody>
-          <a:bodyPr wrap="none" lIns="0" rIns="0" tIns="0" bIns="0" anchor="t">
-            <a:spAutoFit/>
-          </a:bodyPr>
-          <a:lstStyle/>
-          <a:p>
-            <a:pPr algn="l">
-              <a:lnSpc>
-                <a:spcPts val="1540"/>
-              </a:lnSpc>
-            </a:pPr>
-            <a:r>
-              <a:rPr sz="1100">
-                <a:solidFill>
-                  <a:srgbClr val="59AAF8"/>
-                </a:solidFill>
-                <a:latin typeface="IBM Plex Mono Medium"/>
-                <a:cs typeface="IBM Plex Mono Medium"/>
-                <a:ea typeface="IBM Plex Mono Medium"/>
-              </a:rPr>
-              <a:t>—</a:t>
-            </a:r>
-          </a:p>
-        </p:txBody>
-      </p:sp>
-      <p:sp>
-        <p:nvSpPr>
-          <p:cNvPr id="16" name="TextBox 15"/>
-          <p:cNvSpPr txBox="1"/>
-          <p:nvPr/>
-        </p:nvSpPr>
-        <p:spPr>
-          <a:xfrm>
-            <a:off x="7589088" y="3191713"/>
-            <a:ext cx="3578479" cy="473303"/>
-          </a:xfrm>
-          <a:prstGeom prst="rect">
-            <a:avLst/>
-          </a:prstGeom>
-          <a:noFill/>
-        </p:spPr>
-        <p:txBody>
-          <a:bodyPr wrap="none" lIns="0" rIns="0" tIns="0" bIns="0" anchor="t">
-            <a:spAutoFit/>
-          </a:bodyPr>
-          <a:lstStyle/>
-          <a:p>
-            <a:pPr algn="l">
-              <a:lnSpc>
-                <a:spcPts val="1540"/>
-              </a:lnSpc>
-            </a:pPr>
-            <a:r>
-              <a:rPr sz="1100">
-                <a:solidFill>
-                  <a:srgbClr val="EEEBE5"/>
-                </a:solidFill>
-                <a:latin typeface="GQ Text"/>
-                <a:cs typeface="GQ Text"/>
-                <a:ea typeface="GQ Text"/>
-              </a:rPr>
-              <a:t>Дыбыстау: 589 сөз тіркесі, әрқайсысы өз</a:t>
-            </a:r>
-          </a:p>
-          <a:p>
-            <a:pPr algn="l">
-              <a:lnSpc>
-                <a:spcPts val="1540"/>
-              </a:lnSpc>
-            </a:pPr>
-            <a:r>
-              <a:rPr sz="1100">
-                <a:solidFill>
-                  <a:srgbClr val="EEEBE5"/>
-                </a:solidFill>
-                <a:latin typeface="GQ Text"/>
-                <a:cs typeface="GQ Text"/>
-                <a:ea typeface="GQ Text"/>
-              </a:rPr>
-              <a:t>дауысымен</a:t>
-            </a:r>
-          </a:p>
-        </p:txBody>
-      </p:sp>
-      <p:sp>
-        <p:nvSpPr>
-          <p:cNvPr id="17" name="TextBox 16"/>
-          <p:cNvSpPr txBox="1"/>
-          <p:nvPr/>
-        </p:nvSpPr>
-        <p:spPr>
-          <a:xfrm>
-            <a:off x="7378522" y="3720033"/>
-            <a:ext cx="210566" cy="277723"/>
-          </a:xfrm>
-          <a:prstGeom prst="rect">
-            <a:avLst/>
-          </a:prstGeom>
-          <a:noFill/>
-        </p:spPr>
-        <p:txBody>
-          <a:bodyPr wrap="none" lIns="0" rIns="0" tIns="0" bIns="0" anchor="t">
-            <a:spAutoFit/>
-          </a:bodyPr>
-          <a:lstStyle/>
-          <a:p>
-            <a:pPr algn="l">
-              <a:lnSpc>
-                <a:spcPts val="1540"/>
-              </a:lnSpc>
-            </a:pPr>
-            <a:r>
-              <a:rPr sz="1100">
-                <a:solidFill>
-                  <a:srgbClr val="59AAF8"/>
-                </a:solidFill>
-                <a:latin typeface="IBM Plex Mono Medium"/>
-                <a:cs typeface="IBM Plex Mono Medium"/>
-                <a:ea typeface="IBM Plex Mono Medium"/>
-              </a:rPr>
-              <a:t>—</a:t>
-            </a:r>
-          </a:p>
-        </p:txBody>
-      </p:sp>
-      <p:sp>
-        <p:nvSpPr>
-          <p:cNvPr id="18" name="TextBox 17"/>
-          <p:cNvSpPr txBox="1"/>
-          <p:nvPr/>
-        </p:nvSpPr>
-        <p:spPr>
-          <a:xfrm>
-            <a:off x="7589088" y="3720033"/>
-            <a:ext cx="3578479" cy="277723"/>
-          </a:xfrm>
-          <a:prstGeom prst="rect">
-            <a:avLst/>
-          </a:prstGeom>
-          <a:noFill/>
-        </p:spPr>
-        <p:txBody>
-          <a:bodyPr wrap="none" lIns="0" rIns="0" tIns="0" bIns="0" anchor="t">
-            <a:spAutoFit/>
-          </a:bodyPr>
-          <a:lstStyle/>
-          <a:p>
-            <a:pPr algn="l">
-              <a:lnSpc>
-                <a:spcPts val="1540"/>
-              </a:lnSpc>
-            </a:pPr>
-            <a:r>
-              <a:rPr sz="1100">
-                <a:solidFill>
-                  <a:srgbClr val="EEEBE5"/>
-                </a:solidFill>
-                <a:latin typeface="GQ Text"/>
-                <a:cs typeface="GQ Text"/>
-                <a:ea typeface="GQ Text"/>
-              </a:rPr>
-              <a:t>Ашық қолжетімділік: тегін және сілтеме арқылы</a:t>
-            </a:r>
-          </a:p>
-        </p:txBody>
-      </p:sp>
-      <p:sp>
-        <p:nvSpPr>
-          <p:cNvPr id="20" name="TextBox 19"/>
-          <p:cNvSpPr txBox="1"/>
-          <p:nvPr/>
-        </p:nvSpPr>
-        <p:spPr>
-          <a:xfrm>
-            <a:off x="749808" y="6323584"/>
-            <a:ext cx="10692079" cy="198374"/>
-          </a:xfrm>
-          <a:prstGeom prst="rect">
-            <a:avLst/>
-          </a:prstGeom>
-          <a:noFill/>
-        </p:spPr>
-        <p:txBody>
-          <a:bodyPr wrap="none" lIns="0" rIns="0" tIns="0" bIns="0" anchor="t">
-            <a:spAutoFit/>
-          </a:bodyPr>
-          <a:lstStyle/>
-          <a:p>
-            <a:pPr algn="l">
-              <a:lnSpc>
-                <a:spcPts val="1100"/>
-              </a:lnSpc>
-            </a:pPr>
-            <a:r>
-              <a:rPr sz="850" spc="85">
-                <a:solidFill>
-                  <a:srgbClr val="A6ADB6"/>
-                </a:solidFill>
-                <a:latin typeface="IBM Plex Mono Medium"/>
-                <a:cs typeface="IBM Plex Mono Medium"/>
-                <a:ea typeface="IBM Plex Mono Medium"/>
-              </a:rPr>
-              <a:t>TILASHAR-KZ.VERCEL.APP  ·  МАЛЫШКО МАКАР ЕВГЕНЬЕВИЧ · 6 «Б» СЫНЫП · №35 МЕКТЕП</a:t>
             </a:r>
           </a:p>
         </p:txBody>
@@ -10105,7 +9084,7 @@
                 <a:cs typeface="IBM Plex Mono Medium"/>
                 <a:ea typeface="IBM Plex Mono Medium"/>
               </a:rPr>
-              <a:t>02 / 10</a:t>
+              <a:t>02 / 08</a:t>
             </a:r>
           </a:p>
         </p:txBody>
@@ -11852,7 +10831,7 @@
                 <a:cs typeface="IBM Plex Mono Medium"/>
                 <a:ea typeface="IBM Plex Mono Medium"/>
               </a:rPr>
-              <a:t>03 / 10</a:t>
+              <a:t>03 / 08</a:t>
             </a:r>
           </a:p>
         </p:txBody>
@@ -12497,7 +11476,7 @@
                 <a:cs typeface="IBM Plex Mono Medium"/>
                 <a:ea typeface="IBM Plex Mono Medium"/>
               </a:rPr>
-              <a:t>04 / 10</a:t>
+              <a:t>04 / 08</a:t>
             </a:r>
           </a:p>
         </p:txBody>
@@ -13530,7 +12509,7 @@
                 <a:cs typeface="IBM Plex Mono SemiBold"/>
                 <a:ea typeface="IBM Plex Mono SemiBold"/>
               </a:rPr>
-              <a:t>ЕРЕКШЕЛІГІ · 1</a:t>
+              <a:t>ЕРЕКШЕЛІГІ</a:t>
             </a:r>
           </a:p>
         </p:txBody>
@@ -13571,7 +12550,7 @@
                 <a:cs typeface="IBM Plex Mono Medium"/>
                 <a:ea typeface="IBM Plex Mono Medium"/>
               </a:rPr>
-              <a:t>05 / 10</a:t>
+              <a:t>05 / 08</a:t>
             </a:r>
           </a:p>
         </p:txBody>
@@ -13584,8 +12563,8 @@
         </p:nvSpPr>
         <p:spPr>
           <a:xfrm>
-            <a:off x="749808" y="782157"/>
-            <a:ext cx="10692079" cy="849040"/>
+            <a:off x="749808" y="786505"/>
+            <a:ext cx="10692079" cy="810447"/>
           </a:xfrm>
           <a:prstGeom prst="rect">
             <a:avLst/>
@@ -13600,11 +12579,11 @@
           <a:p>
             <a:pPr algn="l">
               <a:lnSpc>
-                <a:spcPts val="4708"/>
-              </a:lnSpc>
-            </a:pPr>
-            <a:r>
-              <a:rPr sz="4400" spc="-97">
+                <a:spcPts val="4494"/>
+              </a:lnSpc>
+            </a:pPr>
+            <a:r>
+              <a:rPr sz="4200" spc="-92">
                 <a:solidFill>
                   <a:srgbClr val="EEEBE5"/>
                 </a:solidFill>
@@ -13612,7 +12591,7 @@
                 <a:cs typeface="GQ Text Bold"/>
                 <a:ea typeface="GQ Text Bold"/>
               </a:rPr>
-              <a:t>Пернетақтада жоқ тоғыз әріп</a:t>
+              <a:t>Кәдімгі жаттықтырғышта жоқ төрт нәрсе</a:t>
             </a:r>
           </a:p>
         </p:txBody>
@@ -13625,8 +12604,8 @@
         </p:nvSpPr>
         <p:spPr>
           <a:xfrm>
-            <a:off x="749808" y="1602821"/>
-            <a:ext cx="9195188" cy="567349"/>
+            <a:off x="749808" y="1575643"/>
+            <a:ext cx="8767504" cy="332907"/>
           </a:xfrm>
           <a:prstGeom prst="rect">
             <a:avLst/>
@@ -13653,39 +12632,301 @@
                 <a:cs typeface="GQ Text"/>
                 <a:ea typeface="GQ Text"/>
               </a:rPr>
-              <a:t>Қазақ тілінде ә ғ қ ң ө ұ ү һ і әріптері бар. Орыс пернетақтасында оларды алатын жер жоқ. Кәдімгі</a:t>
-            </a:r>
-          </a:p>
-          <a:p>
-            <a:pPr algn="l">
-              <a:lnSpc>
-                <a:spcPts val="1846"/>
-              </a:lnSpc>
-            </a:pPr>
-            <a:r>
-              <a:rPr sz="1300">
-                <a:solidFill>
-                  <a:srgbClr val="A6ADB6"/>
+              <a:t>Әрқайсысы әдемілік үшін емес, онсыз оқушы шұғылдануды тоқтатқандықтан пайда болды.</a:t>
+            </a:r>
+          </a:p>
+        </p:txBody>
+      </p:sp>
+      <p:sp>
+        <p:nvSpPr>
+          <p:cNvPr id="8" name="Rectangle 7"/>
+          <p:cNvSpPr/>
+          <p:nvPr/>
+        </p:nvSpPr>
+        <p:spPr>
+          <a:xfrm>
+            <a:off x="749808" y="2323084"/>
+            <a:ext cx="2522143" cy="2343658"/>
+          </a:xfrm>
+          <a:prstGeom prst="rect">
+            <a:avLst/>
+          </a:prstGeom>
+          <a:solidFill>
+            <a:srgbClr val="11161E"/>
+          </a:solidFill>
+          <a:ln w="9525">
+            <a:solidFill>
+              <a:srgbClr val="3B434D"/>
+            </a:solidFill>
+          </a:ln>
+          <a:effectLst/>
+        </p:spPr>
+        <p:txBody>
+          <a:bodyPr rtlCol="0" anchor="ctr" wrap="none"/>
+          <a:lstStyle/>
+          <a:p>
+            <a:pPr algn="ctr"/>
+          </a:p>
+        </p:txBody>
+      </p:sp>
+      <p:sp>
+        <p:nvSpPr>
+          <p:cNvPr id="9" name="Rectangle 8"/>
+          <p:cNvSpPr/>
+          <p:nvPr/>
+        </p:nvSpPr>
+        <p:spPr>
+          <a:xfrm>
+            <a:off x="749808" y="2323084"/>
+            <a:ext cx="32004" cy="2343658"/>
+          </a:xfrm>
+          <a:prstGeom prst="rect">
+            <a:avLst/>
+          </a:prstGeom>
+          <a:solidFill>
+            <a:srgbClr val="0064B9"/>
+          </a:solidFill>
+          <a:ln>
+            <a:noFill/>
+          </a:ln>
+          <a:effectLst/>
+        </p:spPr>
+        <p:txBody>
+          <a:bodyPr rtlCol="0" anchor="ctr" wrap="none"/>
+          <a:lstStyle/>
+          <a:p>
+            <a:pPr algn="ctr"/>
+          </a:p>
+        </p:txBody>
+      </p:sp>
+      <p:sp>
+        <p:nvSpPr>
+          <p:cNvPr id="10" name="TextBox 9"/>
+          <p:cNvSpPr txBox="1"/>
+          <p:nvPr/>
+        </p:nvSpPr>
+        <p:spPr>
+          <a:xfrm>
+            <a:off x="1005840" y="2557780"/>
+            <a:ext cx="2010079" cy="189357"/>
+          </a:xfrm>
+          <a:prstGeom prst="rect">
+            <a:avLst/>
+          </a:prstGeom>
+          <a:noFill/>
+        </p:spPr>
+        <p:txBody>
+          <a:bodyPr wrap="none" lIns="0" rIns="0" tIns="0" bIns="0" anchor="t">
+            <a:spAutoFit/>
+          </a:bodyPr>
+          <a:lstStyle/>
+          <a:p>
+            <a:pPr algn="l">
+              <a:lnSpc>
+                <a:spcPts val="1050"/>
+              </a:lnSpc>
+            </a:pPr>
+            <a:r>
+              <a:rPr sz="850" spc="136">
+                <a:solidFill>
+                  <a:srgbClr val="59AAF8"/>
+                </a:solidFill>
+                <a:latin typeface="IBM Plex Mono SemiBold"/>
+                <a:cs typeface="IBM Plex Mono SemiBold"/>
+                <a:ea typeface="IBM Plex Mono SemiBold"/>
+              </a:rPr>
+              <a:t>1</a:t>
+            </a:r>
+          </a:p>
+        </p:txBody>
+      </p:sp>
+      <p:sp>
+        <p:nvSpPr>
+          <p:cNvPr id="11" name="TextBox 10"/>
+          <p:cNvSpPr txBox="1"/>
+          <p:nvPr/>
+        </p:nvSpPr>
+        <p:spPr>
+          <a:xfrm>
+            <a:off x="1005840" y="2796590"/>
+            <a:ext cx="2010079" cy="525551"/>
+          </a:xfrm>
+          <a:prstGeom prst="rect">
+            <a:avLst/>
+          </a:prstGeom>
+          <a:noFill/>
+        </p:spPr>
+        <p:txBody>
+          <a:bodyPr wrap="none" lIns="0" rIns="0" tIns="0" bIns="0" anchor="t">
+            <a:spAutoFit/>
+          </a:bodyPr>
+          <a:lstStyle/>
+          <a:p>
+            <a:pPr algn="l">
+              <a:lnSpc>
+                <a:spcPts val="1710"/>
+              </a:lnSpc>
+            </a:pPr>
+            <a:r>
+              <a:rPr sz="1500" spc="-22">
+                <a:solidFill>
+                  <a:srgbClr val="EEEBE5"/>
+                </a:solidFill>
+                <a:latin typeface="GQ Text Bold"/>
+                <a:cs typeface="GQ Text Bold"/>
+                <a:ea typeface="GQ Text Bold"/>
+              </a:rPr>
+              <a:t>Орыс әріптерін</a:t>
+            </a:r>
+          </a:p>
+          <a:p>
+            <a:pPr algn="l">
+              <a:lnSpc>
+                <a:spcPts val="1710"/>
+              </a:lnSpc>
+            </a:pPr>
+            <a:r>
+              <a:rPr sz="1500" spc="-22">
+                <a:solidFill>
+                  <a:srgbClr val="EEEBE5"/>
+                </a:solidFill>
+                <a:latin typeface="GQ Text Bold"/>
+                <a:cs typeface="GQ Text Bold"/>
+                <a:ea typeface="GQ Text Bold"/>
+              </a:rPr>
+              <a:t>қабылдайды</a:t>
+            </a:r>
+          </a:p>
+        </p:txBody>
+      </p:sp>
+      <p:sp>
+        <p:nvSpPr>
+          <p:cNvPr id="12" name="TextBox 11"/>
+          <p:cNvSpPr txBox="1"/>
+          <p:nvPr/>
+        </p:nvSpPr>
+        <p:spPr>
+          <a:xfrm>
+            <a:off x="1005840" y="3392678"/>
+            <a:ext cx="204216" cy="252475"/>
+          </a:xfrm>
+          <a:prstGeom prst="rect">
+            <a:avLst/>
+          </a:prstGeom>
+          <a:noFill/>
+        </p:spPr>
+        <p:txBody>
+          <a:bodyPr wrap="none" lIns="0" rIns="0" tIns="0" bIns="0" anchor="t">
+            <a:spAutoFit/>
+          </a:bodyPr>
+          <a:lstStyle/>
+          <a:p>
+            <a:pPr algn="l">
+              <a:lnSpc>
+                <a:spcPts val="1400"/>
+              </a:lnSpc>
+            </a:pPr>
+            <a:r>
+              <a:rPr sz="1000">
+                <a:solidFill>
+                  <a:srgbClr val="59AAF8"/>
+                </a:solidFill>
+                <a:latin typeface="IBM Plex Mono Medium"/>
+                <a:cs typeface="IBM Plex Mono Medium"/>
+                <a:ea typeface="IBM Plex Mono Medium"/>
+              </a:rPr>
+              <a:t>—</a:t>
+            </a:r>
+          </a:p>
+        </p:txBody>
+      </p:sp>
+      <p:sp>
+        <p:nvSpPr>
+          <p:cNvPr id="13" name="TextBox 12"/>
+          <p:cNvSpPr txBox="1"/>
+          <p:nvPr/>
+        </p:nvSpPr>
+        <p:spPr>
+          <a:xfrm>
+            <a:off x="1210056" y="3392678"/>
+            <a:ext cx="1805863" cy="608076"/>
+          </a:xfrm>
+          <a:prstGeom prst="rect">
+            <a:avLst/>
+          </a:prstGeom>
+          <a:noFill/>
+        </p:spPr>
+        <p:txBody>
+          <a:bodyPr wrap="none" lIns="0" rIns="0" tIns="0" bIns="0" anchor="t">
+            <a:spAutoFit/>
+          </a:bodyPr>
+          <a:lstStyle/>
+          <a:p>
+            <a:pPr algn="l">
+              <a:lnSpc>
+                <a:spcPts val="1400"/>
+              </a:lnSpc>
+            </a:pPr>
+            <a:r>
+              <a:rPr sz="1000">
+                <a:solidFill>
+                  <a:srgbClr val="EEEBE5"/>
                 </a:solidFill>
                 <a:latin typeface="GQ Text"/>
                 <a:cs typeface="GQ Text"/>
                 <a:ea typeface="GQ Text"/>
               </a:rPr>
-              <a:t>жаттықтырғыш жауапты әріпме-әріп салыстырады — сөйтіп оқушы дұрыс жауабы үшін «қате» алады.</a:t>
-            </a:r>
-          </a:p>
-        </p:txBody>
-      </p:sp>
-      <p:sp>
-        <p:nvSpPr>
-          <p:cNvPr id="8" name="TextBox 7"/>
+              <a:t>Қазақ тілінде орыс</a:t>
+            </a:r>
+          </a:p>
+          <a:p>
+            <a:pPr algn="l">
+              <a:lnSpc>
+                <a:spcPts val="1400"/>
+              </a:lnSpc>
+            </a:pPr>
+            <a:r>
+              <a:rPr sz="1000">
+                <a:solidFill>
+                  <a:srgbClr val="EEEBE5"/>
+                </a:solidFill>
+                <a:latin typeface="GQ Text"/>
+                <a:cs typeface="GQ Text"/>
+                <a:ea typeface="GQ Text"/>
+              </a:rPr>
+              <a:t>пернетақтасында жоқ тоғыз</a:t>
+            </a:r>
+          </a:p>
+          <a:p>
+            <a:pPr algn="l">
+              <a:lnSpc>
+                <a:spcPts val="1400"/>
+              </a:lnSpc>
+            </a:pPr>
+            <a:r>
+              <a:rPr sz="1000">
+                <a:solidFill>
+                  <a:srgbClr val="EEEBE5"/>
+                </a:solidFill>
+                <a:latin typeface="GQ Text"/>
+                <a:cs typeface="GQ Text"/>
+                <a:ea typeface="GQ Text"/>
+              </a:rPr>
+              <a:t>әріп бар</a:t>
+            </a:r>
+          </a:p>
+        </p:txBody>
+      </p:sp>
+      <p:sp>
+        <p:nvSpPr>
+          <p:cNvPr id="14" name="TextBox 13"/>
           <p:cNvSpPr txBox="1"/>
           <p:nvPr/>
         </p:nvSpPr>
         <p:spPr>
           <a:xfrm>
-            <a:off x="749808" y="2540000"/>
-            <a:ext cx="3381146" cy="883666"/>
+            <a:off x="1005840" y="4026662"/>
+            <a:ext cx="204216" cy="252475"/>
           </a:xfrm>
           <a:prstGeom prst="rect">
             <a:avLst/>
@@ -13700,33 +12941,254 @@
           <a:p>
             <a:pPr algn="l">
               <a:lnSpc>
-                <a:spcPts val="4900"/>
-              </a:lnSpc>
-            </a:pPr>
-            <a:r>
-              <a:rPr sz="5000" spc="-150">
+                <a:spcPts val="1400"/>
+              </a:lnSpc>
+            </a:pPr>
+            <a:r>
+              <a:rPr sz="1000">
                 <a:solidFill>
                   <a:srgbClr val="59AAF8"/>
+                </a:solidFill>
+                <a:latin typeface="IBM Plex Mono Medium"/>
+                <a:cs typeface="IBM Plex Mono Medium"/>
+                <a:ea typeface="IBM Plex Mono Medium"/>
+              </a:rPr>
+              <a:t>—</a:t>
+            </a:r>
+          </a:p>
+        </p:txBody>
+      </p:sp>
+      <p:sp>
+        <p:nvSpPr>
+          <p:cNvPr id="15" name="TextBox 14"/>
+          <p:cNvSpPr txBox="1"/>
+          <p:nvPr/>
+        </p:nvSpPr>
+        <p:spPr>
+          <a:xfrm>
+            <a:off x="1210056" y="4026662"/>
+            <a:ext cx="1805863" cy="430276"/>
+          </a:xfrm>
+          <a:prstGeom prst="rect">
+            <a:avLst/>
+          </a:prstGeom>
+          <a:noFill/>
+        </p:spPr>
+        <p:txBody>
+          <a:bodyPr wrap="none" lIns="0" rIns="0" tIns="0" bIns="0" anchor="t">
+            <a:spAutoFit/>
+          </a:bodyPr>
+          <a:lstStyle/>
+          <a:p>
+            <a:pPr algn="l">
+              <a:lnSpc>
+                <a:spcPts val="1400"/>
+              </a:lnSpc>
+            </a:pPr>
+            <a:r>
+              <a:rPr sz="1000">
+                <a:solidFill>
+                  <a:srgbClr val="EEEBE5"/>
+                </a:solidFill>
+                <a:latin typeface="GQ Text"/>
+                <a:cs typeface="GQ Text"/>
+                <a:ea typeface="GQ Text"/>
+              </a:rPr>
+              <a:t>Жауап есептеледі, дұрыс</a:t>
+            </a:r>
+          </a:p>
+          <a:p>
+            <a:pPr algn="l">
+              <a:lnSpc>
+                <a:spcPts val="1400"/>
+              </a:lnSpc>
+            </a:pPr>
+            <a:r>
+              <a:rPr sz="1000">
+                <a:solidFill>
+                  <a:srgbClr val="EEEBE5"/>
+                </a:solidFill>
+                <a:latin typeface="GQ Text"/>
+                <a:cs typeface="GQ Text"/>
+                <a:ea typeface="GQ Text"/>
+              </a:rPr>
+              <a:t>жазылуы көрсетіледі</a:t>
+            </a:r>
+          </a:p>
+        </p:txBody>
+      </p:sp>
+      <p:sp>
+        <p:nvSpPr>
+          <p:cNvPr id="16" name="Rectangle 15"/>
+          <p:cNvSpPr/>
+          <p:nvPr/>
+        </p:nvSpPr>
+        <p:spPr>
+          <a:xfrm>
+            <a:off x="3473119" y="2323084"/>
+            <a:ext cx="2522143" cy="2343658"/>
+          </a:xfrm>
+          <a:prstGeom prst="rect">
+            <a:avLst/>
+          </a:prstGeom>
+          <a:solidFill>
+            <a:srgbClr val="11161E"/>
+          </a:solidFill>
+          <a:ln w="9525">
+            <a:solidFill>
+              <a:srgbClr val="3B434D"/>
+            </a:solidFill>
+          </a:ln>
+          <a:effectLst/>
+        </p:spPr>
+        <p:txBody>
+          <a:bodyPr rtlCol="0" anchor="ctr" wrap="none"/>
+          <a:lstStyle/>
+          <a:p>
+            <a:pPr algn="ctr"/>
+          </a:p>
+        </p:txBody>
+      </p:sp>
+      <p:sp>
+        <p:nvSpPr>
+          <p:cNvPr id="17" name="Rectangle 16"/>
+          <p:cNvSpPr/>
+          <p:nvPr/>
+        </p:nvSpPr>
+        <p:spPr>
+          <a:xfrm>
+            <a:off x="3473119" y="2323084"/>
+            <a:ext cx="32004" cy="2343658"/>
+          </a:xfrm>
+          <a:prstGeom prst="rect">
+            <a:avLst/>
+          </a:prstGeom>
+          <a:solidFill>
+            <a:srgbClr val="0064B9"/>
+          </a:solidFill>
+          <a:ln>
+            <a:noFill/>
+          </a:ln>
+          <a:effectLst/>
+        </p:spPr>
+        <p:txBody>
+          <a:bodyPr rtlCol="0" anchor="ctr" wrap="none"/>
+          <a:lstStyle/>
+          <a:p>
+            <a:pPr algn="ctr"/>
+          </a:p>
+        </p:txBody>
+      </p:sp>
+      <p:sp>
+        <p:nvSpPr>
+          <p:cNvPr id="18" name="TextBox 17"/>
+          <p:cNvSpPr txBox="1"/>
+          <p:nvPr/>
+        </p:nvSpPr>
+        <p:spPr>
+          <a:xfrm>
+            <a:off x="3729151" y="2557780"/>
+            <a:ext cx="2010079" cy="189357"/>
+          </a:xfrm>
+          <a:prstGeom prst="rect">
+            <a:avLst/>
+          </a:prstGeom>
+          <a:noFill/>
+        </p:spPr>
+        <p:txBody>
+          <a:bodyPr wrap="none" lIns="0" rIns="0" tIns="0" bIns="0" anchor="t">
+            <a:spAutoFit/>
+          </a:bodyPr>
+          <a:lstStyle/>
+          <a:p>
+            <a:pPr algn="l">
+              <a:lnSpc>
+                <a:spcPts val="1050"/>
+              </a:lnSpc>
+            </a:pPr>
+            <a:r>
+              <a:rPr sz="850" spc="136">
+                <a:solidFill>
+                  <a:srgbClr val="59AAF8"/>
+                </a:solidFill>
+                <a:latin typeface="IBM Plex Mono SemiBold"/>
+                <a:cs typeface="IBM Plex Mono SemiBold"/>
+                <a:ea typeface="IBM Plex Mono SemiBold"/>
+              </a:rPr>
+              <a:t>2</a:t>
+            </a:r>
+          </a:p>
+        </p:txBody>
+      </p:sp>
+      <p:sp>
+        <p:nvSpPr>
+          <p:cNvPr id="19" name="TextBox 18"/>
+          <p:cNvSpPr txBox="1"/>
+          <p:nvPr/>
+        </p:nvSpPr>
+        <p:spPr>
+          <a:xfrm>
+            <a:off x="3729151" y="2796590"/>
+            <a:ext cx="2010079" cy="525551"/>
+          </a:xfrm>
+          <a:prstGeom prst="rect">
+            <a:avLst/>
+          </a:prstGeom>
+          <a:noFill/>
+        </p:spPr>
+        <p:txBody>
+          <a:bodyPr wrap="none" lIns="0" rIns="0" tIns="0" bIns="0" anchor="t">
+            <a:spAutoFit/>
+          </a:bodyPr>
+          <a:lstStyle/>
+          <a:p>
+            <a:pPr algn="l">
+              <a:lnSpc>
+                <a:spcPts val="1710"/>
+              </a:lnSpc>
+            </a:pPr>
+            <a:r>
+              <a:rPr sz="1500" spc="-22">
+                <a:solidFill>
+                  <a:srgbClr val="EEEBE5"/>
                 </a:solidFill>
                 <a:latin typeface="GQ Text Bold"/>
                 <a:cs typeface="GQ Text Bold"/>
                 <a:ea typeface="GQ Text Bold"/>
               </a:rPr>
-              <a:t>193</a:t>
-            </a:r>
-          </a:p>
-        </p:txBody>
-      </p:sp>
-      <p:sp>
-        <p:nvSpPr>
-          <p:cNvPr id="9" name="TextBox 8"/>
+              <a:t>Жалғауларды</a:t>
+            </a:r>
+          </a:p>
+          <a:p>
+            <a:pPr algn="l">
+              <a:lnSpc>
+                <a:spcPts val="1710"/>
+              </a:lnSpc>
+            </a:pPr>
+            <a:r>
+              <a:rPr sz="1500" spc="-22">
+                <a:solidFill>
+                  <a:srgbClr val="EEEBE5"/>
+                </a:solidFill>
+                <a:latin typeface="GQ Text Bold"/>
+                <a:cs typeface="GQ Text Bold"/>
+                <a:ea typeface="GQ Text Bold"/>
+              </a:rPr>
+              <a:t>ережемен есептейді</a:t>
+            </a:r>
+          </a:p>
+        </p:txBody>
+      </p:sp>
+      <p:sp>
+        <p:nvSpPr>
+          <p:cNvPr id="20" name="TextBox 19"/>
           <p:cNvSpPr txBox="1"/>
           <p:nvPr/>
         </p:nvSpPr>
         <p:spPr>
           <a:xfrm>
-            <a:off x="749808" y="3327400"/>
-            <a:ext cx="3381146" cy="229933"/>
+            <a:off x="3729151" y="3392678"/>
+            <a:ext cx="204216" cy="252475"/>
           </a:xfrm>
           <a:prstGeom prst="rect">
             <a:avLst/>
@@ -13741,33 +13203,33 @@
           <a:p>
             <a:pPr algn="l">
               <a:lnSpc>
-                <a:spcPts val="1275"/>
-              </a:lnSpc>
-            </a:pPr>
-            <a:r>
-              <a:rPr sz="850" spc="68">
-                <a:solidFill>
-                  <a:srgbClr val="A6ADB6"/>
+                <a:spcPts val="1400"/>
+              </a:lnSpc>
+            </a:pPr>
+            <a:r>
+              <a:rPr sz="1000">
+                <a:solidFill>
+                  <a:srgbClr val="59AAF8"/>
                 </a:solidFill>
                 <a:latin typeface="IBM Plex Mono Medium"/>
                 <a:cs typeface="IBM Plex Mono Medium"/>
                 <a:ea typeface="IBM Plex Mono Medium"/>
               </a:rPr>
-              <a:t>225 ЖАУАПТЫҢ</a:t>
-            </a:r>
-          </a:p>
-        </p:txBody>
-      </p:sp>
-      <p:sp>
-        <p:nvSpPr>
-          <p:cNvPr id="10" name="TextBox 9"/>
+              <a:t>—</a:t>
+            </a:r>
+          </a:p>
+        </p:txBody>
+      </p:sp>
+      <p:sp>
+        <p:nvSpPr>
+          <p:cNvPr id="21" name="TextBox 20"/>
           <p:cNvSpPr txBox="1"/>
           <p:nvPr/>
         </p:nvSpPr>
         <p:spPr>
           <a:xfrm>
-            <a:off x="749808" y="3579261"/>
-            <a:ext cx="3381146" cy="243278"/>
+            <a:off x="3933367" y="3392678"/>
+            <a:ext cx="1805863" cy="430276"/>
           </a:xfrm>
           <a:prstGeom prst="rect">
             <a:avLst/>
@@ -13782,33 +13244,51 @@
           <a:p>
             <a:pPr algn="l">
               <a:lnSpc>
-                <a:spcPts val="1349"/>
-              </a:lnSpc>
-            </a:pPr>
-            <a:r>
-              <a:rPr sz="950">
-                <a:solidFill>
-                  <a:srgbClr val="A6ADB6"/>
+                <a:spcPts val="1400"/>
+              </a:lnSpc>
+            </a:pPr>
+            <a:r>
+              <a:rPr sz="1000">
+                <a:solidFill>
+                  <a:srgbClr val="EEEBE5"/>
                 </a:solidFill>
                 <a:latin typeface="GQ Text"/>
                 <a:cs typeface="GQ Text"/>
                 <a:ea typeface="GQ Text"/>
               </a:rPr>
-              <a:t>кемінде бір осындай әрпі бар</a:t>
-            </a:r>
-          </a:p>
-        </p:txBody>
-      </p:sp>
-      <p:sp>
-        <p:nvSpPr>
-          <p:cNvPr id="11" name="TextBox 10"/>
+              <a:t>Кез келген өз сөзіңді қой —</a:t>
+            </a:r>
+          </a:p>
+          <a:p>
+            <a:pPr algn="l">
+              <a:lnSpc>
+                <a:spcPts val="1400"/>
+              </a:lnSpc>
+            </a:pPr>
+            <a:r>
+              <a:rPr sz="1000">
+                <a:solidFill>
+                  <a:srgbClr val="EEEBE5"/>
+                </a:solidFill>
+                <a:latin typeface="GQ Text"/>
+                <a:cs typeface="GQ Text"/>
+                <a:ea typeface="GQ Text"/>
+              </a:rPr>
+              <a:t>барлық формасын көресің</a:t>
+            </a:r>
+          </a:p>
+        </p:txBody>
+      </p:sp>
+      <p:sp>
+        <p:nvSpPr>
+          <p:cNvPr id="22" name="TextBox 21"/>
           <p:cNvSpPr txBox="1"/>
           <p:nvPr/>
         </p:nvSpPr>
         <p:spPr>
           <a:xfrm>
-            <a:off x="4405274" y="2540000"/>
-            <a:ext cx="3381146" cy="883666"/>
+            <a:off x="3729151" y="3848862"/>
+            <a:ext cx="204216" cy="252475"/>
           </a:xfrm>
           <a:prstGeom prst="rect">
             <a:avLst/>
@@ -13823,11 +13303,214 @@
           <a:p>
             <a:pPr algn="l">
               <a:lnSpc>
-                <a:spcPts val="4900"/>
-              </a:lnSpc>
-            </a:pPr>
-            <a:r>
-              <a:rPr sz="5000" spc="-150">
+                <a:spcPts val="1400"/>
+              </a:lnSpc>
+            </a:pPr>
+            <a:r>
+              <a:rPr sz="1000">
+                <a:solidFill>
+                  <a:srgbClr val="59AAF8"/>
+                </a:solidFill>
+                <a:latin typeface="IBM Plex Mono Medium"/>
+                <a:cs typeface="IBM Plex Mono Medium"/>
+                <a:ea typeface="IBM Plex Mono Medium"/>
+              </a:rPr>
+              <a:t>—</a:t>
+            </a:r>
+          </a:p>
+        </p:txBody>
+      </p:sp>
+      <p:sp>
+        <p:nvSpPr>
+          <p:cNvPr id="23" name="TextBox 22"/>
+          <p:cNvSpPr txBox="1"/>
+          <p:nvPr/>
+        </p:nvSpPr>
+        <p:spPr>
+          <a:xfrm>
+            <a:off x="3933367" y="3848862"/>
+            <a:ext cx="1805863" cy="430276"/>
+          </a:xfrm>
+          <a:prstGeom prst="rect">
+            <a:avLst/>
+          </a:prstGeom>
+          <a:noFill/>
+        </p:spPr>
+        <p:txBody>
+          <a:bodyPr wrap="none" lIns="0" rIns="0" tIns="0" bIns="0" anchor="t">
+            <a:spAutoFit/>
+          </a:bodyPr>
+          <a:lstStyle/>
+          <a:p>
+            <a:pPr algn="l">
+              <a:lnSpc>
+                <a:spcPts val="1400"/>
+              </a:lnSpc>
+            </a:pPr>
+            <a:r>
+              <a:rPr sz="1000">
+                <a:solidFill>
+                  <a:srgbClr val="EEEBE5"/>
+                </a:solidFill>
+                <a:latin typeface="GQ Text"/>
+                <a:cs typeface="GQ Text"/>
+                <a:ea typeface="GQ Text"/>
+              </a:rPr>
+              <a:t>Кесте емес, қазақ тілінің</a:t>
+            </a:r>
+          </a:p>
+          <a:p>
+            <a:pPr algn="l">
+              <a:lnSpc>
+                <a:spcPts val="1400"/>
+              </a:lnSpc>
+            </a:pPr>
+            <a:r>
+              <a:rPr sz="1000">
+                <a:solidFill>
+                  <a:srgbClr val="EEEBE5"/>
+                </a:solidFill>
+                <a:latin typeface="GQ Text"/>
+                <a:cs typeface="GQ Text"/>
+                <a:ea typeface="GQ Text"/>
+              </a:rPr>
+              <a:t>ережелері</a:t>
+            </a:r>
+          </a:p>
+        </p:txBody>
+      </p:sp>
+      <p:sp>
+        <p:nvSpPr>
+          <p:cNvPr id="24" name="Rectangle 23"/>
+          <p:cNvSpPr/>
+          <p:nvPr/>
+        </p:nvSpPr>
+        <p:spPr>
+          <a:xfrm>
+            <a:off x="6196431" y="2323084"/>
+            <a:ext cx="2522143" cy="2343658"/>
+          </a:xfrm>
+          <a:prstGeom prst="rect">
+            <a:avLst/>
+          </a:prstGeom>
+          <a:solidFill>
+            <a:srgbClr val="11161E"/>
+          </a:solidFill>
+          <a:ln w="9525">
+            <a:solidFill>
+              <a:srgbClr val="3B434D"/>
+            </a:solidFill>
+          </a:ln>
+          <a:effectLst/>
+        </p:spPr>
+        <p:txBody>
+          <a:bodyPr rtlCol="0" anchor="ctr" wrap="none"/>
+          <a:lstStyle/>
+          <a:p>
+            <a:pPr algn="ctr"/>
+          </a:p>
+        </p:txBody>
+      </p:sp>
+      <p:sp>
+        <p:nvSpPr>
+          <p:cNvPr id="25" name="Rectangle 24"/>
+          <p:cNvSpPr/>
+          <p:nvPr/>
+        </p:nvSpPr>
+        <p:spPr>
+          <a:xfrm>
+            <a:off x="6196431" y="2323084"/>
+            <a:ext cx="32004" cy="2343658"/>
+          </a:xfrm>
+          <a:prstGeom prst="rect">
+            <a:avLst/>
+          </a:prstGeom>
+          <a:solidFill>
+            <a:srgbClr val="0064B9"/>
+          </a:solidFill>
+          <a:ln>
+            <a:noFill/>
+          </a:ln>
+          <a:effectLst/>
+        </p:spPr>
+        <p:txBody>
+          <a:bodyPr rtlCol="0" anchor="ctr" wrap="none"/>
+          <a:lstStyle/>
+          <a:p>
+            <a:pPr algn="ctr"/>
+          </a:p>
+        </p:txBody>
+      </p:sp>
+      <p:sp>
+        <p:nvSpPr>
+          <p:cNvPr id="26" name="TextBox 25"/>
+          <p:cNvSpPr txBox="1"/>
+          <p:nvPr/>
+        </p:nvSpPr>
+        <p:spPr>
+          <a:xfrm>
+            <a:off x="6452463" y="2557780"/>
+            <a:ext cx="2010079" cy="189357"/>
+          </a:xfrm>
+          <a:prstGeom prst="rect">
+            <a:avLst/>
+          </a:prstGeom>
+          <a:noFill/>
+        </p:spPr>
+        <p:txBody>
+          <a:bodyPr wrap="none" lIns="0" rIns="0" tIns="0" bIns="0" anchor="t">
+            <a:spAutoFit/>
+          </a:bodyPr>
+          <a:lstStyle/>
+          <a:p>
+            <a:pPr algn="l">
+              <a:lnSpc>
+                <a:spcPts val="1050"/>
+              </a:lnSpc>
+            </a:pPr>
+            <a:r>
+              <a:rPr sz="850" spc="136">
+                <a:solidFill>
+                  <a:srgbClr val="59AAF8"/>
+                </a:solidFill>
+                <a:latin typeface="IBM Plex Mono SemiBold"/>
+                <a:cs typeface="IBM Plex Mono SemiBold"/>
+                <a:ea typeface="IBM Plex Mono SemiBold"/>
+              </a:rPr>
+              <a:t>3</a:t>
+            </a:r>
+          </a:p>
+        </p:txBody>
+      </p:sp>
+      <p:sp>
+        <p:nvSpPr>
+          <p:cNvPr id="27" name="TextBox 26"/>
+          <p:cNvSpPr txBox="1"/>
+          <p:nvPr/>
+        </p:nvSpPr>
+        <p:spPr>
+          <a:xfrm>
+            <a:off x="6452463" y="2796590"/>
+            <a:ext cx="2010079" cy="525551"/>
+          </a:xfrm>
+          <a:prstGeom prst="rect">
+            <a:avLst/>
+          </a:prstGeom>
+          <a:noFill/>
+        </p:spPr>
+        <p:txBody>
+          <a:bodyPr wrap="none" lIns="0" rIns="0" tIns="0" bIns="0" anchor="t">
+            <a:spAutoFit/>
+          </a:bodyPr>
+          <a:lstStyle/>
+          <a:p>
+            <a:pPr algn="l">
+              <a:lnSpc>
+                <a:spcPts val="1710"/>
+              </a:lnSpc>
+            </a:pPr>
+            <a:r>
+              <a:rPr sz="1500" spc="-22">
                 <a:solidFill>
                   <a:srgbClr val="EEEBE5"/>
                 </a:solidFill>
@@ -13835,21 +13518,39 @@
                 <a:cs typeface="GQ Text Bold"/>
                 <a:ea typeface="GQ Text Bold"/>
               </a:rPr>
-              <a:t>86%</a:t>
-            </a:r>
-          </a:p>
-        </p:txBody>
-      </p:sp>
-      <p:sp>
-        <p:nvSpPr>
-          <p:cNvPr id="12" name="TextBox 11"/>
+              <a:t>Ұмытылғанды</a:t>
+            </a:r>
+          </a:p>
+          <a:p>
+            <a:pPr algn="l">
+              <a:lnSpc>
+                <a:spcPts val="1710"/>
+              </a:lnSpc>
+            </a:pPr>
+            <a:r>
+              <a:rPr sz="1500" spc="-22">
+                <a:solidFill>
+                  <a:srgbClr val="EEEBE5"/>
+                </a:solidFill>
+                <a:latin typeface="GQ Text Bold"/>
+                <a:cs typeface="GQ Text Bold"/>
+                <a:ea typeface="GQ Text Bold"/>
+              </a:rPr>
+              <a:t>қайтарады</a:t>
+            </a:r>
+          </a:p>
+        </p:txBody>
+      </p:sp>
+      <p:sp>
+        <p:nvSpPr>
+          <p:cNvPr id="28" name="TextBox 27"/>
           <p:cNvSpPr txBox="1"/>
           <p:nvPr/>
         </p:nvSpPr>
         <p:spPr>
           <a:xfrm>
-            <a:off x="4405274" y="3327400"/>
-            <a:ext cx="3381146" cy="229933"/>
+            <a:off x="6452463" y="3392678"/>
+            <a:ext cx="204216" cy="252475"/>
           </a:xfrm>
           <a:prstGeom prst="rect">
             <a:avLst/>
@@ -13864,33 +13565,33 @@
           <a:p>
             <a:pPr algn="l">
               <a:lnSpc>
-                <a:spcPts val="1275"/>
-              </a:lnSpc>
-            </a:pPr>
-            <a:r>
-              <a:rPr sz="850" spc="68">
-                <a:solidFill>
-                  <a:srgbClr val="A6ADB6"/>
+                <a:spcPts val="1400"/>
+              </a:lnSpc>
+            </a:pPr>
+            <a:r>
+              <a:rPr sz="1000">
+                <a:solidFill>
+                  <a:srgbClr val="59AAF8"/>
                 </a:solidFill>
                 <a:latin typeface="IBM Plex Mono Medium"/>
                 <a:cs typeface="IBM Plex Mono Medium"/>
                 <a:ea typeface="IBM Plex Mono Medium"/>
               </a:rPr>
-              <a:t>КУРС ТАПСЫРМАСЫН</a:t>
-            </a:r>
-          </a:p>
-        </p:txBody>
-      </p:sp>
-      <p:sp>
-        <p:nvSpPr>
-          <p:cNvPr id="13" name="TextBox 12"/>
+              <a:t>—</a:t>
+            </a:r>
+          </a:p>
+        </p:txBody>
+      </p:sp>
+      <p:sp>
+        <p:nvSpPr>
+          <p:cNvPr id="29" name="TextBox 28"/>
           <p:cNvSpPr txBox="1"/>
           <p:nvPr/>
         </p:nvSpPr>
         <p:spPr>
           <a:xfrm>
-            <a:off x="4405274" y="3579261"/>
-            <a:ext cx="3381146" cy="243278"/>
+            <a:off x="6656679" y="3392678"/>
+            <a:ext cx="1805863" cy="430276"/>
           </a:xfrm>
           <a:prstGeom prst="rect">
             <a:avLst/>
@@ -13905,33 +13606,51 @@
           <a:p>
             <a:pPr algn="l">
               <a:lnSpc>
-                <a:spcPts val="1349"/>
-              </a:lnSpc>
-            </a:pPr>
-            <a:r>
-              <a:rPr sz="950">
-                <a:solidFill>
-                  <a:srgbClr val="A6ADB6"/>
+                <a:spcPts val="1400"/>
+              </a:lnSpc>
+            </a:pPr>
+            <a:r>
+              <a:rPr sz="1000">
+                <a:solidFill>
+                  <a:srgbClr val="EEEBE5"/>
                 </a:solidFill>
                 <a:latin typeface="GQ Text"/>
                 <a:cs typeface="GQ Text"/>
                 <a:ea typeface="GQ Text"/>
               </a:rPr>
-              <a:t>орыс пернетақтасынан теру мүмкін емес</a:t>
-            </a:r>
-          </a:p>
-        </p:txBody>
-      </p:sp>
-      <p:sp>
-        <p:nvSpPr>
-          <p:cNvPr id="14" name="TextBox 13"/>
+              <a:t>Қателессең — тапсырма</a:t>
+            </a:r>
+          </a:p>
+          <a:p>
+            <a:pPr algn="l">
+              <a:lnSpc>
+                <a:spcPts val="1400"/>
+              </a:lnSpc>
+            </a:pPr>
+            <a:r>
+              <a:rPr sz="1000">
+                <a:solidFill>
+                  <a:srgbClr val="EEEBE5"/>
+                </a:solidFill>
+                <a:latin typeface="GQ Text"/>
+                <a:cs typeface="GQ Text"/>
+                <a:ea typeface="GQ Text"/>
+              </a:rPr>
+              <a:t>бүгін қайтады</a:t>
+            </a:r>
+          </a:p>
+        </p:txBody>
+      </p:sp>
+      <p:sp>
+        <p:nvSpPr>
+          <p:cNvPr id="30" name="TextBox 29"/>
           <p:cNvSpPr txBox="1"/>
           <p:nvPr/>
         </p:nvSpPr>
         <p:spPr>
           <a:xfrm>
-            <a:off x="8060740" y="2540000"/>
-            <a:ext cx="3381146" cy="883666"/>
+            <a:off x="6452463" y="3848862"/>
+            <a:ext cx="204216" cy="252475"/>
           </a:xfrm>
           <a:prstGeom prst="rect">
             <a:avLst/>
@@ -13946,11 +13665,232 @@
           <a:p>
             <a:pPr algn="l">
               <a:lnSpc>
-                <a:spcPts val="4900"/>
-              </a:lnSpc>
-            </a:pPr>
-            <a:r>
-              <a:rPr sz="5000" spc="-150">
+                <a:spcPts val="1400"/>
+              </a:lnSpc>
+            </a:pPr>
+            <a:r>
+              <a:rPr sz="1000">
+                <a:solidFill>
+                  <a:srgbClr val="59AAF8"/>
+                </a:solidFill>
+                <a:latin typeface="IBM Plex Mono Medium"/>
+                <a:cs typeface="IBM Plex Mono Medium"/>
+                <a:ea typeface="IBM Plex Mono Medium"/>
+              </a:rPr>
+              <a:t>—</a:t>
+            </a:r>
+          </a:p>
+        </p:txBody>
+      </p:sp>
+      <p:sp>
+        <p:nvSpPr>
+          <p:cNvPr id="31" name="TextBox 30"/>
+          <p:cNvSpPr txBox="1"/>
+          <p:nvPr/>
+        </p:nvSpPr>
+        <p:spPr>
+          <a:xfrm>
+            <a:off x="6656679" y="3848862"/>
+            <a:ext cx="1805863" cy="608076"/>
+          </a:xfrm>
+          <a:prstGeom prst="rect">
+            <a:avLst/>
+          </a:prstGeom>
+          <a:noFill/>
+        </p:spPr>
+        <p:txBody>
+          <a:bodyPr wrap="none" lIns="0" rIns="0" tIns="0" bIns="0" anchor="t">
+            <a:spAutoFit/>
+          </a:bodyPr>
+          <a:lstStyle/>
+          <a:p>
+            <a:pPr algn="l">
+              <a:lnSpc>
+                <a:spcPts val="1400"/>
+              </a:lnSpc>
+            </a:pPr>
+            <a:r>
+              <a:rPr sz="1000">
+                <a:solidFill>
+                  <a:srgbClr val="EEEBE5"/>
+                </a:solidFill>
+                <a:latin typeface="GQ Text"/>
+                <a:cs typeface="GQ Text"/>
+                <a:ea typeface="GQ Text"/>
+              </a:rPr>
+              <a:t>Дұрыс жауап берсең — бір</a:t>
+            </a:r>
+          </a:p>
+          <a:p>
+            <a:pPr algn="l">
+              <a:lnSpc>
+                <a:spcPts val="1400"/>
+              </a:lnSpc>
+            </a:pPr>
+            <a:r>
+              <a:rPr sz="1000">
+                <a:solidFill>
+                  <a:srgbClr val="EEEBE5"/>
+                </a:solidFill>
+                <a:latin typeface="GQ Text"/>
+                <a:cs typeface="GQ Text"/>
+                <a:ea typeface="GQ Text"/>
+              </a:rPr>
+              <a:t>күннен, содан соң үш</a:t>
+            </a:r>
+          </a:p>
+          <a:p>
+            <a:pPr algn="l">
+              <a:lnSpc>
+                <a:spcPts val="1400"/>
+              </a:lnSpc>
+            </a:pPr>
+            <a:r>
+              <a:rPr sz="1000">
+                <a:solidFill>
+                  <a:srgbClr val="EEEBE5"/>
+                </a:solidFill>
+                <a:latin typeface="GQ Text"/>
+                <a:cs typeface="GQ Text"/>
+                <a:ea typeface="GQ Text"/>
+              </a:rPr>
+              <a:t>күннен кейін</a:t>
+            </a:r>
+          </a:p>
+        </p:txBody>
+      </p:sp>
+      <p:sp>
+        <p:nvSpPr>
+          <p:cNvPr id="32" name="Rectangle 31"/>
+          <p:cNvSpPr/>
+          <p:nvPr/>
+        </p:nvSpPr>
+        <p:spPr>
+          <a:xfrm>
+            <a:off x="8919743" y="2323084"/>
+            <a:ext cx="2522143" cy="2343658"/>
+          </a:xfrm>
+          <a:prstGeom prst="rect">
+            <a:avLst/>
+          </a:prstGeom>
+          <a:solidFill>
+            <a:srgbClr val="11161E"/>
+          </a:solidFill>
+          <a:ln w="9525">
+            <a:solidFill>
+              <a:srgbClr val="3B434D"/>
+            </a:solidFill>
+          </a:ln>
+          <a:effectLst/>
+        </p:spPr>
+        <p:txBody>
+          <a:bodyPr rtlCol="0" anchor="ctr" wrap="none"/>
+          <a:lstStyle/>
+          <a:p>
+            <a:pPr algn="ctr"/>
+          </a:p>
+        </p:txBody>
+      </p:sp>
+      <p:sp>
+        <p:nvSpPr>
+          <p:cNvPr id="33" name="Rectangle 32"/>
+          <p:cNvSpPr/>
+          <p:nvPr/>
+        </p:nvSpPr>
+        <p:spPr>
+          <a:xfrm>
+            <a:off x="8919743" y="2323084"/>
+            <a:ext cx="32004" cy="2343658"/>
+          </a:xfrm>
+          <a:prstGeom prst="rect">
+            <a:avLst/>
+          </a:prstGeom>
+          <a:solidFill>
+            <a:srgbClr val="0064B9"/>
+          </a:solidFill>
+          <a:ln>
+            <a:noFill/>
+          </a:ln>
+          <a:effectLst/>
+        </p:spPr>
+        <p:txBody>
+          <a:bodyPr rtlCol="0" anchor="ctr" wrap="none"/>
+          <a:lstStyle/>
+          <a:p>
+            <a:pPr algn="ctr"/>
+          </a:p>
+        </p:txBody>
+      </p:sp>
+      <p:sp>
+        <p:nvSpPr>
+          <p:cNvPr id="34" name="TextBox 33"/>
+          <p:cNvSpPr txBox="1"/>
+          <p:nvPr/>
+        </p:nvSpPr>
+        <p:spPr>
+          <a:xfrm>
+            <a:off x="9175775" y="2557780"/>
+            <a:ext cx="2010079" cy="189357"/>
+          </a:xfrm>
+          <a:prstGeom prst="rect">
+            <a:avLst/>
+          </a:prstGeom>
+          <a:noFill/>
+        </p:spPr>
+        <p:txBody>
+          <a:bodyPr wrap="none" lIns="0" rIns="0" tIns="0" bIns="0" anchor="t">
+            <a:spAutoFit/>
+          </a:bodyPr>
+          <a:lstStyle/>
+          <a:p>
+            <a:pPr algn="l">
+              <a:lnSpc>
+                <a:spcPts val="1050"/>
+              </a:lnSpc>
+            </a:pPr>
+            <a:r>
+              <a:rPr sz="850" spc="136">
+                <a:solidFill>
+                  <a:srgbClr val="59AAF8"/>
+                </a:solidFill>
+                <a:latin typeface="IBM Plex Mono SemiBold"/>
+                <a:cs typeface="IBM Plex Mono SemiBold"/>
+                <a:ea typeface="IBM Plex Mono SemiBold"/>
+              </a:rPr>
+              <a:t>4</a:t>
+            </a:r>
+          </a:p>
+        </p:txBody>
+      </p:sp>
+      <p:sp>
+        <p:nvSpPr>
+          <p:cNvPr id="35" name="TextBox 34"/>
+          <p:cNvSpPr txBox="1"/>
+          <p:nvPr/>
+        </p:nvSpPr>
+        <p:spPr>
+          <a:xfrm>
+            <a:off x="9175775" y="2796590"/>
+            <a:ext cx="2010079" cy="525551"/>
+          </a:xfrm>
+          <a:prstGeom prst="rect">
+            <a:avLst/>
+          </a:prstGeom>
+          <a:noFill/>
+        </p:spPr>
+        <p:txBody>
+          <a:bodyPr wrap="none" lIns="0" rIns="0" tIns="0" bIns="0" anchor="t">
+            <a:spAutoFit/>
+          </a:bodyPr>
+          <a:lstStyle/>
+          <a:p>
+            <a:pPr algn="l">
+              <a:lnSpc>
+                <a:spcPts val="1710"/>
+              </a:lnSpc>
+            </a:pPr>
+            <a:r>
+              <a:rPr sz="1500" spc="-22">
                 <a:solidFill>
                   <a:srgbClr val="EEEBE5"/>
                 </a:solidFill>
@@ -13958,21 +13898,39 @@
                 <a:cs typeface="GQ Text Bold"/>
                 <a:ea typeface="GQ Text Bold"/>
               </a:rPr>
-              <a:t>9</a:t>
-            </a:r>
-          </a:p>
-        </p:txBody>
-      </p:sp>
-      <p:sp>
-        <p:nvSpPr>
-          <p:cNvPr id="15" name="TextBox 14"/>
+              <a:t>Интернетсіз жұмыс</a:t>
+            </a:r>
+          </a:p>
+          <a:p>
+            <a:pPr algn="l">
+              <a:lnSpc>
+                <a:spcPts val="1710"/>
+              </a:lnSpc>
+            </a:pPr>
+            <a:r>
+              <a:rPr sz="1500" spc="-22">
+                <a:solidFill>
+                  <a:srgbClr val="EEEBE5"/>
+                </a:solidFill>
+                <a:latin typeface="GQ Text Bold"/>
+                <a:cs typeface="GQ Text Bold"/>
+                <a:ea typeface="GQ Text Bold"/>
+              </a:rPr>
+              <a:t>істейді</a:t>
+            </a:r>
+          </a:p>
+        </p:txBody>
+      </p:sp>
+      <p:sp>
+        <p:nvSpPr>
+          <p:cNvPr id="36" name="TextBox 35"/>
           <p:cNvSpPr txBox="1"/>
           <p:nvPr/>
         </p:nvSpPr>
         <p:spPr>
           <a:xfrm>
-            <a:off x="8060740" y="3327400"/>
-            <a:ext cx="3381146" cy="229933"/>
+            <a:off x="9175775" y="3392678"/>
+            <a:ext cx="204216" cy="252475"/>
           </a:xfrm>
           <a:prstGeom prst="rect">
             <a:avLst/>
@@ -13987,33 +13945,33 @@
           <a:p>
             <a:pPr algn="l">
               <a:lnSpc>
-                <a:spcPts val="1275"/>
-              </a:lnSpc>
-            </a:pPr>
-            <a:r>
-              <a:rPr sz="850" spc="68">
-                <a:solidFill>
-                  <a:srgbClr val="A6ADB6"/>
+                <a:spcPts val="1400"/>
+              </a:lnSpc>
+            </a:pPr>
+            <a:r>
+              <a:rPr sz="1000">
+                <a:solidFill>
+                  <a:srgbClr val="59AAF8"/>
                 </a:solidFill>
                 <a:latin typeface="IBM Plex Mono Medium"/>
                 <a:cs typeface="IBM Plex Mono Medium"/>
                 <a:ea typeface="IBM Plex Mono Medium"/>
               </a:rPr>
-              <a:t>ӘРІП ҚАТАРЫ</a:t>
-            </a:r>
-          </a:p>
-        </p:txBody>
-      </p:sp>
-      <p:sp>
-        <p:nvSpPr>
-          <p:cNvPr id="16" name="TextBox 15"/>
+              <a:t>—</a:t>
+            </a:r>
+          </a:p>
+        </p:txBody>
+      </p:sp>
+      <p:sp>
+        <p:nvSpPr>
+          <p:cNvPr id="37" name="TextBox 36"/>
           <p:cNvSpPr txBox="1"/>
           <p:nvPr/>
         </p:nvSpPr>
         <p:spPr>
           <a:xfrm>
-            <a:off x="8060740" y="3579261"/>
-            <a:ext cx="3381146" cy="243278"/>
+            <a:off x="9379991" y="3392678"/>
+            <a:ext cx="1805863" cy="252475"/>
           </a:xfrm>
           <a:prstGeom prst="rect">
             <a:avLst/>
@@ -14028,63 +13986,33 @@
           <a:p>
             <a:pPr algn="l">
               <a:lnSpc>
-                <a:spcPts val="1349"/>
-              </a:lnSpc>
-            </a:pPr>
-            <a:r>
-              <a:rPr sz="950">
-                <a:solidFill>
-                  <a:srgbClr val="A6ADB6"/>
+                <a:spcPts val="1400"/>
+              </a:lnSpc>
+            </a:pPr>
+            <a:r>
+              <a:rPr sz="1000">
+                <a:solidFill>
+                  <a:srgbClr val="EEEBE5"/>
                 </a:solidFill>
                 <a:latin typeface="GQ Text"/>
                 <a:cs typeface="GQ Text"/>
                 <a:ea typeface="GQ Text"/>
               </a:rPr>
-              <a:t>әр енгізу өрісінің астында</a:t>
-            </a:r>
-          </a:p>
-        </p:txBody>
-      </p:sp>
-      <p:sp>
-        <p:nvSpPr>
-          <p:cNvPr id="17" name="Rectangle 16"/>
-          <p:cNvSpPr/>
-          <p:nvPr/>
-        </p:nvSpPr>
-        <p:spPr>
-          <a:xfrm>
-            <a:off x="749808" y="4235196"/>
-            <a:ext cx="10692079" cy="958850"/>
-          </a:xfrm>
-          <a:prstGeom prst="rect">
-            <a:avLst/>
-          </a:prstGeom>
-          <a:solidFill>
-            <a:srgbClr val="0064B9"/>
-          </a:solidFill>
-          <a:ln>
-            <a:noFill/>
-          </a:ln>
-          <a:effectLst/>
-        </p:spPr>
-        <p:txBody>
-          <a:bodyPr rtlCol="0" anchor="ctr" wrap="none"/>
-          <a:lstStyle/>
-          <a:p>
-            <a:pPr algn="ctr"/>
-          </a:p>
-        </p:txBody>
-      </p:sp>
-      <p:sp>
-        <p:nvSpPr>
-          <p:cNvPr id="18" name="TextBox 17"/>
+              <a:t>Бір рет жүктеледі</a:t>
+            </a:r>
+          </a:p>
+        </p:txBody>
+      </p:sp>
+      <p:sp>
+        <p:nvSpPr>
+          <p:cNvPr id="38" name="TextBox 37"/>
           <p:cNvSpPr txBox="1"/>
           <p:nvPr/>
         </p:nvSpPr>
         <p:spPr>
           <a:xfrm>
-            <a:off x="1024127" y="4432808"/>
-            <a:ext cx="10143439" cy="598487"/>
+            <a:off x="9175775" y="3671062"/>
+            <a:ext cx="204216" cy="252475"/>
           </a:xfrm>
           <a:prstGeom prst="rect">
             <a:avLst/>
@@ -14099,11 +14027,141 @@
           <a:p>
             <a:pPr algn="l">
               <a:lnSpc>
-                <a:spcPts val="1885"/>
-              </a:lnSpc>
-            </a:pPr>
-            <a:r>
-              <a:rPr sz="1300">
+                <a:spcPts val="1400"/>
+              </a:lnSpc>
+            </a:pPr>
+            <a:r>
+              <a:rPr sz="1000">
+                <a:solidFill>
+                  <a:srgbClr val="59AAF8"/>
+                </a:solidFill>
+                <a:latin typeface="IBM Plex Mono Medium"/>
+                <a:cs typeface="IBM Plex Mono Medium"/>
+                <a:ea typeface="IBM Plex Mono Medium"/>
+              </a:rPr>
+              <a:t>—</a:t>
+            </a:r>
+          </a:p>
+        </p:txBody>
+      </p:sp>
+      <p:sp>
+        <p:nvSpPr>
+          <p:cNvPr id="39" name="TextBox 38"/>
+          <p:cNvSpPr txBox="1"/>
+          <p:nvPr/>
+        </p:nvSpPr>
+        <p:spPr>
+          <a:xfrm>
+            <a:off x="9379991" y="3671062"/>
+            <a:ext cx="1805863" cy="430276"/>
+          </a:xfrm>
+          <a:prstGeom prst="rect">
+            <a:avLst/>
+          </a:prstGeom>
+          <a:noFill/>
+        </p:spPr>
+        <p:txBody>
+          <a:bodyPr wrap="none" lIns="0" rIns="0" tIns="0" bIns="0" anchor="t">
+            <a:spAutoFit/>
+          </a:bodyPr>
+          <a:lstStyle/>
+          <a:p>
+            <a:pPr algn="l">
+              <a:lnSpc>
+                <a:spcPts val="1400"/>
+              </a:lnSpc>
+            </a:pPr>
+            <a:r>
+              <a:rPr sz="1000">
+                <a:solidFill>
+                  <a:srgbClr val="EEEBE5"/>
+                </a:solidFill>
+                <a:latin typeface="GQ Text"/>
+                <a:cs typeface="GQ Text"/>
+                <a:ea typeface="GQ Text"/>
+              </a:rPr>
+              <a:t>Әрі қарай кез келген жерде</a:t>
+            </a:r>
+          </a:p>
+          <a:p>
+            <a:pPr algn="l">
+              <a:lnSpc>
+                <a:spcPts val="1400"/>
+              </a:lnSpc>
+            </a:pPr>
+            <a:r>
+              <a:rPr sz="1000">
+                <a:solidFill>
+                  <a:srgbClr val="EEEBE5"/>
+                </a:solidFill>
+                <a:latin typeface="GQ Text"/>
+                <a:cs typeface="GQ Text"/>
+                <a:ea typeface="GQ Text"/>
+              </a:rPr>
+              <a:t>шұғылдан</a:t>
+            </a:r>
+          </a:p>
+        </p:txBody>
+      </p:sp>
+      <p:sp>
+        <p:nvSpPr>
+          <p:cNvPr id="40" name="Rectangle 39"/>
+          <p:cNvSpPr/>
+          <p:nvPr/>
+        </p:nvSpPr>
+        <p:spPr>
+          <a:xfrm>
+            <a:off x="749808" y="5069078"/>
+            <a:ext cx="10692079" cy="710247"/>
+          </a:xfrm>
+          <a:prstGeom prst="rect">
+            <a:avLst/>
+          </a:prstGeom>
+          <a:solidFill>
+            <a:srgbClr val="0064B9"/>
+          </a:solidFill>
+          <a:ln>
+            <a:noFill/>
+          </a:ln>
+          <a:effectLst/>
+        </p:spPr>
+        <p:txBody>
+          <a:bodyPr rtlCol="0" anchor="ctr" wrap="none"/>
+          <a:lstStyle/>
+          <a:p>
+            <a:pPr algn="ctr"/>
+          </a:p>
+        </p:txBody>
+      </p:sp>
+      <p:sp>
+        <p:nvSpPr>
+          <p:cNvPr id="41" name="TextBox 40"/>
+          <p:cNvSpPr txBox="1"/>
+          <p:nvPr/>
+        </p:nvSpPr>
+        <p:spPr>
+          <a:xfrm>
+            <a:off x="1024127" y="5268163"/>
+            <a:ext cx="10143439" cy="345281"/>
+          </a:xfrm>
+          <a:prstGeom prst="rect">
+            <a:avLst/>
+          </a:prstGeom>
+          <a:noFill/>
+        </p:spPr>
+        <p:txBody>
+          <a:bodyPr wrap="none" lIns="0" rIns="0" tIns="0" bIns="0" anchor="t">
+            <a:spAutoFit/>
+          </a:bodyPr>
+          <a:lstStyle/>
+          <a:p>
+            <a:pPr algn="l">
+              <a:lnSpc>
+                <a:spcPts val="1812"/>
+              </a:lnSpc>
+            </a:pPr>
+            <a:r>
+              <a:rPr sz="1250">
                 <a:solidFill>
                   <a:srgbClr val="FFFFFF"/>
                 </a:solidFill>
@@ -14111,25 +14169,7 @@
                 <a:cs typeface="GQ Text SemiBold"/>
                 <a:ea typeface="GQ Text SemiBold"/>
               </a:rPr>
-              <a:t>Қосымша орыс әріптерімен терілген жауапты қабылдайды, есептейді және дұрыс жазылуын көрсетеді. Ал өріс</a:t>
-            </a:r>
-          </a:p>
-          <a:p>
-            <a:pPr algn="l">
-              <a:lnSpc>
-                <a:spcPts val="1885"/>
-              </a:lnSpc>
-            </a:pPr>
-            <a:r>
-              <a:rPr sz="1300">
-                <a:solidFill>
-                  <a:srgbClr val="FFFFFF"/>
-                </a:solidFill>
-                <a:latin typeface="GQ Text SemiBold"/>
-                <a:cs typeface="GQ Text SemiBold"/>
-                <a:ea typeface="GQ Text SemiBold"/>
-              </a:rPr>
-              <a:t>астындағы қатардан әріпті бассаң — ол қойылады.</a:t>
+              <a:t>Мұның бәрі әр жаңартуда автотесттермен тексеріледі: байқаусыз бұзу мүмкін емес.</a:t>
             </a:r>
           </a:p>
         </p:txBody>
@@ -14167,7 +14207,7 @@
             <a:avLst/>
           </a:prstGeom>
           <a:solidFill>
-            <a:srgbClr val="F6F7F9"/>
+            <a:srgbClr val="1B222B"/>
           </a:solidFill>
           <a:ln>
             <a:noFill/>
@@ -14184,68 +14224,6 @@
       </p:sp>
       <p:sp>
         <p:nvSpPr>
-          <p:cNvPr id="16" name="Rectangle 15"/>
-          <p:cNvSpPr/>
-          <p:nvPr/>
-        </p:nvSpPr>
-        <p:spPr>
-          <a:xfrm>
-            <a:off x="6196431" y="2937764"/>
-            <a:ext cx="5245455" cy="2313432"/>
-          </a:xfrm>
-          <a:prstGeom prst="rect">
-            <a:avLst/>
-          </a:prstGeom>
-          <a:solidFill>
-            <a:srgbClr val="0064B9"/>
-          </a:solidFill>
-          <a:ln>
-            <a:noFill/>
-          </a:ln>
-          <a:effectLst/>
-        </p:spPr>
-        <p:txBody>
-          <a:bodyPr rtlCol="0" anchor="ctr" wrap="none"/>
-          <a:lstStyle/>
-          <a:p>
-            <a:pPr algn="ctr"/>
-          </a:p>
-        </p:txBody>
-      </p:sp>
-      <p:sp>
-        <p:nvSpPr>
-          <p:cNvPr id="13" name="Rectangle 12"/>
-          <p:cNvSpPr/>
-          <p:nvPr/>
-        </p:nvSpPr>
-        <p:spPr>
-          <a:xfrm>
-            <a:off x="749808" y="2937764"/>
-            <a:ext cx="5245455" cy="2737103"/>
-          </a:xfrm>
-          <a:prstGeom prst="rect">
-            <a:avLst/>
-          </a:prstGeom>
-          <a:solidFill>
-            <a:srgbClr val="ECF1F5"/>
-          </a:solidFill>
-          <a:ln w="9525">
-            <a:solidFill>
-              <a:srgbClr val="CCD4DC"/>
-            </a:solidFill>
-          </a:ln>
-          <a:effectLst/>
-        </p:spPr>
-        <p:txBody>
-          <a:bodyPr rtlCol="0" anchor="ctr" wrap="none"/>
-          <a:lstStyle/>
-          <a:p>
-            <a:pPr algn="ctr"/>
-          </a:p>
-        </p:txBody>
-      </p:sp>
-      <p:sp>
-        <p:nvSpPr>
           <p:cNvPr id="3" name="Rectangle 2"/>
           <p:cNvSpPr/>
           <p:nvPr/>
@@ -14259,7 +14237,7 @@
             <a:avLst/>
           </a:prstGeom>
           <a:solidFill>
-            <a:srgbClr val="CCD4DC"/>
+            <a:srgbClr val="3B434D"/>
           </a:solidFill>
           <a:ln>
             <a:noFill/>
@@ -14304,13 +14282,13 @@
             <a:r>
               <a:rPr sz="850" spc="136">
                 <a:solidFill>
-                  <a:srgbClr val="0064B9"/>
+                  <a:srgbClr val="59AAF8"/>
                 </a:solidFill>
                 <a:latin typeface="IBM Plex Mono SemiBold"/>
                 <a:cs typeface="IBM Plex Mono SemiBold"/>
                 <a:ea typeface="IBM Plex Mono SemiBold"/>
               </a:rPr>
-              <a:t>ЕРЕКШЕЛІГІ · 2</a:t>
+              <a:t>ІШІНДЕ НЕ БАР</a:t>
             </a:r>
           </a:p>
         </p:txBody>
@@ -14345,13 +14323,13 @@
             <a:r>
               <a:rPr sz="850" spc="85">
                 <a:solidFill>
-                  <a:srgbClr val="535C66"/>
+                  <a:srgbClr val="A6ADB6"/>
                 </a:solidFill>
                 <a:latin typeface="IBM Plex Mono Medium"/>
                 <a:cs typeface="IBM Plex Mono Medium"/>
                 <a:ea typeface="IBM Plex Mono Medium"/>
               </a:rPr>
-              <a:t>06 / 10</a:t>
+              <a:t>06 / 08</a:t>
             </a:r>
           </a:p>
         </p:txBody>
@@ -14364,8 +14342,8 @@
         </p:nvSpPr>
         <p:spPr>
           <a:xfrm>
-            <a:off x="749808" y="799551"/>
-            <a:ext cx="10692079" cy="1183873"/>
+            <a:off x="749808" y="790854"/>
+            <a:ext cx="10692079" cy="771855"/>
           </a:xfrm>
           <a:prstGeom prst="rect">
             <a:avLst/>
@@ -14380,51 +14358,163 @@
           <a:p>
             <a:pPr algn="l">
               <a:lnSpc>
-                <a:spcPts val="3852"/>
-              </a:lnSpc>
-            </a:pPr>
-            <a:r>
-              <a:rPr sz="3600" spc="-79">
-                <a:solidFill>
-                  <a:srgbClr val="1B222B"/>
+                <a:spcPts val="4280"/>
+              </a:lnSpc>
+            </a:pPr>
+            <a:r>
+              <a:rPr sz="4000" spc="-88">
+                <a:solidFill>
+                  <a:srgbClr val="EEEBE5"/>
                 </a:solidFill>
                 <a:latin typeface="GQ Text Bold"/>
                 <a:cs typeface="GQ Text Bold"/>
                 <a:ea typeface="GQ Text Bold"/>
               </a:rPr>
-              <a:t>Қазақ тілінде қате басуға жеңілдік неге</a:t>
-            </a:r>
-          </a:p>
-          <a:p>
-            <a:pPr algn="l">
-              <a:lnSpc>
-                <a:spcPts val="3852"/>
-              </a:lnSpc>
-            </a:pPr>
-            <a:r>
-              <a:rPr sz="3600" spc="-79">
-                <a:solidFill>
-                  <a:srgbClr val="1B222B"/>
+              <a:t>Бес бөлім және кесте бойынша қайталау</a:t>
+            </a:r>
+          </a:p>
+        </p:txBody>
+      </p:sp>
+      <p:sp>
+        <p:nvSpPr>
+          <p:cNvPr id="7" name="TextBox 6"/>
+          <p:cNvSpPr txBox="1"/>
+          <p:nvPr/>
+        </p:nvSpPr>
+        <p:spPr>
+          <a:xfrm>
+            <a:off x="749808" y="1530177"/>
+            <a:ext cx="9195188" cy="567349"/>
+          </a:xfrm>
+          <a:prstGeom prst="rect">
+            <a:avLst/>
+          </a:prstGeom>
+          <a:noFill/>
+        </p:spPr>
+        <p:txBody>
+          <a:bodyPr wrap="none" lIns="0" rIns="0" tIns="0" bIns="0" anchor="t">
+            <a:spAutoFit/>
+          </a:bodyPr>
+          <a:lstStyle/>
+          <a:p>
+            <a:pPr algn="l">
+              <a:lnSpc>
+                <a:spcPts val="1846"/>
+              </a:lnSpc>
+            </a:pPr>
+            <a:r>
+              <a:rPr sz="1300">
+                <a:solidFill>
+                  <a:srgbClr val="A6ADB6"/>
+                </a:solidFill>
+                <a:latin typeface="GQ Text"/>
+                <a:cs typeface="GQ Text"/>
+                <a:ea typeface="GQ Text"/>
+              </a:rPr>
+              <a:t>Әр тапсырма карточкаға айналады. Дұрыс жауап берсең — қосымша оны бір күннен кейін, содан соң үш күннен</a:t>
+            </a:r>
+          </a:p>
+          <a:p>
+            <a:pPr algn="l">
+              <a:lnSpc>
+                <a:spcPts val="1846"/>
+              </a:lnSpc>
+            </a:pPr>
+            <a:r>
+              <a:rPr sz="1300">
+                <a:solidFill>
+                  <a:srgbClr val="A6ADB6"/>
+                </a:solidFill>
+                <a:latin typeface="GQ Text"/>
+                <a:cs typeface="GQ Text"/>
+                <a:ea typeface="GQ Text"/>
+              </a:rPr>
+              <a:t>кейін қайтарады. Қателессең — бүгін-ақ қайтарады.</a:t>
+            </a:r>
+          </a:p>
+        </p:txBody>
+      </p:sp>
+      <p:sp>
+        <p:nvSpPr>
+          <p:cNvPr id="8" name="Rectangle 7"/>
+          <p:cNvSpPr/>
+          <p:nvPr/>
+        </p:nvSpPr>
+        <p:spPr>
+          <a:xfrm>
+            <a:off x="749808" y="2274316"/>
+            <a:ext cx="10692079" cy="7315"/>
+          </a:xfrm>
+          <a:prstGeom prst="rect">
+            <a:avLst/>
+          </a:prstGeom>
+          <a:solidFill>
+            <a:srgbClr val="3B434D"/>
+          </a:solidFill>
+          <a:ln>
+            <a:noFill/>
+          </a:ln>
+          <a:effectLst/>
+        </p:spPr>
+        <p:txBody>
+          <a:bodyPr rtlCol="0" anchor="ctr" wrap="none"/>
+          <a:lstStyle/>
+          <a:p>
+            <a:pPr algn="ctr"/>
+          </a:p>
+        </p:txBody>
+      </p:sp>
+      <p:sp>
+        <p:nvSpPr>
+          <p:cNvPr id="9" name="TextBox 8"/>
+          <p:cNvSpPr txBox="1"/>
+          <p:nvPr/>
+        </p:nvSpPr>
+        <p:spPr>
+          <a:xfrm>
+            <a:off x="749808" y="2548798"/>
+            <a:ext cx="1962851" cy="323169"/>
+          </a:xfrm>
+          <a:prstGeom prst="rect">
+            <a:avLst/>
+          </a:prstGeom>
+          <a:noFill/>
+        </p:spPr>
+        <p:txBody>
+          <a:bodyPr wrap="none" lIns="0" rIns="0" tIns="0" bIns="0" anchor="t">
+            <a:spAutoFit/>
+          </a:bodyPr>
+          <a:lstStyle/>
+          <a:p>
+            <a:pPr algn="l">
+              <a:lnSpc>
+                <a:spcPts val="1792"/>
+              </a:lnSpc>
+            </a:pPr>
+            <a:r>
+              <a:rPr sz="1600" spc="-24">
+                <a:solidFill>
+                  <a:srgbClr val="EEEBE5"/>
                 </a:solidFill>
                 <a:latin typeface="GQ Text Bold"/>
                 <a:cs typeface="GQ Text Bold"/>
                 <a:ea typeface="GQ Text Bold"/>
               </a:rPr>
-              <a:t>басқаша жұмыс істейді</a:t>
-            </a:r>
-          </a:p>
-        </p:txBody>
-      </p:sp>
-      <p:sp>
-        <p:nvSpPr>
-          <p:cNvPr id="7" name="TextBox 6"/>
+              <a:t>Оқу</a:t>
+            </a:r>
+          </a:p>
+        </p:txBody>
+      </p:sp>
+      <p:sp>
+        <p:nvSpPr>
+          <p:cNvPr id="10" name="TextBox 9"/>
           <p:cNvSpPr txBox="1"/>
           <p:nvPr/>
         </p:nvSpPr>
         <p:spPr>
           <a:xfrm>
-            <a:off x="749808" y="1955881"/>
-            <a:ext cx="9195188" cy="567349"/>
+            <a:off x="749808" y="2910332"/>
+            <a:ext cx="1962851" cy="461010"/>
           </a:xfrm>
           <a:prstGeom prst="rect">
             <a:avLst/>
@@ -14439,51 +14529,51 @@
           <a:p>
             <a:pPr algn="l">
               <a:lnSpc>
-                <a:spcPts val="1846"/>
-              </a:lnSpc>
-            </a:pPr>
-            <a:r>
-              <a:rPr sz="1300">
-                <a:solidFill>
-                  <a:srgbClr val="535C66"/>
+                <a:spcPts val="1500"/>
+              </a:lnSpc>
+            </a:pPr>
+            <a:r>
+              <a:rPr sz="1050">
+                <a:solidFill>
+                  <a:srgbClr val="A6ADB6"/>
                 </a:solidFill>
                 <a:latin typeface="GQ Text"/>
                 <a:cs typeface="GQ Text"/>
                 <a:ea typeface="GQ Text"/>
               </a:rPr>
-              <a:t>Кәдімгі жаттықтырғыштар бір-екі әріп қатесін кешіреді. Қазақ тілінде бұл тексеруді бұзады: грамматика</a:t>
-            </a:r>
-          </a:p>
-          <a:p>
-            <a:pPr algn="l">
-              <a:lnSpc>
-                <a:spcPts val="1846"/>
-              </a:lnSpc>
-            </a:pPr>
-            <a:r>
-              <a:rPr sz="1300">
-                <a:solidFill>
-                  <a:srgbClr val="535C66"/>
+              <a:t>Сабақ жолы: өтілгені мен</a:t>
+            </a:r>
+          </a:p>
+          <a:p>
+            <a:pPr algn="l">
+              <a:lnSpc>
+                <a:spcPts val="1500"/>
+              </a:lnSpc>
+            </a:pPr>
+            <a:r>
+              <a:rPr sz="1050">
+                <a:solidFill>
+                  <a:srgbClr val="A6ADB6"/>
                 </a:solidFill>
                 <a:latin typeface="GQ Text"/>
                 <a:cs typeface="GQ Text"/>
                 <a:ea typeface="GQ Text"/>
               </a:rPr>
-              <a:t>жалғауда тұр, ал бір әріп — бұл басқа жақ.</a:t>
-            </a:r>
-          </a:p>
-        </p:txBody>
-      </p:sp>
-      <p:sp>
-        <p:nvSpPr>
-          <p:cNvPr id="8" name="TextBox 7"/>
+              <a:t>келесі қадам көрініп тұрады</a:t>
+            </a:r>
+          </a:p>
+        </p:txBody>
+      </p:sp>
+      <p:sp>
+        <p:nvSpPr>
+          <p:cNvPr id="11" name="TextBox 10"/>
           <p:cNvSpPr txBox="1"/>
           <p:nvPr/>
         </p:nvSpPr>
         <p:spPr>
           <a:xfrm>
-            <a:off x="1024127" y="3157219"/>
-            <a:ext cx="4696815" cy="486918"/>
+            <a:off x="2932115" y="2548798"/>
+            <a:ext cx="1962851" cy="323169"/>
           </a:xfrm>
           <a:prstGeom prst="rect">
             <a:avLst/>
@@ -14498,33 +14588,33 @@
           <a:p>
             <a:pPr algn="l">
               <a:lnSpc>
-                <a:spcPts val="2700"/>
-              </a:lnSpc>
-            </a:pPr>
-            <a:r>
-              <a:rPr sz="2200" spc="-22">
-                <a:solidFill>
-                  <a:srgbClr val="0064B9"/>
-                </a:solidFill>
-                <a:latin typeface="IBM Plex Mono SemiBold"/>
-                <a:cs typeface="IBM Plex Mono SemiBold"/>
-                <a:ea typeface="IBM Plex Mono SemiBold"/>
-              </a:rPr>
-              <a:t>оқимын</a:t>
-            </a:r>
-          </a:p>
-        </p:txBody>
-      </p:sp>
-      <p:sp>
-        <p:nvSpPr>
-          <p:cNvPr id="9" name="TextBox 8"/>
+                <a:spcPts val="1792"/>
+              </a:lnSpc>
+            </a:pPr>
+            <a:r>
+              <a:rPr sz="1600" spc="-24">
+                <a:solidFill>
+                  <a:srgbClr val="EEEBE5"/>
+                </a:solidFill>
+                <a:latin typeface="GQ Text Bold"/>
+                <a:cs typeface="GQ Text Bold"/>
+                <a:ea typeface="GQ Text Bold"/>
+              </a:rPr>
+              <a:t>Жаттығу</a:t>
+            </a:r>
+          </a:p>
+        </p:txBody>
+      </p:sp>
+      <p:sp>
+        <p:nvSpPr>
+          <p:cNvPr id="12" name="TextBox 11"/>
           <p:cNvSpPr txBox="1"/>
           <p:nvPr/>
         </p:nvSpPr>
         <p:spPr>
           <a:xfrm>
-            <a:off x="1024127" y="3579368"/>
-            <a:ext cx="4696815" cy="270510"/>
+            <a:off x="2932115" y="2910332"/>
+            <a:ext cx="1962851" cy="651509"/>
           </a:xfrm>
           <a:prstGeom prst="rect">
             <a:avLst/>
@@ -14543,29 +14633,65 @@
               </a:lnSpc>
             </a:pPr>
             <a:r>
-              <a:rPr sz="1100">
-                <a:solidFill>
-                  <a:srgbClr val="535C66"/>
+              <a:rPr sz="1050">
+                <a:solidFill>
+                  <a:srgbClr val="A6ADB6"/>
                 </a:solidFill>
                 <a:latin typeface="GQ Text"/>
                 <a:cs typeface="GQ Text"/>
                 <a:ea typeface="GQ Text"/>
               </a:rPr>
-              <a:t>мен оқимын</a:t>
-            </a:r>
-          </a:p>
-        </p:txBody>
-      </p:sp>
-      <p:sp>
-        <p:nvSpPr>
-          <p:cNvPr id="10" name="TextBox 9"/>
+              <a:t>Күнделікті мақсат, қайталау,</a:t>
+            </a:r>
+          </a:p>
+          <a:p>
+            <a:pPr algn="l">
+              <a:lnSpc>
+                <a:spcPts val="1500"/>
+              </a:lnSpc>
+            </a:pPr>
+            <a:r>
+              <a:rPr sz="1050">
+                <a:solidFill>
+                  <a:srgbClr val="A6ADB6"/>
+                </a:solidFill>
+                <a:latin typeface="GQ Text"/>
+                <a:cs typeface="GQ Text"/>
+                <a:ea typeface="GQ Text"/>
+              </a:rPr>
+              <a:t>сөз карточкалары, 60</a:t>
+            </a:r>
+          </a:p>
+          <a:p>
+            <a:pPr algn="l">
+              <a:lnSpc>
+                <a:spcPts val="1500"/>
+              </a:lnSpc>
+            </a:pPr>
+            <a:r>
+              <a:rPr sz="1050">
+                <a:solidFill>
+                  <a:srgbClr val="A6ADB6"/>
+                </a:solidFill>
+                <a:latin typeface="GQ Text"/>
+                <a:cs typeface="GQ Text"/>
+                <a:ea typeface="GQ Text"/>
+              </a:rPr>
+              <a:t>секундтық спринт</a:t>
+            </a:r>
+          </a:p>
+        </p:txBody>
+      </p:sp>
+      <p:sp>
+        <p:nvSpPr>
+          <p:cNvPr id="13" name="TextBox 12"/>
           <p:cNvSpPr txBox="1"/>
           <p:nvPr/>
         </p:nvSpPr>
         <p:spPr>
           <a:xfrm>
-            <a:off x="1024127" y="3946651"/>
-            <a:ext cx="4696815" cy="486918"/>
+            <a:off x="5114422" y="2548798"/>
+            <a:ext cx="1962851" cy="323169"/>
           </a:xfrm>
           <a:prstGeom prst="rect">
             <a:avLst/>
@@ -14580,33 +14706,33 @@
           <a:p>
             <a:pPr algn="l">
               <a:lnSpc>
-                <a:spcPts val="2700"/>
-              </a:lnSpc>
-            </a:pPr>
-            <a:r>
-              <a:rPr sz="2200" spc="-22">
-                <a:solidFill>
-                  <a:srgbClr val="0064B9"/>
-                </a:solidFill>
-                <a:latin typeface="IBM Plex Mono SemiBold"/>
-                <a:cs typeface="IBM Plex Mono SemiBold"/>
-                <a:ea typeface="IBM Plex Mono SemiBold"/>
-              </a:rPr>
-              <a:t>оқисың</a:t>
-            </a:r>
-          </a:p>
-        </p:txBody>
-      </p:sp>
-      <p:sp>
-        <p:nvSpPr>
-          <p:cNvPr id="11" name="TextBox 10"/>
+                <a:spcPts val="1792"/>
+              </a:lnSpc>
+            </a:pPr>
+            <a:r>
+              <a:rPr sz="1600" spc="-24">
+                <a:solidFill>
+                  <a:srgbClr val="EEEBE5"/>
+                </a:solidFill>
+                <a:latin typeface="GQ Text Bold"/>
+                <a:cs typeface="GQ Text Bold"/>
+                <a:ea typeface="GQ Text Bold"/>
+              </a:rPr>
+              <a:t>Сөздік</a:t>
+            </a:r>
+          </a:p>
+        </p:txBody>
+      </p:sp>
+      <p:sp>
+        <p:nvSpPr>
+          <p:cNvPr id="14" name="TextBox 13"/>
           <p:cNvSpPr txBox="1"/>
           <p:nvPr/>
         </p:nvSpPr>
         <p:spPr>
           <a:xfrm>
-            <a:off x="1024127" y="4368799"/>
-            <a:ext cx="4696815" cy="270510"/>
+            <a:off x="5114422" y="2910332"/>
+            <a:ext cx="1962851" cy="842010"/>
           </a:xfrm>
           <a:prstGeom prst="rect">
             <a:avLst/>
@@ -14625,29 +14751,83 @@
               </a:lnSpc>
             </a:pPr>
             <a:r>
-              <a:rPr sz="1100">
-                <a:solidFill>
-                  <a:srgbClr val="535C66"/>
+              <a:rPr sz="1050">
+                <a:solidFill>
+                  <a:srgbClr val="A6ADB6"/>
                 </a:solidFill>
                 <a:latin typeface="GQ Text"/>
                 <a:cs typeface="GQ Text"/>
                 <a:ea typeface="GQ Text"/>
               </a:rPr>
-              <a:t>сен оқисың</a:t>
-            </a:r>
-          </a:p>
-        </p:txBody>
-      </p:sp>
-      <p:sp>
-        <p:nvSpPr>
-          <p:cNvPr id="12" name="TextBox 11"/>
+              <a:t>Сабақтардан жиналған 162</a:t>
+            </a:r>
+          </a:p>
+          <a:p>
+            <a:pPr algn="l">
+              <a:lnSpc>
+                <a:spcPts val="1500"/>
+              </a:lnSpc>
+            </a:pPr>
+            <a:r>
+              <a:rPr sz="1050">
+                <a:solidFill>
+                  <a:srgbClr val="A6ADB6"/>
+                </a:solidFill>
+                <a:latin typeface="GQ Text"/>
+                <a:cs typeface="GQ Text"/>
+                <a:ea typeface="GQ Text"/>
+              </a:rPr>
+              <a:t>мақала, іздеу орыс</a:t>
+            </a:r>
+          </a:p>
+          <a:p>
+            <a:pPr algn="l">
+              <a:lnSpc>
+                <a:spcPts val="1500"/>
+              </a:lnSpc>
+            </a:pPr>
+            <a:r>
+              <a:rPr sz="1050">
+                <a:solidFill>
+                  <a:srgbClr val="A6ADB6"/>
+                </a:solidFill>
+                <a:latin typeface="GQ Text"/>
+                <a:cs typeface="GQ Text"/>
+                <a:ea typeface="GQ Text"/>
+              </a:rPr>
+              <a:t>пернетақтасынан да жұмыс</a:t>
+            </a:r>
+          </a:p>
+          <a:p>
+            <a:pPr algn="l">
+              <a:lnSpc>
+                <a:spcPts val="1500"/>
+              </a:lnSpc>
+            </a:pPr>
+            <a:r>
+              <a:rPr sz="1050">
+                <a:solidFill>
+                  <a:srgbClr val="A6ADB6"/>
+                </a:solidFill>
+                <a:latin typeface="GQ Text"/>
+                <a:cs typeface="GQ Text"/>
+                <a:ea typeface="GQ Text"/>
+              </a:rPr>
+              <a:t>істейді</a:t>
+            </a:r>
+          </a:p>
+        </p:txBody>
+      </p:sp>
+      <p:sp>
+        <p:nvSpPr>
+          <p:cNvPr id="15" name="TextBox 14"/>
           <p:cNvSpPr txBox="1"/>
           <p:nvPr/>
         </p:nvSpPr>
         <p:spPr>
           <a:xfrm>
-            <a:off x="1024127" y="4758435"/>
-            <a:ext cx="4696815" cy="694944"/>
+            <a:off x="7296729" y="2548798"/>
+            <a:ext cx="1962851" cy="323169"/>
           </a:xfrm>
           <a:prstGeom prst="rect">
             <a:avLst/>
@@ -14662,69 +14842,240 @@
           <a:p>
             <a:pPr algn="l">
               <a:lnSpc>
-                <a:spcPts val="1600"/>
-              </a:lnSpc>
-            </a:pPr>
-            <a:r>
-              <a:rPr sz="1100">
-                <a:solidFill>
-                  <a:srgbClr val="535C66"/>
+                <a:spcPts val="1792"/>
+              </a:lnSpc>
+            </a:pPr>
+            <a:r>
+              <a:rPr sz="1600" spc="-24">
+                <a:solidFill>
+                  <a:srgbClr val="EEEBE5"/>
+                </a:solidFill>
+                <a:latin typeface="GQ Text Bold"/>
+                <a:cs typeface="GQ Text Bold"/>
+                <a:ea typeface="GQ Text Bold"/>
+              </a:rPr>
+              <a:t>Анықтама</a:t>
+            </a:r>
+          </a:p>
+        </p:txBody>
+      </p:sp>
+      <p:sp>
+        <p:nvSpPr>
+          <p:cNvPr id="16" name="TextBox 15"/>
+          <p:cNvSpPr txBox="1"/>
+          <p:nvPr/>
+        </p:nvSpPr>
+        <p:spPr>
+          <a:xfrm>
+            <a:off x="7296729" y="2910332"/>
+            <a:ext cx="1962851" cy="461010"/>
+          </a:xfrm>
+          <a:prstGeom prst="rect">
+            <a:avLst/>
+          </a:prstGeom>
+          <a:noFill/>
+        </p:spPr>
+        <p:txBody>
+          <a:bodyPr wrap="none" lIns="0" rIns="0" tIns="0" bIns="0" anchor="t">
+            <a:spAutoFit/>
+          </a:bodyPr>
+          <a:lstStyle/>
+          <a:p>
+            <a:pPr algn="l">
+              <a:lnSpc>
+                <a:spcPts val="1500"/>
+              </a:lnSpc>
+            </a:pPr>
+            <a:r>
+              <a:rPr sz="1050">
+                <a:solidFill>
+                  <a:srgbClr val="A6ADB6"/>
                 </a:solidFill>
                 <a:latin typeface="GQ Text"/>
                 <a:cs typeface="GQ Text"/>
                 <a:ea typeface="GQ Text"/>
               </a:rPr>
-              <a:t>Формалар бір әріппен ажыратылады: «м» мен «с». Кәдімгі қате</a:t>
-            </a:r>
-          </a:p>
-          <a:p>
-            <a:pPr algn="l">
-              <a:lnSpc>
-                <a:spcPts val="1600"/>
-              </a:lnSpc>
-            </a:pPr>
-            <a:r>
-              <a:rPr sz="1100">
-                <a:solidFill>
-                  <a:srgbClr val="535C66"/>
+              <a:t>33 ереже, 22 тақырып және</a:t>
+            </a:r>
+          </a:p>
+          <a:p>
+            <a:pPr algn="l">
+              <a:lnSpc>
+                <a:spcPts val="1500"/>
+              </a:lnSpc>
+            </a:pPr>
+            <a:r>
+              <a:rPr sz="1050">
+                <a:solidFill>
+                  <a:srgbClr val="A6ADB6"/>
                 </a:solidFill>
                 <a:latin typeface="GQ Text"/>
                 <a:cs typeface="GQ Text"/>
                 <a:ea typeface="GQ Text"/>
               </a:rPr>
-              <a:t>басудағыдай — оларды арақашықтық бойынша ажырату мүмкін</a:t>
-            </a:r>
-          </a:p>
-          <a:p>
-            <a:pPr algn="l">
-              <a:lnSpc>
-                <a:spcPts val="1600"/>
-              </a:lnSpc>
-            </a:pPr>
-            <a:r>
-              <a:rPr sz="1100">
-                <a:solidFill>
-                  <a:srgbClr val="535C66"/>
+              <a:t>жанды жалғау кестелері</a:t>
+            </a:r>
+          </a:p>
+        </p:txBody>
+      </p:sp>
+      <p:sp>
+        <p:nvSpPr>
+          <p:cNvPr id="17" name="TextBox 16"/>
+          <p:cNvSpPr txBox="1"/>
+          <p:nvPr/>
+        </p:nvSpPr>
+        <p:spPr>
+          <a:xfrm>
+            <a:off x="9479036" y="2548798"/>
+            <a:ext cx="1962851" cy="323169"/>
+          </a:xfrm>
+          <a:prstGeom prst="rect">
+            <a:avLst/>
+          </a:prstGeom>
+          <a:noFill/>
+        </p:spPr>
+        <p:txBody>
+          <a:bodyPr wrap="none" lIns="0" rIns="0" tIns="0" bIns="0" anchor="t">
+            <a:spAutoFit/>
+          </a:bodyPr>
+          <a:lstStyle/>
+          <a:p>
+            <a:pPr algn="l">
+              <a:lnSpc>
+                <a:spcPts val="1792"/>
+              </a:lnSpc>
+            </a:pPr>
+            <a:r>
+              <a:rPr sz="1600" spc="-24">
+                <a:solidFill>
+                  <a:srgbClr val="EEEBE5"/>
+                </a:solidFill>
+                <a:latin typeface="GQ Text Bold"/>
+                <a:cs typeface="GQ Text Bold"/>
+                <a:ea typeface="GQ Text Bold"/>
+              </a:rPr>
+              <a:t>Профиль</a:t>
+            </a:r>
+          </a:p>
+        </p:txBody>
+      </p:sp>
+      <p:sp>
+        <p:nvSpPr>
+          <p:cNvPr id="18" name="TextBox 17"/>
+          <p:cNvSpPr txBox="1"/>
+          <p:nvPr/>
+        </p:nvSpPr>
+        <p:spPr>
+          <a:xfrm>
+            <a:off x="9479036" y="2910332"/>
+            <a:ext cx="1962851" cy="651509"/>
+          </a:xfrm>
+          <a:prstGeom prst="rect">
+            <a:avLst/>
+          </a:prstGeom>
+          <a:noFill/>
+        </p:spPr>
+        <p:txBody>
+          <a:bodyPr wrap="none" lIns="0" rIns="0" tIns="0" bIns="0" anchor="t">
+            <a:spAutoFit/>
+          </a:bodyPr>
+          <a:lstStyle/>
+          <a:p>
+            <a:pPr algn="l">
+              <a:lnSpc>
+                <a:spcPts val="1500"/>
+              </a:lnSpc>
+            </a:pPr>
+            <a:r>
+              <a:rPr sz="1050">
+                <a:solidFill>
+                  <a:srgbClr val="A6ADB6"/>
                 </a:solidFill>
                 <a:latin typeface="GQ Text"/>
                 <a:cs typeface="GQ Text"/>
                 <a:ea typeface="GQ Text"/>
               </a:rPr>
-              <a:t>емес.</a:t>
-            </a:r>
-          </a:p>
-        </p:txBody>
-      </p:sp>
-      <p:sp>
-        <p:nvSpPr>
-          <p:cNvPr id="14" name="TextBox 13"/>
+              <a:t>Статистика, марапаттар</a:t>
+            </a:r>
+          </a:p>
+          <a:p>
+            <a:pPr algn="l">
+              <a:lnSpc>
+                <a:spcPts val="1500"/>
+              </a:lnSpc>
+            </a:pPr>
+            <a:r>
+              <a:rPr sz="1050">
+                <a:solidFill>
+                  <a:srgbClr val="A6ADB6"/>
+                </a:solidFill>
+                <a:latin typeface="GQ Text"/>
+                <a:cs typeface="GQ Text"/>
+                <a:ea typeface="GQ Text"/>
+              </a:rPr>
+              <a:t>және нәтижелерді кесте</a:t>
+            </a:r>
+          </a:p>
+          <a:p>
+            <a:pPr algn="l">
+              <a:lnSpc>
+                <a:spcPts val="1500"/>
+              </a:lnSpc>
+            </a:pPr>
+            <a:r>
+              <a:rPr sz="1050">
+                <a:solidFill>
+                  <a:srgbClr val="A6ADB6"/>
+                </a:solidFill>
+                <a:latin typeface="GQ Text"/>
+                <a:cs typeface="GQ Text"/>
+                <a:ea typeface="GQ Text"/>
+              </a:rPr>
+              <a:t>түрінде жүктеу</a:t>
+            </a:r>
+          </a:p>
+        </p:txBody>
+      </p:sp>
+      <p:sp>
+        <p:nvSpPr>
+          <p:cNvPr id="19" name="Rectangle 18"/>
+          <p:cNvSpPr/>
+          <p:nvPr/>
+        </p:nvSpPr>
+        <p:spPr>
+          <a:xfrm>
+            <a:off x="749808" y="4123435"/>
+            <a:ext cx="10692079" cy="710247"/>
+          </a:xfrm>
+          <a:prstGeom prst="rect">
+            <a:avLst/>
+          </a:prstGeom>
+          <a:solidFill>
+            <a:srgbClr val="0064B9"/>
+          </a:solidFill>
+          <a:ln>
+            <a:noFill/>
+          </a:ln>
+          <a:effectLst/>
+        </p:spPr>
+        <p:txBody>
+          <a:bodyPr rtlCol="0" anchor="ctr" wrap="none"/>
+          <a:lstStyle/>
+          <a:p>
+            <a:pPr algn="ctr"/>
+          </a:p>
+        </p:txBody>
+      </p:sp>
+      <p:sp>
+        <p:nvSpPr>
+          <p:cNvPr id="20" name="TextBox 19"/>
           <p:cNvSpPr txBox="1"/>
           <p:nvPr/>
         </p:nvSpPr>
         <p:spPr>
           <a:xfrm>
-            <a:off x="6470751" y="3189732"/>
-            <a:ext cx="4696815" cy="198374"/>
+            <a:off x="1024127" y="4322521"/>
+            <a:ext cx="10143439" cy="345281"/>
           </a:xfrm>
           <a:prstGeom prst="rect">
             <a:avLst/>
@@ -14739,132 +15090,19 @@
           <a:p>
             <a:pPr algn="l">
               <a:lnSpc>
-                <a:spcPts val="1100"/>
-              </a:lnSpc>
-            </a:pPr>
-            <a:r>
-              <a:rPr sz="850" spc="136">
-                <a:solidFill>
-                  <a:srgbClr val="59AAF8"/>
-                </a:solidFill>
-                <a:latin typeface="IBM Plex Mono SemiBold"/>
-                <a:cs typeface="IBM Plex Mono SemiBold"/>
-                <a:ea typeface="IBM Plex Mono SemiBold"/>
-              </a:rPr>
-              <a:t>МЕН ШЫҒАРҒАН ЕРЕЖЕ</a:t>
-            </a:r>
-          </a:p>
-        </p:txBody>
-      </p:sp>
-      <p:sp>
-        <p:nvSpPr>
-          <p:cNvPr id="15" name="TextBox 14"/>
-          <p:cNvSpPr txBox="1"/>
-          <p:nvPr/>
-        </p:nvSpPr>
-        <p:spPr>
-          <a:xfrm>
-            <a:off x="6470751" y="3469640"/>
-            <a:ext cx="4696815" cy="1583182"/>
-          </a:xfrm>
-          <a:prstGeom prst="rect">
-            <a:avLst/>
-          </a:prstGeom>
-          <a:noFill/>
-        </p:spPr>
-        <p:txBody>
-          <a:bodyPr wrap="none" lIns="0" rIns="0" tIns="0" bIns="0" anchor="t">
-            <a:spAutoFit/>
-          </a:bodyPr>
-          <a:lstStyle/>
-          <a:p>
-            <a:pPr algn="l">
-              <a:lnSpc>
-                <a:spcPts val="2300"/>
-              </a:lnSpc>
-            </a:pPr>
-            <a:r>
-              <a:rPr sz="1700" spc="-26">
-                <a:solidFill>
-                  <a:srgbClr val="EEEBE5"/>
-                </a:solidFill>
-                <a:latin typeface="GQ Text Bold"/>
-                <a:cs typeface="GQ Text Bold"/>
-                <a:ea typeface="GQ Text Bold"/>
-              </a:rPr>
-              <a:t>Қате басу әріпті жоғалтады немесе</a:t>
-            </a:r>
-          </a:p>
-          <a:p>
-            <a:pPr algn="l">
-              <a:lnSpc>
-                <a:spcPts val="2300"/>
-              </a:lnSpc>
-            </a:pPr>
-            <a:r>
-              <a:rPr sz="1700" spc="-26">
-                <a:solidFill>
-                  <a:srgbClr val="EEEBE5"/>
-                </a:solidFill>
-                <a:latin typeface="GQ Text Bold"/>
-                <a:cs typeface="GQ Text Bold"/>
-                <a:ea typeface="GQ Text Bold"/>
-              </a:rPr>
-              <a:t>қосады. Форманың ауысуы оны</a:t>
-            </a:r>
-          </a:p>
-          <a:p>
-            <a:pPr algn="l">
-              <a:lnSpc>
-                <a:spcPts val="2300"/>
-              </a:lnSpc>
-            </a:pPr>
-            <a:r>
-              <a:rPr sz="1700" spc="-26">
-                <a:solidFill>
-                  <a:srgbClr val="EEEBE5"/>
-                </a:solidFill>
-                <a:latin typeface="GQ Text Bold"/>
-                <a:cs typeface="GQ Text Bold"/>
-                <a:ea typeface="GQ Text Bold"/>
-              </a:rPr>
-              <a:t>алмастырады. Сондықтан жеңілдік тек</a:t>
-            </a:r>
-          </a:p>
-          <a:p>
-            <a:pPr algn="l">
-              <a:lnSpc>
-                <a:spcPts val="2300"/>
-              </a:lnSpc>
-            </a:pPr>
-            <a:r>
-              <a:rPr sz="1700" spc="-26">
-                <a:solidFill>
-                  <a:srgbClr val="EEEBE5"/>
-                </a:solidFill>
-                <a:latin typeface="GQ Text Bold"/>
-                <a:cs typeface="GQ Text Bold"/>
-                <a:ea typeface="GQ Text Bold"/>
-              </a:rPr>
-              <a:t>жауап ұзындығы әртүрлі болғанда — және</a:t>
-            </a:r>
-          </a:p>
-          <a:p>
-            <a:pPr algn="l">
-              <a:lnSpc>
-                <a:spcPts val="2300"/>
-              </a:lnSpc>
-            </a:pPr>
-            <a:r>
-              <a:rPr sz="1700" spc="-26">
-                <a:solidFill>
-                  <a:srgbClr val="EEEBE5"/>
-                </a:solidFill>
-                <a:latin typeface="GQ Text Bold"/>
-                <a:cs typeface="GQ Text Bold"/>
-                <a:ea typeface="GQ Text Bold"/>
-              </a:rPr>
-              <a:t>бір таңбадан аспайды.</a:t>
+                <a:spcPts val="1812"/>
+              </a:lnSpc>
+            </a:pPr>
+            <a:r>
+              <a:rPr sz="1250">
+                <a:solidFill>
+                  <a:srgbClr val="FFFFFF"/>
+                </a:solidFill>
+                <a:latin typeface="GQ Text SemiBold"/>
+                <a:cs typeface="GQ Text SemiBold"/>
+                <a:ea typeface="GQ Text SemiBold"/>
+              </a:rPr>
+              <a:t>Сабақ соңындағы қателерді талдау ұпай қоспайды: ол ұпай жинау үшін емес, түсіну үшін керек.</a:t>
             </a:r>
           </a:p>
         </p:txBody>
@@ -14902,7 +15140,7 @@
             <a:avLst/>
           </a:prstGeom>
           <a:solidFill>
-            <a:srgbClr val="F6F7F9"/>
+            <a:srgbClr val="1B222B"/>
           </a:solidFill>
           <a:ln>
             <a:noFill/>
@@ -14919,6 +15157,38 @@
       </p:sp>
       <p:sp>
         <p:nvSpPr>
+          <p:cNvPr id="14" name="Rectangle 13"/>
+          <p:cNvSpPr/>
+          <p:nvPr/>
+        </p:nvSpPr>
+        <p:spPr>
+          <a:xfrm>
+            <a:off x="2852928" y="2259330"/>
+            <a:ext cx="8588959" cy="1929384"/>
+          </a:xfrm>
+          <a:prstGeom prst="rect">
+            <a:avLst/>
+          </a:prstGeom>
+          <a:solidFill>
+            <a:srgbClr val="11161E"/>
+          </a:solidFill>
+          <a:ln w="9525">
+            <a:solidFill>
+              <a:srgbClr val="3B434D"/>
+            </a:solidFill>
+          </a:ln>
+          <a:effectLst/>
+        </p:spPr>
+        <p:txBody>
+          <a:bodyPr rtlCol="0" anchor="ctr" wrap="none"/>
+          <a:lstStyle/>
+          <a:p>
+            <a:pPr algn="ctr"/>
+          </a:p>
+        </p:txBody>
+      </p:sp>
+      <p:sp>
+        <p:nvSpPr>
           <p:cNvPr id="3" name="Rectangle 2"/>
           <p:cNvSpPr/>
           <p:nvPr/>
@@ -14932,7 +15202,7 @@
             <a:avLst/>
           </a:prstGeom>
           <a:solidFill>
-            <a:srgbClr val="CCD4DC"/>
+            <a:srgbClr val="3B434D"/>
           </a:solidFill>
           <a:ln>
             <a:noFill/>
@@ -14977,13 +15247,13 @@
             <a:r>
               <a:rPr sz="850" spc="136">
                 <a:solidFill>
-                  <a:srgbClr val="0064B9"/>
+                  <a:srgbClr val="59AAF8"/>
                 </a:solidFill>
                 <a:latin typeface="IBM Plex Mono SemiBold"/>
                 <a:cs typeface="IBM Plex Mono SemiBold"/>
                 <a:ea typeface="IBM Plex Mono SemiBold"/>
               </a:rPr>
-              <a:t>ЕРЕКШЕЛІГІ · 3</a:t>
+              <a:t>ТІКЕЛЕЙ КӨРСЕТЕМІН</a:t>
             </a:r>
           </a:p>
         </p:txBody>
@@ -15018,13 +15288,13 @@
             <a:r>
               <a:rPr sz="850" spc="85">
                 <a:solidFill>
-                  <a:srgbClr val="535C66"/>
+                  <a:srgbClr val="A6ADB6"/>
                 </a:solidFill>
                 <a:latin typeface="IBM Plex Mono Medium"/>
                 <a:cs typeface="IBM Plex Mono Medium"/>
                 <a:ea typeface="IBM Plex Mono Medium"/>
               </a:rPr>
-              <a:t>07 / 10</a:t>
+              <a:t>07 / 08</a:t>
             </a:r>
           </a:p>
         </p:txBody>
@@ -15037,8 +15307,8 @@
         </p:nvSpPr>
         <p:spPr>
           <a:xfrm>
-            <a:off x="749808" y="819119"/>
-            <a:ext cx="10692079" cy="521002"/>
+            <a:off x="749808" y="790854"/>
+            <a:ext cx="10692079" cy="771855"/>
           </a:xfrm>
           <a:prstGeom prst="rect">
             <a:avLst/>
@@ -15053,19 +15323,19 @@
           <a:p>
             <a:pPr algn="l">
               <a:lnSpc>
-                <a:spcPts val="2889"/>
-              </a:lnSpc>
-            </a:pPr>
-            <a:r>
-              <a:rPr sz="2700" spc="-59">
-                <a:solidFill>
-                  <a:srgbClr val="1B222B"/>
+                <a:spcPts val="4280"/>
+              </a:lnSpc>
+            </a:pPr>
+            <a:r>
+              <a:rPr sz="4000" spc="-88">
+                <a:solidFill>
+                  <a:srgbClr val="EEEBE5"/>
                 </a:solidFill>
                 <a:latin typeface="GQ Text Bold"/>
                 <a:cs typeface="GQ Text Bold"/>
                 <a:ea typeface="GQ Text Bold"/>
               </a:rPr>
-              <a:t>Жалғауларды қосымша кестеден алмайды, ережемен есептейді</a:t>
+              <a:t>Дәл қазір өз телефоныңыздан ашыңыз</a:t>
             </a:r>
           </a:p>
         </p:txBody>
@@ -15078,8 +15348,8 @@
         </p:nvSpPr>
         <p:spPr>
           <a:xfrm>
-            <a:off x="749808" y="1353520"/>
-            <a:ext cx="8981346" cy="567349"/>
+            <a:off x="749808" y="1530177"/>
+            <a:ext cx="8553663" cy="332907"/>
           </a:xfrm>
           <a:prstGeom prst="rect">
             <a:avLst/>
@@ -15100,75 +15370,110 @@
             <a:r>
               <a:rPr sz="1300">
                 <a:solidFill>
-                  <a:srgbClr val="535C66"/>
+                  <a:srgbClr val="A6ADB6"/>
                 </a:solidFill>
                 <a:latin typeface="GQ Text"/>
                 <a:cs typeface="GQ Text"/>
                 <a:ea typeface="GQ Text"/>
               </a:rPr>
-              <a:t>Оқушы кез келген өз сөзін қойып, оның барлық формасын көреді: жалғау боялған, қасында неге дәл сол</a:t>
-            </a:r>
-          </a:p>
-          <a:p>
-            <a:pPr algn="l">
-              <a:lnSpc>
-                <a:spcPts val="1846"/>
-              </a:lnSpc>
-            </a:pPr>
-            <a:r>
-              <a:rPr sz="1300">
-                <a:solidFill>
-                  <a:srgbClr val="535C66"/>
+              <a:t>Камераны кодқа бағыттаңыз. Қосымша бірден ашылады — ештеңе орнатудың қажеті жоқ.</a:t>
+            </a:r>
+          </a:p>
+        </p:txBody>
+      </p:sp>
+      <p:pic>
+        <p:nvPicPr>
+          <p:cNvPr id="8" name="Picture 7" descr="image.png"/>
+          <p:cNvPicPr>
+            <a:picLocks noChangeAspect="1"/>
+          </p:cNvPicPr>
+          <p:nvPr/>
+        </p:nvPicPr>
+        <p:blipFill>
+          <a:blip r:embed="rId2"/>
+          <a:stretch>
+            <a:fillRect/>
+          </a:stretch>
+        </p:blipFill>
+        <p:spPr>
+          <a:xfrm>
+            <a:off x="749808" y="2259330"/>
+            <a:ext cx="1417320" cy="1417320"/>
+          </a:xfrm>
+          <a:prstGeom prst="rect">
+            <a:avLst/>
+          </a:prstGeom>
+        </p:spPr>
+      </p:pic>
+      <p:sp>
+        <p:nvSpPr>
+          <p:cNvPr id="9" name="TextBox 8"/>
+          <p:cNvSpPr txBox="1"/>
+          <p:nvPr/>
+        </p:nvSpPr>
+        <p:spPr>
+          <a:xfrm>
+            <a:off x="749808" y="3777233"/>
+            <a:ext cx="2057400" cy="414909"/>
+          </a:xfrm>
+          <a:prstGeom prst="rect">
+            <a:avLst/>
+          </a:prstGeom>
+          <a:noFill/>
+        </p:spPr>
+        <p:txBody>
+          <a:bodyPr wrap="none" lIns="0" rIns="0" tIns="0" bIns="0" anchor="t">
+            <a:spAutoFit/>
+          </a:bodyPr>
+          <a:lstStyle/>
+          <a:p>
+            <a:pPr algn="l">
+              <a:lnSpc>
+                <a:spcPts val="1350"/>
+              </a:lnSpc>
+            </a:pPr>
+            <a:r>
+              <a:rPr sz="950">
+                <a:solidFill>
+                  <a:srgbClr val="A6ADB6"/>
                 </a:solidFill>
                 <a:latin typeface="GQ Text"/>
                 <a:cs typeface="GQ Text"/>
                 <a:ea typeface="GQ Text"/>
               </a:rPr>
-              <a:t>таңдалғаны айтылған.</a:t>
-            </a:r>
-          </a:p>
-        </p:txBody>
-      </p:sp>
-      <p:sp>
-        <p:nvSpPr>
-          <p:cNvPr id="8" name="Rectangle 7"/>
-          <p:cNvSpPr/>
-          <p:nvPr/>
-        </p:nvSpPr>
-        <p:spPr>
-          <a:xfrm>
-            <a:off x="749808" y="2097659"/>
-            <a:ext cx="10692079" cy="7315"/>
-          </a:xfrm>
-          <a:prstGeom prst="rect">
-            <a:avLst/>
-          </a:prstGeom>
-          <a:solidFill>
-            <a:srgbClr val="CCD4DC"/>
-          </a:solidFill>
-          <a:ln>
-            <a:noFill/>
-          </a:ln>
-          <a:effectLst/>
-        </p:spPr>
-        <p:txBody>
-          <a:bodyPr rtlCol="0" anchor="ctr" wrap="none"/>
-          <a:lstStyle/>
-          <a:p>
-            <a:pPr algn="ctr"/>
-          </a:p>
-        </p:txBody>
-      </p:sp>
-      <p:sp>
-        <p:nvSpPr>
-          <p:cNvPr id="9" name="TextBox 8"/>
+              <a:t>Қосымшаны ашу:</a:t>
+            </a:r>
+          </a:p>
+          <a:p>
+            <a:pPr algn="l">
+              <a:lnSpc>
+                <a:spcPts val="1350"/>
+              </a:lnSpc>
+            </a:pPr>
+            <a:r>
+              <a:rPr sz="950">
+                <a:solidFill>
+                  <a:srgbClr val="A6ADB6"/>
+                </a:solidFill>
+                <a:latin typeface="GQ Text"/>
+                <a:cs typeface="GQ Text"/>
+                <a:ea typeface="GQ Text"/>
+              </a:rPr>
+              <a:t>tilashar-kz.vercel.app</a:t>
+            </a:r>
+          </a:p>
+        </p:txBody>
+      </p:sp>
+      <p:sp>
+        <p:nvSpPr>
+          <p:cNvPr id="10" name="TextBox 9"/>
           <p:cNvSpPr txBox="1"/>
           <p:nvPr/>
         </p:nvSpPr>
         <p:spPr>
           <a:xfrm>
-            <a:off x="749808" y="2375839"/>
-            <a:ext cx="216916" cy="290347"/>
+            <a:off x="3108960" y="2493010"/>
+            <a:ext cx="8076895" cy="198374"/>
           </a:xfrm>
           <a:prstGeom prst="rect">
             <a:avLst/>
@@ -15183,33 +15488,238 @@
           <a:p>
             <a:pPr algn="l">
               <a:lnSpc>
-                <a:spcPts val="1610"/>
-              </a:lnSpc>
-            </a:pPr>
-            <a:r>
-              <a:rPr sz="1150">
-                <a:solidFill>
-                  <a:srgbClr val="0064B9"/>
+                <a:spcPts val="1100"/>
+              </a:lnSpc>
+            </a:pPr>
+            <a:r>
+              <a:rPr sz="850" spc="136">
+                <a:solidFill>
+                  <a:srgbClr val="59AAF8"/>
+                </a:solidFill>
+                <a:latin typeface="IBM Plex Mono SemiBold"/>
+                <a:cs typeface="IBM Plex Mono SemiBold"/>
+                <a:ea typeface="IBM Plex Mono SemiBold"/>
+              </a:rPr>
+              <a:t>ТЕЛЕФОНҒА ОРНАТУ</a:t>
+            </a:r>
+          </a:p>
+        </p:txBody>
+      </p:sp>
+      <p:sp>
+        <p:nvSpPr>
+          <p:cNvPr id="11" name="TextBox 10"/>
+          <p:cNvSpPr txBox="1"/>
+          <p:nvPr/>
+        </p:nvSpPr>
+        <p:spPr>
+          <a:xfrm>
+            <a:off x="3108960" y="2768854"/>
+            <a:ext cx="8076895" cy="288544"/>
+          </a:xfrm>
+          <a:prstGeom prst="rect">
+            <a:avLst/>
+          </a:prstGeom>
+          <a:noFill/>
+        </p:spPr>
+        <p:txBody>
+          <a:bodyPr wrap="none" lIns="0" rIns="0" tIns="0" bIns="0" anchor="t">
+            <a:spAutoFit/>
+          </a:bodyPr>
+          <a:lstStyle/>
+          <a:p>
+            <a:pPr algn="l">
+              <a:lnSpc>
+                <a:spcPts val="1600"/>
+              </a:lnSpc>
+            </a:pPr>
+            <a:r>
+              <a:rPr sz="1100">
+                <a:solidFill>
+                  <a:srgbClr val="EEEBE5"/>
+                </a:solidFill>
+                <a:latin typeface="GQ Text"/>
+                <a:cs typeface="GQ Text"/>
+                <a:ea typeface="GQ Text"/>
+              </a:rPr>
+              <a:t>Android: мәзір → «Қосымшаны орнату». iPhone: «Бөлісу» → «Негізгі экранға»</a:t>
+            </a:r>
+          </a:p>
+        </p:txBody>
+      </p:sp>
+      <p:sp>
+        <p:nvSpPr>
+          <p:cNvPr id="12" name="TextBox 11"/>
+          <p:cNvSpPr txBox="1"/>
+          <p:nvPr/>
+        </p:nvSpPr>
+        <p:spPr>
+          <a:xfrm>
+            <a:off x="3108960" y="3329686"/>
+            <a:ext cx="8076895" cy="198374"/>
+          </a:xfrm>
+          <a:prstGeom prst="rect">
+            <a:avLst/>
+          </a:prstGeom>
+          <a:noFill/>
+        </p:spPr>
+        <p:txBody>
+          <a:bodyPr wrap="none" lIns="0" rIns="0" tIns="0" bIns="0" anchor="t">
+            <a:spAutoFit/>
+          </a:bodyPr>
+          <a:lstStyle/>
+          <a:p>
+            <a:pPr algn="l">
+              <a:lnSpc>
+                <a:spcPts val="1100"/>
+              </a:lnSpc>
+            </a:pPr>
+            <a:r>
+              <a:rPr sz="850" spc="136">
+                <a:solidFill>
+                  <a:srgbClr val="59AAF8"/>
+                </a:solidFill>
+                <a:latin typeface="IBM Plex Mono SemiBold"/>
+                <a:cs typeface="IBM Plex Mono SemiBold"/>
+                <a:ea typeface="IBM Plex Mono SemiBold"/>
+              </a:rPr>
+              <a:t>ANDROID ФАЙЛЫМЕН</a:t>
+            </a:r>
+          </a:p>
+        </p:txBody>
+      </p:sp>
+      <p:sp>
+        <p:nvSpPr>
+          <p:cNvPr id="13" name="TextBox 12"/>
+          <p:cNvSpPr txBox="1"/>
+          <p:nvPr/>
+        </p:nvSpPr>
+        <p:spPr>
+          <a:xfrm>
+            <a:off x="3108960" y="3605530"/>
+            <a:ext cx="8076895" cy="288544"/>
+          </a:xfrm>
+          <a:prstGeom prst="rect">
+            <a:avLst/>
+          </a:prstGeom>
+          <a:noFill/>
+        </p:spPr>
+        <p:txBody>
+          <a:bodyPr wrap="none" lIns="0" rIns="0" tIns="0" bIns="0" anchor="t">
+            <a:spAutoFit/>
+          </a:bodyPr>
+          <a:lstStyle/>
+          <a:p>
+            <a:pPr algn="l">
+              <a:lnSpc>
+                <a:spcPts val="1600"/>
+              </a:lnSpc>
+            </a:pPr>
+            <a:r>
+              <a:rPr sz="1100">
+                <a:solidFill>
+                  <a:srgbClr val="EEEBE5"/>
+                </a:solidFill>
+                <a:latin typeface="GQ Text"/>
+                <a:cs typeface="GQ Text"/>
+                <a:ea typeface="GQ Text"/>
+              </a:rPr>
+              <a:t>Дайын файл осында: github.com/s-chaikovskiy/grammarquest-web/releases</a:t>
+            </a:r>
+          </a:p>
+        </p:txBody>
+      </p:sp>
+      <p:sp>
+        <p:nvSpPr>
+          <p:cNvPr id="15" name="TextBox 14"/>
+          <p:cNvSpPr txBox="1"/>
+          <p:nvPr/>
+        </p:nvSpPr>
+        <p:spPr>
+          <a:xfrm>
+            <a:off x="749808" y="4504466"/>
+            <a:ext cx="3177384" cy="565546"/>
+          </a:xfrm>
+          <a:prstGeom prst="rect">
+            <a:avLst/>
+          </a:prstGeom>
+          <a:noFill/>
+        </p:spPr>
+        <p:txBody>
+          <a:bodyPr wrap="none" lIns="0" rIns="0" tIns="0" bIns="0" anchor="t">
+            <a:spAutoFit/>
+          </a:bodyPr>
+          <a:lstStyle/>
+          <a:p>
+            <a:pPr algn="l">
+              <a:lnSpc>
+                <a:spcPts val="3136"/>
+              </a:lnSpc>
+            </a:pPr>
+            <a:r>
+              <a:rPr sz="3200" spc="-96">
+                <a:solidFill>
+                  <a:srgbClr val="EEEBE5"/>
+                </a:solidFill>
+                <a:latin typeface="GQ Text Bold"/>
+                <a:cs typeface="GQ Text Bold"/>
+                <a:ea typeface="GQ Text Bold"/>
+              </a:rPr>
+              <a:t>202</a:t>
+            </a:r>
+          </a:p>
+        </p:txBody>
+      </p:sp>
+      <p:sp>
+        <p:nvSpPr>
+          <p:cNvPr id="16" name="TextBox 15"/>
+          <p:cNvSpPr txBox="1"/>
+          <p:nvPr/>
+        </p:nvSpPr>
+        <p:spPr>
+          <a:xfrm>
+            <a:off x="749808" y="5033517"/>
+            <a:ext cx="3177384" cy="216408"/>
+          </a:xfrm>
+          <a:prstGeom prst="rect">
+            <a:avLst/>
+          </a:prstGeom>
+          <a:noFill/>
+        </p:spPr>
+        <p:txBody>
+          <a:bodyPr wrap="none" lIns="0" rIns="0" tIns="0" bIns="0" anchor="t">
+            <a:spAutoFit/>
+          </a:bodyPr>
+          <a:lstStyle/>
+          <a:p>
+            <a:pPr algn="l">
+              <a:lnSpc>
+                <a:spcPts val="1200"/>
+              </a:lnSpc>
+            </a:pPr>
+            <a:r>
+              <a:rPr sz="800" spc="64">
+                <a:solidFill>
+                  <a:srgbClr val="A6ADB6"/>
                 </a:solidFill>
                 <a:latin typeface="IBM Plex Mono Medium"/>
                 <a:cs typeface="IBM Plex Mono Medium"/>
                 <a:ea typeface="IBM Plex Mono Medium"/>
               </a:rPr>
-              <a:t>—</a:t>
-            </a:r>
-          </a:p>
-        </p:txBody>
-      </p:sp>
-      <p:sp>
-        <p:nvSpPr>
-          <p:cNvPr id="10" name="TextBox 9"/>
+              <a:t>КБ</a:t>
+            </a:r>
+          </a:p>
+        </p:txBody>
+      </p:sp>
+      <p:sp>
+        <p:nvSpPr>
+          <p:cNvPr id="17" name="TextBox 16"/>
           <p:cNvSpPr txBox="1"/>
           <p:nvPr/>
         </p:nvSpPr>
         <p:spPr>
           <a:xfrm>
-            <a:off x="966724" y="2375839"/>
-            <a:ext cx="6569760" cy="511174"/>
+            <a:off x="749808" y="5274330"/>
+            <a:ext cx="3177384" cy="243278"/>
           </a:xfrm>
           <a:prstGeom prst="rect">
             <a:avLst/>
@@ -15224,62 +15734,156 @@
           <a:p>
             <a:pPr algn="l">
               <a:lnSpc>
-                <a:spcPts val="1610"/>
-              </a:lnSpc>
-            </a:pPr>
-            <a:r>
-              <a:rPr sz="1150">
-                <a:solidFill>
-                  <a:srgbClr val="1B222B"/>
-                </a:solidFill>
-                <a:latin typeface="GQ Text SemiBold"/>
-                <a:cs typeface="GQ Text SemiBold"/>
-                <a:ea typeface="GQ Text SemiBold"/>
-              </a:rPr>
-              <a:t>Үндестік заңы. </a:t>
-            </a:r>
-            <a:r>
-              <a:rPr sz="1150">
-                <a:solidFill>
-                  <a:srgbClr val="1B222B"/>
+                <a:spcPts val="1349"/>
+              </a:lnSpc>
+            </a:pPr>
+            <a:r>
+              <a:rPr sz="950">
+                <a:solidFill>
+                  <a:srgbClr val="A6ADB6"/>
                 </a:solidFill>
                 <a:latin typeface="GQ Text"/>
                 <a:cs typeface="GQ Text"/>
                 <a:ea typeface="GQ Text"/>
               </a:rPr>
-              <a:t> Жалғаудағы дауысты дыбыстың тобы соңғы әріптен емес, сөз түбірінен</a:t>
-            </a:r>
-          </a:p>
-          <a:p>
-            <a:pPr algn="l">
-              <a:lnSpc>
-                <a:spcPts val="1610"/>
-              </a:lnSpc>
-            </a:pPr>
-            <a:r>
-              <a:rPr sz="1150">
-                <a:solidFill>
-                  <a:srgbClr val="1B222B"/>
+              <a:t>сығылған код пен стиль</a:t>
+            </a:r>
+          </a:p>
+        </p:txBody>
+      </p:sp>
+      <p:sp>
+        <p:nvSpPr>
+          <p:cNvPr id="18" name="TextBox 17"/>
+          <p:cNvSpPr txBox="1"/>
+          <p:nvPr/>
+        </p:nvSpPr>
+        <p:spPr>
+          <a:xfrm>
+            <a:off x="4201512" y="4504466"/>
+            <a:ext cx="3177384" cy="565546"/>
+          </a:xfrm>
+          <a:prstGeom prst="rect">
+            <a:avLst/>
+          </a:prstGeom>
+          <a:noFill/>
+        </p:spPr>
+        <p:txBody>
+          <a:bodyPr wrap="none" lIns="0" rIns="0" tIns="0" bIns="0" anchor="t">
+            <a:spAutoFit/>
+          </a:bodyPr>
+          <a:lstStyle/>
+          <a:p>
+            <a:pPr algn="l">
+              <a:lnSpc>
+                <a:spcPts val="3136"/>
+              </a:lnSpc>
+            </a:pPr>
+            <a:r>
+              <a:rPr sz="3200" spc="-96">
+                <a:solidFill>
+                  <a:srgbClr val="EEEBE5"/>
+                </a:solidFill>
+                <a:latin typeface="GQ Text Bold"/>
+                <a:cs typeface="GQ Text Bold"/>
+                <a:ea typeface="GQ Text Bold"/>
+              </a:rPr>
+              <a:t>0</a:t>
+            </a:r>
+          </a:p>
+        </p:txBody>
+      </p:sp>
+      <p:sp>
+        <p:nvSpPr>
+          <p:cNvPr id="19" name="TextBox 18"/>
+          <p:cNvSpPr txBox="1"/>
+          <p:nvPr/>
+        </p:nvSpPr>
+        <p:spPr>
+          <a:xfrm>
+            <a:off x="4201512" y="5033517"/>
+            <a:ext cx="3177384" cy="216408"/>
+          </a:xfrm>
+          <a:prstGeom prst="rect">
+            <a:avLst/>
+          </a:prstGeom>
+          <a:noFill/>
+        </p:spPr>
+        <p:txBody>
+          <a:bodyPr wrap="none" lIns="0" rIns="0" tIns="0" bIns="0" anchor="t">
+            <a:spAutoFit/>
+          </a:bodyPr>
+          <a:lstStyle/>
+          <a:p>
+            <a:pPr algn="l">
+              <a:lnSpc>
+                <a:spcPts val="1200"/>
+              </a:lnSpc>
+            </a:pPr>
+            <a:r>
+              <a:rPr sz="800" spc="64">
+                <a:solidFill>
+                  <a:srgbClr val="A6ADB6"/>
+                </a:solidFill>
+                <a:latin typeface="IBM Plex Mono Medium"/>
+                <a:cs typeface="IBM Plex Mono Medium"/>
+                <a:ea typeface="IBM Plex Mono Medium"/>
+              </a:rPr>
+              <a:t>ЖЕЛІ СҰРАУЫ</a:t>
+            </a:r>
+          </a:p>
+        </p:txBody>
+      </p:sp>
+      <p:sp>
+        <p:nvSpPr>
+          <p:cNvPr id="20" name="TextBox 19"/>
+          <p:cNvSpPr txBox="1"/>
+          <p:nvPr/>
+        </p:nvSpPr>
+        <p:spPr>
+          <a:xfrm>
+            <a:off x="4201512" y="5274330"/>
+            <a:ext cx="3177384" cy="243278"/>
+          </a:xfrm>
+          <a:prstGeom prst="rect">
+            <a:avLst/>
+          </a:prstGeom>
+          <a:noFill/>
+        </p:spPr>
+        <p:txBody>
+          <a:bodyPr wrap="none" lIns="0" rIns="0" tIns="0" bIns="0" anchor="t">
+            <a:spAutoFit/>
+          </a:bodyPr>
+          <a:lstStyle/>
+          <a:p>
+            <a:pPr algn="l">
+              <a:lnSpc>
+                <a:spcPts val="1349"/>
+              </a:lnSpc>
+            </a:pPr>
+            <a:r>
+              <a:rPr sz="950">
+                <a:solidFill>
+                  <a:srgbClr val="A6ADB6"/>
                 </a:solidFill>
                 <a:latin typeface="GQ Text"/>
                 <a:cs typeface="GQ Text"/>
                 <a:ea typeface="GQ Text"/>
               </a:rPr>
-              <a:t>алынады.</a:t>
-            </a:r>
-          </a:p>
-        </p:txBody>
-      </p:sp>
-      <p:sp>
-        <p:nvSpPr>
-          <p:cNvPr id="11" name="TextBox 10"/>
+              <a:t>алғашқы жүктеуден кейін</a:t>
+            </a:r>
+          </a:p>
+        </p:txBody>
+      </p:sp>
+      <p:sp>
+        <p:nvSpPr>
+          <p:cNvPr id="21" name="TextBox 20"/>
           <p:cNvSpPr txBox="1"/>
           <p:nvPr/>
         </p:nvSpPr>
         <p:spPr>
           <a:xfrm>
-            <a:off x="749808" y="2967659"/>
-            <a:ext cx="216916" cy="290347"/>
+            <a:off x="749808" y="6285788"/>
+            <a:ext cx="10692079" cy="209194"/>
           </a:xfrm>
           <a:prstGeom prst="rect">
             <a:avLst/>
@@ -15294,658 +15898,19 @@
           <a:p>
             <a:pPr algn="l">
               <a:lnSpc>
-                <a:spcPts val="1610"/>
-              </a:lnSpc>
-            </a:pPr>
-            <a:r>
-              <a:rPr sz="1150">
-                <a:solidFill>
-                  <a:srgbClr val="0064B9"/>
-                </a:solidFill>
-                <a:latin typeface="IBM Plex Mono Medium"/>
-                <a:cs typeface="IBM Plex Mono Medium"/>
-                <a:ea typeface="IBM Plex Mono Medium"/>
-              </a:rPr>
-              <a:t>—</a:t>
-            </a:r>
-          </a:p>
-        </p:txBody>
-      </p:sp>
-      <p:sp>
-        <p:nvSpPr>
-          <p:cNvPr id="12" name="TextBox 11"/>
-          <p:cNvSpPr txBox="1"/>
-          <p:nvPr/>
-        </p:nvSpPr>
-        <p:spPr>
-          <a:xfrm>
-            <a:off x="966724" y="2967659"/>
-            <a:ext cx="6569760" cy="306705"/>
-          </a:xfrm>
-          <a:prstGeom prst="rect">
-            <a:avLst/>
-          </a:prstGeom>
-          <a:noFill/>
-        </p:spPr>
-        <p:txBody>
-          <a:bodyPr wrap="none" lIns="0" rIns="0" tIns="0" bIns="0" anchor="t">
-            <a:spAutoFit/>
-          </a:bodyPr>
-          <a:lstStyle/>
-          <a:p>
-            <a:pPr algn="l">
-              <a:lnSpc>
-                <a:spcPts val="1610"/>
-              </a:lnSpc>
-            </a:pPr>
-            <a:r>
-              <a:rPr sz="1150">
-                <a:solidFill>
-                  <a:srgbClr val="1B222B"/>
-                </a:solidFill>
-                <a:latin typeface="GQ Text SemiBold"/>
-                <a:cs typeface="GQ Text SemiBold"/>
-                <a:ea typeface="GQ Text SemiBold"/>
-              </a:rPr>
-              <a:t>Ұяңдау. </a:t>
-            </a:r>
-            <a:r>
-              <a:rPr sz="1150">
-                <a:solidFill>
-                  <a:srgbClr val="1B222B"/>
+                <a:spcPts val="1160"/>
+              </a:lnSpc>
+            </a:pPr>
+            <a:r>
+              <a:rPr sz="850">
+                <a:solidFill>
+                  <a:srgbClr val="A6ADB6"/>
                 </a:solidFill>
                 <a:latin typeface="GQ Text"/>
                 <a:cs typeface="GQ Text"/>
                 <a:ea typeface="GQ Text"/>
               </a:rPr>
-              <a:t> «кітап» + «ым» → «кітабым»: қ, к, п дауысты жалғау алдында ұяңдайды.</a:t>
-            </a:r>
-          </a:p>
-        </p:txBody>
-      </p:sp>
-      <p:sp>
-        <p:nvSpPr>
-          <p:cNvPr id="13" name="TextBox 12"/>
-          <p:cNvSpPr txBox="1"/>
-          <p:nvPr/>
-        </p:nvSpPr>
-        <p:spPr>
-          <a:xfrm>
-            <a:off x="749808" y="3355009"/>
-            <a:ext cx="216916" cy="290347"/>
-          </a:xfrm>
-          <a:prstGeom prst="rect">
-            <a:avLst/>
-          </a:prstGeom>
-          <a:noFill/>
-        </p:spPr>
-        <p:txBody>
-          <a:bodyPr wrap="none" lIns="0" rIns="0" tIns="0" bIns="0" anchor="t">
-            <a:spAutoFit/>
-          </a:bodyPr>
-          <a:lstStyle/>
-          <a:p>
-            <a:pPr algn="l">
-              <a:lnSpc>
-                <a:spcPts val="1610"/>
-              </a:lnSpc>
-            </a:pPr>
-            <a:r>
-              <a:rPr sz="1150">
-                <a:solidFill>
-                  <a:srgbClr val="0064B9"/>
-                </a:solidFill>
-                <a:latin typeface="IBM Plex Mono Medium"/>
-                <a:cs typeface="IBM Plex Mono Medium"/>
-                <a:ea typeface="IBM Plex Mono Medium"/>
-              </a:rPr>
-              <a:t>—</a:t>
-            </a:r>
-          </a:p>
-        </p:txBody>
-      </p:sp>
-      <p:sp>
-        <p:nvSpPr>
-          <p:cNvPr id="14" name="TextBox 13"/>
-          <p:cNvSpPr txBox="1"/>
-          <p:nvPr/>
-        </p:nvSpPr>
-        <p:spPr>
-          <a:xfrm>
-            <a:off x="966724" y="3355009"/>
-            <a:ext cx="6569760" cy="306705"/>
-          </a:xfrm>
-          <a:prstGeom prst="rect">
-            <a:avLst/>
-          </a:prstGeom>
-          <a:noFill/>
-        </p:spPr>
-        <p:txBody>
-          <a:bodyPr wrap="none" lIns="0" rIns="0" tIns="0" bIns="0" anchor="t">
-            <a:spAutoFit/>
-          </a:bodyPr>
-          <a:lstStyle/>
-          <a:p>
-            <a:pPr algn="l">
-              <a:lnSpc>
-                <a:spcPts val="1610"/>
-              </a:lnSpc>
-            </a:pPr>
-            <a:r>
-              <a:rPr sz="1150">
-                <a:solidFill>
-                  <a:srgbClr val="1B222B"/>
-                </a:solidFill>
-                <a:latin typeface="GQ Text SemiBold"/>
-                <a:cs typeface="GQ Text SemiBold"/>
-                <a:ea typeface="GQ Text SemiBold"/>
-              </a:rPr>
-              <a:t>Соңғы дыбыс. </a:t>
-            </a:r>
-            <a:r>
-              <a:rPr sz="1150">
-                <a:solidFill>
-                  <a:srgbClr val="1B222B"/>
-                </a:solidFill>
-                <a:latin typeface="GQ Text"/>
-                <a:cs typeface="GQ Text"/>
-                <a:ea typeface="GQ Text"/>
-              </a:rPr>
-              <a:t> р, й, у-дан кейін -лар/-лер, ал л, м, н, ң-нан кейін -дар/-дер қойылады.</a:t>
-            </a:r>
-          </a:p>
-        </p:txBody>
-      </p:sp>
-      <p:sp>
-        <p:nvSpPr>
-          <p:cNvPr id="15" name="TextBox 14"/>
-          <p:cNvSpPr txBox="1"/>
-          <p:nvPr/>
-        </p:nvSpPr>
-        <p:spPr>
-          <a:xfrm>
-            <a:off x="8011972" y="2348814"/>
-            <a:ext cx="1009192" cy="530199"/>
-          </a:xfrm>
-          <a:prstGeom prst="rect">
-            <a:avLst/>
-          </a:prstGeom>
-          <a:noFill/>
-        </p:spPr>
-        <p:txBody>
-          <a:bodyPr wrap="none" lIns="0" rIns="0" tIns="0" bIns="0" anchor="t">
-            <a:spAutoFit/>
-          </a:bodyPr>
-          <a:lstStyle/>
-          <a:p>
-            <a:pPr algn="l">
-              <a:lnSpc>
-                <a:spcPts val="2940"/>
-              </a:lnSpc>
-            </a:pPr>
-            <a:r>
-              <a:rPr sz="3000" spc="-90">
-                <a:solidFill>
-                  <a:srgbClr val="1B222B"/>
-                </a:solidFill>
-                <a:latin typeface="GQ Text Bold"/>
-                <a:cs typeface="GQ Text Bold"/>
-                <a:ea typeface="GQ Text Bold"/>
-              </a:rPr>
-              <a:t>7</a:t>
-            </a:r>
-          </a:p>
-        </p:txBody>
-      </p:sp>
-      <p:sp>
-        <p:nvSpPr>
-          <p:cNvPr id="16" name="TextBox 15"/>
-          <p:cNvSpPr txBox="1"/>
-          <p:nvPr/>
-        </p:nvSpPr>
-        <p:spPr>
-          <a:xfrm>
-            <a:off x="8011972" y="2848991"/>
-            <a:ext cx="1009192" cy="216408"/>
-          </a:xfrm>
-          <a:prstGeom prst="rect">
-            <a:avLst/>
-          </a:prstGeom>
-          <a:noFill/>
-        </p:spPr>
-        <p:txBody>
-          <a:bodyPr wrap="none" lIns="0" rIns="0" tIns="0" bIns="0" anchor="t">
-            <a:spAutoFit/>
-          </a:bodyPr>
-          <a:lstStyle/>
-          <a:p>
-            <a:pPr algn="l">
-              <a:lnSpc>
-                <a:spcPts val="1200"/>
-              </a:lnSpc>
-            </a:pPr>
-            <a:r>
-              <a:rPr sz="800" spc="64">
-                <a:solidFill>
-                  <a:srgbClr val="535C66"/>
-                </a:solidFill>
-                <a:latin typeface="IBM Plex Mono Medium"/>
-                <a:cs typeface="IBM Plex Mono Medium"/>
-                <a:ea typeface="IBM Plex Mono Medium"/>
-              </a:rPr>
-              <a:t>СЕПТІК</a:t>
-            </a:r>
-          </a:p>
-        </p:txBody>
-      </p:sp>
-      <p:sp>
-        <p:nvSpPr>
-          <p:cNvPr id="17" name="TextBox 16"/>
-          <p:cNvSpPr txBox="1"/>
-          <p:nvPr/>
-        </p:nvSpPr>
-        <p:spPr>
-          <a:xfrm>
-            <a:off x="8011972" y="3089803"/>
-            <a:ext cx="1009192" cy="243278"/>
-          </a:xfrm>
-          <a:prstGeom prst="rect">
-            <a:avLst/>
-          </a:prstGeom>
-          <a:noFill/>
-        </p:spPr>
-        <p:txBody>
-          <a:bodyPr wrap="none" lIns="0" rIns="0" tIns="0" bIns="0" anchor="t">
-            <a:spAutoFit/>
-          </a:bodyPr>
-          <a:lstStyle/>
-          <a:p>
-            <a:pPr algn="l">
-              <a:lnSpc>
-                <a:spcPts val="1349"/>
-              </a:lnSpc>
-            </a:pPr>
-            <a:r>
-              <a:rPr sz="950">
-                <a:solidFill>
-                  <a:srgbClr val="535C66"/>
-                </a:solidFill>
-                <a:latin typeface="GQ Text"/>
-                <a:cs typeface="GQ Text"/>
-                <a:ea typeface="GQ Text"/>
-              </a:rPr>
-              <a:t>қазақ тіліндегі</a:t>
-            </a:r>
-          </a:p>
-        </p:txBody>
-      </p:sp>
-      <p:sp>
-        <p:nvSpPr>
-          <p:cNvPr id="18" name="TextBox 17"/>
-          <p:cNvSpPr txBox="1"/>
-          <p:nvPr/>
-        </p:nvSpPr>
-        <p:spPr>
-          <a:xfrm>
-            <a:off x="9222333" y="2348814"/>
-            <a:ext cx="1009192" cy="530199"/>
-          </a:xfrm>
-          <a:prstGeom prst="rect">
-            <a:avLst/>
-          </a:prstGeom>
-          <a:noFill/>
-        </p:spPr>
-        <p:txBody>
-          <a:bodyPr wrap="none" lIns="0" rIns="0" tIns="0" bIns="0" anchor="t">
-            <a:spAutoFit/>
-          </a:bodyPr>
-          <a:lstStyle/>
-          <a:p>
-            <a:pPr algn="l">
-              <a:lnSpc>
-                <a:spcPts val="2940"/>
-              </a:lnSpc>
-            </a:pPr>
-            <a:r>
-              <a:rPr sz="3000" spc="-90">
-                <a:solidFill>
-                  <a:srgbClr val="1B222B"/>
-                </a:solidFill>
-                <a:latin typeface="GQ Text Bold"/>
-                <a:cs typeface="GQ Text Bold"/>
-                <a:ea typeface="GQ Text Bold"/>
-              </a:rPr>
-              <a:t>21</a:t>
-            </a:r>
-          </a:p>
-        </p:txBody>
-      </p:sp>
-      <p:sp>
-        <p:nvSpPr>
-          <p:cNvPr id="19" name="TextBox 18"/>
-          <p:cNvSpPr txBox="1"/>
-          <p:nvPr/>
-        </p:nvSpPr>
-        <p:spPr>
-          <a:xfrm>
-            <a:off x="9222333" y="2848991"/>
-            <a:ext cx="1009192" cy="216408"/>
-          </a:xfrm>
-          <a:prstGeom prst="rect">
-            <a:avLst/>
-          </a:prstGeom>
-          <a:noFill/>
-        </p:spPr>
-        <p:txBody>
-          <a:bodyPr wrap="none" lIns="0" rIns="0" tIns="0" bIns="0" anchor="t">
-            <a:spAutoFit/>
-          </a:bodyPr>
-          <a:lstStyle/>
-          <a:p>
-            <a:pPr algn="l">
-              <a:lnSpc>
-                <a:spcPts val="1200"/>
-              </a:lnSpc>
-            </a:pPr>
-            <a:r>
-              <a:rPr sz="800" spc="64">
-                <a:solidFill>
-                  <a:srgbClr val="535C66"/>
-                </a:solidFill>
-                <a:latin typeface="IBM Plex Mono Medium"/>
-                <a:cs typeface="IBM Plex Mono Medium"/>
-                <a:ea typeface="IBM Plex Mono Medium"/>
-              </a:rPr>
-              <a:t>ЕРЕЖЕГЕ ТЕСТ</a:t>
-            </a:r>
-          </a:p>
-        </p:txBody>
-      </p:sp>
-      <p:sp>
-        <p:nvSpPr>
-          <p:cNvPr id="20" name="TextBox 19"/>
-          <p:cNvSpPr txBox="1"/>
-          <p:nvPr/>
-        </p:nvSpPr>
-        <p:spPr>
-          <a:xfrm>
-            <a:off x="9222333" y="3089803"/>
-            <a:ext cx="1009192" cy="414601"/>
-          </a:xfrm>
-          <a:prstGeom prst="rect">
-            <a:avLst/>
-          </a:prstGeom>
-          <a:noFill/>
-        </p:spPr>
-        <p:txBody>
-          <a:bodyPr wrap="none" lIns="0" rIns="0" tIns="0" bIns="0" anchor="t">
-            <a:spAutoFit/>
-          </a:bodyPr>
-          <a:lstStyle/>
-          <a:p>
-            <a:pPr algn="l">
-              <a:lnSpc>
-                <a:spcPts val="1349"/>
-              </a:lnSpc>
-            </a:pPr>
-            <a:r>
-              <a:rPr sz="950">
-                <a:solidFill>
-                  <a:srgbClr val="535C66"/>
-                </a:solidFill>
-                <a:latin typeface="GQ Text"/>
-                <a:cs typeface="GQ Text"/>
-                <a:ea typeface="GQ Text"/>
-              </a:rPr>
-              <a:t>оқулық</a:t>
-            </a:r>
-          </a:p>
-          <a:p>
-            <a:pPr algn="l">
-              <a:lnSpc>
-                <a:spcPts val="1349"/>
-              </a:lnSpc>
-            </a:pPr>
-            <a:r>
-              <a:rPr sz="950">
-                <a:solidFill>
-                  <a:srgbClr val="535C66"/>
-                </a:solidFill>
-                <a:latin typeface="GQ Text"/>
-                <a:cs typeface="GQ Text"/>
-                <a:ea typeface="GQ Text"/>
-              </a:rPr>
-              <a:t>формаларына</a:t>
-            </a:r>
-          </a:p>
-        </p:txBody>
-      </p:sp>
-      <p:sp>
-        <p:nvSpPr>
-          <p:cNvPr id="21" name="TextBox 20"/>
-          <p:cNvSpPr txBox="1"/>
-          <p:nvPr/>
-        </p:nvSpPr>
-        <p:spPr>
-          <a:xfrm>
-            <a:off x="10432694" y="2348814"/>
-            <a:ext cx="1009192" cy="530199"/>
-          </a:xfrm>
-          <a:prstGeom prst="rect">
-            <a:avLst/>
-          </a:prstGeom>
-          <a:noFill/>
-        </p:spPr>
-        <p:txBody>
-          <a:bodyPr wrap="none" lIns="0" rIns="0" tIns="0" bIns="0" anchor="t">
-            <a:spAutoFit/>
-          </a:bodyPr>
-          <a:lstStyle/>
-          <a:p>
-            <a:pPr algn="l">
-              <a:lnSpc>
-                <a:spcPts val="2940"/>
-              </a:lnSpc>
-            </a:pPr>
-            <a:r>
-              <a:rPr sz="3000" spc="-90">
-                <a:solidFill>
-                  <a:srgbClr val="1B222B"/>
-                </a:solidFill>
-                <a:latin typeface="GQ Text Bold"/>
-                <a:cs typeface="GQ Text Bold"/>
-                <a:ea typeface="GQ Text Bold"/>
-              </a:rPr>
-              <a:t>162</a:t>
-            </a:r>
-          </a:p>
-        </p:txBody>
-      </p:sp>
-      <p:sp>
-        <p:nvSpPr>
-          <p:cNvPr id="22" name="TextBox 21"/>
-          <p:cNvSpPr txBox="1"/>
-          <p:nvPr/>
-        </p:nvSpPr>
-        <p:spPr>
-          <a:xfrm>
-            <a:off x="10432694" y="2848991"/>
-            <a:ext cx="1009192" cy="368808"/>
-          </a:xfrm>
-          <a:prstGeom prst="rect">
-            <a:avLst/>
-          </a:prstGeom>
-          <a:noFill/>
-        </p:spPr>
-        <p:txBody>
-          <a:bodyPr wrap="none" lIns="0" rIns="0" tIns="0" bIns="0" anchor="t">
-            <a:spAutoFit/>
-          </a:bodyPr>
-          <a:lstStyle/>
-          <a:p>
-            <a:pPr algn="l">
-              <a:lnSpc>
-                <a:spcPts val="1200"/>
-              </a:lnSpc>
-            </a:pPr>
-            <a:r>
-              <a:rPr sz="800" spc="64">
-                <a:solidFill>
-                  <a:srgbClr val="535C66"/>
-                </a:solidFill>
-                <a:latin typeface="IBM Plex Mono Medium"/>
-                <a:cs typeface="IBM Plex Mono Medium"/>
-                <a:ea typeface="IBM Plex Mono Medium"/>
-              </a:rPr>
-              <a:t>СӨЗДІК</a:t>
-            </a:r>
-          </a:p>
-          <a:p>
-            <a:pPr algn="l">
-              <a:lnSpc>
-                <a:spcPts val="1200"/>
-              </a:lnSpc>
-            </a:pPr>
-            <a:r>
-              <a:rPr sz="800" spc="64">
-                <a:solidFill>
-                  <a:srgbClr val="535C66"/>
-                </a:solidFill>
-                <a:latin typeface="IBM Plex Mono Medium"/>
-                <a:cs typeface="IBM Plex Mono Medium"/>
-                <a:ea typeface="IBM Plex Mono Medium"/>
-              </a:rPr>
-              <a:t>МАҚАЛАСЫ</a:t>
-            </a:r>
-          </a:p>
-        </p:txBody>
-      </p:sp>
-      <p:sp>
-        <p:nvSpPr>
-          <p:cNvPr id="23" name="TextBox 22"/>
-          <p:cNvSpPr txBox="1"/>
-          <p:nvPr/>
-        </p:nvSpPr>
-        <p:spPr>
-          <a:xfrm>
-            <a:off x="10432694" y="3242203"/>
-            <a:ext cx="1009192" cy="414601"/>
-          </a:xfrm>
-          <a:prstGeom prst="rect">
-            <a:avLst/>
-          </a:prstGeom>
-          <a:noFill/>
-        </p:spPr>
-        <p:txBody>
-          <a:bodyPr wrap="none" lIns="0" rIns="0" tIns="0" bIns="0" anchor="t">
-            <a:spAutoFit/>
-          </a:bodyPr>
-          <a:lstStyle/>
-          <a:p>
-            <a:pPr algn="l">
-              <a:lnSpc>
-                <a:spcPts val="1349"/>
-              </a:lnSpc>
-            </a:pPr>
-            <a:r>
-              <a:rPr sz="950">
-                <a:solidFill>
-                  <a:srgbClr val="535C66"/>
-                </a:solidFill>
-                <a:latin typeface="GQ Text"/>
-                <a:cs typeface="GQ Text"/>
-                <a:ea typeface="GQ Text"/>
-              </a:rPr>
-              <a:t>және кез келген</a:t>
-            </a:r>
-          </a:p>
-          <a:p>
-            <a:pPr algn="l">
-              <a:lnSpc>
-                <a:spcPts val="1349"/>
-              </a:lnSpc>
-            </a:pPr>
-            <a:r>
-              <a:rPr sz="950">
-                <a:solidFill>
-                  <a:srgbClr val="535C66"/>
-                </a:solidFill>
-                <a:latin typeface="GQ Text"/>
-                <a:cs typeface="GQ Text"/>
-                <a:ea typeface="GQ Text"/>
-              </a:rPr>
-              <a:t>өз сөзің</a:t>
-            </a:r>
-          </a:p>
-        </p:txBody>
-      </p:sp>
-      <p:sp>
-        <p:nvSpPr>
-          <p:cNvPr id="24" name="Rectangle 23"/>
-          <p:cNvSpPr/>
-          <p:nvPr/>
-        </p:nvSpPr>
-        <p:spPr>
-          <a:xfrm>
-            <a:off x="749808" y="4069461"/>
-            <a:ext cx="10692079" cy="710247"/>
-          </a:xfrm>
-          <a:prstGeom prst="rect">
-            <a:avLst/>
-          </a:prstGeom>
-          <a:solidFill>
-            <a:srgbClr val="0064B9"/>
-          </a:solidFill>
-          <a:ln>
-            <a:noFill/>
-          </a:ln>
-          <a:effectLst/>
-        </p:spPr>
-        <p:txBody>
-          <a:bodyPr rtlCol="0" anchor="ctr" wrap="none"/>
-          <a:lstStyle/>
-          <a:p>
-            <a:pPr algn="ctr"/>
-          </a:p>
-        </p:txBody>
-      </p:sp>
-      <p:sp>
-        <p:nvSpPr>
-          <p:cNvPr id="25" name="TextBox 24"/>
-          <p:cNvSpPr txBox="1"/>
-          <p:nvPr/>
-        </p:nvSpPr>
-        <p:spPr>
-          <a:xfrm>
-            <a:off x="1024127" y="4268546"/>
-            <a:ext cx="10143439" cy="345281"/>
-          </a:xfrm>
-          <a:prstGeom prst="rect">
-            <a:avLst/>
-          </a:prstGeom>
-          <a:noFill/>
-        </p:spPr>
-        <p:txBody>
-          <a:bodyPr wrap="none" lIns="0" rIns="0" tIns="0" bIns="0" anchor="t">
-            <a:spAutoFit/>
-          </a:bodyPr>
-          <a:lstStyle/>
-          <a:p>
-            <a:pPr algn="l">
-              <a:lnSpc>
-                <a:spcPts val="1812"/>
-              </a:lnSpc>
-            </a:pPr>
-            <a:r>
-              <a:rPr sz="1250">
-                <a:solidFill>
-                  <a:srgbClr val="FFFFFF"/>
-                </a:solidFill>
-                <a:latin typeface="GQ Text SemiBold"/>
-                <a:cs typeface="GQ Text SemiBold"/>
-                <a:ea typeface="GQ Text SemiBold"/>
-              </a:rPr>
-              <a:t>Ережелер автотесттермен қорғалған: оларды байқаусыз бұзу мүмкін емес — жинақ өтпейді.</a:t>
+              <a:t>Қосымша қаріпті және суреттерді қоса алғанда шамамен 1,4 МБ орын алады. Бір рет жүктеліп, әрі қарай интернетсіз жұмыс істейді — өлшеумен тексерілді.</a:t>
             </a:r>
           </a:p>
         </p:txBody>
@@ -16000,947 +15965,14 @@
       </p:sp>
       <p:sp>
         <p:nvSpPr>
-          <p:cNvPr id="3" name="Rectangle 2"/>
-          <p:cNvSpPr/>
-          <p:nvPr/>
-        </p:nvSpPr>
-        <p:spPr>
-          <a:xfrm>
-            <a:off x="749808" y="475488"/>
-            <a:ext cx="10692079" cy="7315"/>
-          </a:xfrm>
-          <a:prstGeom prst="rect">
-            <a:avLst/>
-          </a:prstGeom>
-          <a:solidFill>
-            <a:srgbClr val="3B434D"/>
-          </a:solidFill>
-          <a:ln>
-            <a:noFill/>
-          </a:ln>
-          <a:effectLst/>
-        </p:spPr>
-        <p:txBody>
-          <a:bodyPr rtlCol="0" anchor="ctr" wrap="none"/>
-          <a:lstStyle/>
-          <a:p>
-            <a:pPr algn="ctr"/>
-          </a:p>
-        </p:txBody>
-      </p:sp>
-      <p:sp>
-        <p:nvSpPr>
-          <p:cNvPr id="4" name="TextBox 3"/>
-          <p:cNvSpPr txBox="1"/>
-          <p:nvPr/>
-        </p:nvSpPr>
-        <p:spPr>
-          <a:xfrm>
-            <a:off x="749808" y="559308"/>
-            <a:ext cx="7484455" cy="189357"/>
-          </a:xfrm>
-          <a:prstGeom prst="rect">
-            <a:avLst/>
-          </a:prstGeom>
-          <a:noFill/>
-        </p:spPr>
-        <p:txBody>
-          <a:bodyPr wrap="none" lIns="0" rIns="0" tIns="0" bIns="0" anchor="t">
-            <a:spAutoFit/>
-          </a:bodyPr>
-          <a:lstStyle/>
-          <a:p>
-            <a:pPr algn="l">
-              <a:lnSpc>
-                <a:spcPts val="1050"/>
-              </a:lnSpc>
-            </a:pPr>
-            <a:r>
-              <a:rPr sz="850" spc="136">
-                <a:solidFill>
-                  <a:srgbClr val="59AAF8"/>
-                </a:solidFill>
-                <a:latin typeface="IBM Plex Mono SemiBold"/>
-                <a:cs typeface="IBM Plex Mono SemiBold"/>
-                <a:ea typeface="IBM Plex Mono SemiBold"/>
-              </a:rPr>
-              <a:t>ІШІНДЕ НЕ БАР</a:t>
-            </a:r>
-          </a:p>
-        </p:txBody>
-      </p:sp>
-      <p:sp>
-        <p:nvSpPr>
-          <p:cNvPr id="5" name="TextBox 4"/>
-          <p:cNvSpPr txBox="1"/>
-          <p:nvPr/>
-        </p:nvSpPr>
-        <p:spPr>
-          <a:xfrm>
-            <a:off x="10914329" y="559308"/>
-            <a:ext cx="618998" cy="189357"/>
-          </a:xfrm>
-          <a:prstGeom prst="rect">
-            <a:avLst/>
-          </a:prstGeom>
-          <a:noFill/>
-        </p:spPr>
-        <p:txBody>
-          <a:bodyPr wrap="none" lIns="0" rIns="0" tIns="0" bIns="0" anchor="t">
-            <a:spAutoFit/>
-          </a:bodyPr>
-          <a:lstStyle/>
-          <a:p>
-            <a:pPr algn="l">
-              <a:lnSpc>
-                <a:spcPts val="1050"/>
-              </a:lnSpc>
-            </a:pPr>
-            <a:r>
-              <a:rPr sz="850" spc="85">
-                <a:solidFill>
-                  <a:srgbClr val="A6ADB6"/>
-                </a:solidFill>
-                <a:latin typeface="IBM Plex Mono Medium"/>
-                <a:cs typeface="IBM Plex Mono Medium"/>
-                <a:ea typeface="IBM Plex Mono Medium"/>
-              </a:rPr>
-              <a:t>08 / 10</a:t>
-            </a:r>
-          </a:p>
-        </p:txBody>
-      </p:sp>
-      <p:sp>
-        <p:nvSpPr>
-          <p:cNvPr id="6" name="TextBox 5"/>
-          <p:cNvSpPr txBox="1"/>
-          <p:nvPr/>
-        </p:nvSpPr>
-        <p:spPr>
-          <a:xfrm>
-            <a:off x="749808" y="790854"/>
-            <a:ext cx="10692079" cy="771855"/>
-          </a:xfrm>
-          <a:prstGeom prst="rect">
-            <a:avLst/>
-          </a:prstGeom>
-          <a:noFill/>
-        </p:spPr>
-        <p:txBody>
-          <a:bodyPr wrap="none" lIns="0" rIns="0" tIns="0" bIns="0" anchor="t">
-            <a:spAutoFit/>
-          </a:bodyPr>
-          <a:lstStyle/>
-          <a:p>
-            <a:pPr algn="l">
-              <a:lnSpc>
-                <a:spcPts val="4280"/>
-              </a:lnSpc>
-            </a:pPr>
-            <a:r>
-              <a:rPr sz="4000" spc="-88">
-                <a:solidFill>
-                  <a:srgbClr val="EEEBE5"/>
-                </a:solidFill>
-                <a:latin typeface="GQ Text Bold"/>
-                <a:cs typeface="GQ Text Bold"/>
-                <a:ea typeface="GQ Text Bold"/>
-              </a:rPr>
-              <a:t>Бес бөлім және кесте бойынша қайталау</a:t>
-            </a:r>
-          </a:p>
-        </p:txBody>
-      </p:sp>
-      <p:sp>
-        <p:nvSpPr>
-          <p:cNvPr id="7" name="TextBox 6"/>
-          <p:cNvSpPr txBox="1"/>
-          <p:nvPr/>
-        </p:nvSpPr>
-        <p:spPr>
-          <a:xfrm>
-            <a:off x="749808" y="1530177"/>
-            <a:ext cx="9195188" cy="567349"/>
-          </a:xfrm>
-          <a:prstGeom prst="rect">
-            <a:avLst/>
-          </a:prstGeom>
-          <a:noFill/>
-        </p:spPr>
-        <p:txBody>
-          <a:bodyPr wrap="none" lIns="0" rIns="0" tIns="0" bIns="0" anchor="t">
-            <a:spAutoFit/>
-          </a:bodyPr>
-          <a:lstStyle/>
-          <a:p>
-            <a:pPr algn="l">
-              <a:lnSpc>
-                <a:spcPts val="1846"/>
-              </a:lnSpc>
-            </a:pPr>
-            <a:r>
-              <a:rPr sz="1300">
-                <a:solidFill>
-                  <a:srgbClr val="A6ADB6"/>
-                </a:solidFill>
-                <a:latin typeface="GQ Text"/>
-                <a:cs typeface="GQ Text"/>
-                <a:ea typeface="GQ Text"/>
-              </a:rPr>
-              <a:t>Әр тапсырма карточкаға айналады. Дұрыс жауап берсең — қосымша оны бір күннен кейін, содан соң үш күннен</a:t>
-            </a:r>
-          </a:p>
-          <a:p>
-            <a:pPr algn="l">
-              <a:lnSpc>
-                <a:spcPts val="1846"/>
-              </a:lnSpc>
-            </a:pPr>
-            <a:r>
-              <a:rPr sz="1300">
-                <a:solidFill>
-                  <a:srgbClr val="A6ADB6"/>
-                </a:solidFill>
-                <a:latin typeface="GQ Text"/>
-                <a:cs typeface="GQ Text"/>
-                <a:ea typeface="GQ Text"/>
-              </a:rPr>
-              <a:t>кейін қайтарады. Қателессең — бүгін-ақ қайтарады.</a:t>
-            </a:r>
-          </a:p>
-        </p:txBody>
-      </p:sp>
-      <p:sp>
-        <p:nvSpPr>
-          <p:cNvPr id="8" name="Rectangle 7"/>
-          <p:cNvSpPr/>
-          <p:nvPr/>
-        </p:nvSpPr>
-        <p:spPr>
-          <a:xfrm>
-            <a:off x="749808" y="2274316"/>
-            <a:ext cx="10692079" cy="7315"/>
-          </a:xfrm>
-          <a:prstGeom prst="rect">
-            <a:avLst/>
-          </a:prstGeom>
-          <a:solidFill>
-            <a:srgbClr val="3B434D"/>
-          </a:solidFill>
-          <a:ln>
-            <a:noFill/>
-          </a:ln>
-          <a:effectLst/>
-        </p:spPr>
-        <p:txBody>
-          <a:bodyPr rtlCol="0" anchor="ctr" wrap="none"/>
-          <a:lstStyle/>
-          <a:p>
-            <a:pPr algn="ctr"/>
-          </a:p>
-        </p:txBody>
-      </p:sp>
-      <p:sp>
-        <p:nvSpPr>
-          <p:cNvPr id="9" name="TextBox 8"/>
-          <p:cNvSpPr txBox="1"/>
-          <p:nvPr/>
-        </p:nvSpPr>
-        <p:spPr>
-          <a:xfrm>
-            <a:off x="749808" y="2548798"/>
-            <a:ext cx="1962851" cy="323169"/>
-          </a:xfrm>
-          <a:prstGeom prst="rect">
-            <a:avLst/>
-          </a:prstGeom>
-          <a:noFill/>
-        </p:spPr>
-        <p:txBody>
-          <a:bodyPr wrap="none" lIns="0" rIns="0" tIns="0" bIns="0" anchor="t">
-            <a:spAutoFit/>
-          </a:bodyPr>
-          <a:lstStyle/>
-          <a:p>
-            <a:pPr algn="l">
-              <a:lnSpc>
-                <a:spcPts val="1792"/>
-              </a:lnSpc>
-            </a:pPr>
-            <a:r>
-              <a:rPr sz="1600" spc="-24">
-                <a:solidFill>
-                  <a:srgbClr val="EEEBE5"/>
-                </a:solidFill>
-                <a:latin typeface="GQ Text Bold"/>
-                <a:cs typeface="GQ Text Bold"/>
-                <a:ea typeface="GQ Text Bold"/>
-              </a:rPr>
-              <a:t>Оқу</a:t>
-            </a:r>
-          </a:p>
-        </p:txBody>
-      </p:sp>
-      <p:sp>
-        <p:nvSpPr>
-          <p:cNvPr id="10" name="TextBox 9"/>
-          <p:cNvSpPr txBox="1"/>
-          <p:nvPr/>
-        </p:nvSpPr>
-        <p:spPr>
-          <a:xfrm>
-            <a:off x="749808" y="2910332"/>
-            <a:ext cx="1962851" cy="461010"/>
-          </a:xfrm>
-          <a:prstGeom prst="rect">
-            <a:avLst/>
-          </a:prstGeom>
-          <a:noFill/>
-        </p:spPr>
-        <p:txBody>
-          <a:bodyPr wrap="none" lIns="0" rIns="0" tIns="0" bIns="0" anchor="t">
-            <a:spAutoFit/>
-          </a:bodyPr>
-          <a:lstStyle/>
-          <a:p>
-            <a:pPr algn="l">
-              <a:lnSpc>
-                <a:spcPts val="1500"/>
-              </a:lnSpc>
-            </a:pPr>
-            <a:r>
-              <a:rPr sz="1050">
-                <a:solidFill>
-                  <a:srgbClr val="A6ADB6"/>
-                </a:solidFill>
-                <a:latin typeface="GQ Text"/>
-                <a:cs typeface="GQ Text"/>
-                <a:ea typeface="GQ Text"/>
-              </a:rPr>
-              <a:t>Сабақ жолы: өтілгені мен</a:t>
-            </a:r>
-          </a:p>
-          <a:p>
-            <a:pPr algn="l">
-              <a:lnSpc>
-                <a:spcPts val="1500"/>
-              </a:lnSpc>
-            </a:pPr>
-            <a:r>
-              <a:rPr sz="1050">
-                <a:solidFill>
-                  <a:srgbClr val="A6ADB6"/>
-                </a:solidFill>
-                <a:latin typeface="GQ Text"/>
-                <a:cs typeface="GQ Text"/>
-                <a:ea typeface="GQ Text"/>
-              </a:rPr>
-              <a:t>келесі қадам көрініп тұрады</a:t>
-            </a:r>
-          </a:p>
-        </p:txBody>
-      </p:sp>
-      <p:sp>
-        <p:nvSpPr>
-          <p:cNvPr id="11" name="TextBox 10"/>
-          <p:cNvSpPr txBox="1"/>
-          <p:nvPr/>
-        </p:nvSpPr>
-        <p:spPr>
-          <a:xfrm>
-            <a:off x="2932115" y="2548798"/>
-            <a:ext cx="1962851" cy="323169"/>
-          </a:xfrm>
-          <a:prstGeom prst="rect">
-            <a:avLst/>
-          </a:prstGeom>
-          <a:noFill/>
-        </p:spPr>
-        <p:txBody>
-          <a:bodyPr wrap="none" lIns="0" rIns="0" tIns="0" bIns="0" anchor="t">
-            <a:spAutoFit/>
-          </a:bodyPr>
-          <a:lstStyle/>
-          <a:p>
-            <a:pPr algn="l">
-              <a:lnSpc>
-                <a:spcPts val="1792"/>
-              </a:lnSpc>
-            </a:pPr>
-            <a:r>
-              <a:rPr sz="1600" spc="-24">
-                <a:solidFill>
-                  <a:srgbClr val="EEEBE5"/>
-                </a:solidFill>
-                <a:latin typeface="GQ Text Bold"/>
-                <a:cs typeface="GQ Text Bold"/>
-                <a:ea typeface="GQ Text Bold"/>
-              </a:rPr>
-              <a:t>Жаттығу</a:t>
-            </a:r>
-          </a:p>
-        </p:txBody>
-      </p:sp>
-      <p:sp>
-        <p:nvSpPr>
-          <p:cNvPr id="12" name="TextBox 11"/>
-          <p:cNvSpPr txBox="1"/>
-          <p:nvPr/>
-        </p:nvSpPr>
-        <p:spPr>
-          <a:xfrm>
-            <a:off x="2932115" y="2910332"/>
-            <a:ext cx="1962851" cy="651509"/>
-          </a:xfrm>
-          <a:prstGeom prst="rect">
-            <a:avLst/>
-          </a:prstGeom>
-          <a:noFill/>
-        </p:spPr>
-        <p:txBody>
-          <a:bodyPr wrap="none" lIns="0" rIns="0" tIns="0" bIns="0" anchor="t">
-            <a:spAutoFit/>
-          </a:bodyPr>
-          <a:lstStyle/>
-          <a:p>
-            <a:pPr algn="l">
-              <a:lnSpc>
-                <a:spcPts val="1500"/>
-              </a:lnSpc>
-            </a:pPr>
-            <a:r>
-              <a:rPr sz="1050">
-                <a:solidFill>
-                  <a:srgbClr val="A6ADB6"/>
-                </a:solidFill>
-                <a:latin typeface="GQ Text"/>
-                <a:cs typeface="GQ Text"/>
-                <a:ea typeface="GQ Text"/>
-              </a:rPr>
-              <a:t>Күнделікті мақсат, қайталау,</a:t>
-            </a:r>
-          </a:p>
-          <a:p>
-            <a:pPr algn="l">
-              <a:lnSpc>
-                <a:spcPts val="1500"/>
-              </a:lnSpc>
-            </a:pPr>
-            <a:r>
-              <a:rPr sz="1050">
-                <a:solidFill>
-                  <a:srgbClr val="A6ADB6"/>
-                </a:solidFill>
-                <a:latin typeface="GQ Text"/>
-                <a:cs typeface="GQ Text"/>
-                <a:ea typeface="GQ Text"/>
-              </a:rPr>
-              <a:t>сөз карточкалары, 60</a:t>
-            </a:r>
-          </a:p>
-          <a:p>
-            <a:pPr algn="l">
-              <a:lnSpc>
-                <a:spcPts val="1500"/>
-              </a:lnSpc>
-            </a:pPr>
-            <a:r>
-              <a:rPr sz="1050">
-                <a:solidFill>
-                  <a:srgbClr val="A6ADB6"/>
-                </a:solidFill>
-                <a:latin typeface="GQ Text"/>
-                <a:cs typeface="GQ Text"/>
-                <a:ea typeface="GQ Text"/>
-              </a:rPr>
-              <a:t>секундтық спринт</a:t>
-            </a:r>
-          </a:p>
-        </p:txBody>
-      </p:sp>
-      <p:sp>
-        <p:nvSpPr>
-          <p:cNvPr id="13" name="TextBox 12"/>
-          <p:cNvSpPr txBox="1"/>
-          <p:nvPr/>
-        </p:nvSpPr>
-        <p:spPr>
-          <a:xfrm>
-            <a:off x="5114422" y="2548798"/>
-            <a:ext cx="1962851" cy="323169"/>
-          </a:xfrm>
-          <a:prstGeom prst="rect">
-            <a:avLst/>
-          </a:prstGeom>
-          <a:noFill/>
-        </p:spPr>
-        <p:txBody>
-          <a:bodyPr wrap="none" lIns="0" rIns="0" tIns="0" bIns="0" anchor="t">
-            <a:spAutoFit/>
-          </a:bodyPr>
-          <a:lstStyle/>
-          <a:p>
-            <a:pPr algn="l">
-              <a:lnSpc>
-                <a:spcPts val="1792"/>
-              </a:lnSpc>
-            </a:pPr>
-            <a:r>
-              <a:rPr sz="1600" spc="-24">
-                <a:solidFill>
-                  <a:srgbClr val="EEEBE5"/>
-                </a:solidFill>
-                <a:latin typeface="GQ Text Bold"/>
-                <a:cs typeface="GQ Text Bold"/>
-                <a:ea typeface="GQ Text Bold"/>
-              </a:rPr>
-              <a:t>Сөздік</a:t>
-            </a:r>
-          </a:p>
-        </p:txBody>
-      </p:sp>
-      <p:sp>
-        <p:nvSpPr>
-          <p:cNvPr id="14" name="TextBox 13"/>
-          <p:cNvSpPr txBox="1"/>
-          <p:nvPr/>
-        </p:nvSpPr>
-        <p:spPr>
-          <a:xfrm>
-            <a:off x="5114422" y="2910332"/>
-            <a:ext cx="1962851" cy="842010"/>
-          </a:xfrm>
-          <a:prstGeom prst="rect">
-            <a:avLst/>
-          </a:prstGeom>
-          <a:noFill/>
-        </p:spPr>
-        <p:txBody>
-          <a:bodyPr wrap="none" lIns="0" rIns="0" tIns="0" bIns="0" anchor="t">
-            <a:spAutoFit/>
-          </a:bodyPr>
-          <a:lstStyle/>
-          <a:p>
-            <a:pPr algn="l">
-              <a:lnSpc>
-                <a:spcPts val="1500"/>
-              </a:lnSpc>
-            </a:pPr>
-            <a:r>
-              <a:rPr sz="1050">
-                <a:solidFill>
-                  <a:srgbClr val="A6ADB6"/>
-                </a:solidFill>
-                <a:latin typeface="GQ Text"/>
-                <a:cs typeface="GQ Text"/>
-                <a:ea typeface="GQ Text"/>
-              </a:rPr>
-              <a:t>Сабақтардан жиналған 162</a:t>
-            </a:r>
-          </a:p>
-          <a:p>
-            <a:pPr algn="l">
-              <a:lnSpc>
-                <a:spcPts val="1500"/>
-              </a:lnSpc>
-            </a:pPr>
-            <a:r>
-              <a:rPr sz="1050">
-                <a:solidFill>
-                  <a:srgbClr val="A6ADB6"/>
-                </a:solidFill>
-                <a:latin typeface="GQ Text"/>
-                <a:cs typeface="GQ Text"/>
-                <a:ea typeface="GQ Text"/>
-              </a:rPr>
-              <a:t>мақала, іздеу орыс</a:t>
-            </a:r>
-          </a:p>
-          <a:p>
-            <a:pPr algn="l">
-              <a:lnSpc>
-                <a:spcPts val="1500"/>
-              </a:lnSpc>
-            </a:pPr>
-            <a:r>
-              <a:rPr sz="1050">
-                <a:solidFill>
-                  <a:srgbClr val="A6ADB6"/>
-                </a:solidFill>
-                <a:latin typeface="GQ Text"/>
-                <a:cs typeface="GQ Text"/>
-                <a:ea typeface="GQ Text"/>
-              </a:rPr>
-              <a:t>пернетақтасынан да жұмыс</a:t>
-            </a:r>
-          </a:p>
-          <a:p>
-            <a:pPr algn="l">
-              <a:lnSpc>
-                <a:spcPts val="1500"/>
-              </a:lnSpc>
-            </a:pPr>
-            <a:r>
-              <a:rPr sz="1050">
-                <a:solidFill>
-                  <a:srgbClr val="A6ADB6"/>
-                </a:solidFill>
-                <a:latin typeface="GQ Text"/>
-                <a:cs typeface="GQ Text"/>
-                <a:ea typeface="GQ Text"/>
-              </a:rPr>
-              <a:t>істейді</a:t>
-            </a:r>
-          </a:p>
-        </p:txBody>
-      </p:sp>
-      <p:sp>
-        <p:nvSpPr>
-          <p:cNvPr id="15" name="TextBox 14"/>
-          <p:cNvSpPr txBox="1"/>
-          <p:nvPr/>
-        </p:nvSpPr>
-        <p:spPr>
-          <a:xfrm>
-            <a:off x="7296729" y="2548798"/>
-            <a:ext cx="1962851" cy="323169"/>
-          </a:xfrm>
-          <a:prstGeom prst="rect">
-            <a:avLst/>
-          </a:prstGeom>
-          <a:noFill/>
-        </p:spPr>
-        <p:txBody>
-          <a:bodyPr wrap="none" lIns="0" rIns="0" tIns="0" bIns="0" anchor="t">
-            <a:spAutoFit/>
-          </a:bodyPr>
-          <a:lstStyle/>
-          <a:p>
-            <a:pPr algn="l">
-              <a:lnSpc>
-                <a:spcPts val="1792"/>
-              </a:lnSpc>
-            </a:pPr>
-            <a:r>
-              <a:rPr sz="1600" spc="-24">
-                <a:solidFill>
-                  <a:srgbClr val="EEEBE5"/>
-                </a:solidFill>
-                <a:latin typeface="GQ Text Bold"/>
-                <a:cs typeface="GQ Text Bold"/>
-                <a:ea typeface="GQ Text Bold"/>
-              </a:rPr>
-              <a:t>Анықтама</a:t>
-            </a:r>
-          </a:p>
-        </p:txBody>
-      </p:sp>
-      <p:sp>
-        <p:nvSpPr>
-          <p:cNvPr id="16" name="TextBox 15"/>
-          <p:cNvSpPr txBox="1"/>
-          <p:nvPr/>
-        </p:nvSpPr>
-        <p:spPr>
-          <a:xfrm>
-            <a:off x="7296729" y="2910332"/>
-            <a:ext cx="1962851" cy="461010"/>
-          </a:xfrm>
-          <a:prstGeom prst="rect">
-            <a:avLst/>
-          </a:prstGeom>
-          <a:noFill/>
-        </p:spPr>
-        <p:txBody>
-          <a:bodyPr wrap="none" lIns="0" rIns="0" tIns="0" bIns="0" anchor="t">
-            <a:spAutoFit/>
-          </a:bodyPr>
-          <a:lstStyle/>
-          <a:p>
-            <a:pPr algn="l">
-              <a:lnSpc>
-                <a:spcPts val="1500"/>
-              </a:lnSpc>
-            </a:pPr>
-            <a:r>
-              <a:rPr sz="1050">
-                <a:solidFill>
-                  <a:srgbClr val="A6ADB6"/>
-                </a:solidFill>
-                <a:latin typeface="GQ Text"/>
-                <a:cs typeface="GQ Text"/>
-                <a:ea typeface="GQ Text"/>
-              </a:rPr>
-              <a:t>33 ереже, 22 тақырып және</a:t>
-            </a:r>
-          </a:p>
-          <a:p>
-            <a:pPr algn="l">
-              <a:lnSpc>
-                <a:spcPts val="1500"/>
-              </a:lnSpc>
-            </a:pPr>
-            <a:r>
-              <a:rPr sz="1050">
-                <a:solidFill>
-                  <a:srgbClr val="A6ADB6"/>
-                </a:solidFill>
-                <a:latin typeface="GQ Text"/>
-                <a:cs typeface="GQ Text"/>
-                <a:ea typeface="GQ Text"/>
-              </a:rPr>
-              <a:t>жанды жалғау кестелері</a:t>
-            </a:r>
-          </a:p>
-        </p:txBody>
-      </p:sp>
-      <p:sp>
-        <p:nvSpPr>
-          <p:cNvPr id="17" name="TextBox 16"/>
-          <p:cNvSpPr txBox="1"/>
-          <p:nvPr/>
-        </p:nvSpPr>
-        <p:spPr>
-          <a:xfrm>
-            <a:off x="9479036" y="2548798"/>
-            <a:ext cx="1962851" cy="323169"/>
-          </a:xfrm>
-          <a:prstGeom prst="rect">
-            <a:avLst/>
-          </a:prstGeom>
-          <a:noFill/>
-        </p:spPr>
-        <p:txBody>
-          <a:bodyPr wrap="none" lIns="0" rIns="0" tIns="0" bIns="0" anchor="t">
-            <a:spAutoFit/>
-          </a:bodyPr>
-          <a:lstStyle/>
-          <a:p>
-            <a:pPr algn="l">
-              <a:lnSpc>
-                <a:spcPts val="1792"/>
-              </a:lnSpc>
-            </a:pPr>
-            <a:r>
-              <a:rPr sz="1600" spc="-24">
-                <a:solidFill>
-                  <a:srgbClr val="EEEBE5"/>
-                </a:solidFill>
-                <a:latin typeface="GQ Text Bold"/>
-                <a:cs typeface="GQ Text Bold"/>
-                <a:ea typeface="GQ Text Bold"/>
-              </a:rPr>
-              <a:t>Профиль</a:t>
-            </a:r>
-          </a:p>
-        </p:txBody>
-      </p:sp>
-      <p:sp>
-        <p:nvSpPr>
-          <p:cNvPr id="18" name="TextBox 17"/>
-          <p:cNvSpPr txBox="1"/>
-          <p:nvPr/>
-        </p:nvSpPr>
-        <p:spPr>
-          <a:xfrm>
-            <a:off x="9479036" y="2910332"/>
-            <a:ext cx="1962851" cy="651509"/>
-          </a:xfrm>
-          <a:prstGeom prst="rect">
-            <a:avLst/>
-          </a:prstGeom>
-          <a:noFill/>
-        </p:spPr>
-        <p:txBody>
-          <a:bodyPr wrap="none" lIns="0" rIns="0" tIns="0" bIns="0" anchor="t">
-            <a:spAutoFit/>
-          </a:bodyPr>
-          <a:lstStyle/>
-          <a:p>
-            <a:pPr algn="l">
-              <a:lnSpc>
-                <a:spcPts val="1500"/>
-              </a:lnSpc>
-            </a:pPr>
-            <a:r>
-              <a:rPr sz="1050">
-                <a:solidFill>
-                  <a:srgbClr val="A6ADB6"/>
-                </a:solidFill>
-                <a:latin typeface="GQ Text"/>
-                <a:cs typeface="GQ Text"/>
-                <a:ea typeface="GQ Text"/>
-              </a:rPr>
-              <a:t>Статистика, марапаттар</a:t>
-            </a:r>
-          </a:p>
-          <a:p>
-            <a:pPr algn="l">
-              <a:lnSpc>
-                <a:spcPts val="1500"/>
-              </a:lnSpc>
-            </a:pPr>
-            <a:r>
-              <a:rPr sz="1050">
-                <a:solidFill>
-                  <a:srgbClr val="A6ADB6"/>
-                </a:solidFill>
-                <a:latin typeface="GQ Text"/>
-                <a:cs typeface="GQ Text"/>
-                <a:ea typeface="GQ Text"/>
-              </a:rPr>
-              <a:t>және нәтижелерді кесте</a:t>
-            </a:r>
-          </a:p>
-          <a:p>
-            <a:pPr algn="l">
-              <a:lnSpc>
-                <a:spcPts val="1500"/>
-              </a:lnSpc>
-            </a:pPr>
-            <a:r>
-              <a:rPr sz="1050">
-                <a:solidFill>
-                  <a:srgbClr val="A6ADB6"/>
-                </a:solidFill>
-                <a:latin typeface="GQ Text"/>
-                <a:cs typeface="GQ Text"/>
-                <a:ea typeface="GQ Text"/>
-              </a:rPr>
-              <a:t>түрінде жүктеу</a:t>
-            </a:r>
-          </a:p>
-        </p:txBody>
-      </p:sp>
-      <p:sp>
-        <p:nvSpPr>
           <p:cNvPr id="19" name="Rectangle 18"/>
           <p:cNvSpPr/>
           <p:nvPr/>
         </p:nvSpPr>
         <p:spPr>
           <a:xfrm>
-            <a:off x="749808" y="4123435"/>
-            <a:ext cx="10692079" cy="710247"/>
-          </a:xfrm>
-          <a:prstGeom prst="rect">
-            <a:avLst/>
-          </a:prstGeom>
-          <a:solidFill>
-            <a:srgbClr val="0064B9"/>
-          </a:solidFill>
-          <a:ln>
-            <a:noFill/>
-          </a:ln>
-          <a:effectLst/>
-        </p:spPr>
-        <p:txBody>
-          <a:bodyPr rtlCol="0" anchor="ctr" wrap="none"/>
-          <a:lstStyle/>
-          <a:p>
-            <a:pPr algn="ctr"/>
-          </a:p>
-        </p:txBody>
-      </p:sp>
-      <p:sp>
-        <p:nvSpPr>
-          <p:cNvPr id="20" name="TextBox 19"/>
-          <p:cNvSpPr txBox="1"/>
-          <p:nvPr/>
-        </p:nvSpPr>
-        <p:spPr>
-          <a:xfrm>
-            <a:off x="1024127" y="4322521"/>
-            <a:ext cx="10143439" cy="345281"/>
-          </a:xfrm>
-          <a:prstGeom prst="rect">
-            <a:avLst/>
-          </a:prstGeom>
-          <a:noFill/>
-        </p:spPr>
-        <p:txBody>
-          <a:bodyPr wrap="none" lIns="0" rIns="0" tIns="0" bIns="0" anchor="t">
-            <a:spAutoFit/>
-          </a:bodyPr>
-          <a:lstStyle/>
-          <a:p>
-            <a:pPr algn="l">
-              <a:lnSpc>
-                <a:spcPts val="1812"/>
-              </a:lnSpc>
-            </a:pPr>
-            <a:r>
-              <a:rPr sz="1250">
-                <a:solidFill>
-                  <a:srgbClr val="FFFFFF"/>
-                </a:solidFill>
-                <a:latin typeface="GQ Text SemiBold"/>
-                <a:cs typeface="GQ Text SemiBold"/>
-                <a:ea typeface="GQ Text SemiBold"/>
-              </a:rPr>
-              <a:t>Сабақ соңындағы қателерді талдау ұпай қоспайды: ол ұпай жинау үшін емес, түсіну үшін керек.</a:t>
-            </a:r>
-          </a:p>
-        </p:txBody>
-      </p:sp>
-    </p:spTree>
-  </p:cSld>
-  <p:clrMapOvr>
-    <a:masterClrMapping/>
-  </p:clrMapOvr>
-</p:sld>
-</file>
-
-<file path=ppt/slides/slide9.xml><?xml version="1.0" encoding="utf-8"?>
-<p:sld xmlns:a="http://schemas.openxmlformats.org/drawingml/2006/main" xmlns:p="http://schemas.openxmlformats.org/presentationml/2006/main" xmlns:r="http://schemas.openxmlformats.org/officeDocument/2006/relationships">
-  <p:cSld>
-    <p:spTree>
-      <p:nvGrpSpPr>
-        <p:cNvPr id="1" name=""/>
-        <p:cNvGrpSpPr/>
-        <p:nvPr/>
-      </p:nvGrpSpPr>
-      <p:grpSpPr/>
-      <p:sp>
-        <p:nvSpPr>
-          <p:cNvPr id="2" name="Rectangle 1"/>
-          <p:cNvSpPr/>
-          <p:nvPr/>
-        </p:nvSpPr>
-        <p:spPr>
-          <a:xfrm>
-            <a:off x="0" y="0"/>
-            <a:ext cx="12191695" cy="6858000"/>
-          </a:xfrm>
-          <a:prstGeom prst="rect">
-            <a:avLst/>
-          </a:prstGeom>
-          <a:solidFill>
-            <a:srgbClr val="1B222B"/>
-          </a:solidFill>
-          <a:ln>
-            <a:noFill/>
-          </a:ln>
-          <a:effectLst/>
-        </p:spPr>
-        <p:txBody>
-          <a:bodyPr rtlCol="0" anchor="ctr" wrap="none"/>
-          <a:lstStyle/>
-          <a:p>
-            <a:pPr algn="ctr"/>
-          </a:p>
-        </p:txBody>
-      </p:sp>
-      <p:sp>
-        <p:nvSpPr>
-          <p:cNvPr id="14" name="Rectangle 13"/>
-          <p:cNvSpPr/>
-          <p:nvPr/>
-        </p:nvSpPr>
-        <p:spPr>
-          <a:xfrm>
-            <a:off x="2852928" y="2259330"/>
-            <a:ext cx="8588959" cy="1929384"/>
+            <a:off x="7104202" y="1960626"/>
+            <a:ext cx="4337684" cy="2260599"/>
           </a:xfrm>
           <a:prstGeom prst="rect">
             <a:avLst/>
@@ -16965,6 +15997,36 @@
       </p:sp>
       <p:sp>
         <p:nvSpPr>
+          <p:cNvPr id="9" name="Rectangle 8"/>
+          <p:cNvSpPr/>
+          <p:nvPr/>
+        </p:nvSpPr>
+        <p:spPr>
+          <a:xfrm>
+            <a:off x="749808" y="1960626"/>
+            <a:ext cx="6153226" cy="2440432"/>
+          </a:xfrm>
+          <a:prstGeom prst="rect">
+            <a:avLst/>
+          </a:prstGeom>
+          <a:solidFill>
+            <a:srgbClr val="0064B9"/>
+          </a:solidFill>
+          <a:ln>
+            <a:noFill/>
+          </a:ln>
+          <a:effectLst/>
+        </p:spPr>
+        <p:txBody>
+          <a:bodyPr rtlCol="0" anchor="ctr" wrap="none"/>
+          <a:lstStyle/>
+          <a:p>
+            <a:pPr algn="ctr"/>
+          </a:p>
+        </p:txBody>
+      </p:sp>
+      <p:sp>
+        <p:nvSpPr>
           <p:cNvPr id="3" name="Rectangle 2"/>
           <p:cNvSpPr/>
           <p:nvPr/>
@@ -17029,7 +16091,7 @@
                 <a:cs typeface="IBM Plex Mono SemiBold"/>
                 <a:ea typeface="IBM Plex Mono SemiBold"/>
               </a:rPr>
-              <a:t>ТІКЕЛЕЙ КӨРСЕТЕМІН</a:t>
+              <a:t>ҚОРЫТЫНДЫ</a:t>
             </a:r>
           </a:p>
         </p:txBody>
@@ -17070,7 +16132,7 @@
                 <a:cs typeface="IBM Plex Mono Medium"/>
                 <a:ea typeface="IBM Plex Mono Medium"/>
               </a:rPr>
-              <a:t>09 / 10</a:t>
+              <a:t>08 / 08</a:t>
             </a:r>
           </a:p>
         </p:txBody>
@@ -17083,8 +16145,8 @@
         </p:nvSpPr>
         <p:spPr>
           <a:xfrm>
-            <a:off x="749808" y="790854"/>
-            <a:ext cx="10692079" cy="771855"/>
+            <a:off x="749808" y="786505"/>
+            <a:ext cx="10692079" cy="810447"/>
           </a:xfrm>
           <a:prstGeom prst="rect">
             <a:avLst/>
@@ -17099,11 +16161,11 @@
           <a:p>
             <a:pPr algn="l">
               <a:lnSpc>
-                <a:spcPts val="4280"/>
-              </a:lnSpc>
-            </a:pPr>
-            <a:r>
-              <a:rPr sz="4000" spc="-88">
+                <a:spcPts val="4494"/>
+              </a:lnSpc>
+            </a:pPr>
+            <a:r>
+              <a:rPr sz="4200" spc="-92">
                 <a:solidFill>
                   <a:srgbClr val="EEEBE5"/>
                 </a:solidFill>
@@ -17111,7 +16173,7 @@
                 <a:cs typeface="GQ Text Bold"/>
                 <a:ea typeface="GQ Text Bold"/>
               </a:rPr>
-              <a:t>Дәл қазір өз телефоныңыздан ашыңыз</a:t>
+              <a:t>Не шықты және әрі қарай не істеу керек</a:t>
             </a:r>
           </a:p>
         </p:txBody>
@@ -17124,8 +16186,8 @@
         </p:nvSpPr>
         <p:spPr>
           <a:xfrm>
-            <a:off x="749808" y="1530177"/>
-            <a:ext cx="8553663" cy="332907"/>
+            <a:off x="1024127" y="2212594"/>
+            <a:ext cx="5604586" cy="198374"/>
           </a:xfrm>
           <a:prstGeom prst="rect">
             <a:avLst/>
@@ -17140,57 +16202,269 @@
           <a:p>
             <a:pPr algn="l">
               <a:lnSpc>
-                <a:spcPts val="1846"/>
-              </a:lnSpc>
-            </a:pPr>
-            <a:r>
-              <a:rPr sz="1300">
-                <a:solidFill>
-                  <a:srgbClr val="A6ADB6"/>
+                <a:spcPts val="1100"/>
+              </a:lnSpc>
+            </a:pPr>
+            <a:r>
+              <a:rPr sz="850" spc="136">
+                <a:solidFill>
+                  <a:srgbClr val="59AAF8"/>
+                </a:solidFill>
+                <a:latin typeface="IBM Plex Mono SemiBold"/>
+                <a:cs typeface="IBM Plex Mono SemiBold"/>
+                <a:ea typeface="IBM Plex Mono SemiBold"/>
+              </a:rPr>
+              <a:t>ҚОРЫТЫНДЫ</a:t>
+            </a:r>
+          </a:p>
+        </p:txBody>
+      </p:sp>
+      <p:sp>
+        <p:nvSpPr>
+          <p:cNvPr id="8" name="TextBox 7"/>
+          <p:cNvSpPr txBox="1"/>
+          <p:nvPr/>
+        </p:nvSpPr>
+        <p:spPr>
+          <a:xfrm>
+            <a:off x="1024127" y="2488438"/>
+            <a:ext cx="5604586" cy="1720850"/>
+          </a:xfrm>
+          <a:prstGeom prst="rect">
+            <a:avLst/>
+          </a:prstGeom>
+          <a:noFill/>
+        </p:spPr>
+        <p:txBody>
+          <a:bodyPr wrap="none" lIns="0" rIns="0" tIns="0" bIns="0" anchor="t">
+            <a:spAutoFit/>
+          </a:bodyPr>
+          <a:lstStyle/>
+          <a:p>
+            <a:pPr algn="l">
+              <a:lnSpc>
+                <a:spcPts val="2500"/>
+              </a:lnSpc>
+            </a:pPr>
+            <a:r>
+              <a:rPr sz="1900" spc="-34">
+                <a:solidFill>
+                  <a:srgbClr val="EEEBE5"/>
+                </a:solidFill>
+                <a:latin typeface="GQ Text Bold"/>
+                <a:cs typeface="GQ Text Bold"/>
+                <a:ea typeface="GQ Text Bold"/>
+              </a:rPr>
+              <a:t>Оқушыларға қазақ тілінің қиындығы емес,</a:t>
+            </a:r>
+          </a:p>
+          <a:p>
+            <a:pPr algn="l">
+              <a:lnSpc>
+                <a:spcPts val="2500"/>
+              </a:lnSpc>
+            </a:pPr>
+            <a:r>
+              <a:rPr sz="1900" spc="-34">
+                <a:solidFill>
+                  <a:srgbClr val="EEEBE5"/>
+                </a:solidFill>
+                <a:latin typeface="GQ Text Bold"/>
+                <a:cs typeface="GQ Text Bold"/>
+                <a:ea typeface="GQ Text Bold"/>
+              </a:rPr>
+              <a:t>техникалық бөгеттер кедергі болды: дұрыс</a:t>
+            </a:r>
+          </a:p>
+          <a:p>
+            <a:pPr algn="l">
+              <a:lnSpc>
+                <a:spcPts val="2500"/>
+              </a:lnSpc>
+            </a:pPr>
+            <a:r>
+              <a:rPr sz="1900" spc="-34">
+                <a:solidFill>
+                  <a:srgbClr val="EEEBE5"/>
+                </a:solidFill>
+                <a:latin typeface="GQ Text Bold"/>
+                <a:cs typeface="GQ Text Bold"/>
+                <a:ea typeface="GQ Text Bold"/>
+              </a:rPr>
+              <a:t>жауапты теру мүмкін емес еді. Оларды алып</a:t>
+            </a:r>
+          </a:p>
+          <a:p>
+            <a:pPr algn="l">
+              <a:lnSpc>
+                <a:spcPts val="2500"/>
+              </a:lnSpc>
+            </a:pPr>
+            <a:r>
+              <a:rPr sz="1900" spc="-34">
+                <a:solidFill>
+                  <a:srgbClr val="EEEBE5"/>
+                </a:solidFill>
+                <a:latin typeface="GQ Text Bold"/>
+                <a:cs typeface="GQ Text Bold"/>
+                <a:ea typeface="GQ Text Bold"/>
+              </a:rPr>
+              <a:t>тастауға болды, әрі бірде-бірі тілдің өзін</a:t>
+            </a:r>
+          </a:p>
+          <a:p>
+            <a:pPr algn="l">
+              <a:lnSpc>
+                <a:spcPts val="2500"/>
+              </a:lnSpc>
+            </a:pPr>
+            <a:r>
+              <a:rPr sz="1900" spc="-34">
+                <a:solidFill>
+                  <a:srgbClr val="EEEBE5"/>
+                </a:solidFill>
+                <a:latin typeface="GQ Text Bold"/>
+                <a:cs typeface="GQ Text Bold"/>
+                <a:ea typeface="GQ Text Bold"/>
+              </a:rPr>
+              <a:t>жеңілдетуді талап етпеді.</a:t>
+            </a:r>
+          </a:p>
+        </p:txBody>
+      </p:sp>
+      <p:sp>
+        <p:nvSpPr>
+          <p:cNvPr id="10" name="TextBox 9"/>
+          <p:cNvSpPr txBox="1"/>
+          <p:nvPr/>
+        </p:nvSpPr>
+        <p:spPr>
+          <a:xfrm>
+            <a:off x="7378522" y="2212594"/>
+            <a:ext cx="3789045" cy="198374"/>
+          </a:xfrm>
+          <a:prstGeom prst="rect">
+            <a:avLst/>
+          </a:prstGeom>
+          <a:noFill/>
+        </p:spPr>
+        <p:txBody>
+          <a:bodyPr wrap="none" lIns="0" rIns="0" tIns="0" bIns="0" anchor="t">
+            <a:spAutoFit/>
+          </a:bodyPr>
+          <a:lstStyle/>
+          <a:p>
+            <a:pPr algn="l">
+              <a:lnSpc>
+                <a:spcPts val="1100"/>
+              </a:lnSpc>
+            </a:pPr>
+            <a:r>
+              <a:rPr sz="850" spc="136">
+                <a:solidFill>
+                  <a:srgbClr val="59AAF8"/>
+                </a:solidFill>
+                <a:latin typeface="IBM Plex Mono SemiBold"/>
+                <a:cs typeface="IBM Plex Mono SemiBold"/>
+                <a:ea typeface="IBM Plex Mono SemiBold"/>
+              </a:rPr>
+              <a:t>ӘРІ ҚАРАЙ</a:t>
+            </a:r>
+          </a:p>
+        </p:txBody>
+      </p:sp>
+      <p:sp>
+        <p:nvSpPr>
+          <p:cNvPr id="11" name="TextBox 10"/>
+          <p:cNvSpPr txBox="1"/>
+          <p:nvPr/>
+        </p:nvSpPr>
+        <p:spPr>
+          <a:xfrm>
+            <a:off x="7378522" y="2526233"/>
+            <a:ext cx="210566" cy="277723"/>
+          </a:xfrm>
+          <a:prstGeom prst="rect">
+            <a:avLst/>
+          </a:prstGeom>
+          <a:noFill/>
+        </p:spPr>
+        <p:txBody>
+          <a:bodyPr wrap="none" lIns="0" rIns="0" tIns="0" bIns="0" anchor="t">
+            <a:spAutoFit/>
+          </a:bodyPr>
+          <a:lstStyle/>
+          <a:p>
+            <a:pPr algn="l">
+              <a:lnSpc>
+                <a:spcPts val="1540"/>
+              </a:lnSpc>
+            </a:pPr>
+            <a:r>
+              <a:rPr sz="1100">
+                <a:solidFill>
+                  <a:srgbClr val="59AAF8"/>
+                </a:solidFill>
+                <a:latin typeface="IBM Plex Mono Medium"/>
+                <a:cs typeface="IBM Plex Mono Medium"/>
+                <a:ea typeface="IBM Plex Mono Medium"/>
+              </a:rPr>
+              <a:t>—</a:t>
+            </a:r>
+          </a:p>
+        </p:txBody>
+      </p:sp>
+      <p:sp>
+        <p:nvSpPr>
+          <p:cNvPr id="12" name="TextBox 11"/>
+          <p:cNvSpPr txBox="1"/>
+          <p:nvPr/>
+        </p:nvSpPr>
+        <p:spPr>
+          <a:xfrm>
+            <a:off x="7589088" y="2526233"/>
+            <a:ext cx="3578479" cy="277723"/>
+          </a:xfrm>
+          <a:prstGeom prst="rect">
+            <a:avLst/>
+          </a:prstGeom>
+          <a:noFill/>
+        </p:spPr>
+        <p:txBody>
+          <a:bodyPr wrap="none" lIns="0" rIns="0" tIns="0" bIns="0" anchor="t">
+            <a:spAutoFit/>
+          </a:bodyPr>
+          <a:lstStyle/>
+          <a:p>
+            <a:pPr algn="l">
+              <a:lnSpc>
+                <a:spcPts val="1540"/>
+              </a:lnSpc>
+            </a:pPr>
+            <a:r>
+              <a:rPr sz="1100">
+                <a:solidFill>
+                  <a:srgbClr val="EEEBE5"/>
                 </a:solidFill>
                 <a:latin typeface="GQ Text"/>
                 <a:cs typeface="GQ Text"/>
                 <a:ea typeface="GQ Text"/>
               </a:rPr>
-              <a:t>Камераны кодқа бағыттаңыз. Қосымша бірден ашылады — ештеңе орнатудың қажеті жоқ.</a:t>
-            </a:r>
-          </a:p>
-        </p:txBody>
-      </p:sp>
-      <p:pic>
-        <p:nvPicPr>
-          <p:cNvPr id="8" name="Picture 7" descr="image.png"/>
-          <p:cNvPicPr>
-            <a:picLocks noChangeAspect="1"/>
-          </p:cNvPicPr>
-          <p:nvPr/>
-        </p:nvPicPr>
-        <p:blipFill>
-          <a:blip r:embed="rId2"/>
-          <a:stretch>
-            <a:fillRect/>
-          </a:stretch>
-        </p:blipFill>
-        <p:spPr>
-          <a:xfrm>
-            <a:off x="749808" y="2259330"/>
-            <a:ext cx="1417320" cy="1417320"/>
-          </a:xfrm>
-          <a:prstGeom prst="rect">
-            <a:avLst/>
-          </a:prstGeom>
-        </p:spPr>
-      </p:pic>
-      <p:sp>
-        <p:nvSpPr>
-          <p:cNvPr id="9" name="TextBox 8"/>
+              <a:t>Бүкіл қазақ мәтінін мұғалімнің тексеруі</a:t>
+            </a:r>
+          </a:p>
+        </p:txBody>
+      </p:sp>
+      <p:sp>
+        <p:nvSpPr>
+          <p:cNvPr id="13" name="TextBox 12"/>
           <p:cNvSpPr txBox="1"/>
           <p:nvPr/>
         </p:nvSpPr>
         <p:spPr>
           <a:xfrm>
-            <a:off x="749808" y="3777233"/>
-            <a:ext cx="2057400" cy="414909"/>
+            <a:off x="7378522" y="2858973"/>
+            <a:ext cx="210566" cy="277723"/>
           </a:xfrm>
           <a:prstGeom prst="rect">
             <a:avLst/>
@@ -17205,51 +16479,174 @@
           <a:p>
             <a:pPr algn="l">
               <a:lnSpc>
-                <a:spcPts val="1350"/>
-              </a:lnSpc>
-            </a:pPr>
-            <a:r>
-              <a:rPr sz="950">
-                <a:solidFill>
-                  <a:srgbClr val="A6ADB6"/>
+                <a:spcPts val="1540"/>
+              </a:lnSpc>
+            </a:pPr>
+            <a:r>
+              <a:rPr sz="1100">
+                <a:solidFill>
+                  <a:srgbClr val="59AAF8"/>
+                </a:solidFill>
+                <a:latin typeface="IBM Plex Mono Medium"/>
+                <a:cs typeface="IBM Plex Mono Medium"/>
+                <a:ea typeface="IBM Plex Mono Medium"/>
+              </a:rPr>
+              <a:t>—</a:t>
+            </a:r>
+          </a:p>
+        </p:txBody>
+      </p:sp>
+      <p:sp>
+        <p:nvSpPr>
+          <p:cNvPr id="14" name="TextBox 13"/>
+          <p:cNvSpPr txBox="1"/>
+          <p:nvPr/>
+        </p:nvSpPr>
+        <p:spPr>
+          <a:xfrm>
+            <a:off x="7589088" y="2858973"/>
+            <a:ext cx="3578479" cy="277723"/>
+          </a:xfrm>
+          <a:prstGeom prst="rect">
+            <a:avLst/>
+          </a:prstGeom>
+          <a:noFill/>
+        </p:spPr>
+        <p:txBody>
+          <a:bodyPr wrap="none" lIns="0" rIns="0" tIns="0" bIns="0" anchor="t">
+            <a:spAutoFit/>
+          </a:bodyPr>
+          <a:lstStyle/>
+          <a:p>
+            <a:pPr algn="l">
+              <a:lnSpc>
+                <a:spcPts val="1540"/>
+              </a:lnSpc>
+            </a:pPr>
+            <a:r>
+              <a:rPr sz="1100">
+                <a:solidFill>
+                  <a:srgbClr val="EEEBE5"/>
                 </a:solidFill>
                 <a:latin typeface="GQ Text"/>
                 <a:cs typeface="GQ Text"/>
                 <a:ea typeface="GQ Text"/>
               </a:rPr>
-              <a:t>Қосымшаны ашу:</a:t>
-            </a:r>
-          </a:p>
-          <a:p>
-            <a:pPr algn="l">
-              <a:lnSpc>
-                <a:spcPts val="1350"/>
-              </a:lnSpc>
-            </a:pPr>
-            <a:r>
-              <a:rPr sz="950">
-                <a:solidFill>
-                  <a:srgbClr val="A6ADB6"/>
+              <a:t>Сыныпта сынақтан өткізу және нақты сандар</a:t>
+            </a:r>
+          </a:p>
+        </p:txBody>
+      </p:sp>
+      <p:sp>
+        <p:nvSpPr>
+          <p:cNvPr id="15" name="TextBox 14"/>
+          <p:cNvSpPr txBox="1"/>
+          <p:nvPr/>
+        </p:nvSpPr>
+        <p:spPr>
+          <a:xfrm>
+            <a:off x="7378522" y="3191713"/>
+            <a:ext cx="210566" cy="277723"/>
+          </a:xfrm>
+          <a:prstGeom prst="rect">
+            <a:avLst/>
+          </a:prstGeom>
+          <a:noFill/>
+        </p:spPr>
+        <p:txBody>
+          <a:bodyPr wrap="none" lIns="0" rIns="0" tIns="0" bIns="0" anchor="t">
+            <a:spAutoFit/>
+          </a:bodyPr>
+          <a:lstStyle/>
+          <a:p>
+            <a:pPr algn="l">
+              <a:lnSpc>
+                <a:spcPts val="1540"/>
+              </a:lnSpc>
+            </a:pPr>
+            <a:r>
+              <a:rPr sz="1100">
+                <a:solidFill>
+                  <a:srgbClr val="59AAF8"/>
+                </a:solidFill>
+                <a:latin typeface="IBM Plex Mono Medium"/>
+                <a:cs typeface="IBM Plex Mono Medium"/>
+                <a:ea typeface="IBM Plex Mono Medium"/>
+              </a:rPr>
+              <a:t>—</a:t>
+            </a:r>
+          </a:p>
+        </p:txBody>
+      </p:sp>
+      <p:sp>
+        <p:nvSpPr>
+          <p:cNvPr id="16" name="TextBox 15"/>
+          <p:cNvSpPr txBox="1"/>
+          <p:nvPr/>
+        </p:nvSpPr>
+        <p:spPr>
+          <a:xfrm>
+            <a:off x="7589088" y="3191713"/>
+            <a:ext cx="3578479" cy="473303"/>
+          </a:xfrm>
+          <a:prstGeom prst="rect">
+            <a:avLst/>
+          </a:prstGeom>
+          <a:noFill/>
+        </p:spPr>
+        <p:txBody>
+          <a:bodyPr wrap="none" lIns="0" rIns="0" tIns="0" bIns="0" anchor="t">
+            <a:spAutoFit/>
+          </a:bodyPr>
+          <a:lstStyle/>
+          <a:p>
+            <a:pPr algn="l">
+              <a:lnSpc>
+                <a:spcPts val="1540"/>
+              </a:lnSpc>
+            </a:pPr>
+            <a:r>
+              <a:rPr sz="1100">
+                <a:solidFill>
+                  <a:srgbClr val="EEEBE5"/>
                 </a:solidFill>
                 <a:latin typeface="GQ Text"/>
                 <a:cs typeface="GQ Text"/>
                 <a:ea typeface="GQ Text"/>
               </a:rPr>
-              <a:t>tilashar-kz.vercel.app</a:t>
-            </a:r>
-          </a:p>
-        </p:txBody>
-      </p:sp>
-      <p:sp>
-        <p:nvSpPr>
-          <p:cNvPr id="10" name="TextBox 9"/>
+              <a:t>Дыбыстау: 589 сөз тіркесі, әрқайсысы өз</a:t>
+            </a:r>
+          </a:p>
+          <a:p>
+            <a:pPr algn="l">
+              <a:lnSpc>
+                <a:spcPts val="1540"/>
+              </a:lnSpc>
+            </a:pPr>
+            <a:r>
+              <a:rPr sz="1100">
+                <a:solidFill>
+                  <a:srgbClr val="EEEBE5"/>
+                </a:solidFill>
+                <a:latin typeface="GQ Text"/>
+                <a:cs typeface="GQ Text"/>
+                <a:ea typeface="GQ Text"/>
+              </a:rPr>
+              <a:t>дауысымен</a:t>
+            </a:r>
+          </a:p>
+        </p:txBody>
+      </p:sp>
+      <p:sp>
+        <p:nvSpPr>
+          <p:cNvPr id="17" name="TextBox 16"/>
           <p:cNvSpPr txBox="1"/>
           <p:nvPr/>
         </p:nvSpPr>
         <p:spPr>
           <a:xfrm>
-            <a:off x="3108960" y="2493010"/>
-            <a:ext cx="8076895" cy="198374"/>
+            <a:off x="7378522" y="3720033"/>
+            <a:ext cx="210566" cy="277723"/>
           </a:xfrm>
           <a:prstGeom prst="rect">
             <a:avLst/>
@@ -17264,33 +16661,33 @@
           <a:p>
             <a:pPr algn="l">
               <a:lnSpc>
-                <a:spcPts val="1100"/>
-              </a:lnSpc>
-            </a:pPr>
-            <a:r>
-              <a:rPr sz="850" spc="136">
+                <a:spcPts val="1540"/>
+              </a:lnSpc>
+            </a:pPr>
+            <a:r>
+              <a:rPr sz="1100">
                 <a:solidFill>
                   <a:srgbClr val="59AAF8"/>
                 </a:solidFill>
-                <a:latin typeface="IBM Plex Mono SemiBold"/>
-                <a:cs typeface="IBM Plex Mono SemiBold"/>
-                <a:ea typeface="IBM Plex Mono SemiBold"/>
-              </a:rPr>
-              <a:t>ТЕЛЕФОНҒА ОРНАТУ</a:t>
-            </a:r>
-          </a:p>
-        </p:txBody>
-      </p:sp>
-      <p:sp>
-        <p:nvSpPr>
-          <p:cNvPr id="11" name="TextBox 10"/>
+                <a:latin typeface="IBM Plex Mono Medium"/>
+                <a:cs typeface="IBM Plex Mono Medium"/>
+                <a:ea typeface="IBM Plex Mono Medium"/>
+              </a:rPr>
+              <a:t>—</a:t>
+            </a:r>
+          </a:p>
+        </p:txBody>
+      </p:sp>
+      <p:sp>
+        <p:nvSpPr>
+          <p:cNvPr id="18" name="TextBox 17"/>
           <p:cNvSpPr txBox="1"/>
           <p:nvPr/>
         </p:nvSpPr>
         <p:spPr>
           <a:xfrm>
-            <a:off x="3108960" y="2768854"/>
-            <a:ext cx="8076895" cy="288544"/>
+            <a:off x="7589088" y="3720033"/>
+            <a:ext cx="3578479" cy="277723"/>
           </a:xfrm>
           <a:prstGeom prst="rect">
             <a:avLst/>
@@ -17305,7 +16702,7 @@
           <a:p>
             <a:pPr algn="l">
               <a:lnSpc>
-                <a:spcPts val="1600"/>
+                <a:spcPts val="1540"/>
               </a:lnSpc>
             </a:pPr>
             <a:r>
@@ -17317,21 +16714,21 @@
                 <a:cs typeface="GQ Text"/>
                 <a:ea typeface="GQ Text"/>
               </a:rPr>
-              <a:t>Android: мәзір → «Қосымшаны орнату». iPhone: «Бөлісу» → «Негізгі экранға»</a:t>
-            </a:r>
-          </a:p>
-        </p:txBody>
-      </p:sp>
-      <p:sp>
-        <p:nvSpPr>
-          <p:cNvPr id="12" name="TextBox 11"/>
+              <a:t>Ашық қолжетімділік: тегін және сілтеме арқылы</a:t>
+            </a:r>
+          </a:p>
+        </p:txBody>
+      </p:sp>
+      <p:sp>
+        <p:nvSpPr>
+          <p:cNvPr id="20" name="TextBox 19"/>
           <p:cNvSpPr txBox="1"/>
           <p:nvPr/>
         </p:nvSpPr>
         <p:spPr>
           <a:xfrm>
-            <a:off x="3108960" y="3329686"/>
-            <a:ext cx="8076895" cy="198374"/>
+            <a:off x="749808" y="6323584"/>
+            <a:ext cx="10692079" cy="198374"/>
           </a:xfrm>
           <a:prstGeom prst="rect">
             <a:avLst/>
@@ -17350,130 +16747,7 @@
               </a:lnSpc>
             </a:pPr>
             <a:r>
-              <a:rPr sz="850" spc="136">
-                <a:solidFill>
-                  <a:srgbClr val="59AAF8"/>
-                </a:solidFill>
-                <a:latin typeface="IBM Plex Mono SemiBold"/>
-                <a:cs typeface="IBM Plex Mono SemiBold"/>
-                <a:ea typeface="IBM Plex Mono SemiBold"/>
-              </a:rPr>
-              <a:t>ANDROID ФАЙЛЫМЕН</a:t>
-            </a:r>
-          </a:p>
-        </p:txBody>
-      </p:sp>
-      <p:sp>
-        <p:nvSpPr>
-          <p:cNvPr id="13" name="TextBox 12"/>
-          <p:cNvSpPr txBox="1"/>
-          <p:nvPr/>
-        </p:nvSpPr>
-        <p:spPr>
-          <a:xfrm>
-            <a:off x="3108960" y="3605530"/>
-            <a:ext cx="8076895" cy="288544"/>
-          </a:xfrm>
-          <a:prstGeom prst="rect">
-            <a:avLst/>
-          </a:prstGeom>
-          <a:noFill/>
-        </p:spPr>
-        <p:txBody>
-          <a:bodyPr wrap="none" lIns="0" rIns="0" tIns="0" bIns="0" anchor="t">
-            <a:spAutoFit/>
-          </a:bodyPr>
-          <a:lstStyle/>
-          <a:p>
-            <a:pPr algn="l">
-              <a:lnSpc>
-                <a:spcPts val="1600"/>
-              </a:lnSpc>
-            </a:pPr>
-            <a:r>
-              <a:rPr sz="1100">
-                <a:solidFill>
-                  <a:srgbClr val="EEEBE5"/>
-                </a:solidFill>
-                <a:latin typeface="GQ Text"/>
-                <a:cs typeface="GQ Text"/>
-                <a:ea typeface="GQ Text"/>
-              </a:rPr>
-              <a:t>Дайын файл осында: github.com/s-chaikovskiy/grammarquest-web/releases</a:t>
-            </a:r>
-          </a:p>
-        </p:txBody>
-      </p:sp>
-      <p:sp>
-        <p:nvSpPr>
-          <p:cNvPr id="15" name="TextBox 14"/>
-          <p:cNvSpPr txBox="1"/>
-          <p:nvPr/>
-        </p:nvSpPr>
-        <p:spPr>
-          <a:xfrm>
-            <a:off x="749808" y="4504466"/>
-            <a:ext cx="3177384" cy="565546"/>
-          </a:xfrm>
-          <a:prstGeom prst="rect">
-            <a:avLst/>
-          </a:prstGeom>
-          <a:noFill/>
-        </p:spPr>
-        <p:txBody>
-          <a:bodyPr wrap="none" lIns="0" rIns="0" tIns="0" bIns="0" anchor="t">
-            <a:spAutoFit/>
-          </a:bodyPr>
-          <a:lstStyle/>
-          <a:p>
-            <a:pPr algn="l">
-              <a:lnSpc>
-                <a:spcPts val="3136"/>
-              </a:lnSpc>
-            </a:pPr>
-            <a:r>
-              <a:rPr sz="3200" spc="-96">
-                <a:solidFill>
-                  <a:srgbClr val="EEEBE5"/>
-                </a:solidFill>
-                <a:latin typeface="GQ Text Bold"/>
-                <a:cs typeface="GQ Text Bold"/>
-                <a:ea typeface="GQ Text Bold"/>
-              </a:rPr>
-              <a:t>202</a:t>
-            </a:r>
-          </a:p>
-        </p:txBody>
-      </p:sp>
-      <p:sp>
-        <p:nvSpPr>
-          <p:cNvPr id="16" name="TextBox 15"/>
-          <p:cNvSpPr txBox="1"/>
-          <p:nvPr/>
-        </p:nvSpPr>
-        <p:spPr>
-          <a:xfrm>
-            <a:off x="749808" y="5033517"/>
-            <a:ext cx="3177384" cy="216408"/>
-          </a:xfrm>
-          <a:prstGeom prst="rect">
-            <a:avLst/>
-          </a:prstGeom>
-          <a:noFill/>
-        </p:spPr>
-        <p:txBody>
-          <a:bodyPr wrap="none" lIns="0" rIns="0" tIns="0" bIns="0" anchor="t">
-            <a:spAutoFit/>
-          </a:bodyPr>
-          <a:lstStyle/>
-          <a:p>
-            <a:pPr algn="l">
-              <a:lnSpc>
-                <a:spcPts val="1200"/>
-              </a:lnSpc>
-            </a:pPr>
-            <a:r>
-              <a:rPr sz="800" spc="64">
+              <a:rPr sz="850" spc="85">
                 <a:solidFill>
                   <a:srgbClr val="A6ADB6"/>
                 </a:solidFill>
@@ -17481,212 +16755,7 @@
                 <a:cs typeface="IBM Plex Mono Medium"/>
                 <a:ea typeface="IBM Plex Mono Medium"/>
               </a:rPr>
-              <a:t>КБ</a:t>
-            </a:r>
-          </a:p>
-        </p:txBody>
-      </p:sp>
-      <p:sp>
-        <p:nvSpPr>
-          <p:cNvPr id="17" name="TextBox 16"/>
-          <p:cNvSpPr txBox="1"/>
-          <p:nvPr/>
-        </p:nvSpPr>
-        <p:spPr>
-          <a:xfrm>
-            <a:off x="749808" y="5274330"/>
-            <a:ext cx="3177384" cy="243278"/>
-          </a:xfrm>
-          <a:prstGeom prst="rect">
-            <a:avLst/>
-          </a:prstGeom>
-          <a:noFill/>
-        </p:spPr>
-        <p:txBody>
-          <a:bodyPr wrap="none" lIns="0" rIns="0" tIns="0" bIns="0" anchor="t">
-            <a:spAutoFit/>
-          </a:bodyPr>
-          <a:lstStyle/>
-          <a:p>
-            <a:pPr algn="l">
-              <a:lnSpc>
-                <a:spcPts val="1349"/>
-              </a:lnSpc>
-            </a:pPr>
-            <a:r>
-              <a:rPr sz="950">
-                <a:solidFill>
-                  <a:srgbClr val="A6ADB6"/>
-                </a:solidFill>
-                <a:latin typeface="GQ Text"/>
-                <a:cs typeface="GQ Text"/>
-                <a:ea typeface="GQ Text"/>
-              </a:rPr>
-              <a:t>сығылған код пен стиль</a:t>
-            </a:r>
-          </a:p>
-        </p:txBody>
-      </p:sp>
-      <p:sp>
-        <p:nvSpPr>
-          <p:cNvPr id="18" name="TextBox 17"/>
-          <p:cNvSpPr txBox="1"/>
-          <p:nvPr/>
-        </p:nvSpPr>
-        <p:spPr>
-          <a:xfrm>
-            <a:off x="4201512" y="4504466"/>
-            <a:ext cx="3177384" cy="565546"/>
-          </a:xfrm>
-          <a:prstGeom prst="rect">
-            <a:avLst/>
-          </a:prstGeom>
-          <a:noFill/>
-        </p:spPr>
-        <p:txBody>
-          <a:bodyPr wrap="none" lIns="0" rIns="0" tIns="0" bIns="0" anchor="t">
-            <a:spAutoFit/>
-          </a:bodyPr>
-          <a:lstStyle/>
-          <a:p>
-            <a:pPr algn="l">
-              <a:lnSpc>
-                <a:spcPts val="3136"/>
-              </a:lnSpc>
-            </a:pPr>
-            <a:r>
-              <a:rPr sz="3200" spc="-96">
-                <a:solidFill>
-                  <a:srgbClr val="EEEBE5"/>
-                </a:solidFill>
-                <a:latin typeface="GQ Text Bold"/>
-                <a:cs typeface="GQ Text Bold"/>
-                <a:ea typeface="GQ Text Bold"/>
-              </a:rPr>
-              <a:t>0</a:t>
-            </a:r>
-          </a:p>
-        </p:txBody>
-      </p:sp>
-      <p:sp>
-        <p:nvSpPr>
-          <p:cNvPr id="19" name="TextBox 18"/>
-          <p:cNvSpPr txBox="1"/>
-          <p:nvPr/>
-        </p:nvSpPr>
-        <p:spPr>
-          <a:xfrm>
-            <a:off x="4201512" y="5033517"/>
-            <a:ext cx="3177384" cy="216408"/>
-          </a:xfrm>
-          <a:prstGeom prst="rect">
-            <a:avLst/>
-          </a:prstGeom>
-          <a:noFill/>
-        </p:spPr>
-        <p:txBody>
-          <a:bodyPr wrap="none" lIns="0" rIns="0" tIns="0" bIns="0" anchor="t">
-            <a:spAutoFit/>
-          </a:bodyPr>
-          <a:lstStyle/>
-          <a:p>
-            <a:pPr algn="l">
-              <a:lnSpc>
-                <a:spcPts val="1200"/>
-              </a:lnSpc>
-            </a:pPr>
-            <a:r>
-              <a:rPr sz="800" spc="64">
-                <a:solidFill>
-                  <a:srgbClr val="A6ADB6"/>
-                </a:solidFill>
-                <a:latin typeface="IBM Plex Mono Medium"/>
-                <a:cs typeface="IBM Plex Mono Medium"/>
-                <a:ea typeface="IBM Plex Mono Medium"/>
-              </a:rPr>
-              <a:t>ЖЕЛІ СҰРАУЫ</a:t>
-            </a:r>
-          </a:p>
-        </p:txBody>
-      </p:sp>
-      <p:sp>
-        <p:nvSpPr>
-          <p:cNvPr id="20" name="TextBox 19"/>
-          <p:cNvSpPr txBox="1"/>
-          <p:nvPr/>
-        </p:nvSpPr>
-        <p:spPr>
-          <a:xfrm>
-            <a:off x="4201512" y="5274330"/>
-            <a:ext cx="3177384" cy="243278"/>
-          </a:xfrm>
-          <a:prstGeom prst="rect">
-            <a:avLst/>
-          </a:prstGeom>
-          <a:noFill/>
-        </p:spPr>
-        <p:txBody>
-          <a:bodyPr wrap="none" lIns="0" rIns="0" tIns="0" bIns="0" anchor="t">
-            <a:spAutoFit/>
-          </a:bodyPr>
-          <a:lstStyle/>
-          <a:p>
-            <a:pPr algn="l">
-              <a:lnSpc>
-                <a:spcPts val="1349"/>
-              </a:lnSpc>
-            </a:pPr>
-            <a:r>
-              <a:rPr sz="950">
-                <a:solidFill>
-                  <a:srgbClr val="A6ADB6"/>
-                </a:solidFill>
-                <a:latin typeface="GQ Text"/>
-                <a:cs typeface="GQ Text"/>
-                <a:ea typeface="GQ Text"/>
-              </a:rPr>
-              <a:t>алғашқы жүктеуден кейін</a:t>
-            </a:r>
-          </a:p>
-        </p:txBody>
-      </p:sp>
-      <p:sp>
-        <p:nvSpPr>
-          <p:cNvPr id="21" name="TextBox 20"/>
-          <p:cNvSpPr txBox="1"/>
-          <p:nvPr/>
-        </p:nvSpPr>
-        <p:spPr>
-          <a:xfrm>
-            <a:off x="749808" y="6285788"/>
-            <a:ext cx="10692079" cy="209194"/>
-          </a:xfrm>
-          <a:prstGeom prst="rect">
-            <a:avLst/>
-          </a:prstGeom>
-          <a:noFill/>
-        </p:spPr>
-        <p:txBody>
-          <a:bodyPr wrap="none" lIns="0" rIns="0" tIns="0" bIns="0" anchor="t">
-            <a:spAutoFit/>
-          </a:bodyPr>
-          <a:lstStyle/>
-          <a:p>
-            <a:pPr algn="l">
-              <a:lnSpc>
-                <a:spcPts val="1160"/>
-              </a:lnSpc>
-            </a:pPr>
-            <a:r>
-              <a:rPr sz="850">
-                <a:solidFill>
-                  <a:srgbClr val="A6ADB6"/>
-                </a:solidFill>
-                <a:latin typeface="GQ Text"/>
-                <a:cs typeface="GQ Text"/>
-                <a:ea typeface="GQ Text"/>
-              </a:rPr>
-              <a:t>Қосымша қаріпті және суреттерді қоса алғанда шамамен 1,4 МБ орын алады. Бір рет жүктеліп, әрі қарай интернетсіз жұмыс істейді — өлшеумен тексерілді.</a:t>
+              <a:t>TILASHAR-KZ.VERCEL.APP  ·  МАЛЫШКО МАКАР ЕВГЕНЬЕВИЧ · 6 «Б» СЫНЫП · №35 МЕКТЕП</a:t>
             </a:r>
           </a:p>
         </p:txBody>

--- a/презентация/Тілашар-қорғау.pptx
+++ b/презентация/Тілашар-қорғау.pptx
@@ -509,34 +509,34 @@
           <a:lstStyle/>
           <a:p>
             <a:r>
-              <a:t>Здравствуйте. Меня зовут Макар Малышко, я учусь в 6 «б» классе школы №35.</a:t>
+              <a:t>Здравствуйте. Меня зовут Малышко Макар, я учусь в 6 «б» классе школы №35.</a:t>
             </a:r>
           </a:p>
           <a:p/>
           <a:p>
             <a:r>
-              <a:t>Я сделал приложение для изучения казахского языка. Первая версия победила</a:t>
-            </a:r>
-          </a:p>
-          <a:p>
-            <a:r>
-              <a:t>на школьной олимпиаде — сегодня показываю вторую и рассказываю, что в ней</a:t>
-            </a:r>
-          </a:p>
-          <a:p>
-            <a:r>
-              <a:t>появилось и почему.</a:t>
+              <a:t>Я прошёл краткий курс по искусственному интеллекту и сделал приложение</a:t>
+            </a:r>
+          </a:p>
+          <a:p>
+            <a:r>
+              <a:t>для изучения казахского языка — «Тілашар». Оно рассчитано на учеников</a:t>
+            </a:r>
+          </a:p>
+          <a:p>
+            <a:r>
+              <a:t>с 5 по 11 класс.</a:t>
             </a:r>
           </a:p>
           <a:p/>
           <a:p>
             <a:r>
-              <a:t>Доклад займёт около семи минут. Отвечу на четыре вопроса: что создано,</a:t>
-            </a:r>
-          </a:p>
-          <a:p>
-            <a:r>
-              <a:t>для чего, как и что здесь особенного.</a:t>
+              <a:t>Доклад займёт около семи минут. Расскажу: как я его сделал, зачем оно</a:t>
+            </a:r>
+          </a:p>
+          <a:p>
+            <a:r>
+              <a:t>нужно, что внутри и что я хочу делать дальше.</a:t>
             </a:r>
           </a:p>
         </p:txBody>
@@ -606,23 +606,34 @@
           <a:lstStyle/>
           <a:p>
             <a:r>
-              <a:t>Здесь важно показать масштаб одним взглядом: это не демонстрационный пример</a:t>
-            </a:r>
-          </a:p>
-          <a:p>
-            <a:r>
-              <a:t>из трёх уроков, а курс, которым можно заниматься весь учебный год.</a:t>
+              <a:t>Здесь важно сказать своими словами и спокойно.</a:t>
             </a:r>
           </a:p>
           <a:p/>
           <a:p>
             <a:r>
-              <a:t>Если спросят про уровни: уровень — ориентир, а не замок. Уроки не запираются,</a:t>
-            </a:r>
-          </a:p>
-          <a:p>
-            <a:r>
-              <a:t>переключиться можно в одно касание.</a:t>
+              <a:t>Курс по искусственному интеллекту дал главное: как правильно поставить</a:t>
+            </a:r>
+          </a:p>
+          <a:p>
+            <a:r>
+              <a:t>задачу нейросети и как проверить то, что она сделала. Код помогала писать</a:t>
+            </a:r>
+          </a:p>
+          <a:p>
+            <a:r>
+              <a:t>нейросеть — но что именно делать, зачем и правильно ли получилось, решал я.</a:t>
+            </a:r>
+          </a:p>
+          <a:p/>
+          <a:p>
+            <a:r>
+              <a:t>Если спросят «а что здесь твоего?» — отвечать так же прямо: замысел,</a:t>
+            </a:r>
+          </a:p>
+          <a:p>
+            <a:r>
+              <a:t>содержание уроков, проверка и все решения.</a:t>
             </a:r>
           </a:p>
         </p:txBody>
@@ -697,23 +708,34 @@
           </a:p>
           <a:p>
             <a:r>
-              <a:t>аудиторией, и это нормально. Ниша казахского остаётся незакрытой — её я</a:t>
-            </a:r>
-          </a:p>
-          <a:p>
-            <a:r>
-              <a:t>и попробовал закрыть.</a:t>
+              <a:t>аудиторией, и это нормально. Место для казахского осталось пустым — его</a:t>
+            </a:r>
+          </a:p>
+          <a:p>
+            <a:r>
+              <a:t>я и попробовал занять.</a:t>
             </a:r>
           </a:p>
           <a:p/>
           <a:p>
             <a:r>
-              <a:t>Список курсов я проверил на их сайте в день подготовки и поставил дату.</a:t>
-            </a:r>
-          </a:p>
-          <a:p>
-            <a:r>
-              <a:t>Если жюри захочет — можно открыть сайт прямо сейчас.</a:t>
+              <a:t>Главная мысль слайда: приложение должно усилить интерес к языку и дать</a:t>
+            </a:r>
+          </a:p>
+          <a:p>
+            <a:r>
+              <a:t>больше практики, а не заменить учителя.</a:t>
+            </a:r>
+          </a:p>
+          <a:p/>
+          <a:p>
+            <a:r>
+              <a:t>Список курсов я проверил на их сайте и поставил дату. Если жюри захочет —</a:t>
+            </a:r>
+          </a:p>
+          <a:p>
+            <a:r>
+              <a:t>можно открыть сайт прямо сейчас.</a:t>
             </a:r>
           </a:p>
         </p:txBody>
@@ -783,34 +805,28 @@
           <a:lstStyle/>
           <a:p>
             <a:r>
-              <a:t>Самый частый вопрос жюри: «что здесь сделал ты, а что нейросеть?».</a:t>
-            </a:r>
-          </a:p>
-          <a:p>
-            <a:r>
-              <a:t>Отвечать спокойно и честно.</a:t>
+              <a:t>Не перечислять все пять — назвать «Учиться» и «Практику», остальное видно</a:t>
+            </a:r>
+          </a:p>
+          <a:p>
+            <a:r>
+              <a:t>на слайде.</a:t>
             </a:r>
           </a:p>
           <a:p/>
           <a:p>
             <a:r>
-              <a:t>Код помогала писать нейросеть. Моя работа — поставить вопрос, измерить,</a:t>
-            </a:r>
-          </a:p>
-          <a:p>
-            <a:r>
-              <a:t>найти причины и проверить результат. Первая версия писалась без такой</a:t>
-            </a:r>
-          </a:p>
-          <a:p>
-            <a:r>
-              <a:t>проверки, и в ней половина задуманного просто не работала.</a:t>
-            </a:r>
-          </a:p>
-          <a:p/>
-          <a:p>
-            <a:r>
-              <a:t>Именно поэтому я и сделал так, чтобы приложение проверяло себя само.</a:t>
+              <a:t>Смысл: это не список уроков, а курс на весь учебный год с тремя уровнями —</a:t>
+            </a:r>
+          </a:p>
+          <a:p>
+            <a:r>
+              <a:t>5–7, 7–9 и 9–11 класс. Уровень подсказывает, откуда начать, но ничего</a:t>
+            </a:r>
+          </a:p>
+          <a:p>
+            <a:r>
+              <a:t>не запирает: перейти можно в одно касание.</a:t>
             </a:r>
           </a:p>
         </p:txBody>
@@ -880,44 +896,44 @@
           <a:lstStyle/>
           <a:p>
             <a:r>
-              <a:t>Это ядро доклада. Не читать по пунктам — рассказать про первый и третий,</a:t>
-            </a:r>
-          </a:p>
-          <a:p>
-            <a:r>
-              <a:t>остальные видны на слайде.</a:t>
+              <a:t>Самый частый вопрос жюри: «что здесь сделал ты, а что нейросеть?».</a:t>
+            </a:r>
+          </a:p>
+          <a:p>
+            <a:r>
+              <a:t>Отвечать спокойно и честно.</a:t>
             </a:r>
           </a:p>
           <a:p/>
           <a:p>
             <a:r>
-              <a:t>Про первый стоит сделать паузу: в казахском есть буквы, которых физически</a:t>
-            </a:r>
-          </a:p>
-          <a:p>
-            <a:r>
-              <a:t>нет на русской клавиатуре. Обычный тренажёр сравнивает ответ буква в букву,</a:t>
-            </a:r>
-          </a:p>
-          <a:p>
-            <a:r>
-              <a:t>и ученик получает «неверно» за правильный ответ. Именно из-за этого первую</a:t>
-            </a:r>
-          </a:p>
-          <a:p>
-            <a:r>
-              <a:t>версию бросали.</a:t>
+              <a:t>Код помогала писать нейросеть. Моя работа — поставить задачу, проверить</a:t>
+            </a:r>
+          </a:p>
+          <a:p>
+            <a:r>
+              <a:t>результат и найти причину, если что-то не работает. В первой версии такой</a:t>
+            </a:r>
+          </a:p>
+          <a:p>
+            <a:r>
+              <a:t>проверки не было, и часть задуманного просто не работала. Поэтому во второй</a:t>
+            </a:r>
+          </a:p>
+          <a:p>
+            <a:r>
+              <a:t>версии приложение проверяет себя само при каждом изменении.</a:t>
             </a:r>
           </a:p>
           <a:p/>
           <a:p>
             <a:r>
-              <a:t>Если спросят подробнее про окончания — можно показать вживую на слайде 07:</a:t>
-            </a:r>
-          </a:p>
-          <a:p>
-            <a:r>
-              <a:t>подставить любое слово прямо при жюри.</a:t>
+              <a:t>Про деньги: все сервисы бесплатные. Это важно — значит, повторить может</a:t>
+            </a:r>
+          </a:p>
+          <a:p>
+            <a:r>
+              <a:t>любой школьник.</a:t>
             </a:r>
           </a:p>
         </p:txBody>
@@ -987,23 +1003,44 @@
           <a:lstStyle/>
           <a:p>
             <a:r>
-              <a:t>Коротко: это не список уроков, а система, которая возвращает материал тогда,</a:t>
-            </a:r>
-          </a:p>
-          <a:p>
-            <a:r>
-              <a:t>когда он начинает забываться.</a:t>
+              <a:t>Это ядро доклада. Не читать по пунктам — рассказать про первый и третий,</a:t>
+            </a:r>
+          </a:p>
+          <a:p>
+            <a:r>
+              <a:t>остальные видны на слайде.</a:t>
             </a:r>
           </a:p>
           <a:p/>
           <a:p>
             <a:r>
-              <a:t>Если останется время — можно показать «Таблицы окончаний»: подставить любое</a:t>
-            </a:r>
-          </a:p>
-          <a:p>
-            <a:r>
-              <a:t>слово прямо при жюри.</a:t>
+              <a:t>Про первый сделать паузу: в казахском есть буквы, которых физически нет</a:t>
+            </a:r>
+          </a:p>
+          <a:p>
+            <a:r>
+              <a:t>на русской клавиатуре. Обычный тренажёр сравнивает ответ буква в букву,</a:t>
+            </a:r>
+          </a:p>
+          <a:p>
+            <a:r>
+              <a:t>и ученик получает «неверно» за правильный ответ. Именно из-за этого первую</a:t>
+            </a:r>
+          </a:p>
+          <a:p>
+            <a:r>
+              <a:t>версию бросали.</a:t>
+            </a:r>
+          </a:p>
+          <a:p/>
+          <a:p>
+            <a:r>
+              <a:t>Про третий: приложение само помнит, что начинает забываться, и возвращает</a:t>
+            </a:r>
+          </a:p>
+          <a:p>
+            <a:r>
+              <a:t>это задание. Ученику не нужно решать, что повторять.</a:t>
             </a:r>
           </a:p>
         </p:txBody>
@@ -1201,7 +1238,17 @@
           </a:p>
           <a:p>
             <a:r>
-              <a:t>мешало то, что он не мог нажать нужную букву.</a:t>
+              <a:t>мешало то, что он не мог нажать нужную букву. Это я убрал — а дальше</a:t>
+            </a:r>
+          </a:p>
+          <a:p>
+            <a:r>
+              <a:t>приложение нужно проверить на живом классе, и без учителей мне это</a:t>
+            </a:r>
+          </a:p>
+          <a:p>
+            <a:r>
+              <a:t>не сделать.</a:t>
             </a:r>
           </a:p>
           <a:p/>
@@ -1218,17 +1265,17 @@
           </a:p>
           <a:p>
             <a:r>
-              <a:t>   Код помогала писать нейросеть. Я поставил вопрос, измерил, нашёл причины</a:t>
-            </a:r>
-          </a:p>
-          <a:p>
-            <a:r>
-              <a:t>   и проверил результат. Первая версия писалась без такой проверки — потому</a:t>
-            </a:r>
-          </a:p>
-          <a:p>
-            <a:r>
-              <a:t>   в ней половина задуманного и не работала.</a:t>
+              <a:t>   Код помогала писать нейросеть. Я ставил задачу, проверял результат</a:t>
+            </a:r>
+          </a:p>
+          <a:p>
+            <a:r>
+              <a:t>   и искал причину, если что-то не работало. Содержание уроков и все</a:t>
+            </a:r>
+          </a:p>
+          <a:p>
+            <a:r>
+              <a:t>   решения — мои.</a:t>
             </a:r>
           </a:p>
           <a:p/>
@@ -1239,12 +1286,12 @@
           </a:p>
           <a:p>
             <a:r>
-              <a:t>   Тогда я показывал замысел, и он победил. Сейчас показываю проверку этого</a:t>
-            </a:r>
-          </a:p>
-          <a:p>
-            <a:r>
-              <a:t>   замысла на данных и то, что из неё вышло.</a:t>
+              <a:t>   Тогда я показывал замысел, и он победил. Сейчас показываю работающее</a:t>
+            </a:r>
+          </a:p>
+          <a:p>
+            <a:r>
+              <a:t>   приложение и то, что в нём проверено.</a:t>
             </a:r>
           </a:p>
           <a:p/>
@@ -1271,17 +1318,12 @@
           </a:p>
           <a:p>
             <a:r>
-              <a:t>   Нет, и это касается всего текста. Носитель языка не видел ни одной строки,</a:t>
-            </a:r>
-          </a:p>
-          <a:p>
-            <a:r>
-              <a:t>   поэтому весь казахский текст — 168 тысяч знаков — выгружен учителю</a:t>
-            </a:r>
-          </a:p>
-          <a:p>
-            <a:r>
-              <a:t>   на проверку.</a:t>
+              <a:t>   Нет. Весь казахский текст выгружен учителю на проверку — это первый</a:t>
+            </a:r>
+          </a:p>
+          <a:p>
+            <a:r>
+              <a:t>   пункт плана развития.</a:t>
             </a:r>
           </a:p>
           <a:p/>
@@ -1293,6 +1335,11 @@
           <a:p>
             <a:r>
               <a:t>   Нет. Открывается по ссылке, работает без интернета, ставится на телефон.</a:t>
+            </a:r>
+          </a:p>
+          <a:p>
+            <a:r>
+              <a:t>   Все сервисы, на которых оно сделано, тоже бесплатные.</a:t>
             </a:r>
           </a:p>
         </p:txBody>
@@ -8507,7 +8554,7 @@
                 <a:cs typeface="GQ Text"/>
                 <a:ea typeface="GQ Text"/>
               </a:rPr>
-              <a:t>Орысша сөйлеп, қазақ тілін үйренетіндерге арналған қосымша. Екінші</a:t>
+              <a:t>Орысша сөйлейтін және қазақ тілін үйренетін 5–11 сынып оқушыларына</a:t>
             </a:r>
           </a:p>
           <a:p>
@@ -8525,7 +8572,7 @@
                 <a:cs typeface="GQ Text"/>
                 <a:ea typeface="GQ Text"/>
               </a:rPr>
-              <a:t>нұсқа: біріншісі мектеп олимпиадасында жеңді.</a:t>
+              <a:t>арналған қосымша. Тегін, сілтеме арқылы ашылады.</a:t>
             </a:r>
           </a:p>
         </p:txBody>
@@ -8842,7 +8889,7 @@
                 <a:cs typeface="GQ Text Bold"/>
                 <a:ea typeface="GQ Text Bold"/>
               </a:rPr>
-              <a:t>3</a:t>
+              <a:t>5–11</a:t>
             </a:r>
           </a:p>
         </p:txBody>
@@ -8883,7 +8930,7 @@
                 <a:cs typeface="IBM Plex Mono Medium"/>
                 <a:ea typeface="IBM Plex Mono Medium"/>
               </a:rPr>
-              <a:t>СЫНЫП БОЙЫНША ДЕҢГЕЙ</a:t>
+              <a:t>СЫНЫПТАР</a:t>
             </a:r>
           </a:p>
         </p:txBody>
@@ -9043,7 +9090,7 @@
                 <a:cs typeface="IBM Plex Mono SemiBold"/>
                 <a:ea typeface="IBM Plex Mono SemiBold"/>
               </a:rPr>
-              <a:t>НЕ ЖАСАЛДЫ</a:t>
+              <a:t>БҰЛ ҚАЛАЙ ПАЙДА БОЛДЫ</a:t>
             </a:r>
           </a:p>
         </p:txBody>
@@ -9097,8 +9144,8 @@
         </p:nvSpPr>
         <p:spPr>
           <a:xfrm>
-            <a:off x="749808" y="795202"/>
-            <a:ext cx="10692079" cy="1249644"/>
+            <a:off x="749808" y="803899"/>
+            <a:ext cx="10692079" cy="1118102"/>
           </a:xfrm>
           <a:prstGeom prst="rect">
             <a:avLst/>
@@ -9113,11 +9160,11 @@
           <a:p>
             <a:pPr algn="l">
               <a:lnSpc>
-                <a:spcPts val="4066"/>
-              </a:lnSpc>
-            </a:pPr>
-            <a:r>
-              <a:rPr sz="3800" spc="-84">
+                <a:spcPts val="3638"/>
+              </a:lnSpc>
+            </a:pPr>
+            <a:r>
+              <a:rPr sz="3400" spc="-75">
                 <a:solidFill>
                   <a:srgbClr val="1B222B"/>
                 </a:solidFill>
@@ -9125,17 +9172,17 @@
                 <a:cs typeface="GQ Text Bold"/>
                 <a:ea typeface="GQ Text Bold"/>
               </a:rPr>
-              <a:t>Қазақ тілін күн сайын он минөттен үйренуге</a:t>
-            </a:r>
-          </a:p>
-          <a:p>
-            <a:pPr algn="l">
-              <a:lnSpc>
-                <a:spcPts val="4066"/>
-              </a:lnSpc>
-            </a:pPr>
-            <a:r>
-              <a:rPr sz="3800" spc="-84">
+              <a:t>Жасанды интеллект бойынша қысқа курстан өттім</a:t>
+            </a:r>
+          </a:p>
+          <a:p>
+            <a:pPr algn="l">
+              <a:lnSpc>
+                <a:spcPts val="3638"/>
+              </a:lnSpc>
+            </a:pPr>
+            <a:r>
+              <a:rPr sz="3400" spc="-75">
                 <a:solidFill>
                   <a:srgbClr val="1B222B"/>
                 </a:solidFill>
@@ -9143,7 +9190,7 @@
                 <a:cs typeface="GQ Text Bold"/>
                 <a:ea typeface="GQ Text Bold"/>
               </a:rPr>
-              <a:t>болатын қосымша</a:t>
+              <a:t>— және реферат емес, нақты қосымша жасадым</a:t>
             </a:r>
           </a:p>
         </p:txBody>
@@ -9156,7 +9203,7 @@
         </p:nvSpPr>
         <p:spPr>
           <a:xfrm>
-            <a:off x="749808" y="2019381"/>
+            <a:off x="749808" y="1910669"/>
             <a:ext cx="9195188" cy="567349"/>
           </a:xfrm>
           <a:prstGeom prst="rect">
@@ -9184,7 +9231,7 @@
                 <a:cs typeface="GQ Text"/>
                 <a:ea typeface="GQ Text"/>
               </a:rPr>
-              <a:t>Браузерде ашылады және телефонға орнатылады. Алғашқы жүктеуден кейін интернетсіз жұмыс істейді — кез</a:t>
+              <a:t>Оқушы нейрожелінің көмегімен идеяны шынымен пайдаланылатын дайын бағдарламаға дейін жеткізе ала ма —</a:t>
             </a:r>
           </a:p>
           <a:p>
@@ -9202,7 +9249,7 @@
                 <a:cs typeface="GQ Text"/>
                 <a:ea typeface="GQ Text"/>
               </a:rPr>
-              <a:t>келген жерде шұғылдануға болады.</a:t>
+              <a:t>соны тексергім келді. Жеткізе екен.</a:t>
             </a:r>
           </a:p>
         </p:txBody>
@@ -9215,8 +9262,8 @@
         </p:nvSpPr>
         <p:spPr>
           <a:xfrm>
-            <a:off x="749808" y="2946400"/>
-            <a:ext cx="2522143" cy="1948688"/>
+            <a:off x="749808" y="2837688"/>
+            <a:ext cx="2522143" cy="2126488"/>
           </a:xfrm>
           <a:prstGeom prst="rect">
             <a:avLst/>
@@ -9247,8 +9294,8 @@
         </p:nvSpPr>
         <p:spPr>
           <a:xfrm>
-            <a:off x="749808" y="2946400"/>
-            <a:ext cx="32004" cy="1948688"/>
+            <a:off x="749808" y="2837688"/>
+            <a:ext cx="32004" cy="2126488"/>
           </a:xfrm>
           <a:prstGeom prst="rect">
             <a:avLst/>
@@ -9277,7 +9324,7 @@
         </p:nvSpPr>
         <p:spPr>
           <a:xfrm>
-            <a:off x="1005840" y="3181096"/>
+            <a:off x="1005840" y="3072384"/>
             <a:ext cx="2010079" cy="189357"/>
           </a:xfrm>
           <a:prstGeom prst="rect">
@@ -9305,7 +9352,7 @@
                 <a:cs typeface="IBM Plex Mono SemiBold"/>
                 <a:ea typeface="IBM Plex Mono SemiBold"/>
               </a:rPr>
-              <a:t>КУРС</a:t>
+              <a:t>1</a:t>
             </a:r>
           </a:p>
         </p:txBody>
@@ -9318,7 +9365,7 @@
         </p:nvSpPr>
         <p:spPr>
           <a:xfrm>
-            <a:off x="1005840" y="3419906"/>
+            <a:off x="1005840" y="3311194"/>
             <a:ext cx="2010079" cy="308381"/>
           </a:xfrm>
           <a:prstGeom prst="rect">
@@ -9346,7 +9393,7 @@
                 <a:cs typeface="GQ Text Bold"/>
                 <a:ea typeface="GQ Text Bold"/>
               </a:rPr>
-              <a:t>26 сабақ</a:t>
+              <a:t>Үйрендім</a:t>
             </a:r>
           </a:p>
         </p:txBody>
@@ -9359,7 +9406,7 @@
         </p:nvSpPr>
         <p:spPr>
           <a:xfrm>
-            <a:off x="1005840" y="3798824"/>
+            <a:off x="1005840" y="3690112"/>
             <a:ext cx="204216" cy="252475"/>
           </a:xfrm>
           <a:prstGeom prst="rect">
@@ -9400,7 +9447,7 @@
         </p:nvSpPr>
         <p:spPr>
           <a:xfrm>
-            <a:off x="1210056" y="3798824"/>
+            <a:off x="1210056" y="3690112"/>
             <a:ext cx="1805863" cy="430276"/>
           </a:xfrm>
           <a:prstGeom prst="rect">
@@ -9428,7 +9475,7 @@
                 <a:cs typeface="GQ Text"/>
                 <a:ea typeface="GQ Text"/>
               </a:rPr>
-              <a:t>Үш деңгей: 5–7, 7–9 және</a:t>
+              <a:t>Жасанды интеллект</a:t>
             </a:r>
           </a:p>
           <a:p>
@@ -9446,7 +9493,7 @@
                 <a:cs typeface="GQ Text"/>
                 <a:ea typeface="GQ Text"/>
               </a:rPr>
-              <a:t>9–11 сынып</a:t>
+              <a:t>бойынша қысқа курс</a:t>
             </a:r>
           </a:p>
         </p:txBody>
@@ -9459,7 +9506,7 @@
         </p:nvSpPr>
         <p:spPr>
           <a:xfrm>
-            <a:off x="1005840" y="4255008"/>
+            <a:off x="1005840" y="4146296"/>
             <a:ext cx="204216" cy="252475"/>
           </a:xfrm>
           <a:prstGeom prst="rect">
@@ -9500,8 +9547,8 @@
         </p:nvSpPr>
         <p:spPr>
           <a:xfrm>
-            <a:off x="1210056" y="4255008"/>
-            <a:ext cx="1805863" cy="430276"/>
+            <a:off x="1210056" y="4146296"/>
+            <a:ext cx="1805863" cy="608076"/>
           </a:xfrm>
           <a:prstGeom prst="rect">
             <a:avLst/>
@@ -9528,7 +9575,7 @@
                 <a:cs typeface="GQ Text"/>
                 <a:ea typeface="GQ Text"/>
               </a:rPr>
-              <a:t>Сабақ төрт қадаммен</a:t>
+              <a:t>Тапсырманы қалай қою</a:t>
             </a:r>
           </a:p>
           <a:p>
@@ -9546,7 +9593,25 @@
                 <a:cs typeface="GQ Text"/>
                 <a:ea typeface="GQ Text"/>
               </a:rPr>
-              <a:t>жүреді</a:t>
+              <a:t>және жауапты қалай</a:t>
+            </a:r>
+          </a:p>
+          <a:p>
+            <a:pPr algn="l">
+              <a:lnSpc>
+                <a:spcPts val="1400"/>
+              </a:lnSpc>
+            </a:pPr>
+            <a:r>
+              <a:rPr sz="1000">
+                <a:solidFill>
+                  <a:srgbClr val="1B222B"/>
+                </a:solidFill>
+                <a:latin typeface="GQ Text"/>
+                <a:cs typeface="GQ Text"/>
+                <a:ea typeface="GQ Text"/>
+              </a:rPr>
+              <a:t>тексеру</a:t>
             </a:r>
           </a:p>
         </p:txBody>
@@ -9559,8 +9624,8 @@
         </p:nvSpPr>
         <p:spPr>
           <a:xfrm>
-            <a:off x="3473119" y="2946400"/>
-            <a:ext cx="2522143" cy="1948688"/>
+            <a:off x="3473119" y="2837688"/>
+            <a:ext cx="2522143" cy="2126488"/>
           </a:xfrm>
           <a:prstGeom prst="rect">
             <a:avLst/>
@@ -9591,8 +9656,8 @@
         </p:nvSpPr>
         <p:spPr>
           <a:xfrm>
-            <a:off x="3473119" y="2946400"/>
-            <a:ext cx="32004" cy="1948688"/>
+            <a:off x="3473119" y="2837688"/>
+            <a:ext cx="32004" cy="2126488"/>
           </a:xfrm>
           <a:prstGeom prst="rect">
             <a:avLst/>
@@ -9621,7 +9686,7 @@
         </p:nvSpPr>
         <p:spPr>
           <a:xfrm>
-            <a:off x="3729151" y="3181096"/>
+            <a:off x="3729151" y="3072384"/>
             <a:ext cx="2010079" cy="189357"/>
           </a:xfrm>
           <a:prstGeom prst="rect">
@@ -9649,7 +9714,7 @@
                 <a:cs typeface="IBM Plex Mono SemiBold"/>
                 <a:ea typeface="IBM Plex Mono SemiBold"/>
               </a:rPr>
-              <a:t>ТАПСЫРМАЛАР</a:t>
+              <a:t>2</a:t>
             </a:r>
           </a:p>
         </p:txBody>
@@ -9662,7 +9727,7 @@
         </p:nvSpPr>
         <p:spPr>
           <a:xfrm>
-            <a:off x="3729151" y="3419906"/>
+            <a:off x="3729151" y="3311194"/>
             <a:ext cx="2010079" cy="308381"/>
           </a:xfrm>
           <a:prstGeom prst="rect">
@@ -9690,7 +9755,7 @@
                 <a:cs typeface="GQ Text Bold"/>
                 <a:ea typeface="GQ Text Bold"/>
               </a:rPr>
-              <a:t>225 жаттығу</a:t>
+              <a:t>Жасадым</a:t>
             </a:r>
           </a:p>
         </p:txBody>
@@ -9703,7 +9768,7 @@
         </p:nvSpPr>
         <p:spPr>
           <a:xfrm>
-            <a:off x="3729151" y="3798824"/>
+            <a:off x="3729151" y="3690112"/>
             <a:ext cx="204216" cy="252475"/>
           </a:xfrm>
           <a:prstGeom prst="rect">
@@ -9744,8 +9809,8 @@
         </p:nvSpPr>
         <p:spPr>
           <a:xfrm>
-            <a:off x="3933367" y="3798824"/>
-            <a:ext cx="1805863" cy="252475"/>
+            <a:off x="3933367" y="3690112"/>
+            <a:ext cx="1805863" cy="430276"/>
           </a:xfrm>
           <a:prstGeom prst="rect">
             <a:avLst/>
@@ -9772,7 +9837,25 @@
                 <a:cs typeface="GQ Text"/>
                 <a:ea typeface="GQ Text"/>
               </a:rPr>
-              <a:t>Жеті түрлі тапсырма</a:t>
+              <a:t>Қосымша туралы баяндама</a:t>
+            </a:r>
+          </a:p>
+          <a:p>
+            <a:pPr algn="l">
+              <a:lnSpc>
+                <a:spcPts val="1400"/>
+              </a:lnSpc>
+            </a:pPr>
+            <a:r>
+              <a:rPr sz="1000">
+                <a:solidFill>
+                  <a:srgbClr val="1B222B"/>
+                </a:solidFill>
+                <a:latin typeface="GQ Text"/>
+                <a:cs typeface="GQ Text"/>
+                <a:ea typeface="GQ Text"/>
+              </a:rPr>
+              <a:t>емес, қосымшаның өзі</a:t>
             </a:r>
           </a:p>
         </p:txBody>
@@ -9785,7 +9868,7 @@
         </p:nvSpPr>
         <p:spPr>
           <a:xfrm>
-            <a:off x="3729151" y="4077208"/>
+            <a:off x="3729151" y="4146296"/>
             <a:ext cx="204216" cy="252475"/>
           </a:xfrm>
           <a:prstGeom prst="rect">
@@ -9826,8 +9909,8 @@
         </p:nvSpPr>
         <p:spPr>
           <a:xfrm>
-            <a:off x="3933367" y="4077208"/>
-            <a:ext cx="1805863" cy="252475"/>
+            <a:off x="3933367" y="4146296"/>
+            <a:ext cx="1805863" cy="430276"/>
           </a:xfrm>
           <a:prstGeom prst="rect">
             <a:avLst/>
@@ -9854,7 +9937,25 @@
                 <a:cs typeface="GQ Text"/>
                 <a:ea typeface="GQ Text"/>
               </a:rPr>
-              <a:t>Әр қатені талдау</a:t>
+              <a:t>26 сабақ және 225</a:t>
+            </a:r>
+          </a:p>
+          <a:p>
+            <a:pPr algn="l">
+              <a:lnSpc>
+                <a:spcPts val="1400"/>
+              </a:lnSpc>
+            </a:pPr>
+            <a:r>
+              <a:rPr sz="1000">
+                <a:solidFill>
+                  <a:srgbClr val="1B222B"/>
+                </a:solidFill>
+                <a:latin typeface="GQ Text"/>
+                <a:cs typeface="GQ Text"/>
+                <a:ea typeface="GQ Text"/>
+              </a:rPr>
+              <a:t>тапсырма</a:t>
             </a:r>
           </a:p>
         </p:txBody>
@@ -9867,8 +9968,8 @@
         </p:nvSpPr>
         <p:spPr>
           <a:xfrm>
-            <a:off x="6196431" y="2946400"/>
-            <a:ext cx="2522143" cy="1948688"/>
+            <a:off x="6196431" y="2837688"/>
+            <a:ext cx="2522143" cy="2126488"/>
           </a:xfrm>
           <a:prstGeom prst="rect">
             <a:avLst/>
@@ -9899,8 +10000,8 @@
         </p:nvSpPr>
         <p:spPr>
           <a:xfrm>
-            <a:off x="6196431" y="2946400"/>
-            <a:ext cx="32004" cy="1948688"/>
+            <a:off x="6196431" y="2837688"/>
+            <a:ext cx="32004" cy="2126488"/>
           </a:xfrm>
           <a:prstGeom prst="rect">
             <a:avLst/>
@@ -9929,7 +10030,7 @@
         </p:nvSpPr>
         <p:spPr>
           <a:xfrm>
-            <a:off x="6452463" y="3181096"/>
+            <a:off x="6452463" y="3072384"/>
             <a:ext cx="2010079" cy="189357"/>
           </a:xfrm>
           <a:prstGeom prst="rect">
@@ -9957,7 +10058,7 @@
                 <a:cs typeface="IBM Plex Mono SemiBold"/>
                 <a:ea typeface="IBM Plex Mono SemiBold"/>
               </a:rPr>
-              <a:t>АНЫҚТАМА</a:t>
+              <a:t>3</a:t>
             </a:r>
           </a:p>
         </p:txBody>
@@ -9970,7 +10071,7 @@
         </p:nvSpPr>
         <p:spPr>
           <a:xfrm>
-            <a:off x="6452463" y="3419906"/>
+            <a:off x="6452463" y="3311194"/>
             <a:ext cx="2010079" cy="308381"/>
           </a:xfrm>
           <a:prstGeom prst="rect">
@@ -9998,7 +10099,7 @@
                 <a:cs typeface="GQ Text Bold"/>
                 <a:ea typeface="GQ Text Bold"/>
               </a:rPr>
-              <a:t>33 ереже</a:t>
+              <a:t>Тексердім</a:t>
             </a:r>
           </a:p>
         </p:txBody>
@@ -10011,7 +10112,7 @@
         </p:nvSpPr>
         <p:spPr>
           <a:xfrm>
-            <a:off x="6452463" y="3798824"/>
+            <a:off x="6452463" y="3690112"/>
             <a:ext cx="204216" cy="252475"/>
           </a:xfrm>
           <a:prstGeom prst="rect">
@@ -10052,8 +10153,8 @@
         </p:nvSpPr>
         <p:spPr>
           <a:xfrm>
-            <a:off x="6656679" y="3798824"/>
-            <a:ext cx="1805863" cy="252475"/>
+            <a:off x="6656679" y="3690112"/>
+            <a:ext cx="1805863" cy="430276"/>
           </a:xfrm>
           <a:prstGeom prst="rect">
             <a:avLst/>
@@ -10080,7 +10181,25 @@
                 <a:cs typeface="GQ Text"/>
                 <a:ea typeface="GQ Text"/>
               </a:rPr>
-              <a:t>Мысалдары бар 22 тақырып</a:t>
+              <a:t>Бірінші нұсқа мектеп</a:t>
+            </a:r>
+          </a:p>
+          <a:p>
+            <a:pPr algn="l">
+              <a:lnSpc>
+                <a:spcPts val="1400"/>
+              </a:lnSpc>
+            </a:pPr>
+            <a:r>
+              <a:rPr sz="1000">
+                <a:solidFill>
+                  <a:srgbClr val="1B222B"/>
+                </a:solidFill>
+                <a:latin typeface="GQ Text"/>
+                <a:cs typeface="GQ Text"/>
+                <a:ea typeface="GQ Text"/>
+              </a:rPr>
+              <a:t>олимпиадасында жеңді</a:t>
             </a:r>
           </a:p>
         </p:txBody>
@@ -10093,7 +10212,7 @@
         </p:nvSpPr>
         <p:spPr>
           <a:xfrm>
-            <a:off x="6452463" y="4077208"/>
+            <a:off x="6452463" y="4146296"/>
             <a:ext cx="204216" cy="252475"/>
           </a:xfrm>
           <a:prstGeom prst="rect">
@@ -10134,8 +10253,8 @@
         </p:nvSpPr>
         <p:spPr>
           <a:xfrm>
-            <a:off x="6656679" y="4077208"/>
-            <a:ext cx="1805863" cy="252475"/>
+            <a:off x="6656679" y="4146296"/>
+            <a:ext cx="1805863" cy="430276"/>
           </a:xfrm>
           <a:prstGeom prst="rect">
             <a:avLst/>
@@ -10162,7 +10281,25 @@
                 <a:cs typeface="GQ Text"/>
                 <a:ea typeface="GQ Text"/>
               </a:rPr>
-              <a:t>Жанды жалғау кестелері</a:t>
+              <a:t>Бұл — екінші, қайта</a:t>
+            </a:r>
+          </a:p>
+          <a:p>
+            <a:pPr algn="l">
+              <a:lnSpc>
+                <a:spcPts val="1400"/>
+              </a:lnSpc>
+            </a:pPr>
+            <a:r>
+              <a:rPr sz="1000">
+                <a:solidFill>
+                  <a:srgbClr val="1B222B"/>
+                </a:solidFill>
+                <a:latin typeface="GQ Text"/>
+                <a:cs typeface="GQ Text"/>
+                <a:ea typeface="GQ Text"/>
+              </a:rPr>
+              <a:t>жасалған нұсқа</a:t>
             </a:r>
           </a:p>
         </p:txBody>
@@ -10175,8 +10312,8 @@
         </p:nvSpPr>
         <p:spPr>
           <a:xfrm>
-            <a:off x="8919743" y="2946400"/>
-            <a:ext cx="2522143" cy="1948688"/>
+            <a:off x="8919743" y="2837688"/>
+            <a:ext cx="2522143" cy="2126488"/>
           </a:xfrm>
           <a:prstGeom prst="rect">
             <a:avLst/>
@@ -10207,8 +10344,8 @@
         </p:nvSpPr>
         <p:spPr>
           <a:xfrm>
-            <a:off x="8919743" y="2946400"/>
-            <a:ext cx="32004" cy="1948688"/>
+            <a:off x="8919743" y="2837688"/>
+            <a:ext cx="32004" cy="2126488"/>
           </a:xfrm>
           <a:prstGeom prst="rect">
             <a:avLst/>
@@ -10237,7 +10374,7 @@
         </p:nvSpPr>
         <p:spPr>
           <a:xfrm>
-            <a:off x="9175775" y="3181096"/>
+            <a:off x="9175775" y="3072384"/>
             <a:ext cx="2010079" cy="189357"/>
           </a:xfrm>
           <a:prstGeom prst="rect">
@@ -10265,7 +10402,7 @@
                 <a:cs typeface="IBM Plex Mono SemiBold"/>
                 <a:ea typeface="IBM Plex Mono SemiBold"/>
               </a:rPr>
-              <a:t>СӨЗДІК</a:t>
+              <a:t>4</a:t>
             </a:r>
           </a:p>
         </p:txBody>
@@ -10278,7 +10415,7 @@
         </p:nvSpPr>
         <p:spPr>
           <a:xfrm>
-            <a:off x="9175775" y="3419906"/>
+            <a:off x="9175775" y="3311194"/>
             <a:ext cx="2010079" cy="308381"/>
           </a:xfrm>
           <a:prstGeom prst="rect">
@@ -10306,7 +10443,7 @@
                 <a:cs typeface="GQ Text Bold"/>
                 <a:ea typeface="GQ Text Bold"/>
               </a:rPr>
-              <a:t>162 мақала</a:t>
+              <a:t>Аштым</a:t>
             </a:r>
           </a:p>
         </p:txBody>
@@ -10319,7 +10456,7 @@
         </p:nvSpPr>
         <p:spPr>
           <a:xfrm>
-            <a:off x="9175775" y="3798824"/>
+            <a:off x="9175775" y="3690112"/>
             <a:ext cx="204216" cy="252475"/>
           </a:xfrm>
           <a:prstGeom prst="rect">
@@ -10360,7 +10497,7 @@
         </p:nvSpPr>
         <p:spPr>
           <a:xfrm>
-            <a:off x="9379991" y="3798824"/>
+            <a:off x="9379991" y="3690112"/>
             <a:ext cx="1805863" cy="430276"/>
           </a:xfrm>
           <a:prstGeom prst="rect">
@@ -10388,7 +10525,7 @@
                 <a:cs typeface="GQ Text"/>
                 <a:ea typeface="GQ Text"/>
               </a:rPr>
-              <a:t>Сабақтардың өзінен</a:t>
+              <a:t>Тегін және сілтеме арқылы,</a:t>
             </a:r>
           </a:p>
           <a:p>
@@ -10406,7 +10543,7 @@
                 <a:cs typeface="GQ Text"/>
                 <a:ea typeface="GQ Text"/>
               </a:rPr>
-              <a:t>жиналған</a:t>
+              <a:t>орнатусыз</a:t>
             </a:r>
           </a:p>
         </p:txBody>
@@ -10419,7 +10556,7 @@
         </p:nvSpPr>
         <p:spPr>
           <a:xfrm>
-            <a:off x="9175775" y="4255008"/>
+            <a:off x="9175775" y="4146296"/>
             <a:ext cx="204216" cy="252475"/>
           </a:xfrm>
           <a:prstGeom prst="rect">
@@ -10460,7 +10597,7 @@
         </p:nvSpPr>
         <p:spPr>
           <a:xfrm>
-            <a:off x="9379991" y="4255008"/>
+            <a:off x="9379991" y="4146296"/>
             <a:ext cx="1805863" cy="430276"/>
           </a:xfrm>
           <a:prstGeom prst="rect">
@@ -10488,7 +10625,7 @@
                 <a:cs typeface="GQ Text"/>
                 <a:ea typeface="GQ Text"/>
               </a:rPr>
-              <a:t>Орыс пернетақтасынан да</a:t>
+              <a:t>Кез келген мектептің 5–11</a:t>
             </a:r>
           </a:p>
           <a:p>
@@ -10506,7 +10643,7 @@
                 <a:cs typeface="GQ Text"/>
                 <a:ea typeface="GQ Text"/>
               </a:rPr>
-              <a:t>іздеу</a:t>
+              <a:t>сынып оқушысына</a:t>
             </a:r>
           </a:p>
         </p:txBody>
@@ -10519,7 +10656,7 @@
         </p:nvSpPr>
         <p:spPr>
           <a:xfrm>
-            <a:off x="749808" y="5279136"/>
+            <a:off x="749808" y="5348224"/>
             <a:ext cx="10692079" cy="710247"/>
           </a:xfrm>
           <a:prstGeom prst="rect">
@@ -10549,7 +10686,7 @@
         </p:nvSpPr>
         <p:spPr>
           <a:xfrm>
-            <a:off x="1024127" y="5478221"/>
+            <a:off x="1024127" y="5547309"/>
             <a:ext cx="10143439" cy="345281"/>
           </a:xfrm>
           <a:prstGeom prst="rect">
@@ -10577,7 +10714,7 @@
                 <a:cs typeface="GQ Text SemiBold"/>
                 <a:ea typeface="GQ Text SemiBold"/>
               </a:rPr>
-              <a:t>Қосымша тегін және сілтеме арқылы ашық. Ештеңе орнатудың қажеті жоқ.</a:t>
+              <a:t>Қосымша дәл қазір жұмыс істеп тұр: сайт ашық, кез келген адам кіріп шұғылдана алады.</a:t>
             </a:r>
           </a:p>
         </p:txBody>
@@ -10639,7 +10776,7 @@
         <p:spPr>
           <a:xfrm>
             <a:off x="6196431" y="2964688"/>
-            <a:ext cx="5245455" cy="1234439"/>
+            <a:ext cx="5245455" cy="1463039"/>
           </a:xfrm>
           <a:prstGeom prst="rect">
             <a:avLst/>
@@ -10790,7 +10927,7 @@
                 <a:cs typeface="IBM Plex Mono SemiBold"/>
                 <a:ea typeface="IBM Plex Mono SemiBold"/>
               </a:rPr>
-              <a:t>НЕ ҮШІН ЖАСАЛДЫ</a:t>
+              <a:t>НЕ ҮШІН ҚАЖЕТ</a:t>
             </a:r>
           </a:p>
         </p:txBody>
@@ -10872,7 +11009,7 @@
                 <a:cs typeface="GQ Text Bold"/>
                 <a:ea typeface="GQ Text Bold"/>
               </a:rPr>
-              <a:t>Қазақ тілін бәрі оқиды, ал орыстілді оқушыға</a:t>
+              <a:t>Қазақ тілін әр мектепте оқиды, ал жаттығуға</a:t>
             </a:r>
           </a:p>
           <a:p>
@@ -10890,7 +11027,7 @@
                 <a:cs typeface="GQ Text Bold"/>
                 <a:ea typeface="GQ Text Bold"/>
               </a:rPr>
-              <a:t>арналған жаттықтырғыш жоқтың қасы</a:t>
+              <a:t>ыңғайлы орын жоқ</a:t>
             </a:r>
           </a:p>
         </p:txBody>
@@ -10931,7 +11068,7 @@
                 <a:cs typeface="GQ Text"/>
                 <a:ea typeface="GQ Text"/>
               </a:rPr>
-              <a:t>Қазақ тілі елдегі барлық мектепте оқытылады, оның ішінде оқыту орыс тілінде жүретін мектептерде де.</a:t>
+              <a:t>Қазақ тілі — мемлекеттік тіл және елдегі барлық мектептің міндетті пәні, оның ішінде оқыту орыс тілінде жүретін</a:t>
             </a:r>
           </a:p>
           <a:p>
@@ -10949,7 +11086,7 @@
                 <a:cs typeface="GQ Text"/>
                 <a:ea typeface="GQ Text"/>
               </a:rPr>
-              <a:t>Түсіндірмесі орысша берілетін цифрлық жаттықтырғыштар өте аз.</a:t>
+              <a:t>мектептерде де.</a:t>
             </a:r>
           </a:p>
         </p:txBody>
@@ -11020,7 +11157,7 @@
                 <a:cs typeface="GQ Text SemiBold"/>
                 <a:ea typeface="GQ Text SemiBold"/>
               </a:rPr>
-              <a:t>duolingo.com сайтында орысша білетіндерге арналған</a:t>
+              <a:t>Тіл көлеммен емес, қайталаумен беріледі: күн сайынғы</a:t>
             </a:r>
           </a:p>
           <a:p>
@@ -11038,7 +11175,7 @@
                 <a:cs typeface="GQ Text SemiBold"/>
                 <a:ea typeface="GQ Text SemiBold"/>
               </a:rPr>
-              <a:t>тоғыз тіл бар: ағылшын, неміс, француз, испан, қытай,</a:t>
+              <a:t>он минөт аптасына бір рет отыратын екі сағаттан көп</a:t>
             </a:r>
           </a:p>
           <a:p>
@@ -11056,7 +11193,7 @@
                 <a:cs typeface="GQ Text SemiBold"/>
                 <a:ea typeface="GQ Text SemiBold"/>
               </a:rPr>
-              <a:t>корей, жапон, итальян, португал. Бұл тізімде қазақ тілі</a:t>
+              <a:t>нәтиже береді. Ол үшін телефон өте қолайлы — ол</a:t>
             </a:r>
           </a:p>
           <a:p>
@@ -11074,7 +11211,7 @@
                 <a:cs typeface="GQ Text SemiBold"/>
                 <a:ea typeface="GQ Text SemiBold"/>
               </a:rPr>
-              <a:t>жоқ.</a:t>
+              <a:t>әрқашан қасында.</a:t>
             </a:r>
           </a:p>
         </p:txBody>
@@ -11088,7 +11225,7 @@
         <p:spPr>
           <a:xfrm>
             <a:off x="6452463" y="3202432"/>
-            <a:ext cx="4733391" cy="781812"/>
+            <a:ext cx="4733391" cy="1010412"/>
           </a:xfrm>
           <a:prstGeom prst="rect">
             <a:avLst/>
@@ -11115,7 +11252,7 @@
                 <a:cs typeface="GQ Text"/>
                 <a:ea typeface="GQ Text"/>
               </a:rPr>
-              <a:t>Демек, оқушыға оқулық пен дәптер ғана қалады. Ал тілді</a:t>
+              <a:t>Бірақ түсіндірмесі орысша, ал үйрететіні қазақша</a:t>
             </a:r>
           </a:p>
           <a:p>
@@ -11133,7 +11270,7 @@
                 <a:cs typeface="GQ Text"/>
                 <a:ea typeface="GQ Text"/>
               </a:rPr>
-              <a:t>күн сайынғы қысқа жаттығу береді — оны телефоннан істеу</a:t>
+              <a:t>жаттықтырғыштар жоқтың қасы. duolingo.com сайтында</a:t>
             </a:r>
           </a:p>
           <a:p>
@@ -11151,7 +11288,25 @@
                 <a:cs typeface="GQ Text"/>
                 <a:ea typeface="GQ Text"/>
               </a:rPr>
-              <a:t>ыңғайлы.</a:t>
+              <a:t>орысша білетіндерге тоғыз тіл қолжетімді — олардың</a:t>
+            </a:r>
+          </a:p>
+          <a:p>
+            <a:pPr algn="l">
+              <a:lnSpc>
+                <a:spcPts val="1800"/>
+              </a:lnSpc>
+            </a:pPr>
+            <a:r>
+              <a:rPr sz="1250">
+                <a:solidFill>
+                  <a:srgbClr val="535C66"/>
+                </a:solidFill>
+                <a:latin typeface="GQ Text"/>
+                <a:cs typeface="GQ Text"/>
+                <a:ea typeface="GQ Text"/>
+              </a:rPr>
+              <a:t>ішінде қазақ тілі жоқ. Оқулық пен дәптер ғана қалады.</a:t>
             </a:r>
           </a:p>
         </p:txBody>
@@ -11247,130 +11402,6 @@
       </p:sp>
       <p:sp>
         <p:nvSpPr>
-          <p:cNvPr id="26" name="Rectangle 25"/>
-          <p:cNvSpPr/>
-          <p:nvPr/>
-        </p:nvSpPr>
-        <p:spPr>
-          <a:xfrm>
-            <a:off x="7104202" y="2459799"/>
-            <a:ext cx="4337684" cy="2037587"/>
-          </a:xfrm>
-          <a:prstGeom prst="rect">
-            <a:avLst/>
-          </a:prstGeom>
-          <a:solidFill>
-            <a:srgbClr val="11161E"/>
-          </a:solidFill>
-          <a:ln w="9525">
-            <a:solidFill>
-              <a:srgbClr val="3B434D"/>
-            </a:solidFill>
-          </a:ln>
-          <a:effectLst/>
-        </p:spPr>
-        <p:txBody>
-          <a:bodyPr rtlCol="0" anchor="ctr" wrap="none"/>
-          <a:lstStyle/>
-          <a:p>
-            <a:pPr algn="ctr"/>
-          </a:p>
-        </p:txBody>
-      </p:sp>
-      <p:sp>
-        <p:nvSpPr>
-          <p:cNvPr id="27" name="Rectangle 26"/>
-          <p:cNvSpPr/>
-          <p:nvPr/>
-        </p:nvSpPr>
-        <p:spPr>
-          <a:xfrm>
-            <a:off x="7104202" y="2459799"/>
-            <a:ext cx="32004" cy="2037587"/>
-          </a:xfrm>
-          <a:prstGeom prst="rect">
-            <a:avLst/>
-          </a:prstGeom>
-          <a:solidFill>
-            <a:srgbClr val="00793D"/>
-          </a:solidFill>
-          <a:ln>
-            <a:noFill/>
-          </a:ln>
-          <a:effectLst/>
-        </p:spPr>
-        <p:txBody>
-          <a:bodyPr rtlCol="0" anchor="ctr" wrap="none"/>
-          <a:lstStyle/>
-          <a:p>
-            <a:pPr algn="ctr"/>
-          </a:p>
-        </p:txBody>
-      </p:sp>
-      <p:sp>
-        <p:nvSpPr>
-          <p:cNvPr id="15" name="Rectangle 14"/>
-          <p:cNvSpPr/>
-          <p:nvPr/>
-        </p:nvSpPr>
-        <p:spPr>
-          <a:xfrm>
-            <a:off x="749808" y="2459799"/>
-            <a:ext cx="6153226" cy="2390647"/>
-          </a:xfrm>
-          <a:prstGeom prst="rect">
-            <a:avLst/>
-          </a:prstGeom>
-          <a:solidFill>
-            <a:srgbClr val="11161E"/>
-          </a:solidFill>
-          <a:ln w="9525">
-            <a:solidFill>
-              <a:srgbClr val="3B434D"/>
-            </a:solidFill>
-          </a:ln>
-          <a:effectLst/>
-        </p:spPr>
-        <p:txBody>
-          <a:bodyPr rtlCol="0" anchor="ctr" wrap="none"/>
-          <a:lstStyle/>
-          <a:p>
-            <a:pPr algn="ctr"/>
-          </a:p>
-        </p:txBody>
-      </p:sp>
-      <p:sp>
-        <p:nvSpPr>
-          <p:cNvPr id="16" name="Rectangle 15"/>
-          <p:cNvSpPr/>
-          <p:nvPr/>
-        </p:nvSpPr>
-        <p:spPr>
-          <a:xfrm>
-            <a:off x="749808" y="2459799"/>
-            <a:ext cx="32004" cy="2390647"/>
-          </a:xfrm>
-          <a:prstGeom prst="rect">
-            <a:avLst/>
-          </a:prstGeom>
-          <a:solidFill>
-            <a:srgbClr val="0064B9"/>
-          </a:solidFill>
-          <a:ln>
-            <a:noFill/>
-          </a:ln>
-          <a:effectLst/>
-        </p:spPr>
-        <p:txBody>
-          <a:bodyPr rtlCol="0" anchor="ctr" wrap="none"/>
-          <a:lstStyle/>
-          <a:p>
-            <a:pPr algn="ctr"/>
-          </a:p>
-        </p:txBody>
-      </p:sp>
-      <p:sp>
-        <p:nvSpPr>
           <p:cNvPr id="3" name="Rectangle 2"/>
           <p:cNvSpPr/>
           <p:nvPr/>
@@ -11435,7 +11466,7 @@
                 <a:cs typeface="IBM Plex Mono SemiBold"/>
                 <a:ea typeface="IBM Plex Mono SemiBold"/>
               </a:rPr>
-              <a:t>ҚАЛАЙ ЖАСАЛДЫ</a:t>
+              <a:t>НЕ ЖАСАЛДЫ</a:t>
             </a:r>
           </a:p>
         </p:txBody>
@@ -11489,8 +11520,8 @@
         </p:nvSpPr>
         <p:spPr>
           <a:xfrm>
-            <a:off x="749808" y="796290"/>
-            <a:ext cx="10692079" cy="723614"/>
+            <a:off x="749808" y="794115"/>
+            <a:ext cx="10692079" cy="742910"/>
           </a:xfrm>
           <a:prstGeom prst="rect">
             <a:avLst/>
@@ -11505,11 +11536,11 @@
           <a:p>
             <a:pPr algn="l">
               <a:lnSpc>
-                <a:spcPts val="4012"/>
-              </a:lnSpc>
-            </a:pPr>
-            <a:r>
-              <a:rPr sz="3750" spc="-82">
+                <a:spcPts val="4120"/>
+              </a:lnSpc>
+            </a:pPr>
+            <a:r>
+              <a:rPr sz="3850" spc="-85">
                 <a:solidFill>
                   <a:srgbClr val="EEEBE5"/>
                 </a:solidFill>
@@ -11517,7 +11548,7 @@
                 <a:cs typeface="GQ Text Bold"/>
                 <a:ea typeface="GQ Text Bold"/>
               </a:rPr>
-              <a:t>Ол қалай құрылған және өзін қалай тексереді</a:t>
+              <a:t>Бес бөлім және әрқайсысына түсінікті экран</a:t>
             </a:r>
           </a:p>
         </p:txBody>
@@ -11530,7 +11561,7 @@
         </p:nvSpPr>
         <p:spPr>
           <a:xfrm>
-            <a:off x="749808" y="1496204"/>
+            <a:off x="749808" y="1509793"/>
             <a:ext cx="9195188" cy="567349"/>
           </a:xfrm>
           <a:prstGeom prst="rect">
@@ -11558,7 +11589,7 @@
                 <a:cs typeface="GQ Text"/>
                 <a:ea typeface="GQ Text"/>
               </a:rPr>
-              <a:t>Сабақ мазмұны кодтан бөлек жатыр және скрипттермен жиналады. Әр жаңарту оқушыларға жетер алдында</a:t>
+              <a:t>Оқушы қосымшаны ашқанда қай жерде тоқтағанын және әрі қарай не істеу керегін бірден көреді. Мәзірді</a:t>
             </a:r>
           </a:p>
           <a:p>
@@ -11576,21 +11607,51 @@
                 <a:cs typeface="GQ Text"/>
                 <a:ea typeface="GQ Text"/>
               </a:rPr>
-              <a:t>тексеруден өтеді.</a:t>
-            </a:r>
-          </a:p>
-        </p:txBody>
-      </p:sp>
-      <p:sp>
-        <p:nvSpPr>
-          <p:cNvPr id="8" name="TextBox 7"/>
+              <a:t>зерттеудің қажеті жоқ.</a:t>
+            </a:r>
+          </a:p>
+        </p:txBody>
+      </p:sp>
+      <p:sp>
+        <p:nvSpPr>
+          <p:cNvPr id="8" name="Rectangle 7"/>
+          <p:cNvSpPr/>
+          <p:nvPr/>
+        </p:nvSpPr>
+        <p:spPr>
+          <a:xfrm>
+            <a:off x="749808" y="2253932"/>
+            <a:ext cx="10692079" cy="7315"/>
+          </a:xfrm>
+          <a:prstGeom prst="rect">
+            <a:avLst/>
+          </a:prstGeom>
+          <a:solidFill>
+            <a:srgbClr val="3B434D"/>
+          </a:solidFill>
+          <a:ln>
+            <a:noFill/>
+          </a:ln>
+          <a:effectLst/>
+        </p:spPr>
+        <p:txBody>
+          <a:bodyPr rtlCol="0" anchor="ctr" wrap="none"/>
+          <a:lstStyle/>
+          <a:p>
+            <a:pPr algn="ctr"/>
+          </a:p>
+        </p:txBody>
+      </p:sp>
+      <p:sp>
+        <p:nvSpPr>
+          <p:cNvPr id="9" name="TextBox 8"/>
           <p:cNvSpPr txBox="1"/>
           <p:nvPr/>
         </p:nvSpPr>
         <p:spPr>
           <a:xfrm>
-            <a:off x="1024127" y="2711767"/>
-            <a:ext cx="5604586" cy="198374"/>
+            <a:off x="749808" y="2528415"/>
+            <a:ext cx="1962851" cy="323169"/>
           </a:xfrm>
           <a:prstGeom prst="rect">
             <a:avLst/>
@@ -11605,33 +11666,33 @@
           <a:p>
             <a:pPr algn="l">
               <a:lnSpc>
-                <a:spcPts val="1100"/>
-              </a:lnSpc>
-            </a:pPr>
-            <a:r>
-              <a:rPr sz="850" spc="136">
-                <a:solidFill>
-                  <a:srgbClr val="59AAF8"/>
-                </a:solidFill>
-                <a:latin typeface="IBM Plex Mono SemiBold"/>
-                <a:cs typeface="IBM Plex Mono SemiBold"/>
-                <a:ea typeface="IBM Plex Mono SemiBold"/>
-              </a:rPr>
-              <a:t>НЕДЕН ЖИНАЛҒАН</a:t>
-            </a:r>
-          </a:p>
-        </p:txBody>
-      </p:sp>
-      <p:sp>
-        <p:nvSpPr>
-          <p:cNvPr id="9" name="TextBox 8"/>
+                <a:spcPts val="1792"/>
+              </a:lnSpc>
+            </a:pPr>
+            <a:r>
+              <a:rPr sz="1600" spc="-24">
+                <a:solidFill>
+                  <a:srgbClr val="EEEBE5"/>
+                </a:solidFill>
+                <a:latin typeface="GQ Text Bold"/>
+                <a:cs typeface="GQ Text Bold"/>
+                <a:ea typeface="GQ Text Bold"/>
+              </a:rPr>
+              <a:t>Оқу</a:t>
+            </a:r>
+          </a:p>
+        </p:txBody>
+      </p:sp>
+      <p:sp>
+        <p:nvSpPr>
+          <p:cNvPr id="10" name="TextBox 9"/>
           <p:cNvSpPr txBox="1"/>
           <p:nvPr/>
         </p:nvSpPr>
         <p:spPr>
           <a:xfrm>
-            <a:off x="1024127" y="3023984"/>
-            <a:ext cx="216916" cy="290347"/>
+            <a:off x="749808" y="2889948"/>
+            <a:ext cx="1962851" cy="461010"/>
           </a:xfrm>
           <a:prstGeom prst="rect">
             <a:avLst/>
@@ -11646,33 +11707,676 @@
           <a:p>
             <a:pPr algn="l">
               <a:lnSpc>
-                <a:spcPts val="1610"/>
-              </a:lnSpc>
-            </a:pPr>
-            <a:r>
-              <a:rPr sz="1150">
-                <a:solidFill>
-                  <a:srgbClr val="59AAF8"/>
+                <a:spcPts val="1500"/>
+              </a:lnSpc>
+            </a:pPr>
+            <a:r>
+              <a:rPr sz="1050">
+                <a:solidFill>
+                  <a:srgbClr val="A6ADB6"/>
+                </a:solidFill>
+                <a:latin typeface="GQ Text"/>
+                <a:cs typeface="GQ Text"/>
+                <a:ea typeface="GQ Text"/>
+              </a:rPr>
+              <a:t>Сабақ жолы: өтілгені мен</a:t>
+            </a:r>
+          </a:p>
+          <a:p>
+            <a:pPr algn="l">
+              <a:lnSpc>
+                <a:spcPts val="1500"/>
+              </a:lnSpc>
+            </a:pPr>
+            <a:r>
+              <a:rPr sz="1050">
+                <a:solidFill>
+                  <a:srgbClr val="A6ADB6"/>
+                </a:solidFill>
+                <a:latin typeface="GQ Text"/>
+                <a:cs typeface="GQ Text"/>
+                <a:ea typeface="GQ Text"/>
+              </a:rPr>
+              <a:t>келесі қадам көрініп тұрады</a:t>
+            </a:r>
+          </a:p>
+        </p:txBody>
+      </p:sp>
+      <p:sp>
+        <p:nvSpPr>
+          <p:cNvPr id="11" name="TextBox 10"/>
+          <p:cNvSpPr txBox="1"/>
+          <p:nvPr/>
+        </p:nvSpPr>
+        <p:spPr>
+          <a:xfrm>
+            <a:off x="2932115" y="2528415"/>
+            <a:ext cx="1962851" cy="323169"/>
+          </a:xfrm>
+          <a:prstGeom prst="rect">
+            <a:avLst/>
+          </a:prstGeom>
+          <a:noFill/>
+        </p:spPr>
+        <p:txBody>
+          <a:bodyPr wrap="none" lIns="0" rIns="0" tIns="0" bIns="0" anchor="t">
+            <a:spAutoFit/>
+          </a:bodyPr>
+          <a:lstStyle/>
+          <a:p>
+            <a:pPr algn="l">
+              <a:lnSpc>
+                <a:spcPts val="1792"/>
+              </a:lnSpc>
+            </a:pPr>
+            <a:r>
+              <a:rPr sz="1600" spc="-24">
+                <a:solidFill>
+                  <a:srgbClr val="EEEBE5"/>
+                </a:solidFill>
+                <a:latin typeface="GQ Text Bold"/>
+                <a:cs typeface="GQ Text Bold"/>
+                <a:ea typeface="GQ Text Bold"/>
+              </a:rPr>
+              <a:t>Жаттығу</a:t>
+            </a:r>
+          </a:p>
+        </p:txBody>
+      </p:sp>
+      <p:sp>
+        <p:nvSpPr>
+          <p:cNvPr id="12" name="TextBox 11"/>
+          <p:cNvSpPr txBox="1"/>
+          <p:nvPr/>
+        </p:nvSpPr>
+        <p:spPr>
+          <a:xfrm>
+            <a:off x="2932115" y="2889948"/>
+            <a:ext cx="1962851" cy="651509"/>
+          </a:xfrm>
+          <a:prstGeom prst="rect">
+            <a:avLst/>
+          </a:prstGeom>
+          <a:noFill/>
+        </p:spPr>
+        <p:txBody>
+          <a:bodyPr wrap="none" lIns="0" rIns="0" tIns="0" bIns="0" anchor="t">
+            <a:spAutoFit/>
+          </a:bodyPr>
+          <a:lstStyle/>
+          <a:p>
+            <a:pPr algn="l">
+              <a:lnSpc>
+                <a:spcPts val="1500"/>
+              </a:lnSpc>
+            </a:pPr>
+            <a:r>
+              <a:rPr sz="1050">
+                <a:solidFill>
+                  <a:srgbClr val="A6ADB6"/>
+                </a:solidFill>
+                <a:latin typeface="GQ Text"/>
+                <a:cs typeface="GQ Text"/>
+                <a:ea typeface="GQ Text"/>
+              </a:rPr>
+              <a:t>Күнделікті мақсат, қайталау,</a:t>
+            </a:r>
+          </a:p>
+          <a:p>
+            <a:pPr algn="l">
+              <a:lnSpc>
+                <a:spcPts val="1500"/>
+              </a:lnSpc>
+            </a:pPr>
+            <a:r>
+              <a:rPr sz="1050">
+                <a:solidFill>
+                  <a:srgbClr val="A6ADB6"/>
+                </a:solidFill>
+                <a:latin typeface="GQ Text"/>
+                <a:cs typeface="GQ Text"/>
+                <a:ea typeface="GQ Text"/>
+              </a:rPr>
+              <a:t>сөз карточкалары, 60</a:t>
+            </a:r>
+          </a:p>
+          <a:p>
+            <a:pPr algn="l">
+              <a:lnSpc>
+                <a:spcPts val="1500"/>
+              </a:lnSpc>
+            </a:pPr>
+            <a:r>
+              <a:rPr sz="1050">
+                <a:solidFill>
+                  <a:srgbClr val="A6ADB6"/>
+                </a:solidFill>
+                <a:latin typeface="GQ Text"/>
+                <a:cs typeface="GQ Text"/>
+                <a:ea typeface="GQ Text"/>
+              </a:rPr>
+              <a:t>секундтық спринт</a:t>
+            </a:r>
+          </a:p>
+        </p:txBody>
+      </p:sp>
+      <p:sp>
+        <p:nvSpPr>
+          <p:cNvPr id="13" name="TextBox 12"/>
+          <p:cNvSpPr txBox="1"/>
+          <p:nvPr/>
+        </p:nvSpPr>
+        <p:spPr>
+          <a:xfrm>
+            <a:off x="5114422" y="2528415"/>
+            <a:ext cx="1962851" cy="323169"/>
+          </a:xfrm>
+          <a:prstGeom prst="rect">
+            <a:avLst/>
+          </a:prstGeom>
+          <a:noFill/>
+        </p:spPr>
+        <p:txBody>
+          <a:bodyPr wrap="none" lIns="0" rIns="0" tIns="0" bIns="0" anchor="t">
+            <a:spAutoFit/>
+          </a:bodyPr>
+          <a:lstStyle/>
+          <a:p>
+            <a:pPr algn="l">
+              <a:lnSpc>
+                <a:spcPts val="1792"/>
+              </a:lnSpc>
+            </a:pPr>
+            <a:r>
+              <a:rPr sz="1600" spc="-24">
+                <a:solidFill>
+                  <a:srgbClr val="EEEBE5"/>
+                </a:solidFill>
+                <a:latin typeface="GQ Text Bold"/>
+                <a:cs typeface="GQ Text Bold"/>
+                <a:ea typeface="GQ Text Bold"/>
+              </a:rPr>
+              <a:t>Сөздік</a:t>
+            </a:r>
+          </a:p>
+        </p:txBody>
+      </p:sp>
+      <p:sp>
+        <p:nvSpPr>
+          <p:cNvPr id="14" name="TextBox 13"/>
+          <p:cNvSpPr txBox="1"/>
+          <p:nvPr/>
+        </p:nvSpPr>
+        <p:spPr>
+          <a:xfrm>
+            <a:off x="5114422" y="2889948"/>
+            <a:ext cx="1962851" cy="842010"/>
+          </a:xfrm>
+          <a:prstGeom prst="rect">
+            <a:avLst/>
+          </a:prstGeom>
+          <a:noFill/>
+        </p:spPr>
+        <p:txBody>
+          <a:bodyPr wrap="none" lIns="0" rIns="0" tIns="0" bIns="0" anchor="t">
+            <a:spAutoFit/>
+          </a:bodyPr>
+          <a:lstStyle/>
+          <a:p>
+            <a:pPr algn="l">
+              <a:lnSpc>
+                <a:spcPts val="1500"/>
+              </a:lnSpc>
+            </a:pPr>
+            <a:r>
+              <a:rPr sz="1050">
+                <a:solidFill>
+                  <a:srgbClr val="A6ADB6"/>
+                </a:solidFill>
+                <a:latin typeface="GQ Text"/>
+                <a:cs typeface="GQ Text"/>
+                <a:ea typeface="GQ Text"/>
+              </a:rPr>
+              <a:t>Сабақтардан алынған 162</a:t>
+            </a:r>
+          </a:p>
+          <a:p>
+            <a:pPr algn="l">
+              <a:lnSpc>
+                <a:spcPts val="1500"/>
+              </a:lnSpc>
+            </a:pPr>
+            <a:r>
+              <a:rPr sz="1050">
+                <a:solidFill>
+                  <a:srgbClr val="A6ADB6"/>
+                </a:solidFill>
+                <a:latin typeface="GQ Text"/>
+                <a:cs typeface="GQ Text"/>
+                <a:ea typeface="GQ Text"/>
+              </a:rPr>
+              <a:t>сөз, іздеу орыс</a:t>
+            </a:r>
+          </a:p>
+          <a:p>
+            <a:pPr algn="l">
+              <a:lnSpc>
+                <a:spcPts val="1500"/>
+              </a:lnSpc>
+            </a:pPr>
+            <a:r>
+              <a:rPr sz="1050">
+                <a:solidFill>
+                  <a:srgbClr val="A6ADB6"/>
+                </a:solidFill>
+                <a:latin typeface="GQ Text"/>
+                <a:cs typeface="GQ Text"/>
+                <a:ea typeface="GQ Text"/>
+              </a:rPr>
+              <a:t>пернетақтасынан да жұмыс</a:t>
+            </a:r>
+          </a:p>
+          <a:p>
+            <a:pPr algn="l">
+              <a:lnSpc>
+                <a:spcPts val="1500"/>
+              </a:lnSpc>
+            </a:pPr>
+            <a:r>
+              <a:rPr sz="1050">
+                <a:solidFill>
+                  <a:srgbClr val="A6ADB6"/>
+                </a:solidFill>
+                <a:latin typeface="GQ Text"/>
+                <a:cs typeface="GQ Text"/>
+                <a:ea typeface="GQ Text"/>
+              </a:rPr>
+              <a:t>істейді</a:t>
+            </a:r>
+          </a:p>
+        </p:txBody>
+      </p:sp>
+      <p:sp>
+        <p:nvSpPr>
+          <p:cNvPr id="15" name="TextBox 14"/>
+          <p:cNvSpPr txBox="1"/>
+          <p:nvPr/>
+        </p:nvSpPr>
+        <p:spPr>
+          <a:xfrm>
+            <a:off x="7296729" y="2528415"/>
+            <a:ext cx="1962851" cy="323169"/>
+          </a:xfrm>
+          <a:prstGeom prst="rect">
+            <a:avLst/>
+          </a:prstGeom>
+          <a:noFill/>
+        </p:spPr>
+        <p:txBody>
+          <a:bodyPr wrap="none" lIns="0" rIns="0" tIns="0" bIns="0" anchor="t">
+            <a:spAutoFit/>
+          </a:bodyPr>
+          <a:lstStyle/>
+          <a:p>
+            <a:pPr algn="l">
+              <a:lnSpc>
+                <a:spcPts val="1792"/>
+              </a:lnSpc>
+            </a:pPr>
+            <a:r>
+              <a:rPr sz="1600" spc="-24">
+                <a:solidFill>
+                  <a:srgbClr val="EEEBE5"/>
+                </a:solidFill>
+                <a:latin typeface="GQ Text Bold"/>
+                <a:cs typeface="GQ Text Bold"/>
+                <a:ea typeface="GQ Text Bold"/>
+              </a:rPr>
+              <a:t>Анықтама</a:t>
+            </a:r>
+          </a:p>
+        </p:txBody>
+      </p:sp>
+      <p:sp>
+        <p:nvSpPr>
+          <p:cNvPr id="16" name="TextBox 15"/>
+          <p:cNvSpPr txBox="1"/>
+          <p:nvPr/>
+        </p:nvSpPr>
+        <p:spPr>
+          <a:xfrm>
+            <a:off x="7296729" y="2889948"/>
+            <a:ext cx="1962851" cy="461010"/>
+          </a:xfrm>
+          <a:prstGeom prst="rect">
+            <a:avLst/>
+          </a:prstGeom>
+          <a:noFill/>
+        </p:spPr>
+        <p:txBody>
+          <a:bodyPr wrap="none" lIns="0" rIns="0" tIns="0" bIns="0" anchor="t">
+            <a:spAutoFit/>
+          </a:bodyPr>
+          <a:lstStyle/>
+          <a:p>
+            <a:pPr algn="l">
+              <a:lnSpc>
+                <a:spcPts val="1500"/>
+              </a:lnSpc>
+            </a:pPr>
+            <a:r>
+              <a:rPr sz="1050">
+                <a:solidFill>
+                  <a:srgbClr val="A6ADB6"/>
+                </a:solidFill>
+                <a:latin typeface="GQ Text"/>
+                <a:cs typeface="GQ Text"/>
+                <a:ea typeface="GQ Text"/>
+              </a:rPr>
+              <a:t>33 ереже, 22 тақырып және</a:t>
+            </a:r>
+          </a:p>
+          <a:p>
+            <a:pPr algn="l">
+              <a:lnSpc>
+                <a:spcPts val="1500"/>
+              </a:lnSpc>
+            </a:pPr>
+            <a:r>
+              <a:rPr sz="1050">
+                <a:solidFill>
+                  <a:srgbClr val="A6ADB6"/>
+                </a:solidFill>
+                <a:latin typeface="GQ Text"/>
+                <a:cs typeface="GQ Text"/>
+                <a:ea typeface="GQ Text"/>
+              </a:rPr>
+              <a:t>жанды жалғау кестелері</a:t>
+            </a:r>
+          </a:p>
+        </p:txBody>
+      </p:sp>
+      <p:sp>
+        <p:nvSpPr>
+          <p:cNvPr id="17" name="TextBox 16"/>
+          <p:cNvSpPr txBox="1"/>
+          <p:nvPr/>
+        </p:nvSpPr>
+        <p:spPr>
+          <a:xfrm>
+            <a:off x="9479036" y="2528415"/>
+            <a:ext cx="1962851" cy="323169"/>
+          </a:xfrm>
+          <a:prstGeom prst="rect">
+            <a:avLst/>
+          </a:prstGeom>
+          <a:noFill/>
+        </p:spPr>
+        <p:txBody>
+          <a:bodyPr wrap="none" lIns="0" rIns="0" tIns="0" bIns="0" anchor="t">
+            <a:spAutoFit/>
+          </a:bodyPr>
+          <a:lstStyle/>
+          <a:p>
+            <a:pPr algn="l">
+              <a:lnSpc>
+                <a:spcPts val="1792"/>
+              </a:lnSpc>
+            </a:pPr>
+            <a:r>
+              <a:rPr sz="1600" spc="-24">
+                <a:solidFill>
+                  <a:srgbClr val="EEEBE5"/>
+                </a:solidFill>
+                <a:latin typeface="GQ Text Bold"/>
+                <a:cs typeface="GQ Text Bold"/>
+                <a:ea typeface="GQ Text Bold"/>
+              </a:rPr>
+              <a:t>Профиль</a:t>
+            </a:r>
+          </a:p>
+        </p:txBody>
+      </p:sp>
+      <p:sp>
+        <p:nvSpPr>
+          <p:cNvPr id="18" name="TextBox 17"/>
+          <p:cNvSpPr txBox="1"/>
+          <p:nvPr/>
+        </p:nvSpPr>
+        <p:spPr>
+          <a:xfrm>
+            <a:off x="9479036" y="2889948"/>
+            <a:ext cx="1962851" cy="651509"/>
+          </a:xfrm>
+          <a:prstGeom prst="rect">
+            <a:avLst/>
+          </a:prstGeom>
+          <a:noFill/>
+        </p:spPr>
+        <p:txBody>
+          <a:bodyPr wrap="none" lIns="0" rIns="0" tIns="0" bIns="0" anchor="t">
+            <a:spAutoFit/>
+          </a:bodyPr>
+          <a:lstStyle/>
+          <a:p>
+            <a:pPr algn="l">
+              <a:lnSpc>
+                <a:spcPts val="1500"/>
+              </a:lnSpc>
+            </a:pPr>
+            <a:r>
+              <a:rPr sz="1050">
+                <a:solidFill>
+                  <a:srgbClr val="A6ADB6"/>
+                </a:solidFill>
+                <a:latin typeface="GQ Text"/>
+                <a:cs typeface="GQ Text"/>
+                <a:ea typeface="GQ Text"/>
+              </a:rPr>
+              <a:t>Статистика, марапаттар</a:t>
+            </a:r>
+          </a:p>
+          <a:p>
+            <a:pPr algn="l">
+              <a:lnSpc>
+                <a:spcPts val="1500"/>
+              </a:lnSpc>
+            </a:pPr>
+            <a:r>
+              <a:rPr sz="1050">
+                <a:solidFill>
+                  <a:srgbClr val="A6ADB6"/>
+                </a:solidFill>
+                <a:latin typeface="GQ Text"/>
+                <a:cs typeface="GQ Text"/>
+                <a:ea typeface="GQ Text"/>
+              </a:rPr>
+              <a:t>және нәтижелерді кесте</a:t>
+            </a:r>
+          </a:p>
+          <a:p>
+            <a:pPr algn="l">
+              <a:lnSpc>
+                <a:spcPts val="1500"/>
+              </a:lnSpc>
+            </a:pPr>
+            <a:r>
+              <a:rPr sz="1050">
+                <a:solidFill>
+                  <a:srgbClr val="A6ADB6"/>
+                </a:solidFill>
+                <a:latin typeface="GQ Text"/>
+                <a:cs typeface="GQ Text"/>
+                <a:ea typeface="GQ Text"/>
+              </a:rPr>
+              <a:t>түрінде жүктеу</a:t>
+            </a:r>
+          </a:p>
+        </p:txBody>
+      </p:sp>
+      <p:sp>
+        <p:nvSpPr>
+          <p:cNvPr id="19" name="Rectangle 18"/>
+          <p:cNvSpPr/>
+          <p:nvPr/>
+        </p:nvSpPr>
+        <p:spPr>
+          <a:xfrm>
+            <a:off x="749808" y="4103052"/>
+            <a:ext cx="10692079" cy="710247"/>
+          </a:xfrm>
+          <a:prstGeom prst="rect">
+            <a:avLst/>
+          </a:prstGeom>
+          <a:solidFill>
+            <a:srgbClr val="0064B9"/>
+          </a:solidFill>
+          <a:ln>
+            <a:noFill/>
+          </a:ln>
+          <a:effectLst/>
+        </p:spPr>
+        <p:txBody>
+          <a:bodyPr rtlCol="0" anchor="ctr" wrap="none"/>
+          <a:lstStyle/>
+          <a:p>
+            <a:pPr algn="ctr"/>
+          </a:p>
+        </p:txBody>
+      </p:sp>
+      <p:sp>
+        <p:nvSpPr>
+          <p:cNvPr id="20" name="TextBox 19"/>
+          <p:cNvSpPr txBox="1"/>
+          <p:nvPr/>
+        </p:nvSpPr>
+        <p:spPr>
+          <a:xfrm>
+            <a:off x="1024127" y="4302137"/>
+            <a:ext cx="10143439" cy="345281"/>
+          </a:xfrm>
+          <a:prstGeom prst="rect">
+            <a:avLst/>
+          </a:prstGeom>
+          <a:noFill/>
+        </p:spPr>
+        <p:txBody>
+          <a:bodyPr wrap="none" lIns="0" rIns="0" tIns="0" bIns="0" anchor="t">
+            <a:spAutoFit/>
+          </a:bodyPr>
+          <a:lstStyle/>
+          <a:p>
+            <a:pPr algn="l">
+              <a:lnSpc>
+                <a:spcPts val="1812"/>
+              </a:lnSpc>
+            </a:pPr>
+            <a:r>
+              <a:rPr sz="1250">
+                <a:solidFill>
+                  <a:srgbClr val="FFFFFF"/>
+                </a:solidFill>
+                <a:latin typeface="GQ Text SemiBold"/>
+                <a:cs typeface="GQ Text SemiBold"/>
+                <a:ea typeface="GQ Text SemiBold"/>
+              </a:rPr>
+              <a:t>Ірі түймелер, әр қатеден кейінгі түсіндірме, кез келген жерден негізгі экранға оралу, ашық және қараңғы тақырып.</a:t>
+            </a:r>
+          </a:p>
+        </p:txBody>
+      </p:sp>
+      <p:sp>
+        <p:nvSpPr>
+          <p:cNvPr id="21" name="TextBox 20"/>
+          <p:cNvSpPr txBox="1"/>
+          <p:nvPr/>
+        </p:nvSpPr>
+        <p:spPr>
+          <a:xfrm>
+            <a:off x="749808" y="5275945"/>
+            <a:ext cx="2383219" cy="600892"/>
+          </a:xfrm>
+          <a:prstGeom prst="rect">
+            <a:avLst/>
+          </a:prstGeom>
+          <a:noFill/>
+        </p:spPr>
+        <p:txBody>
+          <a:bodyPr wrap="none" lIns="0" rIns="0" tIns="0" bIns="0" anchor="t">
+            <a:spAutoFit/>
+          </a:bodyPr>
+          <a:lstStyle/>
+          <a:p>
+            <a:pPr algn="l">
+              <a:lnSpc>
+                <a:spcPts val="3332"/>
+              </a:lnSpc>
+            </a:pPr>
+            <a:r>
+              <a:rPr sz="3400" spc="-102">
+                <a:solidFill>
+                  <a:srgbClr val="EEEBE5"/>
+                </a:solidFill>
+                <a:latin typeface="GQ Text Bold"/>
+                <a:cs typeface="GQ Text Bold"/>
+                <a:ea typeface="GQ Text Bold"/>
+              </a:rPr>
+              <a:t>12</a:t>
+            </a:r>
+          </a:p>
+        </p:txBody>
+      </p:sp>
+      <p:sp>
+        <p:nvSpPr>
+          <p:cNvPr id="22" name="TextBox 21"/>
+          <p:cNvSpPr txBox="1"/>
+          <p:nvPr/>
+        </p:nvSpPr>
+        <p:spPr>
+          <a:xfrm>
+            <a:off x="749808" y="5833872"/>
+            <a:ext cx="2383219" cy="216408"/>
+          </a:xfrm>
+          <a:prstGeom prst="rect">
+            <a:avLst/>
+          </a:prstGeom>
+          <a:noFill/>
+        </p:spPr>
+        <p:txBody>
+          <a:bodyPr wrap="none" lIns="0" rIns="0" tIns="0" bIns="0" anchor="t">
+            <a:spAutoFit/>
+          </a:bodyPr>
+          <a:lstStyle/>
+          <a:p>
+            <a:pPr algn="l">
+              <a:lnSpc>
+                <a:spcPts val="1200"/>
+              </a:lnSpc>
+            </a:pPr>
+            <a:r>
+              <a:rPr sz="800" spc="64">
+                <a:solidFill>
+                  <a:srgbClr val="A6ADB6"/>
                 </a:solidFill>
                 <a:latin typeface="IBM Plex Mono Medium"/>
                 <a:cs typeface="IBM Plex Mono Medium"/>
                 <a:ea typeface="IBM Plex Mono Medium"/>
               </a:rPr>
-              <a:t>—</a:t>
-            </a:r>
-          </a:p>
-        </p:txBody>
-      </p:sp>
-      <p:sp>
-        <p:nvSpPr>
-          <p:cNvPr id="10" name="TextBox 9"/>
+              <a:t>САБАҚ · 5–7 СЫНЫП</a:t>
+            </a:r>
+          </a:p>
+        </p:txBody>
+      </p:sp>
+      <p:sp>
+        <p:nvSpPr>
+          <p:cNvPr id="23" name="TextBox 22"/>
           <p:cNvSpPr txBox="1"/>
           <p:nvPr/>
         </p:nvSpPr>
         <p:spPr>
           <a:xfrm>
-            <a:off x="1241044" y="3023984"/>
-            <a:ext cx="5387670" cy="511174"/>
+            <a:off x="3407347" y="5275945"/>
+            <a:ext cx="2383219" cy="600892"/>
           </a:xfrm>
           <a:prstGeom prst="rect">
             <a:avLst/>
@@ -11687,62 +12391,33 @@
           <a:p>
             <a:pPr algn="l">
               <a:lnSpc>
-                <a:spcPts val="1610"/>
-              </a:lnSpc>
-            </a:pPr>
-            <a:r>
-              <a:rPr sz="1150">
+                <a:spcPts val="3332"/>
+              </a:lnSpc>
+            </a:pPr>
+            <a:r>
+              <a:rPr sz="3400" spc="-102">
                 <a:solidFill>
                   <a:srgbClr val="EEEBE5"/>
                 </a:solidFill>
-                <a:latin typeface="GQ Text SemiBold"/>
-                <a:cs typeface="GQ Text SemiBold"/>
-                <a:ea typeface="GQ Text SemiBold"/>
-              </a:rPr>
-              <a:t>Қосымша. </a:t>
-            </a:r>
-            <a:r>
-              <a:rPr sz="1150">
-                <a:solidFill>
-                  <a:srgbClr val="EEEBE5"/>
-                </a:solidFill>
-                <a:latin typeface="GQ Text"/>
-                <a:cs typeface="GQ Text"/>
-                <a:ea typeface="GQ Text"/>
-              </a:rPr>
-              <a:t> Браузерде жұмыс істейді, телефонға орнатылады,</a:t>
-            </a:r>
-          </a:p>
-          <a:p>
-            <a:pPr algn="l">
-              <a:lnSpc>
-                <a:spcPts val="1610"/>
-              </a:lnSpc>
-            </a:pPr>
-            <a:r>
-              <a:rPr sz="1150">
-                <a:solidFill>
-                  <a:srgbClr val="EEEBE5"/>
-                </a:solidFill>
-                <a:latin typeface="GQ Text"/>
-                <a:cs typeface="GQ Text"/>
-                <a:ea typeface="GQ Text"/>
-              </a:rPr>
-              <a:t>интернетсіз жүреді.</a:t>
-            </a:r>
-          </a:p>
-        </p:txBody>
-      </p:sp>
-      <p:sp>
-        <p:nvSpPr>
-          <p:cNvPr id="11" name="TextBox 10"/>
+                <a:latin typeface="GQ Text Bold"/>
+                <a:cs typeface="GQ Text Bold"/>
+                <a:ea typeface="GQ Text Bold"/>
+              </a:rPr>
+              <a:t>7</a:t>
+            </a:r>
+          </a:p>
+        </p:txBody>
+      </p:sp>
+      <p:sp>
+        <p:nvSpPr>
+          <p:cNvPr id="24" name="TextBox 23"/>
           <p:cNvSpPr txBox="1"/>
           <p:nvPr/>
         </p:nvSpPr>
         <p:spPr>
           <a:xfrm>
-            <a:off x="1024127" y="3579228"/>
-            <a:ext cx="216916" cy="290347"/>
+            <a:off x="3407347" y="5833872"/>
+            <a:ext cx="2383219" cy="216408"/>
           </a:xfrm>
           <a:prstGeom prst="rect">
             <a:avLst/>
@@ -11757,33 +12432,33 @@
           <a:p>
             <a:pPr algn="l">
               <a:lnSpc>
-                <a:spcPts val="1610"/>
-              </a:lnSpc>
-            </a:pPr>
-            <a:r>
-              <a:rPr sz="1150">
-                <a:solidFill>
-                  <a:srgbClr val="59AAF8"/>
+                <a:spcPts val="1200"/>
+              </a:lnSpc>
+            </a:pPr>
+            <a:r>
+              <a:rPr sz="800" spc="64">
+                <a:solidFill>
+                  <a:srgbClr val="A6ADB6"/>
                 </a:solidFill>
                 <a:latin typeface="IBM Plex Mono Medium"/>
                 <a:cs typeface="IBM Plex Mono Medium"/>
                 <a:ea typeface="IBM Plex Mono Medium"/>
               </a:rPr>
-              <a:t>—</a:t>
-            </a:r>
-          </a:p>
-        </p:txBody>
-      </p:sp>
-      <p:sp>
-        <p:nvSpPr>
-          <p:cNvPr id="12" name="TextBox 11"/>
+              <a:t>САБАҚ · 7–9 СЫНЫП</a:t>
+            </a:r>
+          </a:p>
+        </p:txBody>
+      </p:sp>
+      <p:sp>
+        <p:nvSpPr>
+          <p:cNvPr id="25" name="TextBox 24"/>
           <p:cNvSpPr txBox="1"/>
           <p:nvPr/>
         </p:nvSpPr>
         <p:spPr>
           <a:xfrm>
-            <a:off x="1241044" y="3579228"/>
-            <a:ext cx="5387670" cy="511174"/>
+            <a:off x="6064886" y="5275945"/>
+            <a:ext cx="2383219" cy="600892"/>
           </a:xfrm>
           <a:prstGeom prst="rect">
             <a:avLst/>
@@ -11798,62 +12473,33 @@
           <a:p>
             <a:pPr algn="l">
               <a:lnSpc>
-                <a:spcPts val="1610"/>
-              </a:lnSpc>
-            </a:pPr>
-            <a:r>
-              <a:rPr sz="1150">
+                <a:spcPts val="3332"/>
+              </a:lnSpc>
+            </a:pPr>
+            <a:r>
+              <a:rPr sz="3400" spc="-102">
                 <a:solidFill>
                   <a:srgbClr val="EEEBE5"/>
                 </a:solidFill>
-                <a:latin typeface="GQ Text SemiBold"/>
-                <a:cs typeface="GQ Text SemiBold"/>
-                <a:ea typeface="GQ Text SemiBold"/>
-              </a:rPr>
-              <a:t>Мазмұн. </a:t>
-            </a:r>
-            <a:r>
-              <a:rPr sz="1150">
-                <a:solidFill>
-                  <a:srgbClr val="EEEBE5"/>
-                </a:solidFill>
-                <a:latin typeface="GQ Text"/>
-                <a:cs typeface="GQ Text"/>
-                <a:ea typeface="GQ Text"/>
-              </a:rPr>
-              <a:t> Сабақтар, ережелер, сөздік — кодтың ішіндегі мәтін емес, бөлек</a:t>
-            </a:r>
-          </a:p>
-          <a:p>
-            <a:pPr algn="l">
-              <a:lnSpc>
-                <a:spcPts val="1610"/>
-              </a:lnSpc>
-            </a:pPr>
-            <a:r>
-              <a:rPr sz="1150">
-                <a:solidFill>
-                  <a:srgbClr val="EEEBE5"/>
-                </a:solidFill>
-                <a:latin typeface="GQ Text"/>
-                <a:cs typeface="GQ Text"/>
-                <a:ea typeface="GQ Text"/>
-              </a:rPr>
-              <a:t>файлдар.</a:t>
-            </a:r>
-          </a:p>
-        </p:txBody>
-      </p:sp>
-      <p:sp>
-        <p:nvSpPr>
-          <p:cNvPr id="13" name="TextBox 12"/>
+                <a:latin typeface="GQ Text Bold"/>
+                <a:cs typeface="GQ Text Bold"/>
+                <a:ea typeface="GQ Text Bold"/>
+              </a:rPr>
+              <a:t>7</a:t>
+            </a:r>
+          </a:p>
+        </p:txBody>
+      </p:sp>
+      <p:sp>
+        <p:nvSpPr>
+          <p:cNvPr id="26" name="TextBox 25"/>
           <p:cNvSpPr txBox="1"/>
           <p:nvPr/>
         </p:nvSpPr>
         <p:spPr>
           <a:xfrm>
-            <a:off x="1024127" y="4134472"/>
-            <a:ext cx="216916" cy="290347"/>
+            <a:off x="6064886" y="5833872"/>
+            <a:ext cx="2383219" cy="216408"/>
           </a:xfrm>
           <a:prstGeom prst="rect">
             <a:avLst/>
@@ -11868,529 +12514,19 @@
           <a:p>
             <a:pPr algn="l">
               <a:lnSpc>
-                <a:spcPts val="1610"/>
-              </a:lnSpc>
-            </a:pPr>
-            <a:r>
-              <a:rPr sz="1150">
-                <a:solidFill>
-                  <a:srgbClr val="59AAF8"/>
+                <a:spcPts val="1200"/>
+              </a:lnSpc>
+            </a:pPr>
+            <a:r>
+              <a:rPr sz="800" spc="64">
+                <a:solidFill>
+                  <a:srgbClr val="A6ADB6"/>
                 </a:solidFill>
                 <a:latin typeface="IBM Plex Mono Medium"/>
                 <a:cs typeface="IBM Plex Mono Medium"/>
                 <a:ea typeface="IBM Plex Mono Medium"/>
               </a:rPr>
-              <a:t>—</a:t>
-            </a:r>
-          </a:p>
-        </p:txBody>
-      </p:sp>
-      <p:sp>
-        <p:nvSpPr>
-          <p:cNvPr id="14" name="TextBox 13"/>
-          <p:cNvSpPr txBox="1"/>
-          <p:nvPr/>
-        </p:nvSpPr>
-        <p:spPr>
-          <a:xfrm>
-            <a:off x="1241044" y="4134472"/>
-            <a:ext cx="5387670" cy="511174"/>
-          </a:xfrm>
-          <a:prstGeom prst="rect">
-            <a:avLst/>
-          </a:prstGeom>
-          <a:noFill/>
-        </p:spPr>
-        <p:txBody>
-          <a:bodyPr wrap="none" lIns="0" rIns="0" tIns="0" bIns="0" anchor="t">
-            <a:spAutoFit/>
-          </a:bodyPr>
-          <a:lstStyle/>
-          <a:p>
-            <a:pPr algn="l">
-              <a:lnSpc>
-                <a:spcPts val="1610"/>
-              </a:lnSpc>
-            </a:pPr>
-            <a:r>
-              <a:rPr sz="1150">
-                <a:solidFill>
-                  <a:srgbClr val="EEEBE5"/>
-                </a:solidFill>
-                <a:latin typeface="GQ Text SemiBold"/>
-                <a:cs typeface="GQ Text SemiBold"/>
-                <a:ea typeface="GQ Text SemiBold"/>
-              </a:rPr>
-              <a:t>Сақтау. </a:t>
-            </a:r>
-            <a:r>
-              <a:rPr sz="1150">
-                <a:solidFill>
-                  <a:srgbClr val="EEEBE5"/>
-                </a:solidFill>
-                <a:latin typeface="GQ Text"/>
-                <a:cs typeface="GQ Text"/>
-                <a:ea typeface="GQ Text"/>
-              </a:rPr>
-              <a:t> Код пен өзгерістер тарихы GitHub-та, сайтты Vercel өзі</a:t>
-            </a:r>
-          </a:p>
-          <a:p>
-            <a:pPr algn="l">
-              <a:lnSpc>
-                <a:spcPts val="1610"/>
-              </a:lnSpc>
-            </a:pPr>
-            <a:r>
-              <a:rPr sz="1150">
-                <a:solidFill>
-                  <a:srgbClr val="EEEBE5"/>
-                </a:solidFill>
-                <a:latin typeface="GQ Text"/>
-                <a:cs typeface="GQ Text"/>
-                <a:ea typeface="GQ Text"/>
-              </a:rPr>
-              <a:t>жаңартады.</a:t>
-            </a:r>
-          </a:p>
-        </p:txBody>
-      </p:sp>
-      <p:sp>
-        <p:nvSpPr>
-          <p:cNvPr id="17" name="TextBox 16"/>
-          <p:cNvSpPr txBox="1"/>
-          <p:nvPr/>
-        </p:nvSpPr>
-        <p:spPr>
-          <a:xfrm>
-            <a:off x="7378522" y="2711767"/>
-            <a:ext cx="3789045" cy="198374"/>
-          </a:xfrm>
-          <a:prstGeom prst="rect">
-            <a:avLst/>
-          </a:prstGeom>
-          <a:noFill/>
-        </p:spPr>
-        <p:txBody>
-          <a:bodyPr wrap="none" lIns="0" rIns="0" tIns="0" bIns="0" anchor="t">
-            <a:spAutoFit/>
-          </a:bodyPr>
-          <a:lstStyle/>
-          <a:p>
-            <a:pPr algn="l">
-              <a:lnSpc>
-                <a:spcPts val="1100"/>
-              </a:lnSpc>
-            </a:pPr>
-            <a:r>
-              <a:rPr sz="850" spc="136">
-                <a:solidFill>
-                  <a:srgbClr val="48CD8C"/>
-                </a:solidFill>
-                <a:latin typeface="IBM Plex Mono SemiBold"/>
-                <a:cs typeface="IBM Plex Mono SemiBold"/>
-                <a:ea typeface="IBM Plex Mono SemiBold"/>
-              </a:rPr>
-              <a:t>НЕ ӨЗІ ТЕКСЕРІЛЕДІ</a:t>
-            </a:r>
-          </a:p>
-        </p:txBody>
-      </p:sp>
-      <p:sp>
-        <p:nvSpPr>
-          <p:cNvPr id="18" name="TextBox 17"/>
-          <p:cNvSpPr txBox="1"/>
-          <p:nvPr/>
-        </p:nvSpPr>
-        <p:spPr>
-          <a:xfrm>
-            <a:off x="7378522" y="3025406"/>
-            <a:ext cx="210566" cy="277723"/>
-          </a:xfrm>
-          <a:prstGeom prst="rect">
-            <a:avLst/>
-          </a:prstGeom>
-          <a:noFill/>
-        </p:spPr>
-        <p:txBody>
-          <a:bodyPr wrap="none" lIns="0" rIns="0" tIns="0" bIns="0" anchor="t">
-            <a:spAutoFit/>
-          </a:bodyPr>
-          <a:lstStyle/>
-          <a:p>
-            <a:pPr algn="l">
-              <a:lnSpc>
-                <a:spcPts val="1540"/>
-              </a:lnSpc>
-            </a:pPr>
-            <a:r>
-              <a:rPr sz="1100">
-                <a:solidFill>
-                  <a:srgbClr val="48CD8C"/>
-                </a:solidFill>
-                <a:latin typeface="IBM Plex Mono Medium"/>
-                <a:cs typeface="IBM Plex Mono Medium"/>
-                <a:ea typeface="IBM Plex Mono Medium"/>
-              </a:rPr>
-              <a:t>—</a:t>
-            </a:r>
-          </a:p>
-        </p:txBody>
-      </p:sp>
-      <p:sp>
-        <p:nvSpPr>
-          <p:cNvPr id="19" name="TextBox 18"/>
-          <p:cNvSpPr txBox="1"/>
-          <p:nvPr/>
-        </p:nvSpPr>
-        <p:spPr>
-          <a:xfrm>
-            <a:off x="7589088" y="3025406"/>
-            <a:ext cx="3578479" cy="277723"/>
-          </a:xfrm>
-          <a:prstGeom prst="rect">
-            <a:avLst/>
-          </a:prstGeom>
-          <a:noFill/>
-        </p:spPr>
-        <p:txBody>
-          <a:bodyPr wrap="none" lIns="0" rIns="0" tIns="0" bIns="0" anchor="t">
-            <a:spAutoFit/>
-          </a:bodyPr>
-          <a:lstStyle/>
-          <a:p>
-            <a:pPr algn="l">
-              <a:lnSpc>
-                <a:spcPts val="1540"/>
-              </a:lnSpc>
-            </a:pPr>
-            <a:r>
-              <a:rPr sz="1100">
-                <a:solidFill>
-                  <a:srgbClr val="EEEBE5"/>
-                </a:solidFill>
-                <a:latin typeface="GQ Text"/>
-                <a:cs typeface="GQ Text"/>
-                <a:ea typeface="GQ Text"/>
-              </a:rPr>
-              <a:t>Әр өзгерісте 70 автотест</a:t>
-            </a:r>
-          </a:p>
-        </p:txBody>
-      </p:sp>
-      <p:sp>
-        <p:nvSpPr>
-          <p:cNvPr id="20" name="TextBox 19"/>
-          <p:cNvSpPr txBox="1"/>
-          <p:nvPr/>
-        </p:nvSpPr>
-        <p:spPr>
-          <a:xfrm>
-            <a:off x="7378522" y="3349002"/>
-            <a:ext cx="210566" cy="277723"/>
-          </a:xfrm>
-          <a:prstGeom prst="rect">
-            <a:avLst/>
-          </a:prstGeom>
-          <a:noFill/>
-        </p:spPr>
-        <p:txBody>
-          <a:bodyPr wrap="none" lIns="0" rIns="0" tIns="0" bIns="0" anchor="t">
-            <a:spAutoFit/>
-          </a:bodyPr>
-          <a:lstStyle/>
-          <a:p>
-            <a:pPr algn="l">
-              <a:lnSpc>
-                <a:spcPts val="1540"/>
-              </a:lnSpc>
-            </a:pPr>
-            <a:r>
-              <a:rPr sz="1100">
-                <a:solidFill>
-                  <a:srgbClr val="48CD8C"/>
-                </a:solidFill>
-                <a:latin typeface="IBM Plex Mono Medium"/>
-                <a:cs typeface="IBM Plex Mono Medium"/>
-                <a:ea typeface="IBM Plex Mono Medium"/>
-              </a:rPr>
-              <a:t>—</a:t>
-            </a:r>
-          </a:p>
-        </p:txBody>
-      </p:sp>
-      <p:sp>
-        <p:nvSpPr>
-          <p:cNvPr id="21" name="TextBox 20"/>
-          <p:cNvSpPr txBox="1"/>
-          <p:nvPr/>
-        </p:nvSpPr>
-        <p:spPr>
-          <a:xfrm>
-            <a:off x="7589088" y="3349002"/>
-            <a:ext cx="3578479" cy="277723"/>
-          </a:xfrm>
-          <a:prstGeom prst="rect">
-            <a:avLst/>
-          </a:prstGeom>
-          <a:noFill/>
-        </p:spPr>
-        <p:txBody>
-          <a:bodyPr wrap="none" lIns="0" rIns="0" tIns="0" bIns="0" anchor="t">
-            <a:spAutoFit/>
-          </a:bodyPr>
-          <a:lstStyle/>
-          <a:p>
-            <a:pPr algn="l">
-              <a:lnSpc>
-                <a:spcPts val="1540"/>
-              </a:lnSpc>
-            </a:pPr>
-            <a:r>
-              <a:rPr sz="1100">
-                <a:solidFill>
-                  <a:srgbClr val="EEEBE5"/>
-                </a:solidFill>
-                <a:latin typeface="GQ Text"/>
-                <a:cs typeface="GQ Text"/>
-                <a:ea typeface="GQ Text"/>
-              </a:rPr>
-              <a:t>Түстер контрастына 28 тексеру</a:t>
-            </a:r>
-          </a:p>
-        </p:txBody>
-      </p:sp>
-      <p:sp>
-        <p:nvSpPr>
-          <p:cNvPr id="22" name="TextBox 21"/>
-          <p:cNvSpPr txBox="1"/>
-          <p:nvPr/>
-        </p:nvSpPr>
-        <p:spPr>
-          <a:xfrm>
-            <a:off x="7378522" y="3672598"/>
-            <a:ext cx="210566" cy="277723"/>
-          </a:xfrm>
-          <a:prstGeom prst="rect">
-            <a:avLst/>
-          </a:prstGeom>
-          <a:noFill/>
-        </p:spPr>
-        <p:txBody>
-          <a:bodyPr wrap="none" lIns="0" rIns="0" tIns="0" bIns="0" anchor="t">
-            <a:spAutoFit/>
-          </a:bodyPr>
-          <a:lstStyle/>
-          <a:p>
-            <a:pPr algn="l">
-              <a:lnSpc>
-                <a:spcPts val="1540"/>
-              </a:lnSpc>
-            </a:pPr>
-            <a:r>
-              <a:rPr sz="1100">
-                <a:solidFill>
-                  <a:srgbClr val="48CD8C"/>
-                </a:solidFill>
-                <a:latin typeface="IBM Plex Mono Medium"/>
-                <a:cs typeface="IBM Plex Mono Medium"/>
-                <a:ea typeface="IBM Plex Mono Medium"/>
-              </a:rPr>
-              <a:t>—</a:t>
-            </a:r>
-          </a:p>
-        </p:txBody>
-      </p:sp>
-      <p:sp>
-        <p:nvSpPr>
-          <p:cNvPr id="23" name="TextBox 22"/>
-          <p:cNvSpPr txBox="1"/>
-          <p:nvPr/>
-        </p:nvSpPr>
-        <p:spPr>
-          <a:xfrm>
-            <a:off x="7589088" y="3672598"/>
-            <a:ext cx="3578479" cy="277723"/>
-          </a:xfrm>
-          <a:prstGeom prst="rect">
-            <a:avLst/>
-          </a:prstGeom>
-          <a:noFill/>
-        </p:spPr>
-        <p:txBody>
-          <a:bodyPr wrap="none" lIns="0" rIns="0" tIns="0" bIns="0" anchor="t">
-            <a:spAutoFit/>
-          </a:bodyPr>
-          <a:lstStyle/>
-          <a:p>
-            <a:pPr algn="l">
-              <a:lnSpc>
-                <a:spcPts val="1540"/>
-              </a:lnSpc>
-            </a:pPr>
-            <a:r>
-              <a:rPr sz="1100">
-                <a:solidFill>
-                  <a:srgbClr val="EEEBE5"/>
-                </a:solidFill>
-                <a:latin typeface="GQ Text"/>
-                <a:cs typeface="GQ Text"/>
-                <a:ea typeface="GQ Text"/>
-              </a:rPr>
-              <a:t>Тапсырма тұжырымдарын тексеру</a:t>
-            </a:r>
-          </a:p>
-        </p:txBody>
-      </p:sp>
-      <p:sp>
-        <p:nvSpPr>
-          <p:cNvPr id="24" name="TextBox 23"/>
-          <p:cNvSpPr txBox="1"/>
-          <p:nvPr/>
-        </p:nvSpPr>
-        <p:spPr>
-          <a:xfrm>
-            <a:off x="7378522" y="3996194"/>
-            <a:ext cx="210566" cy="277723"/>
-          </a:xfrm>
-          <a:prstGeom prst="rect">
-            <a:avLst/>
-          </a:prstGeom>
-          <a:noFill/>
-        </p:spPr>
-        <p:txBody>
-          <a:bodyPr wrap="none" lIns="0" rIns="0" tIns="0" bIns="0" anchor="t">
-            <a:spAutoFit/>
-          </a:bodyPr>
-          <a:lstStyle/>
-          <a:p>
-            <a:pPr algn="l">
-              <a:lnSpc>
-                <a:spcPts val="1540"/>
-              </a:lnSpc>
-            </a:pPr>
-            <a:r>
-              <a:rPr sz="1100">
-                <a:solidFill>
-                  <a:srgbClr val="48CD8C"/>
-                </a:solidFill>
-                <a:latin typeface="IBM Plex Mono Medium"/>
-                <a:cs typeface="IBM Plex Mono Medium"/>
-                <a:ea typeface="IBM Plex Mono Medium"/>
-              </a:rPr>
-              <a:t>—</a:t>
-            </a:r>
-          </a:p>
-        </p:txBody>
-      </p:sp>
-      <p:sp>
-        <p:nvSpPr>
-          <p:cNvPr id="25" name="TextBox 24"/>
-          <p:cNvSpPr txBox="1"/>
-          <p:nvPr/>
-        </p:nvSpPr>
-        <p:spPr>
-          <a:xfrm>
-            <a:off x="7589088" y="3996194"/>
-            <a:ext cx="3578479" cy="277723"/>
-          </a:xfrm>
-          <a:prstGeom prst="rect">
-            <a:avLst/>
-          </a:prstGeom>
-          <a:noFill/>
-        </p:spPr>
-        <p:txBody>
-          <a:bodyPr wrap="none" lIns="0" rIns="0" tIns="0" bIns="0" anchor="t">
-            <a:spAutoFit/>
-          </a:bodyPr>
-          <a:lstStyle/>
-          <a:p>
-            <a:pPr algn="l">
-              <a:lnSpc>
-                <a:spcPts val="1540"/>
-              </a:lnSpc>
-            </a:pPr>
-            <a:r>
-              <a:rPr sz="1100">
-                <a:solidFill>
-                  <a:srgbClr val="EEEBE5"/>
-                </a:solidFill>
-                <a:latin typeface="GQ Text"/>
-                <a:cs typeface="GQ Text"/>
-                <a:ea typeface="GQ Text"/>
-              </a:rPr>
-              <a:t>Баяндамадағы әр санды салыстыру</a:t>
-            </a:r>
-          </a:p>
-        </p:txBody>
-      </p:sp>
-      <p:sp>
-        <p:nvSpPr>
-          <p:cNvPr id="28" name="Rectangle 27"/>
-          <p:cNvSpPr/>
-          <p:nvPr/>
-        </p:nvSpPr>
-        <p:spPr>
-          <a:xfrm>
-            <a:off x="749808" y="4996751"/>
-            <a:ext cx="10692079" cy="710247"/>
-          </a:xfrm>
-          <a:prstGeom prst="rect">
-            <a:avLst/>
-          </a:prstGeom>
-          <a:solidFill>
-            <a:srgbClr val="0064B9"/>
-          </a:solidFill>
-          <a:ln>
-            <a:noFill/>
-          </a:ln>
-          <a:effectLst/>
-        </p:spPr>
-        <p:txBody>
-          <a:bodyPr rtlCol="0" anchor="ctr" wrap="none"/>
-          <a:lstStyle/>
-          <a:p>
-            <a:pPr algn="ctr"/>
-          </a:p>
-        </p:txBody>
-      </p:sp>
-      <p:sp>
-        <p:nvSpPr>
-          <p:cNvPr id="29" name="TextBox 28"/>
-          <p:cNvSpPr txBox="1"/>
-          <p:nvPr/>
-        </p:nvSpPr>
-        <p:spPr>
-          <a:xfrm>
-            <a:off x="1024127" y="5195836"/>
-            <a:ext cx="10143439" cy="345281"/>
-          </a:xfrm>
-          <a:prstGeom prst="rect">
-            <a:avLst/>
-          </a:prstGeom>
-          <a:noFill/>
-        </p:spPr>
-        <p:txBody>
-          <a:bodyPr wrap="none" lIns="0" rIns="0" tIns="0" bIns="0" anchor="t">
-            <a:spAutoFit/>
-          </a:bodyPr>
-          <a:lstStyle/>
-          <a:p>
-            <a:pPr algn="l">
-              <a:lnSpc>
-                <a:spcPts val="1812"/>
-              </a:lnSpc>
-            </a:pPr>
-            <a:r>
-              <a:rPr sz="1250">
-                <a:solidFill>
-                  <a:srgbClr val="FFFFFF"/>
-                </a:solidFill>
-                <a:latin typeface="GQ Text SemiBold"/>
-                <a:cs typeface="GQ Text SemiBold"/>
-                <a:ea typeface="GQ Text SemiBold"/>
-              </a:rPr>
-              <a:t>Код ашық: кез келген адам оны қалай жасалғанын көріп, тексерулерді қайта іске қоса алады.</a:t>
+              <a:t>САБАҚ · 9–11 СЫНЫП</a:t>
             </a:r>
           </a:p>
         </p:txBody>
@@ -12445,208 +12581,14 @@
       </p:sp>
       <p:sp>
         <p:nvSpPr>
-          <p:cNvPr id="3" name="Rectangle 2"/>
-          <p:cNvSpPr/>
-          <p:nvPr/>
-        </p:nvSpPr>
-        <p:spPr>
-          <a:xfrm>
-            <a:off x="749808" y="475488"/>
-            <a:ext cx="10692079" cy="7315"/>
-          </a:xfrm>
-          <a:prstGeom prst="rect">
-            <a:avLst/>
-          </a:prstGeom>
-          <a:solidFill>
-            <a:srgbClr val="3B434D"/>
-          </a:solidFill>
-          <a:ln>
-            <a:noFill/>
-          </a:ln>
-          <a:effectLst/>
-        </p:spPr>
-        <p:txBody>
-          <a:bodyPr rtlCol="0" anchor="ctr" wrap="none"/>
-          <a:lstStyle/>
-          <a:p>
-            <a:pPr algn="ctr"/>
-          </a:p>
-        </p:txBody>
-      </p:sp>
-      <p:sp>
-        <p:nvSpPr>
-          <p:cNvPr id="4" name="TextBox 3"/>
-          <p:cNvSpPr txBox="1"/>
-          <p:nvPr/>
-        </p:nvSpPr>
-        <p:spPr>
-          <a:xfrm>
-            <a:off x="749808" y="559308"/>
-            <a:ext cx="7484455" cy="189357"/>
-          </a:xfrm>
-          <a:prstGeom prst="rect">
-            <a:avLst/>
-          </a:prstGeom>
-          <a:noFill/>
-        </p:spPr>
-        <p:txBody>
-          <a:bodyPr wrap="none" lIns="0" rIns="0" tIns="0" bIns="0" anchor="t">
-            <a:spAutoFit/>
-          </a:bodyPr>
-          <a:lstStyle/>
-          <a:p>
-            <a:pPr algn="l">
-              <a:lnSpc>
-                <a:spcPts val="1050"/>
-              </a:lnSpc>
-            </a:pPr>
-            <a:r>
-              <a:rPr sz="850" spc="136">
-                <a:solidFill>
-                  <a:srgbClr val="59AAF8"/>
-                </a:solidFill>
-                <a:latin typeface="IBM Plex Mono SemiBold"/>
-                <a:cs typeface="IBM Plex Mono SemiBold"/>
-                <a:ea typeface="IBM Plex Mono SemiBold"/>
-              </a:rPr>
-              <a:t>ЕРЕКШЕЛІГІ</a:t>
-            </a:r>
-          </a:p>
-        </p:txBody>
-      </p:sp>
-      <p:sp>
-        <p:nvSpPr>
-          <p:cNvPr id="5" name="TextBox 4"/>
-          <p:cNvSpPr txBox="1"/>
-          <p:nvPr/>
-        </p:nvSpPr>
-        <p:spPr>
-          <a:xfrm>
-            <a:off x="10914329" y="559308"/>
-            <a:ext cx="618998" cy="189357"/>
-          </a:xfrm>
-          <a:prstGeom prst="rect">
-            <a:avLst/>
-          </a:prstGeom>
-          <a:noFill/>
-        </p:spPr>
-        <p:txBody>
-          <a:bodyPr wrap="none" lIns="0" rIns="0" tIns="0" bIns="0" anchor="t">
-            <a:spAutoFit/>
-          </a:bodyPr>
-          <a:lstStyle/>
-          <a:p>
-            <a:pPr algn="l">
-              <a:lnSpc>
-                <a:spcPts val="1050"/>
-              </a:lnSpc>
-            </a:pPr>
-            <a:r>
-              <a:rPr sz="850" spc="85">
-                <a:solidFill>
-                  <a:srgbClr val="A6ADB6"/>
-                </a:solidFill>
-                <a:latin typeface="IBM Plex Mono Medium"/>
-                <a:cs typeface="IBM Plex Mono Medium"/>
-                <a:ea typeface="IBM Plex Mono Medium"/>
-              </a:rPr>
-              <a:t>05 / 08</a:t>
-            </a:r>
-          </a:p>
-        </p:txBody>
-      </p:sp>
-      <p:sp>
-        <p:nvSpPr>
-          <p:cNvPr id="6" name="TextBox 5"/>
-          <p:cNvSpPr txBox="1"/>
-          <p:nvPr/>
-        </p:nvSpPr>
-        <p:spPr>
-          <a:xfrm>
-            <a:off x="749808" y="786505"/>
-            <a:ext cx="10692079" cy="810447"/>
-          </a:xfrm>
-          <a:prstGeom prst="rect">
-            <a:avLst/>
-          </a:prstGeom>
-          <a:noFill/>
-        </p:spPr>
-        <p:txBody>
-          <a:bodyPr wrap="none" lIns="0" rIns="0" tIns="0" bIns="0" anchor="t">
-            <a:spAutoFit/>
-          </a:bodyPr>
-          <a:lstStyle/>
-          <a:p>
-            <a:pPr algn="l">
-              <a:lnSpc>
-                <a:spcPts val="4494"/>
-              </a:lnSpc>
-            </a:pPr>
-            <a:r>
-              <a:rPr sz="4200" spc="-92">
-                <a:solidFill>
-                  <a:srgbClr val="EEEBE5"/>
-                </a:solidFill>
-                <a:latin typeface="GQ Text Bold"/>
-                <a:cs typeface="GQ Text Bold"/>
-                <a:ea typeface="GQ Text Bold"/>
-              </a:rPr>
-              <a:t>Кәдімгі жаттықтырғышта жоқ төрт нәрсе</a:t>
-            </a:r>
-          </a:p>
-        </p:txBody>
-      </p:sp>
-      <p:sp>
-        <p:nvSpPr>
-          <p:cNvPr id="7" name="TextBox 6"/>
-          <p:cNvSpPr txBox="1"/>
-          <p:nvPr/>
-        </p:nvSpPr>
-        <p:spPr>
-          <a:xfrm>
-            <a:off x="749808" y="1575643"/>
-            <a:ext cx="8767504" cy="332907"/>
-          </a:xfrm>
-          <a:prstGeom prst="rect">
-            <a:avLst/>
-          </a:prstGeom>
-          <a:noFill/>
-        </p:spPr>
-        <p:txBody>
-          <a:bodyPr wrap="none" lIns="0" rIns="0" tIns="0" bIns="0" anchor="t">
-            <a:spAutoFit/>
-          </a:bodyPr>
-          <a:lstStyle/>
-          <a:p>
-            <a:pPr algn="l">
-              <a:lnSpc>
-                <a:spcPts val="1846"/>
-              </a:lnSpc>
-            </a:pPr>
-            <a:r>
-              <a:rPr sz="1300">
-                <a:solidFill>
-                  <a:srgbClr val="A6ADB6"/>
-                </a:solidFill>
-                <a:latin typeface="GQ Text"/>
-                <a:cs typeface="GQ Text"/>
-                <a:ea typeface="GQ Text"/>
-              </a:rPr>
-              <a:t>Әрқайсысы әдемілік үшін емес, онсыз оқушы шұғылдануды тоқтатқандықтан пайда болды.</a:t>
-            </a:r>
-          </a:p>
-        </p:txBody>
-      </p:sp>
-      <p:sp>
-        <p:nvSpPr>
-          <p:cNvPr id="8" name="Rectangle 7"/>
-          <p:cNvSpPr/>
-          <p:nvPr/>
-        </p:nvSpPr>
-        <p:spPr>
-          <a:xfrm>
-            <a:off x="749808" y="2323084"/>
-            <a:ext cx="2522143" cy="2343658"/>
+          <p:cNvPr id="28" name="Rectangle 27"/>
+          <p:cNvSpPr/>
+          <p:nvPr/>
+        </p:nvSpPr>
+        <p:spPr>
+          <a:xfrm>
+            <a:off x="7104202" y="2259330"/>
+            <a:ext cx="4337684" cy="2037587"/>
           </a:xfrm>
           <a:prstGeom prst="rect">
             <a:avLst/>
@@ -12671,20 +12613,20 @@
       </p:sp>
       <p:sp>
         <p:nvSpPr>
-          <p:cNvPr id="9" name="Rectangle 8"/>
-          <p:cNvSpPr/>
-          <p:nvPr/>
-        </p:nvSpPr>
-        <p:spPr>
-          <a:xfrm>
-            <a:off x="749808" y="2323084"/>
-            <a:ext cx="32004" cy="2343658"/>
-          </a:xfrm>
-          <a:prstGeom prst="rect">
-            <a:avLst/>
-          </a:prstGeom>
-          <a:solidFill>
-            <a:srgbClr val="0064B9"/>
+          <p:cNvPr id="29" name="Rectangle 28"/>
+          <p:cNvSpPr/>
+          <p:nvPr/>
+        </p:nvSpPr>
+        <p:spPr>
+          <a:xfrm>
+            <a:off x="7104202" y="2259330"/>
+            <a:ext cx="32004" cy="2037587"/>
+          </a:xfrm>
+          <a:prstGeom prst="rect">
+            <a:avLst/>
+          </a:prstGeom>
+          <a:solidFill>
+            <a:srgbClr val="00793D"/>
           </a:solidFill>
           <a:ln>
             <a:noFill/>
@@ -12701,332 +12643,14 @@
       </p:sp>
       <p:sp>
         <p:nvSpPr>
-          <p:cNvPr id="10" name="TextBox 9"/>
-          <p:cNvSpPr txBox="1"/>
-          <p:nvPr/>
-        </p:nvSpPr>
-        <p:spPr>
-          <a:xfrm>
-            <a:off x="1005840" y="2557780"/>
-            <a:ext cx="2010079" cy="189357"/>
-          </a:xfrm>
-          <a:prstGeom prst="rect">
-            <a:avLst/>
-          </a:prstGeom>
-          <a:noFill/>
-        </p:spPr>
-        <p:txBody>
-          <a:bodyPr wrap="none" lIns="0" rIns="0" tIns="0" bIns="0" anchor="t">
-            <a:spAutoFit/>
-          </a:bodyPr>
-          <a:lstStyle/>
-          <a:p>
-            <a:pPr algn="l">
-              <a:lnSpc>
-                <a:spcPts val="1050"/>
-              </a:lnSpc>
-            </a:pPr>
-            <a:r>
-              <a:rPr sz="850" spc="136">
-                <a:solidFill>
-                  <a:srgbClr val="59AAF8"/>
-                </a:solidFill>
-                <a:latin typeface="IBM Plex Mono SemiBold"/>
-                <a:cs typeface="IBM Plex Mono SemiBold"/>
-                <a:ea typeface="IBM Plex Mono SemiBold"/>
-              </a:rPr>
-              <a:t>1</a:t>
-            </a:r>
-          </a:p>
-        </p:txBody>
-      </p:sp>
-      <p:sp>
-        <p:nvSpPr>
-          <p:cNvPr id="11" name="TextBox 10"/>
-          <p:cNvSpPr txBox="1"/>
-          <p:nvPr/>
-        </p:nvSpPr>
-        <p:spPr>
-          <a:xfrm>
-            <a:off x="1005840" y="2796590"/>
-            <a:ext cx="2010079" cy="525551"/>
-          </a:xfrm>
-          <a:prstGeom prst="rect">
-            <a:avLst/>
-          </a:prstGeom>
-          <a:noFill/>
-        </p:spPr>
-        <p:txBody>
-          <a:bodyPr wrap="none" lIns="0" rIns="0" tIns="0" bIns="0" anchor="t">
-            <a:spAutoFit/>
-          </a:bodyPr>
-          <a:lstStyle/>
-          <a:p>
-            <a:pPr algn="l">
-              <a:lnSpc>
-                <a:spcPts val="1710"/>
-              </a:lnSpc>
-            </a:pPr>
-            <a:r>
-              <a:rPr sz="1500" spc="-22">
-                <a:solidFill>
-                  <a:srgbClr val="EEEBE5"/>
-                </a:solidFill>
-                <a:latin typeface="GQ Text Bold"/>
-                <a:cs typeface="GQ Text Bold"/>
-                <a:ea typeface="GQ Text Bold"/>
-              </a:rPr>
-              <a:t>Орыс әріптерін</a:t>
-            </a:r>
-          </a:p>
-          <a:p>
-            <a:pPr algn="l">
-              <a:lnSpc>
-                <a:spcPts val="1710"/>
-              </a:lnSpc>
-            </a:pPr>
-            <a:r>
-              <a:rPr sz="1500" spc="-22">
-                <a:solidFill>
-                  <a:srgbClr val="EEEBE5"/>
-                </a:solidFill>
-                <a:latin typeface="GQ Text Bold"/>
-                <a:cs typeface="GQ Text Bold"/>
-                <a:ea typeface="GQ Text Bold"/>
-              </a:rPr>
-              <a:t>қабылдайды</a:t>
-            </a:r>
-          </a:p>
-        </p:txBody>
-      </p:sp>
-      <p:sp>
-        <p:nvSpPr>
-          <p:cNvPr id="12" name="TextBox 11"/>
-          <p:cNvSpPr txBox="1"/>
-          <p:nvPr/>
-        </p:nvSpPr>
-        <p:spPr>
-          <a:xfrm>
-            <a:off x="1005840" y="3392678"/>
-            <a:ext cx="204216" cy="252475"/>
-          </a:xfrm>
-          <a:prstGeom prst="rect">
-            <a:avLst/>
-          </a:prstGeom>
-          <a:noFill/>
-        </p:spPr>
-        <p:txBody>
-          <a:bodyPr wrap="none" lIns="0" rIns="0" tIns="0" bIns="0" anchor="t">
-            <a:spAutoFit/>
-          </a:bodyPr>
-          <a:lstStyle/>
-          <a:p>
-            <a:pPr algn="l">
-              <a:lnSpc>
-                <a:spcPts val="1400"/>
-              </a:lnSpc>
-            </a:pPr>
-            <a:r>
-              <a:rPr sz="1000">
-                <a:solidFill>
-                  <a:srgbClr val="59AAF8"/>
-                </a:solidFill>
-                <a:latin typeface="IBM Plex Mono Medium"/>
-                <a:cs typeface="IBM Plex Mono Medium"/>
-                <a:ea typeface="IBM Plex Mono Medium"/>
-              </a:rPr>
-              <a:t>—</a:t>
-            </a:r>
-          </a:p>
-        </p:txBody>
-      </p:sp>
-      <p:sp>
-        <p:nvSpPr>
-          <p:cNvPr id="13" name="TextBox 12"/>
-          <p:cNvSpPr txBox="1"/>
-          <p:nvPr/>
-        </p:nvSpPr>
-        <p:spPr>
-          <a:xfrm>
-            <a:off x="1210056" y="3392678"/>
-            <a:ext cx="1805863" cy="608076"/>
-          </a:xfrm>
-          <a:prstGeom prst="rect">
-            <a:avLst/>
-          </a:prstGeom>
-          <a:noFill/>
-        </p:spPr>
-        <p:txBody>
-          <a:bodyPr wrap="none" lIns="0" rIns="0" tIns="0" bIns="0" anchor="t">
-            <a:spAutoFit/>
-          </a:bodyPr>
-          <a:lstStyle/>
-          <a:p>
-            <a:pPr algn="l">
-              <a:lnSpc>
-                <a:spcPts val="1400"/>
-              </a:lnSpc>
-            </a:pPr>
-            <a:r>
-              <a:rPr sz="1000">
-                <a:solidFill>
-                  <a:srgbClr val="EEEBE5"/>
-                </a:solidFill>
-                <a:latin typeface="GQ Text"/>
-                <a:cs typeface="GQ Text"/>
-                <a:ea typeface="GQ Text"/>
-              </a:rPr>
-              <a:t>Қазақ тілінде орыс</a:t>
-            </a:r>
-          </a:p>
-          <a:p>
-            <a:pPr algn="l">
-              <a:lnSpc>
-                <a:spcPts val="1400"/>
-              </a:lnSpc>
-            </a:pPr>
-            <a:r>
-              <a:rPr sz="1000">
-                <a:solidFill>
-                  <a:srgbClr val="EEEBE5"/>
-                </a:solidFill>
-                <a:latin typeface="GQ Text"/>
-                <a:cs typeface="GQ Text"/>
-                <a:ea typeface="GQ Text"/>
-              </a:rPr>
-              <a:t>пернетақтасында жоқ тоғыз</a:t>
-            </a:r>
-          </a:p>
-          <a:p>
-            <a:pPr algn="l">
-              <a:lnSpc>
-                <a:spcPts val="1400"/>
-              </a:lnSpc>
-            </a:pPr>
-            <a:r>
-              <a:rPr sz="1000">
-                <a:solidFill>
-                  <a:srgbClr val="EEEBE5"/>
-                </a:solidFill>
-                <a:latin typeface="GQ Text"/>
-                <a:cs typeface="GQ Text"/>
-                <a:ea typeface="GQ Text"/>
-              </a:rPr>
-              <a:t>әріп бар</a:t>
-            </a:r>
-          </a:p>
-        </p:txBody>
-      </p:sp>
-      <p:sp>
-        <p:nvSpPr>
-          <p:cNvPr id="14" name="TextBox 13"/>
-          <p:cNvSpPr txBox="1"/>
-          <p:nvPr/>
-        </p:nvSpPr>
-        <p:spPr>
-          <a:xfrm>
-            <a:off x="1005840" y="4026662"/>
-            <a:ext cx="204216" cy="252475"/>
-          </a:xfrm>
-          <a:prstGeom prst="rect">
-            <a:avLst/>
-          </a:prstGeom>
-          <a:noFill/>
-        </p:spPr>
-        <p:txBody>
-          <a:bodyPr wrap="none" lIns="0" rIns="0" tIns="0" bIns="0" anchor="t">
-            <a:spAutoFit/>
-          </a:bodyPr>
-          <a:lstStyle/>
-          <a:p>
-            <a:pPr algn="l">
-              <a:lnSpc>
-                <a:spcPts val="1400"/>
-              </a:lnSpc>
-            </a:pPr>
-            <a:r>
-              <a:rPr sz="1000">
-                <a:solidFill>
-                  <a:srgbClr val="59AAF8"/>
-                </a:solidFill>
-                <a:latin typeface="IBM Plex Mono Medium"/>
-                <a:cs typeface="IBM Plex Mono Medium"/>
-                <a:ea typeface="IBM Plex Mono Medium"/>
-              </a:rPr>
-              <a:t>—</a:t>
-            </a:r>
-          </a:p>
-        </p:txBody>
-      </p:sp>
-      <p:sp>
-        <p:nvSpPr>
-          <p:cNvPr id="15" name="TextBox 14"/>
-          <p:cNvSpPr txBox="1"/>
-          <p:nvPr/>
-        </p:nvSpPr>
-        <p:spPr>
-          <a:xfrm>
-            <a:off x="1210056" y="4026662"/>
-            <a:ext cx="1805863" cy="430276"/>
-          </a:xfrm>
-          <a:prstGeom prst="rect">
-            <a:avLst/>
-          </a:prstGeom>
-          <a:noFill/>
-        </p:spPr>
-        <p:txBody>
-          <a:bodyPr wrap="none" lIns="0" rIns="0" tIns="0" bIns="0" anchor="t">
-            <a:spAutoFit/>
-          </a:bodyPr>
-          <a:lstStyle/>
-          <a:p>
-            <a:pPr algn="l">
-              <a:lnSpc>
-                <a:spcPts val="1400"/>
-              </a:lnSpc>
-            </a:pPr>
-            <a:r>
-              <a:rPr sz="1000">
-                <a:solidFill>
-                  <a:srgbClr val="EEEBE5"/>
-                </a:solidFill>
-                <a:latin typeface="GQ Text"/>
-                <a:cs typeface="GQ Text"/>
-                <a:ea typeface="GQ Text"/>
-              </a:rPr>
-              <a:t>Жауап есептеледі, дұрыс</a:t>
-            </a:r>
-          </a:p>
-          <a:p>
-            <a:pPr algn="l">
-              <a:lnSpc>
-                <a:spcPts val="1400"/>
-              </a:lnSpc>
-            </a:pPr>
-            <a:r>
-              <a:rPr sz="1000">
-                <a:solidFill>
-                  <a:srgbClr val="EEEBE5"/>
-                </a:solidFill>
-                <a:latin typeface="GQ Text"/>
-                <a:cs typeface="GQ Text"/>
-                <a:ea typeface="GQ Text"/>
-              </a:rPr>
-              <a:t>жазылуы көрсетіледі</a:t>
-            </a:r>
-          </a:p>
-        </p:txBody>
-      </p:sp>
-      <p:sp>
-        <p:nvSpPr>
-          <p:cNvPr id="16" name="Rectangle 15"/>
-          <p:cNvSpPr/>
-          <p:nvPr/>
-        </p:nvSpPr>
-        <p:spPr>
-          <a:xfrm>
-            <a:off x="3473119" y="2323084"/>
-            <a:ext cx="2522143" cy="2343658"/>
+          <p:cNvPr id="17" name="Rectangle 16"/>
+          <p:cNvSpPr/>
+          <p:nvPr/>
+        </p:nvSpPr>
+        <p:spPr>
+          <a:xfrm>
+            <a:off x="749808" y="2259330"/>
+            <a:ext cx="6153226" cy="2536952"/>
           </a:xfrm>
           <a:prstGeom prst="rect">
             <a:avLst/>
@@ -13051,14 +12675,14 @@
       </p:sp>
       <p:sp>
         <p:nvSpPr>
-          <p:cNvPr id="17" name="Rectangle 16"/>
-          <p:cNvSpPr/>
-          <p:nvPr/>
-        </p:nvSpPr>
-        <p:spPr>
-          <a:xfrm>
-            <a:off x="3473119" y="2323084"/>
-            <a:ext cx="32004" cy="2343658"/>
+          <p:cNvPr id="18" name="Rectangle 17"/>
+          <p:cNvSpPr/>
+          <p:nvPr/>
+        </p:nvSpPr>
+        <p:spPr>
+          <a:xfrm>
+            <a:off x="749808" y="2259330"/>
+            <a:ext cx="32004" cy="2536952"/>
           </a:xfrm>
           <a:prstGeom prst="rect">
             <a:avLst/>
@@ -13081,14 +12705,44 @@
       </p:sp>
       <p:sp>
         <p:nvSpPr>
-          <p:cNvPr id="18" name="TextBox 17"/>
+          <p:cNvPr id="3" name="Rectangle 2"/>
+          <p:cNvSpPr/>
+          <p:nvPr/>
+        </p:nvSpPr>
+        <p:spPr>
+          <a:xfrm>
+            <a:off x="749808" y="475488"/>
+            <a:ext cx="10692079" cy="7315"/>
+          </a:xfrm>
+          <a:prstGeom prst="rect">
+            <a:avLst/>
+          </a:prstGeom>
+          <a:solidFill>
+            <a:srgbClr val="3B434D"/>
+          </a:solidFill>
+          <a:ln>
+            <a:noFill/>
+          </a:ln>
+          <a:effectLst/>
+        </p:spPr>
+        <p:txBody>
+          <a:bodyPr rtlCol="0" anchor="ctr" wrap="none"/>
+          <a:lstStyle/>
+          <a:p>
+            <a:pPr algn="ctr"/>
+          </a:p>
+        </p:txBody>
+      </p:sp>
+      <p:sp>
+        <p:nvSpPr>
+          <p:cNvPr id="4" name="TextBox 3"/>
           <p:cNvSpPr txBox="1"/>
           <p:nvPr/>
         </p:nvSpPr>
         <p:spPr>
           <a:xfrm>
-            <a:off x="3729151" y="2557780"/>
-            <a:ext cx="2010079" cy="189357"/>
+            <a:off x="749808" y="559308"/>
+            <a:ext cx="7484455" cy="189357"/>
           </a:xfrm>
           <a:prstGeom prst="rect">
             <a:avLst/>
@@ -13115,21 +12769,21 @@
                 <a:cs typeface="IBM Plex Mono SemiBold"/>
                 <a:ea typeface="IBM Plex Mono SemiBold"/>
               </a:rPr>
-              <a:t>2</a:t>
-            </a:r>
-          </a:p>
-        </p:txBody>
-      </p:sp>
-      <p:sp>
-        <p:nvSpPr>
-          <p:cNvPr id="19" name="TextBox 18"/>
+              <a:t>ҚАЛАЙ ЖАСАЛДЫ</a:t>
+            </a:r>
+          </a:p>
+        </p:txBody>
+      </p:sp>
+      <p:sp>
+        <p:nvSpPr>
+          <p:cNvPr id="5" name="TextBox 4"/>
           <p:cNvSpPr txBox="1"/>
           <p:nvPr/>
         </p:nvSpPr>
         <p:spPr>
           <a:xfrm>
-            <a:off x="3729151" y="2796590"/>
-            <a:ext cx="2010079" cy="525551"/>
+            <a:off x="10914329" y="559308"/>
+            <a:ext cx="618998" cy="189357"/>
           </a:xfrm>
           <a:prstGeom prst="rect">
             <a:avLst/>
@@ -13144,11 +12798,52 @@
           <a:p>
             <a:pPr algn="l">
               <a:lnSpc>
-                <a:spcPts val="1710"/>
-              </a:lnSpc>
-            </a:pPr>
-            <a:r>
-              <a:rPr sz="1500" spc="-22">
+                <a:spcPts val="1050"/>
+              </a:lnSpc>
+            </a:pPr>
+            <a:r>
+              <a:rPr sz="850" spc="85">
+                <a:solidFill>
+                  <a:srgbClr val="A6ADB6"/>
+                </a:solidFill>
+                <a:latin typeface="IBM Plex Mono Medium"/>
+                <a:cs typeface="IBM Plex Mono Medium"/>
+                <a:ea typeface="IBM Plex Mono Medium"/>
+              </a:rPr>
+              <a:t>05 / 08</a:t>
+            </a:r>
+          </a:p>
+        </p:txBody>
+      </p:sp>
+      <p:sp>
+        <p:nvSpPr>
+          <p:cNvPr id="6" name="TextBox 5"/>
+          <p:cNvSpPr txBox="1"/>
+          <p:nvPr/>
+        </p:nvSpPr>
+        <p:spPr>
+          <a:xfrm>
+            <a:off x="749808" y="790854"/>
+            <a:ext cx="10692079" cy="771855"/>
+          </a:xfrm>
+          <a:prstGeom prst="rect">
+            <a:avLst/>
+          </a:prstGeom>
+          <a:noFill/>
+        </p:spPr>
+        <p:txBody>
+          <a:bodyPr wrap="none" lIns="0" rIns="0" tIns="0" bIns="0" anchor="t">
+            <a:spAutoFit/>
+          </a:bodyPr>
+          <a:lstStyle/>
+          <a:p>
+            <a:pPr algn="l">
+              <a:lnSpc>
+                <a:spcPts val="4280"/>
+              </a:lnSpc>
+            </a:pPr>
+            <a:r>
+              <a:rPr sz="4000" spc="-88">
                 <a:solidFill>
                   <a:srgbClr val="EEEBE5"/>
                 </a:solidFill>
@@ -13156,39 +12851,21 @@
                 <a:cs typeface="GQ Text Bold"/>
                 <a:ea typeface="GQ Text Bold"/>
               </a:rPr>
-              <a:t>Жалғауларды</a:t>
-            </a:r>
-          </a:p>
-          <a:p>
-            <a:pPr algn="l">
-              <a:lnSpc>
-                <a:spcPts val="1710"/>
-              </a:lnSpc>
-            </a:pPr>
-            <a:r>
-              <a:rPr sz="1500" spc="-22">
-                <a:solidFill>
-                  <a:srgbClr val="EEEBE5"/>
-                </a:solidFill>
-                <a:latin typeface="GQ Text Bold"/>
-                <a:cs typeface="GQ Text Bold"/>
-                <a:ea typeface="GQ Text Bold"/>
-              </a:rPr>
-              <a:t>ережемен есептейді</a:t>
-            </a:r>
-          </a:p>
-        </p:txBody>
-      </p:sp>
-      <p:sp>
-        <p:nvSpPr>
-          <p:cNvPr id="20" name="TextBox 19"/>
+              <a:t>Қандай сервистермен жасалды</a:t>
+            </a:r>
+          </a:p>
+        </p:txBody>
+      </p:sp>
+      <p:sp>
+        <p:nvSpPr>
+          <p:cNvPr id="7" name="TextBox 6"/>
           <p:cNvSpPr txBox="1"/>
           <p:nvPr/>
         </p:nvSpPr>
         <p:spPr>
           <a:xfrm>
-            <a:off x="3729151" y="3392678"/>
-            <a:ext cx="204216" cy="252475"/>
+            <a:off x="749808" y="1530177"/>
+            <a:ext cx="9195188" cy="332907"/>
           </a:xfrm>
           <a:prstGeom prst="rect">
             <a:avLst/>
@@ -13203,11 +12880,93 @@
           <a:p>
             <a:pPr algn="l">
               <a:lnSpc>
-                <a:spcPts val="1400"/>
-              </a:lnSpc>
-            </a:pPr>
-            <a:r>
-              <a:rPr sz="1000">
+                <a:spcPts val="1846"/>
+              </a:lnSpc>
+            </a:pPr>
+            <a:r>
+              <a:rPr sz="1300">
+                <a:solidFill>
+                  <a:srgbClr val="A6ADB6"/>
+                </a:solidFill>
+                <a:latin typeface="GQ Text"/>
+                <a:cs typeface="GQ Text"/>
+                <a:ea typeface="GQ Text"/>
+              </a:rPr>
+              <a:t>Барлық құрал тегін және оқушыға қолжетімді. Бірде-бір сервис үшін ақы төлеуге тура келген жоқ.</a:t>
+            </a:r>
+          </a:p>
+        </p:txBody>
+      </p:sp>
+      <p:sp>
+        <p:nvSpPr>
+          <p:cNvPr id="8" name="TextBox 7"/>
+          <p:cNvSpPr txBox="1"/>
+          <p:nvPr/>
+        </p:nvSpPr>
+        <p:spPr>
+          <a:xfrm>
+            <a:off x="1024127" y="2511298"/>
+            <a:ext cx="5604586" cy="198374"/>
+          </a:xfrm>
+          <a:prstGeom prst="rect">
+            <a:avLst/>
+          </a:prstGeom>
+          <a:noFill/>
+        </p:spPr>
+        <p:txBody>
+          <a:bodyPr wrap="none" lIns="0" rIns="0" tIns="0" bIns="0" anchor="t">
+            <a:spAutoFit/>
+          </a:bodyPr>
+          <a:lstStyle/>
+          <a:p>
+            <a:pPr algn="l">
+              <a:lnSpc>
+                <a:spcPts val="1100"/>
+              </a:lnSpc>
+            </a:pPr>
+            <a:r>
+              <a:rPr sz="850" spc="136">
+                <a:solidFill>
+                  <a:srgbClr val="59AAF8"/>
+                </a:solidFill>
+                <a:latin typeface="IBM Plex Mono SemiBold"/>
+                <a:cs typeface="IBM Plex Mono SemiBold"/>
+                <a:ea typeface="IBM Plex Mono SemiBold"/>
+              </a:rPr>
+              <a:t>НЕМЕН ЖАСАЛДЫ</a:t>
+            </a:r>
+          </a:p>
+        </p:txBody>
+      </p:sp>
+      <p:sp>
+        <p:nvSpPr>
+          <p:cNvPr id="9" name="TextBox 8"/>
+          <p:cNvSpPr txBox="1"/>
+          <p:nvPr/>
+        </p:nvSpPr>
+        <p:spPr>
+          <a:xfrm>
+            <a:off x="1024127" y="2823514"/>
+            <a:ext cx="216916" cy="290347"/>
+          </a:xfrm>
+          <a:prstGeom prst="rect">
+            <a:avLst/>
+          </a:prstGeom>
+          <a:noFill/>
+        </p:spPr>
+        <p:txBody>
+          <a:bodyPr wrap="none" lIns="0" rIns="0" tIns="0" bIns="0" anchor="t">
+            <a:spAutoFit/>
+          </a:bodyPr>
+          <a:lstStyle/>
+          <a:p>
+            <a:pPr algn="l">
+              <a:lnSpc>
+                <a:spcPts val="1610"/>
+              </a:lnSpc>
+            </a:pPr>
+            <a:r>
+              <a:rPr sz="1150">
                 <a:solidFill>
                   <a:srgbClr val="59AAF8"/>
                 </a:solidFill>
@@ -13222,14 +12981,14 @@
       </p:sp>
       <p:sp>
         <p:nvSpPr>
-          <p:cNvPr id="21" name="TextBox 20"/>
+          <p:cNvPr id="10" name="TextBox 9"/>
           <p:cNvSpPr txBox="1"/>
           <p:nvPr/>
         </p:nvSpPr>
         <p:spPr>
           <a:xfrm>
-            <a:off x="3933367" y="3392678"/>
-            <a:ext cx="1805863" cy="430276"/>
+            <a:off x="1241044" y="2823514"/>
+            <a:ext cx="5387670" cy="511174"/>
           </a:xfrm>
           <a:prstGeom prst="rect">
             <a:avLst/>
@@ -13244,11 +13003,22 @@
           <a:p>
             <a:pPr algn="l">
               <a:lnSpc>
-                <a:spcPts val="1400"/>
-              </a:lnSpc>
-            </a:pPr>
-            <a:r>
-              <a:rPr sz="1000">
+                <a:spcPts val="1610"/>
+              </a:lnSpc>
+            </a:pPr>
+            <a:r>
+              <a:rPr sz="1150">
+                <a:solidFill>
+                  <a:srgbClr val="EEEBE5"/>
+                </a:solidFill>
+                <a:latin typeface="GQ Text SemiBold"/>
+                <a:cs typeface="GQ Text SemiBold"/>
+                <a:ea typeface="GQ Text SemiBold"/>
+              </a:rPr>
+              <a:t>Нейрожелі-көмекші. </a:t>
+            </a:r>
+            <a:r>
+              <a:rPr sz="1150">
                 <a:solidFill>
                   <a:srgbClr val="EEEBE5"/>
                 </a:solidFill>
@@ -13256,17 +13026,17 @@
                 <a:cs typeface="GQ Text"/>
                 <a:ea typeface="GQ Text"/>
               </a:rPr>
-              <a:t>Кез келген өз сөзіңді қой —</a:t>
-            </a:r>
-          </a:p>
-          <a:p>
-            <a:pPr algn="l">
-              <a:lnSpc>
-                <a:spcPts val="1400"/>
-              </a:lnSpc>
-            </a:pPr>
-            <a:r>
-              <a:rPr sz="1000">
+              <a:t> Тапсырмаларым бойынша код жазды — мен</a:t>
+            </a:r>
+          </a:p>
+          <a:p>
+            <a:pPr algn="l">
+              <a:lnSpc>
+                <a:spcPts val="1610"/>
+              </a:lnSpc>
+            </a:pPr>
+            <a:r>
+              <a:rPr sz="1150">
                 <a:solidFill>
                   <a:srgbClr val="EEEBE5"/>
                 </a:solidFill>
@@ -13274,21 +13044,21 @@
                 <a:cs typeface="GQ Text"/>
                 <a:ea typeface="GQ Text"/>
               </a:rPr>
-              <a:t>барлық формасын көресің</a:t>
-            </a:r>
-          </a:p>
-        </p:txBody>
-      </p:sp>
-      <p:sp>
-        <p:nvSpPr>
-          <p:cNvPr id="22" name="TextBox 21"/>
+              <a:t>тапсырма қойып, нәтижені тексердім.</a:t>
+            </a:r>
+          </a:p>
+        </p:txBody>
+      </p:sp>
+      <p:sp>
+        <p:nvSpPr>
+          <p:cNvPr id="11" name="TextBox 10"/>
           <p:cNvSpPr txBox="1"/>
           <p:nvPr/>
         </p:nvSpPr>
         <p:spPr>
           <a:xfrm>
-            <a:off x="3729151" y="3848862"/>
-            <a:ext cx="204216" cy="252475"/>
+            <a:off x="1024127" y="3378758"/>
+            <a:ext cx="216916" cy="290347"/>
           </a:xfrm>
           <a:prstGeom prst="rect">
             <a:avLst/>
@@ -13303,11 +13073,11 @@
           <a:p>
             <a:pPr algn="l">
               <a:lnSpc>
-                <a:spcPts val="1400"/>
-              </a:lnSpc>
-            </a:pPr>
-            <a:r>
-              <a:rPr sz="1000">
+                <a:spcPts val="1610"/>
+              </a:lnSpc>
+            </a:pPr>
+            <a:r>
+              <a:rPr sz="1150">
                 <a:solidFill>
                   <a:srgbClr val="59AAF8"/>
                 </a:solidFill>
@@ -13322,14 +13092,14 @@
       </p:sp>
       <p:sp>
         <p:nvSpPr>
-          <p:cNvPr id="23" name="TextBox 22"/>
+          <p:cNvPr id="12" name="TextBox 11"/>
           <p:cNvSpPr txBox="1"/>
           <p:nvPr/>
         </p:nvSpPr>
         <p:spPr>
           <a:xfrm>
-            <a:off x="3933367" y="3848862"/>
-            <a:ext cx="1805863" cy="430276"/>
+            <a:off x="1241044" y="3378758"/>
+            <a:ext cx="5387670" cy="511174"/>
           </a:xfrm>
           <a:prstGeom prst="rect">
             <a:avLst/>
@@ -13344,11 +13114,22 @@
           <a:p>
             <a:pPr algn="l">
               <a:lnSpc>
-                <a:spcPts val="1400"/>
-              </a:lnSpc>
-            </a:pPr>
-            <a:r>
-              <a:rPr sz="1000">
+                <a:spcPts val="1610"/>
+              </a:lnSpc>
+            </a:pPr>
+            <a:r>
+              <a:rPr sz="1150">
+                <a:solidFill>
+                  <a:srgbClr val="EEEBE5"/>
+                </a:solidFill>
+                <a:latin typeface="GQ Text SemiBold"/>
+                <a:cs typeface="GQ Text SemiBold"/>
+                <a:ea typeface="GQ Text SemiBold"/>
+              </a:rPr>
+              <a:t>GitHub. </a:t>
+            </a:r>
+            <a:r>
+              <a:rPr sz="1150">
                 <a:solidFill>
                   <a:srgbClr val="EEEBE5"/>
                 </a:solidFill>
@@ -13356,17 +13137,17 @@
                 <a:cs typeface="GQ Text"/>
                 <a:ea typeface="GQ Text"/>
               </a:rPr>
-              <a:t>Кесте емес, қазақ тілінің</a:t>
-            </a:r>
-          </a:p>
-          <a:p>
-            <a:pPr algn="l">
-              <a:lnSpc>
-                <a:spcPts val="1400"/>
-              </a:lnSpc>
-            </a:pPr>
-            <a:r>
-              <a:rPr sz="1000">
+              <a:t> Кодты және өзгерістер тарихын сақтайды, Android нұсқасы да</a:t>
+            </a:r>
+          </a:p>
+          <a:p>
+            <a:pPr algn="l">
+              <a:lnSpc>
+                <a:spcPts val="1610"/>
+              </a:lnSpc>
+            </a:pPr>
+            <a:r>
+              <a:rPr sz="1150">
                 <a:solidFill>
                   <a:srgbClr val="EEEBE5"/>
                 </a:solidFill>
@@ -13374,83 +13155,21 @@
                 <a:cs typeface="GQ Text"/>
                 <a:ea typeface="GQ Text"/>
               </a:rPr>
-              <a:t>ережелері</a:t>
-            </a:r>
-          </a:p>
-        </p:txBody>
-      </p:sp>
-      <p:sp>
-        <p:nvSpPr>
-          <p:cNvPr id="24" name="Rectangle 23"/>
-          <p:cNvSpPr/>
-          <p:nvPr/>
-        </p:nvSpPr>
-        <p:spPr>
-          <a:xfrm>
-            <a:off x="6196431" y="2323084"/>
-            <a:ext cx="2522143" cy="2343658"/>
-          </a:xfrm>
-          <a:prstGeom prst="rect">
-            <a:avLst/>
-          </a:prstGeom>
-          <a:solidFill>
-            <a:srgbClr val="11161E"/>
-          </a:solidFill>
-          <a:ln w="9525">
-            <a:solidFill>
-              <a:srgbClr val="3B434D"/>
-            </a:solidFill>
-          </a:ln>
-          <a:effectLst/>
-        </p:spPr>
-        <p:txBody>
-          <a:bodyPr rtlCol="0" anchor="ctr" wrap="none"/>
-          <a:lstStyle/>
-          <a:p>
-            <a:pPr algn="ctr"/>
-          </a:p>
-        </p:txBody>
-      </p:sp>
-      <p:sp>
-        <p:nvSpPr>
-          <p:cNvPr id="25" name="Rectangle 24"/>
-          <p:cNvSpPr/>
-          <p:nvPr/>
-        </p:nvSpPr>
-        <p:spPr>
-          <a:xfrm>
-            <a:off x="6196431" y="2323084"/>
-            <a:ext cx="32004" cy="2343658"/>
-          </a:xfrm>
-          <a:prstGeom prst="rect">
-            <a:avLst/>
-          </a:prstGeom>
-          <a:solidFill>
-            <a:srgbClr val="0064B9"/>
-          </a:solidFill>
-          <a:ln>
-            <a:noFill/>
-          </a:ln>
-          <a:effectLst/>
-        </p:spPr>
-        <p:txBody>
-          <a:bodyPr rtlCol="0" anchor="ctr" wrap="none"/>
-          <a:lstStyle/>
-          <a:p>
-            <a:pPr algn="ctr"/>
-          </a:p>
-        </p:txBody>
-      </p:sp>
-      <p:sp>
-        <p:nvSpPr>
-          <p:cNvPr id="26" name="TextBox 25"/>
+              <a:t>сонда жиналады.</a:t>
+            </a:r>
+          </a:p>
+        </p:txBody>
+      </p:sp>
+      <p:sp>
+        <p:nvSpPr>
+          <p:cNvPr id="13" name="TextBox 12"/>
           <p:cNvSpPr txBox="1"/>
           <p:nvPr/>
         </p:nvSpPr>
         <p:spPr>
           <a:xfrm>
-            <a:off x="6452463" y="2557780"/>
-            <a:ext cx="2010079" cy="189357"/>
+            <a:off x="1024127" y="3934002"/>
+            <a:ext cx="216916" cy="290347"/>
           </a:xfrm>
           <a:prstGeom prst="rect">
             <a:avLst/>
@@ -13465,33 +13184,219 @@
           <a:p>
             <a:pPr algn="l">
               <a:lnSpc>
-                <a:spcPts val="1050"/>
+                <a:spcPts val="1610"/>
+              </a:lnSpc>
+            </a:pPr>
+            <a:r>
+              <a:rPr sz="1150">
+                <a:solidFill>
+                  <a:srgbClr val="59AAF8"/>
+                </a:solidFill>
+                <a:latin typeface="IBM Plex Mono Medium"/>
+                <a:cs typeface="IBM Plex Mono Medium"/>
+                <a:ea typeface="IBM Plex Mono Medium"/>
+              </a:rPr>
+              <a:t>—</a:t>
+            </a:r>
+          </a:p>
+        </p:txBody>
+      </p:sp>
+      <p:sp>
+        <p:nvSpPr>
+          <p:cNvPr id="14" name="TextBox 13"/>
+          <p:cNvSpPr txBox="1"/>
+          <p:nvPr/>
+        </p:nvSpPr>
+        <p:spPr>
+          <a:xfrm>
+            <a:off x="1241044" y="3934002"/>
+            <a:ext cx="5387670" cy="306705"/>
+          </a:xfrm>
+          <a:prstGeom prst="rect">
+            <a:avLst/>
+          </a:prstGeom>
+          <a:noFill/>
+        </p:spPr>
+        <p:txBody>
+          <a:bodyPr wrap="none" lIns="0" rIns="0" tIns="0" bIns="0" anchor="t">
+            <a:spAutoFit/>
+          </a:bodyPr>
+          <a:lstStyle/>
+          <a:p>
+            <a:pPr algn="l">
+              <a:lnSpc>
+                <a:spcPts val="1610"/>
+              </a:lnSpc>
+            </a:pPr>
+            <a:r>
+              <a:rPr sz="1150">
+                <a:solidFill>
+                  <a:srgbClr val="EEEBE5"/>
+                </a:solidFill>
+                <a:latin typeface="GQ Text SemiBold"/>
+                <a:cs typeface="GQ Text SemiBold"/>
+                <a:ea typeface="GQ Text SemiBold"/>
+              </a:rPr>
+              <a:t>Vercel. </a:t>
+            </a:r>
+            <a:r>
+              <a:rPr sz="1150">
+                <a:solidFill>
+                  <a:srgbClr val="EEEBE5"/>
+                </a:solidFill>
+                <a:latin typeface="GQ Text"/>
+                <a:cs typeface="GQ Text"/>
+                <a:ea typeface="GQ Text"/>
+              </a:rPr>
+              <a:t> Әр түзетуден кейін сайтты интернетте өзі жариялайды.</a:t>
+            </a:r>
+          </a:p>
+        </p:txBody>
+      </p:sp>
+      <p:sp>
+        <p:nvSpPr>
+          <p:cNvPr id="15" name="TextBox 14"/>
+          <p:cNvSpPr txBox="1"/>
+          <p:nvPr/>
+        </p:nvSpPr>
+        <p:spPr>
+          <a:xfrm>
+            <a:off x="1024127" y="4284776"/>
+            <a:ext cx="216916" cy="290347"/>
+          </a:xfrm>
+          <a:prstGeom prst="rect">
+            <a:avLst/>
+          </a:prstGeom>
+          <a:noFill/>
+        </p:spPr>
+        <p:txBody>
+          <a:bodyPr wrap="none" lIns="0" rIns="0" tIns="0" bIns="0" anchor="t">
+            <a:spAutoFit/>
+          </a:bodyPr>
+          <a:lstStyle/>
+          <a:p>
+            <a:pPr algn="l">
+              <a:lnSpc>
+                <a:spcPts val="1610"/>
+              </a:lnSpc>
+            </a:pPr>
+            <a:r>
+              <a:rPr sz="1150">
+                <a:solidFill>
+                  <a:srgbClr val="59AAF8"/>
+                </a:solidFill>
+                <a:latin typeface="IBM Plex Mono Medium"/>
+                <a:cs typeface="IBM Plex Mono Medium"/>
+                <a:ea typeface="IBM Plex Mono Medium"/>
+              </a:rPr>
+              <a:t>—</a:t>
+            </a:r>
+          </a:p>
+        </p:txBody>
+      </p:sp>
+      <p:sp>
+        <p:nvSpPr>
+          <p:cNvPr id="16" name="TextBox 15"/>
+          <p:cNvSpPr txBox="1"/>
+          <p:nvPr/>
+        </p:nvSpPr>
+        <p:spPr>
+          <a:xfrm>
+            <a:off x="1241044" y="4284776"/>
+            <a:ext cx="5387670" cy="306705"/>
+          </a:xfrm>
+          <a:prstGeom prst="rect">
+            <a:avLst/>
+          </a:prstGeom>
+          <a:noFill/>
+        </p:spPr>
+        <p:txBody>
+          <a:bodyPr wrap="none" lIns="0" rIns="0" tIns="0" bIns="0" anchor="t">
+            <a:spAutoFit/>
+          </a:bodyPr>
+          <a:lstStyle/>
+          <a:p>
+            <a:pPr algn="l">
+              <a:lnSpc>
+                <a:spcPts val="1610"/>
+              </a:lnSpc>
+            </a:pPr>
+            <a:r>
+              <a:rPr sz="1150">
+                <a:solidFill>
+                  <a:srgbClr val="EEEBE5"/>
+                </a:solidFill>
+                <a:latin typeface="GQ Text SemiBold"/>
+                <a:cs typeface="GQ Text SemiBold"/>
+                <a:ea typeface="GQ Text SemiBold"/>
+              </a:rPr>
+              <a:t>Capacitor. </a:t>
+            </a:r>
+            <a:r>
+              <a:rPr sz="1150">
+                <a:solidFill>
+                  <a:srgbClr val="EEEBE5"/>
+                </a:solidFill>
+                <a:latin typeface="GQ Text"/>
+                <a:cs typeface="GQ Text"/>
+                <a:ea typeface="GQ Text"/>
+              </a:rPr>
+              <a:t> Сайтты телефонға орнатылатын қосымшаға айналдырады.</a:t>
+            </a:r>
+          </a:p>
+        </p:txBody>
+      </p:sp>
+      <p:sp>
+        <p:nvSpPr>
+          <p:cNvPr id="19" name="TextBox 18"/>
+          <p:cNvSpPr txBox="1"/>
+          <p:nvPr/>
+        </p:nvSpPr>
+        <p:spPr>
+          <a:xfrm>
+            <a:off x="7378522" y="2511298"/>
+            <a:ext cx="3789045" cy="198374"/>
+          </a:xfrm>
+          <a:prstGeom prst="rect">
+            <a:avLst/>
+          </a:prstGeom>
+          <a:noFill/>
+        </p:spPr>
+        <p:txBody>
+          <a:bodyPr wrap="none" lIns="0" rIns="0" tIns="0" bIns="0" anchor="t">
+            <a:spAutoFit/>
+          </a:bodyPr>
+          <a:lstStyle/>
+          <a:p>
+            <a:pPr algn="l">
+              <a:lnSpc>
+                <a:spcPts val="1100"/>
               </a:lnSpc>
             </a:pPr>
             <a:r>
               <a:rPr sz="850" spc="136">
                 <a:solidFill>
-                  <a:srgbClr val="59AAF8"/>
+                  <a:srgbClr val="48CD8C"/>
                 </a:solidFill>
                 <a:latin typeface="IBM Plex Mono SemiBold"/>
                 <a:cs typeface="IBM Plex Mono SemiBold"/>
                 <a:ea typeface="IBM Plex Mono SemiBold"/>
               </a:rPr>
-              <a:t>3</a:t>
-            </a:r>
-          </a:p>
-        </p:txBody>
-      </p:sp>
-      <p:sp>
-        <p:nvSpPr>
-          <p:cNvPr id="27" name="TextBox 26"/>
+              <a:t>НЕ ӨЗІ ТЕКСЕРІЛЕДІ</a:t>
+            </a:r>
+          </a:p>
+        </p:txBody>
+      </p:sp>
+      <p:sp>
+        <p:nvSpPr>
+          <p:cNvPr id="20" name="TextBox 19"/>
           <p:cNvSpPr txBox="1"/>
           <p:nvPr/>
         </p:nvSpPr>
         <p:spPr>
           <a:xfrm>
-            <a:off x="6452463" y="2796590"/>
-            <a:ext cx="2010079" cy="525551"/>
+            <a:off x="7378522" y="2824937"/>
+            <a:ext cx="210566" cy="277723"/>
           </a:xfrm>
           <a:prstGeom prst="rect">
             <a:avLst/>
@@ -13506,51 +13411,33 @@
           <a:p>
             <a:pPr algn="l">
               <a:lnSpc>
-                <a:spcPts val="1710"/>
-              </a:lnSpc>
-            </a:pPr>
-            <a:r>
-              <a:rPr sz="1500" spc="-22">
-                <a:solidFill>
-                  <a:srgbClr val="EEEBE5"/>
-                </a:solidFill>
-                <a:latin typeface="GQ Text Bold"/>
-                <a:cs typeface="GQ Text Bold"/>
-                <a:ea typeface="GQ Text Bold"/>
-              </a:rPr>
-              <a:t>Ұмытылғанды</a:t>
-            </a:r>
-          </a:p>
-          <a:p>
-            <a:pPr algn="l">
-              <a:lnSpc>
-                <a:spcPts val="1710"/>
-              </a:lnSpc>
-            </a:pPr>
-            <a:r>
-              <a:rPr sz="1500" spc="-22">
-                <a:solidFill>
-                  <a:srgbClr val="EEEBE5"/>
-                </a:solidFill>
-                <a:latin typeface="GQ Text Bold"/>
-                <a:cs typeface="GQ Text Bold"/>
-                <a:ea typeface="GQ Text Bold"/>
-              </a:rPr>
-              <a:t>қайтарады</a:t>
-            </a:r>
-          </a:p>
-        </p:txBody>
-      </p:sp>
-      <p:sp>
-        <p:nvSpPr>
-          <p:cNvPr id="28" name="TextBox 27"/>
+                <a:spcPts val="1540"/>
+              </a:lnSpc>
+            </a:pPr>
+            <a:r>
+              <a:rPr sz="1100">
+                <a:solidFill>
+                  <a:srgbClr val="48CD8C"/>
+                </a:solidFill>
+                <a:latin typeface="IBM Plex Mono Medium"/>
+                <a:cs typeface="IBM Plex Mono Medium"/>
+                <a:ea typeface="IBM Plex Mono Medium"/>
+              </a:rPr>
+              <a:t>—</a:t>
+            </a:r>
+          </a:p>
+        </p:txBody>
+      </p:sp>
+      <p:sp>
+        <p:nvSpPr>
+          <p:cNvPr id="21" name="TextBox 20"/>
           <p:cNvSpPr txBox="1"/>
           <p:nvPr/>
         </p:nvSpPr>
         <p:spPr>
           <a:xfrm>
-            <a:off x="6452463" y="3392678"/>
-            <a:ext cx="204216" cy="252475"/>
+            <a:off x="7589088" y="2824937"/>
+            <a:ext cx="3578479" cy="277723"/>
           </a:xfrm>
           <a:prstGeom prst="rect">
             <a:avLst/>
@@ -13565,13 +13452,54 @@
           <a:p>
             <a:pPr algn="l">
               <a:lnSpc>
-                <a:spcPts val="1400"/>
-              </a:lnSpc>
-            </a:pPr>
-            <a:r>
-              <a:rPr sz="1000">
-                <a:solidFill>
-                  <a:srgbClr val="59AAF8"/>
+                <a:spcPts val="1540"/>
+              </a:lnSpc>
+            </a:pPr>
+            <a:r>
+              <a:rPr sz="1100">
+                <a:solidFill>
+                  <a:srgbClr val="EEEBE5"/>
+                </a:solidFill>
+                <a:latin typeface="GQ Text"/>
+                <a:cs typeface="GQ Text"/>
+                <a:ea typeface="GQ Text"/>
+              </a:rPr>
+              <a:t>Әр өзгерісте 70 автотест</a:t>
+            </a:r>
+          </a:p>
+        </p:txBody>
+      </p:sp>
+      <p:sp>
+        <p:nvSpPr>
+          <p:cNvPr id="22" name="TextBox 21"/>
+          <p:cNvSpPr txBox="1"/>
+          <p:nvPr/>
+        </p:nvSpPr>
+        <p:spPr>
+          <a:xfrm>
+            <a:off x="7378522" y="3148533"/>
+            <a:ext cx="210566" cy="277723"/>
+          </a:xfrm>
+          <a:prstGeom prst="rect">
+            <a:avLst/>
+          </a:prstGeom>
+          <a:noFill/>
+        </p:spPr>
+        <p:txBody>
+          <a:bodyPr wrap="none" lIns="0" rIns="0" tIns="0" bIns="0" anchor="t">
+            <a:spAutoFit/>
+          </a:bodyPr>
+          <a:lstStyle/>
+          <a:p>
+            <a:pPr algn="l">
+              <a:lnSpc>
+                <a:spcPts val="1540"/>
+              </a:lnSpc>
+            </a:pPr>
+            <a:r>
+              <a:rPr sz="1100">
+                <a:solidFill>
+                  <a:srgbClr val="48CD8C"/>
                 </a:solidFill>
                 <a:latin typeface="IBM Plex Mono Medium"/>
                 <a:cs typeface="IBM Plex Mono Medium"/>
@@ -13584,14 +13512,14 @@
       </p:sp>
       <p:sp>
         <p:nvSpPr>
-          <p:cNvPr id="29" name="TextBox 28"/>
+          <p:cNvPr id="23" name="TextBox 22"/>
           <p:cNvSpPr txBox="1"/>
           <p:nvPr/>
         </p:nvSpPr>
         <p:spPr>
           <a:xfrm>
-            <a:off x="6656679" y="3392678"/>
-            <a:ext cx="1805863" cy="430276"/>
+            <a:off x="7589088" y="3148533"/>
+            <a:ext cx="3578479" cy="277723"/>
           </a:xfrm>
           <a:prstGeom prst="rect">
             <a:avLst/>
@@ -13606,11 +13534,11 @@
           <a:p>
             <a:pPr algn="l">
               <a:lnSpc>
-                <a:spcPts val="1400"/>
-              </a:lnSpc>
-            </a:pPr>
-            <a:r>
-              <a:rPr sz="1000">
+                <a:spcPts val="1540"/>
+              </a:lnSpc>
+            </a:pPr>
+            <a:r>
+              <a:rPr sz="1100">
                 <a:solidFill>
                   <a:srgbClr val="EEEBE5"/>
                 </a:solidFill>
@@ -13618,17 +13546,81 @@
                 <a:cs typeface="GQ Text"/>
                 <a:ea typeface="GQ Text"/>
               </a:rPr>
-              <a:t>Қателессең — тапсырма</a:t>
-            </a:r>
-          </a:p>
-          <a:p>
-            <a:pPr algn="l">
-              <a:lnSpc>
-                <a:spcPts val="1400"/>
-              </a:lnSpc>
-            </a:pPr>
-            <a:r>
-              <a:rPr sz="1000">
+              <a:t>Түстер контрастына 28 тексеру</a:t>
+            </a:r>
+          </a:p>
+        </p:txBody>
+      </p:sp>
+      <p:sp>
+        <p:nvSpPr>
+          <p:cNvPr id="24" name="TextBox 23"/>
+          <p:cNvSpPr txBox="1"/>
+          <p:nvPr/>
+        </p:nvSpPr>
+        <p:spPr>
+          <a:xfrm>
+            <a:off x="7378522" y="3472129"/>
+            <a:ext cx="210566" cy="277723"/>
+          </a:xfrm>
+          <a:prstGeom prst="rect">
+            <a:avLst/>
+          </a:prstGeom>
+          <a:noFill/>
+        </p:spPr>
+        <p:txBody>
+          <a:bodyPr wrap="none" lIns="0" rIns="0" tIns="0" bIns="0" anchor="t">
+            <a:spAutoFit/>
+          </a:bodyPr>
+          <a:lstStyle/>
+          <a:p>
+            <a:pPr algn="l">
+              <a:lnSpc>
+                <a:spcPts val="1540"/>
+              </a:lnSpc>
+            </a:pPr>
+            <a:r>
+              <a:rPr sz="1100">
+                <a:solidFill>
+                  <a:srgbClr val="48CD8C"/>
+                </a:solidFill>
+                <a:latin typeface="IBM Plex Mono Medium"/>
+                <a:cs typeface="IBM Plex Mono Medium"/>
+                <a:ea typeface="IBM Plex Mono Medium"/>
+              </a:rPr>
+              <a:t>—</a:t>
+            </a:r>
+          </a:p>
+        </p:txBody>
+      </p:sp>
+      <p:sp>
+        <p:nvSpPr>
+          <p:cNvPr id="25" name="TextBox 24"/>
+          <p:cNvSpPr txBox="1"/>
+          <p:nvPr/>
+        </p:nvSpPr>
+        <p:spPr>
+          <a:xfrm>
+            <a:off x="7589088" y="3472129"/>
+            <a:ext cx="3578479" cy="277723"/>
+          </a:xfrm>
+          <a:prstGeom prst="rect">
+            <a:avLst/>
+          </a:prstGeom>
+          <a:noFill/>
+        </p:spPr>
+        <p:txBody>
+          <a:bodyPr wrap="none" lIns="0" rIns="0" tIns="0" bIns="0" anchor="t">
+            <a:spAutoFit/>
+          </a:bodyPr>
+          <a:lstStyle/>
+          <a:p>
+            <a:pPr algn="l">
+              <a:lnSpc>
+                <a:spcPts val="1540"/>
+              </a:lnSpc>
+            </a:pPr>
+            <a:r>
+              <a:rPr sz="1100">
                 <a:solidFill>
                   <a:srgbClr val="EEEBE5"/>
                 </a:solidFill>
@@ -13636,21 +13628,21 @@
                 <a:cs typeface="GQ Text"/>
                 <a:ea typeface="GQ Text"/>
               </a:rPr>
-              <a:t>бүгін қайтады</a:t>
-            </a:r>
-          </a:p>
-        </p:txBody>
-      </p:sp>
-      <p:sp>
-        <p:nvSpPr>
-          <p:cNvPr id="30" name="TextBox 29"/>
+              <a:t>Тапсырма тұжырымдарын тексеру</a:t>
+            </a:r>
+          </a:p>
+        </p:txBody>
+      </p:sp>
+      <p:sp>
+        <p:nvSpPr>
+          <p:cNvPr id="26" name="TextBox 25"/>
           <p:cNvSpPr txBox="1"/>
           <p:nvPr/>
         </p:nvSpPr>
         <p:spPr>
           <a:xfrm>
-            <a:off x="6452463" y="3848862"/>
-            <a:ext cx="204216" cy="252475"/>
+            <a:off x="7378522" y="3795725"/>
+            <a:ext cx="210566" cy="277723"/>
           </a:xfrm>
           <a:prstGeom prst="rect">
             <a:avLst/>
@@ -13665,13 +13657,13 @@
           <a:p>
             <a:pPr algn="l">
               <a:lnSpc>
-                <a:spcPts val="1400"/>
-              </a:lnSpc>
-            </a:pPr>
-            <a:r>
-              <a:rPr sz="1000">
-                <a:solidFill>
-                  <a:srgbClr val="59AAF8"/>
+                <a:spcPts val="1540"/>
+              </a:lnSpc>
+            </a:pPr>
+            <a:r>
+              <a:rPr sz="1100">
+                <a:solidFill>
+                  <a:srgbClr val="48CD8C"/>
                 </a:solidFill>
                 <a:latin typeface="IBM Plex Mono Medium"/>
                 <a:cs typeface="IBM Plex Mono Medium"/>
@@ -13684,14 +13676,14 @@
       </p:sp>
       <p:sp>
         <p:nvSpPr>
-          <p:cNvPr id="31" name="TextBox 30"/>
+          <p:cNvPr id="27" name="TextBox 26"/>
           <p:cNvSpPr txBox="1"/>
           <p:nvPr/>
         </p:nvSpPr>
         <p:spPr>
           <a:xfrm>
-            <a:off x="6656679" y="3848862"/>
-            <a:ext cx="1805863" cy="608076"/>
+            <a:off x="7589088" y="3795725"/>
+            <a:ext cx="3578479" cy="277723"/>
           </a:xfrm>
           <a:prstGeom prst="rect">
             <a:avLst/>
@@ -13706,11 +13698,11 @@
           <a:p>
             <a:pPr algn="l">
               <a:lnSpc>
-                <a:spcPts val="1400"/>
-              </a:lnSpc>
-            </a:pPr>
-            <a:r>
-              <a:rPr sz="1000">
+                <a:spcPts val="1540"/>
+              </a:lnSpc>
+            </a:pPr>
+            <a:r>
+              <a:rPr sz="1100">
                 <a:solidFill>
                   <a:srgbClr val="EEEBE5"/>
                 </a:solidFill>
@@ -13718,89 +13710,21 @@
                 <a:cs typeface="GQ Text"/>
                 <a:ea typeface="GQ Text"/>
               </a:rPr>
-              <a:t>Дұрыс жауап берсең — бір</a:t>
-            </a:r>
-          </a:p>
-          <a:p>
-            <a:pPr algn="l">
-              <a:lnSpc>
-                <a:spcPts val="1400"/>
-              </a:lnSpc>
-            </a:pPr>
-            <a:r>
-              <a:rPr sz="1000">
-                <a:solidFill>
-                  <a:srgbClr val="EEEBE5"/>
-                </a:solidFill>
-                <a:latin typeface="GQ Text"/>
-                <a:cs typeface="GQ Text"/>
-                <a:ea typeface="GQ Text"/>
-              </a:rPr>
-              <a:t>күннен, содан соң үш</a:t>
-            </a:r>
-          </a:p>
-          <a:p>
-            <a:pPr algn="l">
-              <a:lnSpc>
-                <a:spcPts val="1400"/>
-              </a:lnSpc>
-            </a:pPr>
-            <a:r>
-              <a:rPr sz="1000">
-                <a:solidFill>
-                  <a:srgbClr val="EEEBE5"/>
-                </a:solidFill>
-                <a:latin typeface="GQ Text"/>
-                <a:cs typeface="GQ Text"/>
-                <a:ea typeface="GQ Text"/>
-              </a:rPr>
-              <a:t>күннен кейін</a:t>
-            </a:r>
-          </a:p>
-        </p:txBody>
-      </p:sp>
-      <p:sp>
-        <p:nvSpPr>
-          <p:cNvPr id="32" name="Rectangle 31"/>
-          <p:cNvSpPr/>
-          <p:nvPr/>
-        </p:nvSpPr>
-        <p:spPr>
-          <a:xfrm>
-            <a:off x="8919743" y="2323084"/>
-            <a:ext cx="2522143" cy="2343658"/>
-          </a:xfrm>
-          <a:prstGeom prst="rect">
-            <a:avLst/>
-          </a:prstGeom>
-          <a:solidFill>
-            <a:srgbClr val="11161E"/>
-          </a:solidFill>
-          <a:ln w="9525">
-            <a:solidFill>
-              <a:srgbClr val="3B434D"/>
-            </a:solidFill>
-          </a:ln>
-          <a:effectLst/>
-        </p:spPr>
-        <p:txBody>
-          <a:bodyPr rtlCol="0" anchor="ctr" wrap="none"/>
-          <a:lstStyle/>
-          <a:p>
-            <a:pPr algn="ctr"/>
-          </a:p>
-        </p:txBody>
-      </p:sp>
-      <p:sp>
-        <p:nvSpPr>
-          <p:cNvPr id="33" name="Rectangle 32"/>
-          <p:cNvSpPr/>
-          <p:nvPr/>
-        </p:nvSpPr>
-        <p:spPr>
-          <a:xfrm>
-            <a:off x="8919743" y="2323084"/>
-            <a:ext cx="32004" cy="2343658"/>
+              <a:t>Баяндамадағы әр санды салыстыру</a:t>
+            </a:r>
+          </a:p>
+        </p:txBody>
+      </p:sp>
+      <p:sp>
+        <p:nvSpPr>
+          <p:cNvPr id="30" name="Rectangle 29"/>
+          <p:cNvSpPr/>
+          <p:nvPr/>
+        </p:nvSpPr>
+        <p:spPr>
+          <a:xfrm>
+            <a:off x="749808" y="4942586"/>
+            <a:ext cx="10692079" cy="710247"/>
           </a:xfrm>
           <a:prstGeom prst="rect">
             <a:avLst/>
@@ -13823,14 +13747,14 @@
       </p:sp>
       <p:sp>
         <p:nvSpPr>
-          <p:cNvPr id="34" name="TextBox 33"/>
+          <p:cNvPr id="31" name="TextBox 30"/>
           <p:cNvSpPr txBox="1"/>
           <p:nvPr/>
         </p:nvSpPr>
         <p:spPr>
           <a:xfrm>
-            <a:off x="9175775" y="2557780"/>
-            <a:ext cx="2010079" cy="189357"/>
+            <a:off x="1024127" y="5141671"/>
+            <a:ext cx="10143439" cy="345281"/>
           </a:xfrm>
           <a:prstGeom prst="rect">
             <a:avLst/>
@@ -13845,318 +13769,6 @@
           <a:p>
             <a:pPr algn="l">
               <a:lnSpc>
-                <a:spcPts val="1050"/>
-              </a:lnSpc>
-            </a:pPr>
-            <a:r>
-              <a:rPr sz="850" spc="136">
-                <a:solidFill>
-                  <a:srgbClr val="59AAF8"/>
-                </a:solidFill>
-                <a:latin typeface="IBM Plex Mono SemiBold"/>
-                <a:cs typeface="IBM Plex Mono SemiBold"/>
-                <a:ea typeface="IBM Plex Mono SemiBold"/>
-              </a:rPr>
-              <a:t>4</a:t>
-            </a:r>
-          </a:p>
-        </p:txBody>
-      </p:sp>
-      <p:sp>
-        <p:nvSpPr>
-          <p:cNvPr id="35" name="TextBox 34"/>
-          <p:cNvSpPr txBox="1"/>
-          <p:nvPr/>
-        </p:nvSpPr>
-        <p:spPr>
-          <a:xfrm>
-            <a:off x="9175775" y="2796590"/>
-            <a:ext cx="2010079" cy="525551"/>
-          </a:xfrm>
-          <a:prstGeom prst="rect">
-            <a:avLst/>
-          </a:prstGeom>
-          <a:noFill/>
-        </p:spPr>
-        <p:txBody>
-          <a:bodyPr wrap="none" lIns="0" rIns="0" tIns="0" bIns="0" anchor="t">
-            <a:spAutoFit/>
-          </a:bodyPr>
-          <a:lstStyle/>
-          <a:p>
-            <a:pPr algn="l">
-              <a:lnSpc>
-                <a:spcPts val="1710"/>
-              </a:lnSpc>
-            </a:pPr>
-            <a:r>
-              <a:rPr sz="1500" spc="-22">
-                <a:solidFill>
-                  <a:srgbClr val="EEEBE5"/>
-                </a:solidFill>
-                <a:latin typeface="GQ Text Bold"/>
-                <a:cs typeface="GQ Text Bold"/>
-                <a:ea typeface="GQ Text Bold"/>
-              </a:rPr>
-              <a:t>Интернетсіз жұмыс</a:t>
-            </a:r>
-          </a:p>
-          <a:p>
-            <a:pPr algn="l">
-              <a:lnSpc>
-                <a:spcPts val="1710"/>
-              </a:lnSpc>
-            </a:pPr>
-            <a:r>
-              <a:rPr sz="1500" spc="-22">
-                <a:solidFill>
-                  <a:srgbClr val="EEEBE5"/>
-                </a:solidFill>
-                <a:latin typeface="GQ Text Bold"/>
-                <a:cs typeface="GQ Text Bold"/>
-                <a:ea typeface="GQ Text Bold"/>
-              </a:rPr>
-              <a:t>істейді</a:t>
-            </a:r>
-          </a:p>
-        </p:txBody>
-      </p:sp>
-      <p:sp>
-        <p:nvSpPr>
-          <p:cNvPr id="36" name="TextBox 35"/>
-          <p:cNvSpPr txBox="1"/>
-          <p:nvPr/>
-        </p:nvSpPr>
-        <p:spPr>
-          <a:xfrm>
-            <a:off x="9175775" y="3392678"/>
-            <a:ext cx="204216" cy="252475"/>
-          </a:xfrm>
-          <a:prstGeom prst="rect">
-            <a:avLst/>
-          </a:prstGeom>
-          <a:noFill/>
-        </p:spPr>
-        <p:txBody>
-          <a:bodyPr wrap="none" lIns="0" rIns="0" tIns="0" bIns="0" anchor="t">
-            <a:spAutoFit/>
-          </a:bodyPr>
-          <a:lstStyle/>
-          <a:p>
-            <a:pPr algn="l">
-              <a:lnSpc>
-                <a:spcPts val="1400"/>
-              </a:lnSpc>
-            </a:pPr>
-            <a:r>
-              <a:rPr sz="1000">
-                <a:solidFill>
-                  <a:srgbClr val="59AAF8"/>
-                </a:solidFill>
-                <a:latin typeface="IBM Plex Mono Medium"/>
-                <a:cs typeface="IBM Plex Mono Medium"/>
-                <a:ea typeface="IBM Plex Mono Medium"/>
-              </a:rPr>
-              <a:t>—</a:t>
-            </a:r>
-          </a:p>
-        </p:txBody>
-      </p:sp>
-      <p:sp>
-        <p:nvSpPr>
-          <p:cNvPr id="37" name="TextBox 36"/>
-          <p:cNvSpPr txBox="1"/>
-          <p:nvPr/>
-        </p:nvSpPr>
-        <p:spPr>
-          <a:xfrm>
-            <a:off x="9379991" y="3392678"/>
-            <a:ext cx="1805863" cy="252475"/>
-          </a:xfrm>
-          <a:prstGeom prst="rect">
-            <a:avLst/>
-          </a:prstGeom>
-          <a:noFill/>
-        </p:spPr>
-        <p:txBody>
-          <a:bodyPr wrap="none" lIns="0" rIns="0" tIns="0" bIns="0" anchor="t">
-            <a:spAutoFit/>
-          </a:bodyPr>
-          <a:lstStyle/>
-          <a:p>
-            <a:pPr algn="l">
-              <a:lnSpc>
-                <a:spcPts val="1400"/>
-              </a:lnSpc>
-            </a:pPr>
-            <a:r>
-              <a:rPr sz="1000">
-                <a:solidFill>
-                  <a:srgbClr val="EEEBE5"/>
-                </a:solidFill>
-                <a:latin typeface="GQ Text"/>
-                <a:cs typeface="GQ Text"/>
-                <a:ea typeface="GQ Text"/>
-              </a:rPr>
-              <a:t>Бір рет жүктеледі</a:t>
-            </a:r>
-          </a:p>
-        </p:txBody>
-      </p:sp>
-      <p:sp>
-        <p:nvSpPr>
-          <p:cNvPr id="38" name="TextBox 37"/>
-          <p:cNvSpPr txBox="1"/>
-          <p:nvPr/>
-        </p:nvSpPr>
-        <p:spPr>
-          <a:xfrm>
-            <a:off x="9175775" y="3671062"/>
-            <a:ext cx="204216" cy="252475"/>
-          </a:xfrm>
-          <a:prstGeom prst="rect">
-            <a:avLst/>
-          </a:prstGeom>
-          <a:noFill/>
-        </p:spPr>
-        <p:txBody>
-          <a:bodyPr wrap="none" lIns="0" rIns="0" tIns="0" bIns="0" anchor="t">
-            <a:spAutoFit/>
-          </a:bodyPr>
-          <a:lstStyle/>
-          <a:p>
-            <a:pPr algn="l">
-              <a:lnSpc>
-                <a:spcPts val="1400"/>
-              </a:lnSpc>
-            </a:pPr>
-            <a:r>
-              <a:rPr sz="1000">
-                <a:solidFill>
-                  <a:srgbClr val="59AAF8"/>
-                </a:solidFill>
-                <a:latin typeface="IBM Plex Mono Medium"/>
-                <a:cs typeface="IBM Plex Mono Medium"/>
-                <a:ea typeface="IBM Plex Mono Medium"/>
-              </a:rPr>
-              <a:t>—</a:t>
-            </a:r>
-          </a:p>
-        </p:txBody>
-      </p:sp>
-      <p:sp>
-        <p:nvSpPr>
-          <p:cNvPr id="39" name="TextBox 38"/>
-          <p:cNvSpPr txBox="1"/>
-          <p:nvPr/>
-        </p:nvSpPr>
-        <p:spPr>
-          <a:xfrm>
-            <a:off x="9379991" y="3671062"/>
-            <a:ext cx="1805863" cy="430276"/>
-          </a:xfrm>
-          <a:prstGeom prst="rect">
-            <a:avLst/>
-          </a:prstGeom>
-          <a:noFill/>
-        </p:spPr>
-        <p:txBody>
-          <a:bodyPr wrap="none" lIns="0" rIns="0" tIns="0" bIns="0" anchor="t">
-            <a:spAutoFit/>
-          </a:bodyPr>
-          <a:lstStyle/>
-          <a:p>
-            <a:pPr algn="l">
-              <a:lnSpc>
-                <a:spcPts val="1400"/>
-              </a:lnSpc>
-            </a:pPr>
-            <a:r>
-              <a:rPr sz="1000">
-                <a:solidFill>
-                  <a:srgbClr val="EEEBE5"/>
-                </a:solidFill>
-                <a:latin typeface="GQ Text"/>
-                <a:cs typeface="GQ Text"/>
-                <a:ea typeface="GQ Text"/>
-              </a:rPr>
-              <a:t>Әрі қарай кез келген жерде</a:t>
-            </a:r>
-          </a:p>
-          <a:p>
-            <a:pPr algn="l">
-              <a:lnSpc>
-                <a:spcPts val="1400"/>
-              </a:lnSpc>
-            </a:pPr>
-            <a:r>
-              <a:rPr sz="1000">
-                <a:solidFill>
-                  <a:srgbClr val="EEEBE5"/>
-                </a:solidFill>
-                <a:latin typeface="GQ Text"/>
-                <a:cs typeface="GQ Text"/>
-                <a:ea typeface="GQ Text"/>
-              </a:rPr>
-              <a:t>шұғылдан</a:t>
-            </a:r>
-          </a:p>
-        </p:txBody>
-      </p:sp>
-      <p:sp>
-        <p:nvSpPr>
-          <p:cNvPr id="40" name="Rectangle 39"/>
-          <p:cNvSpPr/>
-          <p:nvPr/>
-        </p:nvSpPr>
-        <p:spPr>
-          <a:xfrm>
-            <a:off x="749808" y="5069078"/>
-            <a:ext cx="10692079" cy="710247"/>
-          </a:xfrm>
-          <a:prstGeom prst="rect">
-            <a:avLst/>
-          </a:prstGeom>
-          <a:solidFill>
-            <a:srgbClr val="0064B9"/>
-          </a:solidFill>
-          <a:ln>
-            <a:noFill/>
-          </a:ln>
-          <a:effectLst/>
-        </p:spPr>
-        <p:txBody>
-          <a:bodyPr rtlCol="0" anchor="ctr" wrap="none"/>
-          <a:lstStyle/>
-          <a:p>
-            <a:pPr algn="ctr"/>
-          </a:p>
-        </p:txBody>
-      </p:sp>
-      <p:sp>
-        <p:nvSpPr>
-          <p:cNvPr id="41" name="TextBox 40"/>
-          <p:cNvSpPr txBox="1"/>
-          <p:nvPr/>
-        </p:nvSpPr>
-        <p:spPr>
-          <a:xfrm>
-            <a:off x="1024127" y="5268163"/>
-            <a:ext cx="10143439" cy="345281"/>
-          </a:xfrm>
-          <a:prstGeom prst="rect">
-            <a:avLst/>
-          </a:prstGeom>
-          <a:noFill/>
-        </p:spPr>
-        <p:txBody>
-          <a:bodyPr wrap="none" lIns="0" rIns="0" tIns="0" bIns="0" anchor="t">
-            <a:spAutoFit/>
-          </a:bodyPr>
-          <a:lstStyle/>
-          <a:p>
-            <a:pPr algn="l">
-              <a:lnSpc>
                 <a:spcPts val="1812"/>
               </a:lnSpc>
             </a:pPr>
@@ -14169,7 +13781,7 @@
                 <a:cs typeface="GQ Text SemiBold"/>
                 <a:ea typeface="GQ Text SemiBold"/>
               </a:rPr>
-              <a:t>Мұның бәрі әр жаңартуда автотесттермен тексеріледі: байқаусыз бұзу мүмкін емес.</a:t>
+              <a:t>Код ашық: кез келген адам оның қалай жасалғанын көріп, тексерулерді қайта іске қоса алады.</a:t>
             </a:r>
           </a:p>
         </p:txBody>
@@ -14288,7 +13900,7 @@
                 <a:cs typeface="IBM Plex Mono SemiBold"/>
                 <a:ea typeface="IBM Plex Mono SemiBold"/>
               </a:rPr>
-              <a:t>ІШІНДЕ НЕ БАР</a:t>
+              <a:t>ЕРЕКШЕЛІГІ</a:t>
             </a:r>
           </a:p>
         </p:txBody>
@@ -14342,8 +13954,8 @@
         </p:nvSpPr>
         <p:spPr>
           <a:xfrm>
-            <a:off x="749808" y="790854"/>
-            <a:ext cx="10692079" cy="771855"/>
+            <a:off x="749808" y="786505"/>
+            <a:ext cx="10692079" cy="810447"/>
           </a:xfrm>
           <a:prstGeom prst="rect">
             <a:avLst/>
@@ -14358,11 +13970,11 @@
           <a:p>
             <a:pPr algn="l">
               <a:lnSpc>
-                <a:spcPts val="4280"/>
-              </a:lnSpc>
-            </a:pPr>
-            <a:r>
-              <a:rPr sz="4000" spc="-88">
+                <a:spcPts val="4494"/>
+              </a:lnSpc>
+            </a:pPr>
+            <a:r>
+              <a:rPr sz="4200" spc="-92">
                 <a:solidFill>
                   <a:srgbClr val="EEEBE5"/>
                 </a:solidFill>
@@ -14370,7 +13982,7 @@
                 <a:cs typeface="GQ Text Bold"/>
                 <a:ea typeface="GQ Text Bold"/>
               </a:rPr>
-              <a:t>Бес бөлім және кесте бойынша қайталау</a:t>
+              <a:t>Кәдімгі жаттықтырғышта жоқ төрт нәрсе</a:t>
             </a:r>
           </a:p>
         </p:txBody>
@@ -14383,8 +13995,8 @@
         </p:nvSpPr>
         <p:spPr>
           <a:xfrm>
-            <a:off x="749808" y="1530177"/>
-            <a:ext cx="9195188" cy="567349"/>
+            <a:off x="749808" y="1575643"/>
+            <a:ext cx="8767504" cy="332907"/>
           </a:xfrm>
           <a:prstGeom prst="rect">
             <a:avLst/>
@@ -14411,69 +14023,301 @@
                 <a:cs typeface="GQ Text"/>
                 <a:ea typeface="GQ Text"/>
               </a:rPr>
-              <a:t>Әр тапсырма карточкаға айналады. Дұрыс жауап берсең — қосымша оны бір күннен кейін, содан соң үш күннен</a:t>
-            </a:r>
-          </a:p>
-          <a:p>
-            <a:pPr algn="l">
-              <a:lnSpc>
-                <a:spcPts val="1846"/>
-              </a:lnSpc>
-            </a:pPr>
-            <a:r>
-              <a:rPr sz="1300">
-                <a:solidFill>
-                  <a:srgbClr val="A6ADB6"/>
+              <a:t>Әрқайсысы әдемілік үшін емес, онсыз оқушы шұғылдануды тоқтатқандықтан пайда болды.</a:t>
+            </a:r>
+          </a:p>
+        </p:txBody>
+      </p:sp>
+      <p:sp>
+        <p:nvSpPr>
+          <p:cNvPr id="8" name="Rectangle 7"/>
+          <p:cNvSpPr/>
+          <p:nvPr/>
+        </p:nvSpPr>
+        <p:spPr>
+          <a:xfrm>
+            <a:off x="749808" y="2323084"/>
+            <a:ext cx="2522143" cy="2343658"/>
+          </a:xfrm>
+          <a:prstGeom prst="rect">
+            <a:avLst/>
+          </a:prstGeom>
+          <a:solidFill>
+            <a:srgbClr val="11161E"/>
+          </a:solidFill>
+          <a:ln w="9525">
+            <a:solidFill>
+              <a:srgbClr val="3B434D"/>
+            </a:solidFill>
+          </a:ln>
+          <a:effectLst/>
+        </p:spPr>
+        <p:txBody>
+          <a:bodyPr rtlCol="0" anchor="ctr" wrap="none"/>
+          <a:lstStyle/>
+          <a:p>
+            <a:pPr algn="ctr"/>
+          </a:p>
+        </p:txBody>
+      </p:sp>
+      <p:sp>
+        <p:nvSpPr>
+          <p:cNvPr id="9" name="Rectangle 8"/>
+          <p:cNvSpPr/>
+          <p:nvPr/>
+        </p:nvSpPr>
+        <p:spPr>
+          <a:xfrm>
+            <a:off x="749808" y="2323084"/>
+            <a:ext cx="32004" cy="2343658"/>
+          </a:xfrm>
+          <a:prstGeom prst="rect">
+            <a:avLst/>
+          </a:prstGeom>
+          <a:solidFill>
+            <a:srgbClr val="0064B9"/>
+          </a:solidFill>
+          <a:ln>
+            <a:noFill/>
+          </a:ln>
+          <a:effectLst/>
+        </p:spPr>
+        <p:txBody>
+          <a:bodyPr rtlCol="0" anchor="ctr" wrap="none"/>
+          <a:lstStyle/>
+          <a:p>
+            <a:pPr algn="ctr"/>
+          </a:p>
+        </p:txBody>
+      </p:sp>
+      <p:sp>
+        <p:nvSpPr>
+          <p:cNvPr id="10" name="TextBox 9"/>
+          <p:cNvSpPr txBox="1"/>
+          <p:nvPr/>
+        </p:nvSpPr>
+        <p:spPr>
+          <a:xfrm>
+            <a:off x="1005840" y="2557780"/>
+            <a:ext cx="2010079" cy="189357"/>
+          </a:xfrm>
+          <a:prstGeom prst="rect">
+            <a:avLst/>
+          </a:prstGeom>
+          <a:noFill/>
+        </p:spPr>
+        <p:txBody>
+          <a:bodyPr wrap="none" lIns="0" rIns="0" tIns="0" bIns="0" anchor="t">
+            <a:spAutoFit/>
+          </a:bodyPr>
+          <a:lstStyle/>
+          <a:p>
+            <a:pPr algn="l">
+              <a:lnSpc>
+                <a:spcPts val="1050"/>
+              </a:lnSpc>
+            </a:pPr>
+            <a:r>
+              <a:rPr sz="850" spc="136">
+                <a:solidFill>
+                  <a:srgbClr val="59AAF8"/>
+                </a:solidFill>
+                <a:latin typeface="IBM Plex Mono SemiBold"/>
+                <a:cs typeface="IBM Plex Mono SemiBold"/>
+                <a:ea typeface="IBM Plex Mono SemiBold"/>
+              </a:rPr>
+              <a:t>1</a:t>
+            </a:r>
+          </a:p>
+        </p:txBody>
+      </p:sp>
+      <p:sp>
+        <p:nvSpPr>
+          <p:cNvPr id="11" name="TextBox 10"/>
+          <p:cNvSpPr txBox="1"/>
+          <p:nvPr/>
+        </p:nvSpPr>
+        <p:spPr>
+          <a:xfrm>
+            <a:off x="1005840" y="2796590"/>
+            <a:ext cx="2010079" cy="525551"/>
+          </a:xfrm>
+          <a:prstGeom prst="rect">
+            <a:avLst/>
+          </a:prstGeom>
+          <a:noFill/>
+        </p:spPr>
+        <p:txBody>
+          <a:bodyPr wrap="none" lIns="0" rIns="0" tIns="0" bIns="0" anchor="t">
+            <a:spAutoFit/>
+          </a:bodyPr>
+          <a:lstStyle/>
+          <a:p>
+            <a:pPr algn="l">
+              <a:lnSpc>
+                <a:spcPts val="1710"/>
+              </a:lnSpc>
+            </a:pPr>
+            <a:r>
+              <a:rPr sz="1500" spc="-22">
+                <a:solidFill>
+                  <a:srgbClr val="EEEBE5"/>
+                </a:solidFill>
+                <a:latin typeface="GQ Text Bold"/>
+                <a:cs typeface="GQ Text Bold"/>
+                <a:ea typeface="GQ Text Bold"/>
+              </a:rPr>
+              <a:t>Орыс әріптерін</a:t>
+            </a:r>
+          </a:p>
+          <a:p>
+            <a:pPr algn="l">
+              <a:lnSpc>
+                <a:spcPts val="1710"/>
+              </a:lnSpc>
+            </a:pPr>
+            <a:r>
+              <a:rPr sz="1500" spc="-22">
+                <a:solidFill>
+                  <a:srgbClr val="EEEBE5"/>
+                </a:solidFill>
+                <a:latin typeface="GQ Text Bold"/>
+                <a:cs typeface="GQ Text Bold"/>
+                <a:ea typeface="GQ Text Bold"/>
+              </a:rPr>
+              <a:t>қабылдайды</a:t>
+            </a:r>
+          </a:p>
+        </p:txBody>
+      </p:sp>
+      <p:sp>
+        <p:nvSpPr>
+          <p:cNvPr id="12" name="TextBox 11"/>
+          <p:cNvSpPr txBox="1"/>
+          <p:nvPr/>
+        </p:nvSpPr>
+        <p:spPr>
+          <a:xfrm>
+            <a:off x="1005840" y="3392678"/>
+            <a:ext cx="204216" cy="252475"/>
+          </a:xfrm>
+          <a:prstGeom prst="rect">
+            <a:avLst/>
+          </a:prstGeom>
+          <a:noFill/>
+        </p:spPr>
+        <p:txBody>
+          <a:bodyPr wrap="none" lIns="0" rIns="0" tIns="0" bIns="0" anchor="t">
+            <a:spAutoFit/>
+          </a:bodyPr>
+          <a:lstStyle/>
+          <a:p>
+            <a:pPr algn="l">
+              <a:lnSpc>
+                <a:spcPts val="1400"/>
+              </a:lnSpc>
+            </a:pPr>
+            <a:r>
+              <a:rPr sz="1000">
+                <a:solidFill>
+                  <a:srgbClr val="59AAF8"/>
+                </a:solidFill>
+                <a:latin typeface="IBM Plex Mono Medium"/>
+                <a:cs typeface="IBM Plex Mono Medium"/>
+                <a:ea typeface="IBM Plex Mono Medium"/>
+              </a:rPr>
+              <a:t>—</a:t>
+            </a:r>
+          </a:p>
+        </p:txBody>
+      </p:sp>
+      <p:sp>
+        <p:nvSpPr>
+          <p:cNvPr id="13" name="TextBox 12"/>
+          <p:cNvSpPr txBox="1"/>
+          <p:nvPr/>
+        </p:nvSpPr>
+        <p:spPr>
+          <a:xfrm>
+            <a:off x="1210056" y="3392678"/>
+            <a:ext cx="1805863" cy="608076"/>
+          </a:xfrm>
+          <a:prstGeom prst="rect">
+            <a:avLst/>
+          </a:prstGeom>
+          <a:noFill/>
+        </p:spPr>
+        <p:txBody>
+          <a:bodyPr wrap="none" lIns="0" rIns="0" tIns="0" bIns="0" anchor="t">
+            <a:spAutoFit/>
+          </a:bodyPr>
+          <a:lstStyle/>
+          <a:p>
+            <a:pPr algn="l">
+              <a:lnSpc>
+                <a:spcPts val="1400"/>
+              </a:lnSpc>
+            </a:pPr>
+            <a:r>
+              <a:rPr sz="1000">
+                <a:solidFill>
+                  <a:srgbClr val="EEEBE5"/>
                 </a:solidFill>
                 <a:latin typeface="GQ Text"/>
                 <a:cs typeface="GQ Text"/>
                 <a:ea typeface="GQ Text"/>
               </a:rPr>
-              <a:t>кейін қайтарады. Қателессең — бүгін-ақ қайтарады.</a:t>
-            </a:r>
-          </a:p>
-        </p:txBody>
-      </p:sp>
-      <p:sp>
-        <p:nvSpPr>
-          <p:cNvPr id="8" name="Rectangle 7"/>
-          <p:cNvSpPr/>
-          <p:nvPr/>
-        </p:nvSpPr>
-        <p:spPr>
-          <a:xfrm>
-            <a:off x="749808" y="2274316"/>
-            <a:ext cx="10692079" cy="7315"/>
-          </a:xfrm>
-          <a:prstGeom prst="rect">
-            <a:avLst/>
-          </a:prstGeom>
-          <a:solidFill>
-            <a:srgbClr val="3B434D"/>
-          </a:solidFill>
-          <a:ln>
-            <a:noFill/>
-          </a:ln>
-          <a:effectLst/>
-        </p:spPr>
-        <p:txBody>
-          <a:bodyPr rtlCol="0" anchor="ctr" wrap="none"/>
-          <a:lstStyle/>
-          <a:p>
-            <a:pPr algn="ctr"/>
-          </a:p>
-        </p:txBody>
-      </p:sp>
-      <p:sp>
-        <p:nvSpPr>
-          <p:cNvPr id="9" name="TextBox 8"/>
+              <a:t>Қазақ тілінде орыс</a:t>
+            </a:r>
+          </a:p>
+          <a:p>
+            <a:pPr algn="l">
+              <a:lnSpc>
+                <a:spcPts val="1400"/>
+              </a:lnSpc>
+            </a:pPr>
+            <a:r>
+              <a:rPr sz="1000">
+                <a:solidFill>
+                  <a:srgbClr val="EEEBE5"/>
+                </a:solidFill>
+                <a:latin typeface="GQ Text"/>
+                <a:cs typeface="GQ Text"/>
+                <a:ea typeface="GQ Text"/>
+              </a:rPr>
+              <a:t>пернетақтасында жоқ тоғыз</a:t>
+            </a:r>
+          </a:p>
+          <a:p>
+            <a:pPr algn="l">
+              <a:lnSpc>
+                <a:spcPts val="1400"/>
+              </a:lnSpc>
+            </a:pPr>
+            <a:r>
+              <a:rPr sz="1000">
+                <a:solidFill>
+                  <a:srgbClr val="EEEBE5"/>
+                </a:solidFill>
+                <a:latin typeface="GQ Text"/>
+                <a:cs typeface="GQ Text"/>
+                <a:ea typeface="GQ Text"/>
+              </a:rPr>
+              <a:t>әріп бар</a:t>
+            </a:r>
+          </a:p>
+        </p:txBody>
+      </p:sp>
+      <p:sp>
+        <p:nvSpPr>
+          <p:cNvPr id="14" name="TextBox 13"/>
           <p:cNvSpPr txBox="1"/>
           <p:nvPr/>
         </p:nvSpPr>
         <p:spPr>
           <a:xfrm>
-            <a:off x="749808" y="2548798"/>
-            <a:ext cx="1962851" cy="323169"/>
+            <a:off x="1005840" y="4026662"/>
+            <a:ext cx="204216" cy="252475"/>
           </a:xfrm>
           <a:prstGeom prst="rect">
             <a:avLst/>
@@ -14488,11 +14332,214 @@
           <a:p>
             <a:pPr algn="l">
               <a:lnSpc>
-                <a:spcPts val="1792"/>
-              </a:lnSpc>
-            </a:pPr>
-            <a:r>
-              <a:rPr sz="1600" spc="-24">
+                <a:spcPts val="1400"/>
+              </a:lnSpc>
+            </a:pPr>
+            <a:r>
+              <a:rPr sz="1000">
+                <a:solidFill>
+                  <a:srgbClr val="59AAF8"/>
+                </a:solidFill>
+                <a:latin typeface="IBM Plex Mono Medium"/>
+                <a:cs typeface="IBM Plex Mono Medium"/>
+                <a:ea typeface="IBM Plex Mono Medium"/>
+              </a:rPr>
+              <a:t>—</a:t>
+            </a:r>
+          </a:p>
+        </p:txBody>
+      </p:sp>
+      <p:sp>
+        <p:nvSpPr>
+          <p:cNvPr id="15" name="TextBox 14"/>
+          <p:cNvSpPr txBox="1"/>
+          <p:nvPr/>
+        </p:nvSpPr>
+        <p:spPr>
+          <a:xfrm>
+            <a:off x="1210056" y="4026662"/>
+            <a:ext cx="1805863" cy="430276"/>
+          </a:xfrm>
+          <a:prstGeom prst="rect">
+            <a:avLst/>
+          </a:prstGeom>
+          <a:noFill/>
+        </p:spPr>
+        <p:txBody>
+          <a:bodyPr wrap="none" lIns="0" rIns="0" tIns="0" bIns="0" anchor="t">
+            <a:spAutoFit/>
+          </a:bodyPr>
+          <a:lstStyle/>
+          <a:p>
+            <a:pPr algn="l">
+              <a:lnSpc>
+                <a:spcPts val="1400"/>
+              </a:lnSpc>
+            </a:pPr>
+            <a:r>
+              <a:rPr sz="1000">
+                <a:solidFill>
+                  <a:srgbClr val="EEEBE5"/>
+                </a:solidFill>
+                <a:latin typeface="GQ Text"/>
+                <a:cs typeface="GQ Text"/>
+                <a:ea typeface="GQ Text"/>
+              </a:rPr>
+              <a:t>Жауап есептеледі, дұрыс</a:t>
+            </a:r>
+          </a:p>
+          <a:p>
+            <a:pPr algn="l">
+              <a:lnSpc>
+                <a:spcPts val="1400"/>
+              </a:lnSpc>
+            </a:pPr>
+            <a:r>
+              <a:rPr sz="1000">
+                <a:solidFill>
+                  <a:srgbClr val="EEEBE5"/>
+                </a:solidFill>
+                <a:latin typeface="GQ Text"/>
+                <a:cs typeface="GQ Text"/>
+                <a:ea typeface="GQ Text"/>
+              </a:rPr>
+              <a:t>жазылуы көрсетіледі</a:t>
+            </a:r>
+          </a:p>
+        </p:txBody>
+      </p:sp>
+      <p:sp>
+        <p:nvSpPr>
+          <p:cNvPr id="16" name="Rectangle 15"/>
+          <p:cNvSpPr/>
+          <p:nvPr/>
+        </p:nvSpPr>
+        <p:spPr>
+          <a:xfrm>
+            <a:off x="3473119" y="2323084"/>
+            <a:ext cx="2522143" cy="2343658"/>
+          </a:xfrm>
+          <a:prstGeom prst="rect">
+            <a:avLst/>
+          </a:prstGeom>
+          <a:solidFill>
+            <a:srgbClr val="11161E"/>
+          </a:solidFill>
+          <a:ln w="9525">
+            <a:solidFill>
+              <a:srgbClr val="3B434D"/>
+            </a:solidFill>
+          </a:ln>
+          <a:effectLst/>
+        </p:spPr>
+        <p:txBody>
+          <a:bodyPr rtlCol="0" anchor="ctr" wrap="none"/>
+          <a:lstStyle/>
+          <a:p>
+            <a:pPr algn="ctr"/>
+          </a:p>
+        </p:txBody>
+      </p:sp>
+      <p:sp>
+        <p:nvSpPr>
+          <p:cNvPr id="17" name="Rectangle 16"/>
+          <p:cNvSpPr/>
+          <p:nvPr/>
+        </p:nvSpPr>
+        <p:spPr>
+          <a:xfrm>
+            <a:off x="3473119" y="2323084"/>
+            <a:ext cx="32004" cy="2343658"/>
+          </a:xfrm>
+          <a:prstGeom prst="rect">
+            <a:avLst/>
+          </a:prstGeom>
+          <a:solidFill>
+            <a:srgbClr val="0064B9"/>
+          </a:solidFill>
+          <a:ln>
+            <a:noFill/>
+          </a:ln>
+          <a:effectLst/>
+        </p:spPr>
+        <p:txBody>
+          <a:bodyPr rtlCol="0" anchor="ctr" wrap="none"/>
+          <a:lstStyle/>
+          <a:p>
+            <a:pPr algn="ctr"/>
+          </a:p>
+        </p:txBody>
+      </p:sp>
+      <p:sp>
+        <p:nvSpPr>
+          <p:cNvPr id="18" name="TextBox 17"/>
+          <p:cNvSpPr txBox="1"/>
+          <p:nvPr/>
+        </p:nvSpPr>
+        <p:spPr>
+          <a:xfrm>
+            <a:off x="3729151" y="2557780"/>
+            <a:ext cx="2010079" cy="189357"/>
+          </a:xfrm>
+          <a:prstGeom prst="rect">
+            <a:avLst/>
+          </a:prstGeom>
+          <a:noFill/>
+        </p:spPr>
+        <p:txBody>
+          <a:bodyPr wrap="none" lIns="0" rIns="0" tIns="0" bIns="0" anchor="t">
+            <a:spAutoFit/>
+          </a:bodyPr>
+          <a:lstStyle/>
+          <a:p>
+            <a:pPr algn="l">
+              <a:lnSpc>
+                <a:spcPts val="1050"/>
+              </a:lnSpc>
+            </a:pPr>
+            <a:r>
+              <a:rPr sz="850" spc="136">
+                <a:solidFill>
+                  <a:srgbClr val="59AAF8"/>
+                </a:solidFill>
+                <a:latin typeface="IBM Plex Mono SemiBold"/>
+                <a:cs typeface="IBM Plex Mono SemiBold"/>
+                <a:ea typeface="IBM Plex Mono SemiBold"/>
+              </a:rPr>
+              <a:t>2</a:t>
+            </a:r>
+          </a:p>
+        </p:txBody>
+      </p:sp>
+      <p:sp>
+        <p:nvSpPr>
+          <p:cNvPr id="19" name="TextBox 18"/>
+          <p:cNvSpPr txBox="1"/>
+          <p:nvPr/>
+        </p:nvSpPr>
+        <p:spPr>
+          <a:xfrm>
+            <a:off x="3729151" y="2796590"/>
+            <a:ext cx="2010079" cy="525551"/>
+          </a:xfrm>
+          <a:prstGeom prst="rect">
+            <a:avLst/>
+          </a:prstGeom>
+          <a:noFill/>
+        </p:spPr>
+        <p:txBody>
+          <a:bodyPr wrap="none" lIns="0" rIns="0" tIns="0" bIns="0" anchor="t">
+            <a:spAutoFit/>
+          </a:bodyPr>
+          <a:lstStyle/>
+          <a:p>
+            <a:pPr algn="l">
+              <a:lnSpc>
+                <a:spcPts val="1710"/>
+              </a:lnSpc>
+            </a:pPr>
+            <a:r>
+              <a:rPr sz="1500" spc="-22">
                 <a:solidFill>
                   <a:srgbClr val="EEEBE5"/>
                 </a:solidFill>
@@ -14500,21 +14547,39 @@
                 <a:cs typeface="GQ Text Bold"/>
                 <a:ea typeface="GQ Text Bold"/>
               </a:rPr>
-              <a:t>Оқу</a:t>
-            </a:r>
-          </a:p>
-        </p:txBody>
-      </p:sp>
-      <p:sp>
-        <p:nvSpPr>
-          <p:cNvPr id="10" name="TextBox 9"/>
+              <a:t>Жалғауларды</a:t>
+            </a:r>
+          </a:p>
+          <a:p>
+            <a:pPr algn="l">
+              <a:lnSpc>
+                <a:spcPts val="1710"/>
+              </a:lnSpc>
+            </a:pPr>
+            <a:r>
+              <a:rPr sz="1500" spc="-22">
+                <a:solidFill>
+                  <a:srgbClr val="EEEBE5"/>
+                </a:solidFill>
+                <a:latin typeface="GQ Text Bold"/>
+                <a:cs typeface="GQ Text Bold"/>
+                <a:ea typeface="GQ Text Bold"/>
+              </a:rPr>
+              <a:t>ережемен есептейді</a:t>
+            </a:r>
+          </a:p>
+        </p:txBody>
+      </p:sp>
+      <p:sp>
+        <p:nvSpPr>
+          <p:cNvPr id="20" name="TextBox 19"/>
           <p:cNvSpPr txBox="1"/>
           <p:nvPr/>
         </p:nvSpPr>
         <p:spPr>
           <a:xfrm>
-            <a:off x="749808" y="2910332"/>
-            <a:ext cx="1962851" cy="461010"/>
+            <a:off x="3729151" y="3392678"/>
+            <a:ext cx="204216" cy="252475"/>
           </a:xfrm>
           <a:prstGeom prst="rect">
             <a:avLst/>
@@ -14529,51 +14594,92 @@
           <a:p>
             <a:pPr algn="l">
               <a:lnSpc>
-                <a:spcPts val="1500"/>
-              </a:lnSpc>
-            </a:pPr>
-            <a:r>
-              <a:rPr sz="1050">
-                <a:solidFill>
-                  <a:srgbClr val="A6ADB6"/>
+                <a:spcPts val="1400"/>
+              </a:lnSpc>
+            </a:pPr>
+            <a:r>
+              <a:rPr sz="1000">
+                <a:solidFill>
+                  <a:srgbClr val="59AAF8"/>
+                </a:solidFill>
+                <a:latin typeface="IBM Plex Mono Medium"/>
+                <a:cs typeface="IBM Plex Mono Medium"/>
+                <a:ea typeface="IBM Plex Mono Medium"/>
+              </a:rPr>
+              <a:t>—</a:t>
+            </a:r>
+          </a:p>
+        </p:txBody>
+      </p:sp>
+      <p:sp>
+        <p:nvSpPr>
+          <p:cNvPr id="21" name="TextBox 20"/>
+          <p:cNvSpPr txBox="1"/>
+          <p:nvPr/>
+        </p:nvSpPr>
+        <p:spPr>
+          <a:xfrm>
+            <a:off x="3933367" y="3392678"/>
+            <a:ext cx="1805863" cy="430276"/>
+          </a:xfrm>
+          <a:prstGeom prst="rect">
+            <a:avLst/>
+          </a:prstGeom>
+          <a:noFill/>
+        </p:spPr>
+        <p:txBody>
+          <a:bodyPr wrap="none" lIns="0" rIns="0" tIns="0" bIns="0" anchor="t">
+            <a:spAutoFit/>
+          </a:bodyPr>
+          <a:lstStyle/>
+          <a:p>
+            <a:pPr algn="l">
+              <a:lnSpc>
+                <a:spcPts val="1400"/>
+              </a:lnSpc>
+            </a:pPr>
+            <a:r>
+              <a:rPr sz="1000">
+                <a:solidFill>
+                  <a:srgbClr val="EEEBE5"/>
                 </a:solidFill>
                 <a:latin typeface="GQ Text"/>
                 <a:cs typeface="GQ Text"/>
                 <a:ea typeface="GQ Text"/>
               </a:rPr>
-              <a:t>Сабақ жолы: өтілгені мен</a:t>
-            </a:r>
-          </a:p>
-          <a:p>
-            <a:pPr algn="l">
-              <a:lnSpc>
-                <a:spcPts val="1500"/>
-              </a:lnSpc>
-            </a:pPr>
-            <a:r>
-              <a:rPr sz="1050">
-                <a:solidFill>
-                  <a:srgbClr val="A6ADB6"/>
+              <a:t>Кез келген өз сөзіңді қой —</a:t>
+            </a:r>
+          </a:p>
+          <a:p>
+            <a:pPr algn="l">
+              <a:lnSpc>
+                <a:spcPts val="1400"/>
+              </a:lnSpc>
+            </a:pPr>
+            <a:r>
+              <a:rPr sz="1000">
+                <a:solidFill>
+                  <a:srgbClr val="EEEBE5"/>
                 </a:solidFill>
                 <a:latin typeface="GQ Text"/>
                 <a:cs typeface="GQ Text"/>
                 <a:ea typeface="GQ Text"/>
               </a:rPr>
-              <a:t>келесі қадам көрініп тұрады</a:t>
-            </a:r>
-          </a:p>
-        </p:txBody>
-      </p:sp>
-      <p:sp>
-        <p:nvSpPr>
-          <p:cNvPr id="11" name="TextBox 10"/>
+              <a:t>барлық формасын көресің</a:t>
+            </a:r>
+          </a:p>
+        </p:txBody>
+      </p:sp>
+      <p:sp>
+        <p:nvSpPr>
+          <p:cNvPr id="22" name="TextBox 21"/>
           <p:cNvSpPr txBox="1"/>
           <p:nvPr/>
         </p:nvSpPr>
         <p:spPr>
           <a:xfrm>
-            <a:off x="2932115" y="2548798"/>
-            <a:ext cx="1962851" cy="323169"/>
+            <a:off x="3729151" y="3848862"/>
+            <a:ext cx="204216" cy="252475"/>
           </a:xfrm>
           <a:prstGeom prst="rect">
             <a:avLst/>
@@ -14588,11 +14694,214 @@
           <a:p>
             <a:pPr algn="l">
               <a:lnSpc>
-                <a:spcPts val="1792"/>
-              </a:lnSpc>
-            </a:pPr>
-            <a:r>
-              <a:rPr sz="1600" spc="-24">
+                <a:spcPts val="1400"/>
+              </a:lnSpc>
+            </a:pPr>
+            <a:r>
+              <a:rPr sz="1000">
+                <a:solidFill>
+                  <a:srgbClr val="59AAF8"/>
+                </a:solidFill>
+                <a:latin typeface="IBM Plex Mono Medium"/>
+                <a:cs typeface="IBM Plex Mono Medium"/>
+                <a:ea typeface="IBM Plex Mono Medium"/>
+              </a:rPr>
+              <a:t>—</a:t>
+            </a:r>
+          </a:p>
+        </p:txBody>
+      </p:sp>
+      <p:sp>
+        <p:nvSpPr>
+          <p:cNvPr id="23" name="TextBox 22"/>
+          <p:cNvSpPr txBox="1"/>
+          <p:nvPr/>
+        </p:nvSpPr>
+        <p:spPr>
+          <a:xfrm>
+            <a:off x="3933367" y="3848862"/>
+            <a:ext cx="1805863" cy="430276"/>
+          </a:xfrm>
+          <a:prstGeom prst="rect">
+            <a:avLst/>
+          </a:prstGeom>
+          <a:noFill/>
+        </p:spPr>
+        <p:txBody>
+          <a:bodyPr wrap="none" lIns="0" rIns="0" tIns="0" bIns="0" anchor="t">
+            <a:spAutoFit/>
+          </a:bodyPr>
+          <a:lstStyle/>
+          <a:p>
+            <a:pPr algn="l">
+              <a:lnSpc>
+                <a:spcPts val="1400"/>
+              </a:lnSpc>
+            </a:pPr>
+            <a:r>
+              <a:rPr sz="1000">
+                <a:solidFill>
+                  <a:srgbClr val="EEEBE5"/>
+                </a:solidFill>
+                <a:latin typeface="GQ Text"/>
+                <a:cs typeface="GQ Text"/>
+                <a:ea typeface="GQ Text"/>
+              </a:rPr>
+              <a:t>Кесте емес, қазақ тілінің</a:t>
+            </a:r>
+          </a:p>
+          <a:p>
+            <a:pPr algn="l">
+              <a:lnSpc>
+                <a:spcPts val="1400"/>
+              </a:lnSpc>
+            </a:pPr>
+            <a:r>
+              <a:rPr sz="1000">
+                <a:solidFill>
+                  <a:srgbClr val="EEEBE5"/>
+                </a:solidFill>
+                <a:latin typeface="GQ Text"/>
+                <a:cs typeface="GQ Text"/>
+                <a:ea typeface="GQ Text"/>
+              </a:rPr>
+              <a:t>ережелері</a:t>
+            </a:r>
+          </a:p>
+        </p:txBody>
+      </p:sp>
+      <p:sp>
+        <p:nvSpPr>
+          <p:cNvPr id="24" name="Rectangle 23"/>
+          <p:cNvSpPr/>
+          <p:nvPr/>
+        </p:nvSpPr>
+        <p:spPr>
+          <a:xfrm>
+            <a:off x="6196431" y="2323084"/>
+            <a:ext cx="2522143" cy="2343658"/>
+          </a:xfrm>
+          <a:prstGeom prst="rect">
+            <a:avLst/>
+          </a:prstGeom>
+          <a:solidFill>
+            <a:srgbClr val="11161E"/>
+          </a:solidFill>
+          <a:ln w="9525">
+            <a:solidFill>
+              <a:srgbClr val="3B434D"/>
+            </a:solidFill>
+          </a:ln>
+          <a:effectLst/>
+        </p:spPr>
+        <p:txBody>
+          <a:bodyPr rtlCol="0" anchor="ctr" wrap="none"/>
+          <a:lstStyle/>
+          <a:p>
+            <a:pPr algn="ctr"/>
+          </a:p>
+        </p:txBody>
+      </p:sp>
+      <p:sp>
+        <p:nvSpPr>
+          <p:cNvPr id="25" name="Rectangle 24"/>
+          <p:cNvSpPr/>
+          <p:nvPr/>
+        </p:nvSpPr>
+        <p:spPr>
+          <a:xfrm>
+            <a:off x="6196431" y="2323084"/>
+            <a:ext cx="32004" cy="2343658"/>
+          </a:xfrm>
+          <a:prstGeom prst="rect">
+            <a:avLst/>
+          </a:prstGeom>
+          <a:solidFill>
+            <a:srgbClr val="0064B9"/>
+          </a:solidFill>
+          <a:ln>
+            <a:noFill/>
+          </a:ln>
+          <a:effectLst/>
+        </p:spPr>
+        <p:txBody>
+          <a:bodyPr rtlCol="0" anchor="ctr" wrap="none"/>
+          <a:lstStyle/>
+          <a:p>
+            <a:pPr algn="ctr"/>
+          </a:p>
+        </p:txBody>
+      </p:sp>
+      <p:sp>
+        <p:nvSpPr>
+          <p:cNvPr id="26" name="TextBox 25"/>
+          <p:cNvSpPr txBox="1"/>
+          <p:nvPr/>
+        </p:nvSpPr>
+        <p:spPr>
+          <a:xfrm>
+            <a:off x="6452463" y="2557780"/>
+            <a:ext cx="2010079" cy="189357"/>
+          </a:xfrm>
+          <a:prstGeom prst="rect">
+            <a:avLst/>
+          </a:prstGeom>
+          <a:noFill/>
+        </p:spPr>
+        <p:txBody>
+          <a:bodyPr wrap="none" lIns="0" rIns="0" tIns="0" bIns="0" anchor="t">
+            <a:spAutoFit/>
+          </a:bodyPr>
+          <a:lstStyle/>
+          <a:p>
+            <a:pPr algn="l">
+              <a:lnSpc>
+                <a:spcPts val="1050"/>
+              </a:lnSpc>
+            </a:pPr>
+            <a:r>
+              <a:rPr sz="850" spc="136">
+                <a:solidFill>
+                  <a:srgbClr val="59AAF8"/>
+                </a:solidFill>
+                <a:latin typeface="IBM Plex Mono SemiBold"/>
+                <a:cs typeface="IBM Plex Mono SemiBold"/>
+                <a:ea typeface="IBM Plex Mono SemiBold"/>
+              </a:rPr>
+              <a:t>3</a:t>
+            </a:r>
+          </a:p>
+        </p:txBody>
+      </p:sp>
+      <p:sp>
+        <p:nvSpPr>
+          <p:cNvPr id="27" name="TextBox 26"/>
+          <p:cNvSpPr txBox="1"/>
+          <p:nvPr/>
+        </p:nvSpPr>
+        <p:spPr>
+          <a:xfrm>
+            <a:off x="6452463" y="2796590"/>
+            <a:ext cx="2010079" cy="525551"/>
+          </a:xfrm>
+          <a:prstGeom prst="rect">
+            <a:avLst/>
+          </a:prstGeom>
+          <a:noFill/>
+        </p:spPr>
+        <p:txBody>
+          <a:bodyPr wrap="none" lIns="0" rIns="0" tIns="0" bIns="0" anchor="t">
+            <a:spAutoFit/>
+          </a:bodyPr>
+          <a:lstStyle/>
+          <a:p>
+            <a:pPr algn="l">
+              <a:lnSpc>
+                <a:spcPts val="1710"/>
+              </a:lnSpc>
+            </a:pPr>
+            <a:r>
+              <a:rPr sz="1500" spc="-22">
                 <a:solidFill>
                   <a:srgbClr val="EEEBE5"/>
                 </a:solidFill>
@@ -14600,21 +14909,39 @@
                 <a:cs typeface="GQ Text Bold"/>
                 <a:ea typeface="GQ Text Bold"/>
               </a:rPr>
-              <a:t>Жаттығу</a:t>
-            </a:r>
-          </a:p>
-        </p:txBody>
-      </p:sp>
-      <p:sp>
-        <p:nvSpPr>
-          <p:cNvPr id="12" name="TextBox 11"/>
+              <a:t>Ұмытылғанды</a:t>
+            </a:r>
+          </a:p>
+          <a:p>
+            <a:pPr algn="l">
+              <a:lnSpc>
+                <a:spcPts val="1710"/>
+              </a:lnSpc>
+            </a:pPr>
+            <a:r>
+              <a:rPr sz="1500" spc="-22">
+                <a:solidFill>
+                  <a:srgbClr val="EEEBE5"/>
+                </a:solidFill>
+                <a:latin typeface="GQ Text Bold"/>
+                <a:cs typeface="GQ Text Bold"/>
+                <a:ea typeface="GQ Text Bold"/>
+              </a:rPr>
+              <a:t>қайтарады</a:t>
+            </a:r>
+          </a:p>
+        </p:txBody>
+      </p:sp>
+      <p:sp>
+        <p:nvSpPr>
+          <p:cNvPr id="28" name="TextBox 27"/>
           <p:cNvSpPr txBox="1"/>
           <p:nvPr/>
         </p:nvSpPr>
         <p:spPr>
           <a:xfrm>
-            <a:off x="2932115" y="2910332"/>
-            <a:ext cx="1962851" cy="651509"/>
+            <a:off x="6452463" y="3392678"/>
+            <a:ext cx="204216" cy="252475"/>
           </a:xfrm>
           <a:prstGeom prst="rect">
             <a:avLst/>
@@ -14629,69 +14956,272 @@
           <a:p>
             <a:pPr algn="l">
               <a:lnSpc>
-                <a:spcPts val="1500"/>
-              </a:lnSpc>
-            </a:pPr>
-            <a:r>
-              <a:rPr sz="1050">
-                <a:solidFill>
-                  <a:srgbClr val="A6ADB6"/>
+                <a:spcPts val="1400"/>
+              </a:lnSpc>
+            </a:pPr>
+            <a:r>
+              <a:rPr sz="1000">
+                <a:solidFill>
+                  <a:srgbClr val="59AAF8"/>
+                </a:solidFill>
+                <a:latin typeface="IBM Plex Mono Medium"/>
+                <a:cs typeface="IBM Plex Mono Medium"/>
+                <a:ea typeface="IBM Plex Mono Medium"/>
+              </a:rPr>
+              <a:t>—</a:t>
+            </a:r>
+          </a:p>
+        </p:txBody>
+      </p:sp>
+      <p:sp>
+        <p:nvSpPr>
+          <p:cNvPr id="29" name="TextBox 28"/>
+          <p:cNvSpPr txBox="1"/>
+          <p:nvPr/>
+        </p:nvSpPr>
+        <p:spPr>
+          <a:xfrm>
+            <a:off x="6656679" y="3392678"/>
+            <a:ext cx="1805863" cy="430276"/>
+          </a:xfrm>
+          <a:prstGeom prst="rect">
+            <a:avLst/>
+          </a:prstGeom>
+          <a:noFill/>
+        </p:spPr>
+        <p:txBody>
+          <a:bodyPr wrap="none" lIns="0" rIns="0" tIns="0" bIns="0" anchor="t">
+            <a:spAutoFit/>
+          </a:bodyPr>
+          <a:lstStyle/>
+          <a:p>
+            <a:pPr algn="l">
+              <a:lnSpc>
+                <a:spcPts val="1400"/>
+              </a:lnSpc>
+            </a:pPr>
+            <a:r>
+              <a:rPr sz="1000">
+                <a:solidFill>
+                  <a:srgbClr val="EEEBE5"/>
                 </a:solidFill>
                 <a:latin typeface="GQ Text"/>
                 <a:cs typeface="GQ Text"/>
                 <a:ea typeface="GQ Text"/>
               </a:rPr>
-              <a:t>Күнделікті мақсат, қайталау,</a:t>
-            </a:r>
-          </a:p>
-          <a:p>
-            <a:pPr algn="l">
-              <a:lnSpc>
-                <a:spcPts val="1500"/>
-              </a:lnSpc>
-            </a:pPr>
-            <a:r>
-              <a:rPr sz="1050">
-                <a:solidFill>
-                  <a:srgbClr val="A6ADB6"/>
+              <a:t>Қателессең — тапсырма</a:t>
+            </a:r>
+          </a:p>
+          <a:p>
+            <a:pPr algn="l">
+              <a:lnSpc>
+                <a:spcPts val="1400"/>
+              </a:lnSpc>
+            </a:pPr>
+            <a:r>
+              <a:rPr sz="1000">
+                <a:solidFill>
+                  <a:srgbClr val="EEEBE5"/>
                 </a:solidFill>
                 <a:latin typeface="GQ Text"/>
                 <a:cs typeface="GQ Text"/>
                 <a:ea typeface="GQ Text"/>
               </a:rPr>
-              <a:t>сөз карточкалары, 60</a:t>
-            </a:r>
-          </a:p>
-          <a:p>
-            <a:pPr algn="l">
-              <a:lnSpc>
-                <a:spcPts val="1500"/>
-              </a:lnSpc>
-            </a:pPr>
-            <a:r>
-              <a:rPr sz="1050">
-                <a:solidFill>
-                  <a:srgbClr val="A6ADB6"/>
+              <a:t>бүгін қайтады</a:t>
+            </a:r>
+          </a:p>
+        </p:txBody>
+      </p:sp>
+      <p:sp>
+        <p:nvSpPr>
+          <p:cNvPr id="30" name="TextBox 29"/>
+          <p:cNvSpPr txBox="1"/>
+          <p:nvPr/>
+        </p:nvSpPr>
+        <p:spPr>
+          <a:xfrm>
+            <a:off x="6452463" y="3848862"/>
+            <a:ext cx="204216" cy="252475"/>
+          </a:xfrm>
+          <a:prstGeom prst="rect">
+            <a:avLst/>
+          </a:prstGeom>
+          <a:noFill/>
+        </p:spPr>
+        <p:txBody>
+          <a:bodyPr wrap="none" lIns="0" rIns="0" tIns="0" bIns="0" anchor="t">
+            <a:spAutoFit/>
+          </a:bodyPr>
+          <a:lstStyle/>
+          <a:p>
+            <a:pPr algn="l">
+              <a:lnSpc>
+                <a:spcPts val="1400"/>
+              </a:lnSpc>
+            </a:pPr>
+            <a:r>
+              <a:rPr sz="1000">
+                <a:solidFill>
+                  <a:srgbClr val="59AAF8"/>
+                </a:solidFill>
+                <a:latin typeface="IBM Plex Mono Medium"/>
+                <a:cs typeface="IBM Plex Mono Medium"/>
+                <a:ea typeface="IBM Plex Mono Medium"/>
+              </a:rPr>
+              <a:t>—</a:t>
+            </a:r>
+          </a:p>
+        </p:txBody>
+      </p:sp>
+      <p:sp>
+        <p:nvSpPr>
+          <p:cNvPr id="31" name="TextBox 30"/>
+          <p:cNvSpPr txBox="1"/>
+          <p:nvPr/>
+        </p:nvSpPr>
+        <p:spPr>
+          <a:xfrm>
+            <a:off x="6656679" y="3848862"/>
+            <a:ext cx="1805863" cy="608076"/>
+          </a:xfrm>
+          <a:prstGeom prst="rect">
+            <a:avLst/>
+          </a:prstGeom>
+          <a:noFill/>
+        </p:spPr>
+        <p:txBody>
+          <a:bodyPr wrap="none" lIns="0" rIns="0" tIns="0" bIns="0" anchor="t">
+            <a:spAutoFit/>
+          </a:bodyPr>
+          <a:lstStyle/>
+          <a:p>
+            <a:pPr algn="l">
+              <a:lnSpc>
+                <a:spcPts val="1400"/>
+              </a:lnSpc>
+            </a:pPr>
+            <a:r>
+              <a:rPr sz="1000">
+                <a:solidFill>
+                  <a:srgbClr val="EEEBE5"/>
                 </a:solidFill>
                 <a:latin typeface="GQ Text"/>
                 <a:cs typeface="GQ Text"/>
                 <a:ea typeface="GQ Text"/>
               </a:rPr>
-              <a:t>секундтық спринт</a:t>
-            </a:r>
-          </a:p>
-        </p:txBody>
-      </p:sp>
-      <p:sp>
-        <p:nvSpPr>
-          <p:cNvPr id="13" name="TextBox 12"/>
+              <a:t>Дұрыс жауап берсең — бір</a:t>
+            </a:r>
+          </a:p>
+          <a:p>
+            <a:pPr algn="l">
+              <a:lnSpc>
+                <a:spcPts val="1400"/>
+              </a:lnSpc>
+            </a:pPr>
+            <a:r>
+              <a:rPr sz="1000">
+                <a:solidFill>
+                  <a:srgbClr val="EEEBE5"/>
+                </a:solidFill>
+                <a:latin typeface="GQ Text"/>
+                <a:cs typeface="GQ Text"/>
+                <a:ea typeface="GQ Text"/>
+              </a:rPr>
+              <a:t>күннен, содан соң үш</a:t>
+            </a:r>
+          </a:p>
+          <a:p>
+            <a:pPr algn="l">
+              <a:lnSpc>
+                <a:spcPts val="1400"/>
+              </a:lnSpc>
+            </a:pPr>
+            <a:r>
+              <a:rPr sz="1000">
+                <a:solidFill>
+                  <a:srgbClr val="EEEBE5"/>
+                </a:solidFill>
+                <a:latin typeface="GQ Text"/>
+                <a:cs typeface="GQ Text"/>
+                <a:ea typeface="GQ Text"/>
+              </a:rPr>
+              <a:t>күннен кейін</a:t>
+            </a:r>
+          </a:p>
+        </p:txBody>
+      </p:sp>
+      <p:sp>
+        <p:nvSpPr>
+          <p:cNvPr id="32" name="Rectangle 31"/>
+          <p:cNvSpPr/>
+          <p:nvPr/>
+        </p:nvSpPr>
+        <p:spPr>
+          <a:xfrm>
+            <a:off x="8919743" y="2323084"/>
+            <a:ext cx="2522143" cy="2343658"/>
+          </a:xfrm>
+          <a:prstGeom prst="rect">
+            <a:avLst/>
+          </a:prstGeom>
+          <a:solidFill>
+            <a:srgbClr val="11161E"/>
+          </a:solidFill>
+          <a:ln w="9525">
+            <a:solidFill>
+              <a:srgbClr val="3B434D"/>
+            </a:solidFill>
+          </a:ln>
+          <a:effectLst/>
+        </p:spPr>
+        <p:txBody>
+          <a:bodyPr rtlCol="0" anchor="ctr" wrap="none"/>
+          <a:lstStyle/>
+          <a:p>
+            <a:pPr algn="ctr"/>
+          </a:p>
+        </p:txBody>
+      </p:sp>
+      <p:sp>
+        <p:nvSpPr>
+          <p:cNvPr id="33" name="Rectangle 32"/>
+          <p:cNvSpPr/>
+          <p:nvPr/>
+        </p:nvSpPr>
+        <p:spPr>
+          <a:xfrm>
+            <a:off x="8919743" y="2323084"/>
+            <a:ext cx="32004" cy="2343658"/>
+          </a:xfrm>
+          <a:prstGeom prst="rect">
+            <a:avLst/>
+          </a:prstGeom>
+          <a:solidFill>
+            <a:srgbClr val="0064B9"/>
+          </a:solidFill>
+          <a:ln>
+            <a:noFill/>
+          </a:ln>
+          <a:effectLst/>
+        </p:spPr>
+        <p:txBody>
+          <a:bodyPr rtlCol="0" anchor="ctr" wrap="none"/>
+          <a:lstStyle/>
+          <a:p>
+            <a:pPr algn="ctr"/>
+          </a:p>
+        </p:txBody>
+      </p:sp>
+      <p:sp>
+        <p:nvSpPr>
+          <p:cNvPr id="34" name="TextBox 33"/>
           <p:cNvSpPr txBox="1"/>
           <p:nvPr/>
         </p:nvSpPr>
         <p:spPr>
           <a:xfrm>
-            <a:off x="5114422" y="2548798"/>
-            <a:ext cx="1962851" cy="323169"/>
+            <a:off x="9175775" y="2557780"/>
+            <a:ext cx="2010079" cy="189357"/>
           </a:xfrm>
           <a:prstGeom prst="rect">
             <a:avLst/>
@@ -14706,11 +15236,52 @@
           <a:p>
             <a:pPr algn="l">
               <a:lnSpc>
-                <a:spcPts val="1792"/>
-              </a:lnSpc>
-            </a:pPr>
-            <a:r>
-              <a:rPr sz="1600" spc="-24">
+                <a:spcPts val="1050"/>
+              </a:lnSpc>
+            </a:pPr>
+            <a:r>
+              <a:rPr sz="850" spc="136">
+                <a:solidFill>
+                  <a:srgbClr val="59AAF8"/>
+                </a:solidFill>
+                <a:latin typeface="IBM Plex Mono SemiBold"/>
+                <a:cs typeface="IBM Plex Mono SemiBold"/>
+                <a:ea typeface="IBM Plex Mono SemiBold"/>
+              </a:rPr>
+              <a:t>4</a:t>
+            </a:r>
+          </a:p>
+        </p:txBody>
+      </p:sp>
+      <p:sp>
+        <p:nvSpPr>
+          <p:cNvPr id="35" name="TextBox 34"/>
+          <p:cNvSpPr txBox="1"/>
+          <p:nvPr/>
+        </p:nvSpPr>
+        <p:spPr>
+          <a:xfrm>
+            <a:off x="9175775" y="2796590"/>
+            <a:ext cx="2010079" cy="525551"/>
+          </a:xfrm>
+          <a:prstGeom prst="rect">
+            <a:avLst/>
+          </a:prstGeom>
+          <a:noFill/>
+        </p:spPr>
+        <p:txBody>
+          <a:bodyPr wrap="none" lIns="0" rIns="0" tIns="0" bIns="0" anchor="t">
+            <a:spAutoFit/>
+          </a:bodyPr>
+          <a:lstStyle/>
+          <a:p>
+            <a:pPr algn="l">
+              <a:lnSpc>
+                <a:spcPts val="1710"/>
+              </a:lnSpc>
+            </a:pPr>
+            <a:r>
+              <a:rPr sz="1500" spc="-22">
                 <a:solidFill>
                   <a:srgbClr val="EEEBE5"/>
                 </a:solidFill>
@@ -14718,21 +15289,39 @@
                 <a:cs typeface="GQ Text Bold"/>
                 <a:ea typeface="GQ Text Bold"/>
               </a:rPr>
-              <a:t>Сөздік</a:t>
-            </a:r>
-          </a:p>
-        </p:txBody>
-      </p:sp>
-      <p:sp>
-        <p:nvSpPr>
-          <p:cNvPr id="14" name="TextBox 13"/>
+              <a:t>Интернетсіз жұмыс</a:t>
+            </a:r>
+          </a:p>
+          <a:p>
+            <a:pPr algn="l">
+              <a:lnSpc>
+                <a:spcPts val="1710"/>
+              </a:lnSpc>
+            </a:pPr>
+            <a:r>
+              <a:rPr sz="1500" spc="-22">
+                <a:solidFill>
+                  <a:srgbClr val="EEEBE5"/>
+                </a:solidFill>
+                <a:latin typeface="GQ Text Bold"/>
+                <a:cs typeface="GQ Text Bold"/>
+                <a:ea typeface="GQ Text Bold"/>
+              </a:rPr>
+              <a:t>істейді</a:t>
+            </a:r>
+          </a:p>
+        </p:txBody>
+      </p:sp>
+      <p:sp>
+        <p:nvSpPr>
+          <p:cNvPr id="36" name="TextBox 35"/>
           <p:cNvSpPr txBox="1"/>
           <p:nvPr/>
         </p:nvSpPr>
         <p:spPr>
           <a:xfrm>
-            <a:off x="5114422" y="2910332"/>
-            <a:ext cx="1962851" cy="842010"/>
+            <a:off x="9175775" y="3392678"/>
+            <a:ext cx="204216" cy="252475"/>
           </a:xfrm>
           <a:prstGeom prst="rect">
             <a:avLst/>
@@ -14747,87 +15336,204 @@
           <a:p>
             <a:pPr algn="l">
               <a:lnSpc>
-                <a:spcPts val="1500"/>
-              </a:lnSpc>
-            </a:pPr>
-            <a:r>
-              <a:rPr sz="1050">
-                <a:solidFill>
-                  <a:srgbClr val="A6ADB6"/>
+                <a:spcPts val="1400"/>
+              </a:lnSpc>
+            </a:pPr>
+            <a:r>
+              <a:rPr sz="1000">
+                <a:solidFill>
+                  <a:srgbClr val="59AAF8"/>
+                </a:solidFill>
+                <a:latin typeface="IBM Plex Mono Medium"/>
+                <a:cs typeface="IBM Plex Mono Medium"/>
+                <a:ea typeface="IBM Plex Mono Medium"/>
+              </a:rPr>
+              <a:t>—</a:t>
+            </a:r>
+          </a:p>
+        </p:txBody>
+      </p:sp>
+      <p:sp>
+        <p:nvSpPr>
+          <p:cNvPr id="37" name="TextBox 36"/>
+          <p:cNvSpPr txBox="1"/>
+          <p:nvPr/>
+        </p:nvSpPr>
+        <p:spPr>
+          <a:xfrm>
+            <a:off x="9379991" y="3392678"/>
+            <a:ext cx="1805863" cy="252475"/>
+          </a:xfrm>
+          <a:prstGeom prst="rect">
+            <a:avLst/>
+          </a:prstGeom>
+          <a:noFill/>
+        </p:spPr>
+        <p:txBody>
+          <a:bodyPr wrap="none" lIns="0" rIns="0" tIns="0" bIns="0" anchor="t">
+            <a:spAutoFit/>
+          </a:bodyPr>
+          <a:lstStyle/>
+          <a:p>
+            <a:pPr algn="l">
+              <a:lnSpc>
+                <a:spcPts val="1400"/>
+              </a:lnSpc>
+            </a:pPr>
+            <a:r>
+              <a:rPr sz="1000">
+                <a:solidFill>
+                  <a:srgbClr val="EEEBE5"/>
                 </a:solidFill>
                 <a:latin typeface="GQ Text"/>
                 <a:cs typeface="GQ Text"/>
                 <a:ea typeface="GQ Text"/>
               </a:rPr>
-              <a:t>Сабақтардан жиналған 162</a:t>
-            </a:r>
-          </a:p>
-          <a:p>
-            <a:pPr algn="l">
-              <a:lnSpc>
-                <a:spcPts val="1500"/>
-              </a:lnSpc>
-            </a:pPr>
-            <a:r>
-              <a:rPr sz="1050">
-                <a:solidFill>
-                  <a:srgbClr val="A6ADB6"/>
+              <a:t>Бір рет жүктеледі</a:t>
+            </a:r>
+          </a:p>
+        </p:txBody>
+      </p:sp>
+      <p:sp>
+        <p:nvSpPr>
+          <p:cNvPr id="38" name="TextBox 37"/>
+          <p:cNvSpPr txBox="1"/>
+          <p:nvPr/>
+        </p:nvSpPr>
+        <p:spPr>
+          <a:xfrm>
+            <a:off x="9175775" y="3671062"/>
+            <a:ext cx="204216" cy="252475"/>
+          </a:xfrm>
+          <a:prstGeom prst="rect">
+            <a:avLst/>
+          </a:prstGeom>
+          <a:noFill/>
+        </p:spPr>
+        <p:txBody>
+          <a:bodyPr wrap="none" lIns="0" rIns="0" tIns="0" bIns="0" anchor="t">
+            <a:spAutoFit/>
+          </a:bodyPr>
+          <a:lstStyle/>
+          <a:p>
+            <a:pPr algn="l">
+              <a:lnSpc>
+                <a:spcPts val="1400"/>
+              </a:lnSpc>
+            </a:pPr>
+            <a:r>
+              <a:rPr sz="1000">
+                <a:solidFill>
+                  <a:srgbClr val="59AAF8"/>
+                </a:solidFill>
+                <a:latin typeface="IBM Plex Mono Medium"/>
+                <a:cs typeface="IBM Plex Mono Medium"/>
+                <a:ea typeface="IBM Plex Mono Medium"/>
+              </a:rPr>
+              <a:t>—</a:t>
+            </a:r>
+          </a:p>
+        </p:txBody>
+      </p:sp>
+      <p:sp>
+        <p:nvSpPr>
+          <p:cNvPr id="39" name="TextBox 38"/>
+          <p:cNvSpPr txBox="1"/>
+          <p:nvPr/>
+        </p:nvSpPr>
+        <p:spPr>
+          <a:xfrm>
+            <a:off x="9379991" y="3671062"/>
+            <a:ext cx="1805863" cy="430276"/>
+          </a:xfrm>
+          <a:prstGeom prst="rect">
+            <a:avLst/>
+          </a:prstGeom>
+          <a:noFill/>
+        </p:spPr>
+        <p:txBody>
+          <a:bodyPr wrap="none" lIns="0" rIns="0" tIns="0" bIns="0" anchor="t">
+            <a:spAutoFit/>
+          </a:bodyPr>
+          <a:lstStyle/>
+          <a:p>
+            <a:pPr algn="l">
+              <a:lnSpc>
+                <a:spcPts val="1400"/>
+              </a:lnSpc>
+            </a:pPr>
+            <a:r>
+              <a:rPr sz="1000">
+                <a:solidFill>
+                  <a:srgbClr val="EEEBE5"/>
                 </a:solidFill>
                 <a:latin typeface="GQ Text"/>
                 <a:cs typeface="GQ Text"/>
                 <a:ea typeface="GQ Text"/>
               </a:rPr>
-              <a:t>мақала, іздеу орыс</a:t>
-            </a:r>
-          </a:p>
-          <a:p>
-            <a:pPr algn="l">
-              <a:lnSpc>
-                <a:spcPts val="1500"/>
-              </a:lnSpc>
-            </a:pPr>
-            <a:r>
-              <a:rPr sz="1050">
-                <a:solidFill>
-                  <a:srgbClr val="A6ADB6"/>
+              <a:t>Әрі қарай кез келген жерде</a:t>
+            </a:r>
+          </a:p>
+          <a:p>
+            <a:pPr algn="l">
+              <a:lnSpc>
+                <a:spcPts val="1400"/>
+              </a:lnSpc>
+            </a:pPr>
+            <a:r>
+              <a:rPr sz="1000">
+                <a:solidFill>
+                  <a:srgbClr val="EEEBE5"/>
                 </a:solidFill>
                 <a:latin typeface="GQ Text"/>
                 <a:cs typeface="GQ Text"/>
                 <a:ea typeface="GQ Text"/>
               </a:rPr>
-              <a:t>пернетақтасынан да жұмыс</a:t>
-            </a:r>
-          </a:p>
-          <a:p>
-            <a:pPr algn="l">
-              <a:lnSpc>
-                <a:spcPts val="1500"/>
-              </a:lnSpc>
-            </a:pPr>
-            <a:r>
-              <a:rPr sz="1050">
-                <a:solidFill>
-                  <a:srgbClr val="A6ADB6"/>
-                </a:solidFill>
-                <a:latin typeface="GQ Text"/>
-                <a:cs typeface="GQ Text"/>
-                <a:ea typeface="GQ Text"/>
-              </a:rPr>
-              <a:t>істейді</a:t>
-            </a:r>
-          </a:p>
-        </p:txBody>
-      </p:sp>
-      <p:sp>
-        <p:nvSpPr>
-          <p:cNvPr id="15" name="TextBox 14"/>
+              <a:t>шұғылдан</a:t>
+            </a:r>
+          </a:p>
+        </p:txBody>
+      </p:sp>
+      <p:sp>
+        <p:nvSpPr>
+          <p:cNvPr id="40" name="Rectangle 39"/>
+          <p:cNvSpPr/>
+          <p:nvPr/>
+        </p:nvSpPr>
+        <p:spPr>
+          <a:xfrm>
+            <a:off x="749808" y="5069078"/>
+            <a:ext cx="10692079" cy="710247"/>
+          </a:xfrm>
+          <a:prstGeom prst="rect">
+            <a:avLst/>
+          </a:prstGeom>
+          <a:solidFill>
+            <a:srgbClr val="0064B9"/>
+          </a:solidFill>
+          <a:ln>
+            <a:noFill/>
+          </a:ln>
+          <a:effectLst/>
+        </p:spPr>
+        <p:txBody>
+          <a:bodyPr rtlCol="0" anchor="ctr" wrap="none"/>
+          <a:lstStyle/>
+          <a:p>
+            <a:pPr algn="ctr"/>
+          </a:p>
+        </p:txBody>
+      </p:sp>
+      <p:sp>
+        <p:nvSpPr>
+          <p:cNvPr id="41" name="TextBox 40"/>
           <p:cNvSpPr txBox="1"/>
           <p:nvPr/>
         </p:nvSpPr>
         <p:spPr>
           <a:xfrm>
-            <a:off x="7296729" y="2548798"/>
-            <a:ext cx="1962851" cy="323169"/>
+            <a:off x="1024127" y="5268163"/>
+            <a:ext cx="10143439" cy="345281"/>
           </a:xfrm>
           <a:prstGeom prst="rect">
             <a:avLst/>
@@ -14842,254 +15548,6 @@
           <a:p>
             <a:pPr algn="l">
               <a:lnSpc>
-                <a:spcPts val="1792"/>
-              </a:lnSpc>
-            </a:pPr>
-            <a:r>
-              <a:rPr sz="1600" spc="-24">
-                <a:solidFill>
-                  <a:srgbClr val="EEEBE5"/>
-                </a:solidFill>
-                <a:latin typeface="GQ Text Bold"/>
-                <a:cs typeface="GQ Text Bold"/>
-                <a:ea typeface="GQ Text Bold"/>
-              </a:rPr>
-              <a:t>Анықтама</a:t>
-            </a:r>
-          </a:p>
-        </p:txBody>
-      </p:sp>
-      <p:sp>
-        <p:nvSpPr>
-          <p:cNvPr id="16" name="TextBox 15"/>
-          <p:cNvSpPr txBox="1"/>
-          <p:nvPr/>
-        </p:nvSpPr>
-        <p:spPr>
-          <a:xfrm>
-            <a:off x="7296729" y="2910332"/>
-            <a:ext cx="1962851" cy="461010"/>
-          </a:xfrm>
-          <a:prstGeom prst="rect">
-            <a:avLst/>
-          </a:prstGeom>
-          <a:noFill/>
-        </p:spPr>
-        <p:txBody>
-          <a:bodyPr wrap="none" lIns="0" rIns="0" tIns="0" bIns="0" anchor="t">
-            <a:spAutoFit/>
-          </a:bodyPr>
-          <a:lstStyle/>
-          <a:p>
-            <a:pPr algn="l">
-              <a:lnSpc>
-                <a:spcPts val="1500"/>
-              </a:lnSpc>
-            </a:pPr>
-            <a:r>
-              <a:rPr sz="1050">
-                <a:solidFill>
-                  <a:srgbClr val="A6ADB6"/>
-                </a:solidFill>
-                <a:latin typeface="GQ Text"/>
-                <a:cs typeface="GQ Text"/>
-                <a:ea typeface="GQ Text"/>
-              </a:rPr>
-              <a:t>33 ереже, 22 тақырып және</a:t>
-            </a:r>
-          </a:p>
-          <a:p>
-            <a:pPr algn="l">
-              <a:lnSpc>
-                <a:spcPts val="1500"/>
-              </a:lnSpc>
-            </a:pPr>
-            <a:r>
-              <a:rPr sz="1050">
-                <a:solidFill>
-                  <a:srgbClr val="A6ADB6"/>
-                </a:solidFill>
-                <a:latin typeface="GQ Text"/>
-                <a:cs typeface="GQ Text"/>
-                <a:ea typeface="GQ Text"/>
-              </a:rPr>
-              <a:t>жанды жалғау кестелері</a:t>
-            </a:r>
-          </a:p>
-        </p:txBody>
-      </p:sp>
-      <p:sp>
-        <p:nvSpPr>
-          <p:cNvPr id="17" name="TextBox 16"/>
-          <p:cNvSpPr txBox="1"/>
-          <p:nvPr/>
-        </p:nvSpPr>
-        <p:spPr>
-          <a:xfrm>
-            <a:off x="9479036" y="2548798"/>
-            <a:ext cx="1962851" cy="323169"/>
-          </a:xfrm>
-          <a:prstGeom prst="rect">
-            <a:avLst/>
-          </a:prstGeom>
-          <a:noFill/>
-        </p:spPr>
-        <p:txBody>
-          <a:bodyPr wrap="none" lIns="0" rIns="0" tIns="0" bIns="0" anchor="t">
-            <a:spAutoFit/>
-          </a:bodyPr>
-          <a:lstStyle/>
-          <a:p>
-            <a:pPr algn="l">
-              <a:lnSpc>
-                <a:spcPts val="1792"/>
-              </a:lnSpc>
-            </a:pPr>
-            <a:r>
-              <a:rPr sz="1600" spc="-24">
-                <a:solidFill>
-                  <a:srgbClr val="EEEBE5"/>
-                </a:solidFill>
-                <a:latin typeface="GQ Text Bold"/>
-                <a:cs typeface="GQ Text Bold"/>
-                <a:ea typeface="GQ Text Bold"/>
-              </a:rPr>
-              <a:t>Профиль</a:t>
-            </a:r>
-          </a:p>
-        </p:txBody>
-      </p:sp>
-      <p:sp>
-        <p:nvSpPr>
-          <p:cNvPr id="18" name="TextBox 17"/>
-          <p:cNvSpPr txBox="1"/>
-          <p:nvPr/>
-        </p:nvSpPr>
-        <p:spPr>
-          <a:xfrm>
-            <a:off x="9479036" y="2910332"/>
-            <a:ext cx="1962851" cy="651509"/>
-          </a:xfrm>
-          <a:prstGeom prst="rect">
-            <a:avLst/>
-          </a:prstGeom>
-          <a:noFill/>
-        </p:spPr>
-        <p:txBody>
-          <a:bodyPr wrap="none" lIns="0" rIns="0" tIns="0" bIns="0" anchor="t">
-            <a:spAutoFit/>
-          </a:bodyPr>
-          <a:lstStyle/>
-          <a:p>
-            <a:pPr algn="l">
-              <a:lnSpc>
-                <a:spcPts val="1500"/>
-              </a:lnSpc>
-            </a:pPr>
-            <a:r>
-              <a:rPr sz="1050">
-                <a:solidFill>
-                  <a:srgbClr val="A6ADB6"/>
-                </a:solidFill>
-                <a:latin typeface="GQ Text"/>
-                <a:cs typeface="GQ Text"/>
-                <a:ea typeface="GQ Text"/>
-              </a:rPr>
-              <a:t>Статистика, марапаттар</a:t>
-            </a:r>
-          </a:p>
-          <a:p>
-            <a:pPr algn="l">
-              <a:lnSpc>
-                <a:spcPts val="1500"/>
-              </a:lnSpc>
-            </a:pPr>
-            <a:r>
-              <a:rPr sz="1050">
-                <a:solidFill>
-                  <a:srgbClr val="A6ADB6"/>
-                </a:solidFill>
-                <a:latin typeface="GQ Text"/>
-                <a:cs typeface="GQ Text"/>
-                <a:ea typeface="GQ Text"/>
-              </a:rPr>
-              <a:t>және нәтижелерді кесте</a:t>
-            </a:r>
-          </a:p>
-          <a:p>
-            <a:pPr algn="l">
-              <a:lnSpc>
-                <a:spcPts val="1500"/>
-              </a:lnSpc>
-            </a:pPr>
-            <a:r>
-              <a:rPr sz="1050">
-                <a:solidFill>
-                  <a:srgbClr val="A6ADB6"/>
-                </a:solidFill>
-                <a:latin typeface="GQ Text"/>
-                <a:cs typeface="GQ Text"/>
-                <a:ea typeface="GQ Text"/>
-              </a:rPr>
-              <a:t>түрінде жүктеу</a:t>
-            </a:r>
-          </a:p>
-        </p:txBody>
-      </p:sp>
-      <p:sp>
-        <p:nvSpPr>
-          <p:cNvPr id="19" name="Rectangle 18"/>
-          <p:cNvSpPr/>
-          <p:nvPr/>
-        </p:nvSpPr>
-        <p:spPr>
-          <a:xfrm>
-            <a:off x="749808" y="4123435"/>
-            <a:ext cx="10692079" cy="710247"/>
-          </a:xfrm>
-          <a:prstGeom prst="rect">
-            <a:avLst/>
-          </a:prstGeom>
-          <a:solidFill>
-            <a:srgbClr val="0064B9"/>
-          </a:solidFill>
-          <a:ln>
-            <a:noFill/>
-          </a:ln>
-          <a:effectLst/>
-        </p:spPr>
-        <p:txBody>
-          <a:bodyPr rtlCol="0" anchor="ctr" wrap="none"/>
-          <a:lstStyle/>
-          <a:p>
-            <a:pPr algn="ctr"/>
-          </a:p>
-        </p:txBody>
-      </p:sp>
-      <p:sp>
-        <p:nvSpPr>
-          <p:cNvPr id="20" name="TextBox 19"/>
-          <p:cNvSpPr txBox="1"/>
-          <p:nvPr/>
-        </p:nvSpPr>
-        <p:spPr>
-          <a:xfrm>
-            <a:off x="1024127" y="4322521"/>
-            <a:ext cx="10143439" cy="345281"/>
-          </a:xfrm>
-          <a:prstGeom prst="rect">
-            <a:avLst/>
-          </a:prstGeom>
-          <a:noFill/>
-        </p:spPr>
-        <p:txBody>
-          <a:bodyPr wrap="none" lIns="0" rIns="0" tIns="0" bIns="0" anchor="t">
-            <a:spAutoFit/>
-          </a:bodyPr>
-          <a:lstStyle/>
-          <a:p>
-            <a:pPr algn="l">
-              <a:lnSpc>
                 <a:spcPts val="1812"/>
               </a:lnSpc>
             </a:pPr>
@@ -15102,7 +15560,7 @@
                 <a:cs typeface="GQ Text SemiBold"/>
                 <a:ea typeface="GQ Text SemiBold"/>
               </a:rPr>
-              <a:t>Сабақ соңындағы қателерді талдау ұпай қоспайды: ол ұпай жинау үшін емес, түсіну үшін керек.</a:t>
+              <a:t>Мұның бәрі әр жаңартуда автотесттермен тексеріледі: байқаусыз бұзу мүмкін емес.</a:t>
             </a:r>
           </a:p>
         </p:txBody>
@@ -15253,7 +15711,7 @@
                 <a:cs typeface="IBM Plex Mono SemiBold"/>
                 <a:ea typeface="IBM Plex Mono SemiBold"/>
               </a:rPr>
-              <a:t>ТІКЕЛЕЙ КӨРСЕТЕМІН</a:t>
+              <a:t>ӨЗІҢІЗ КӨРІҢІЗ</a:t>
             </a:r>
           </a:p>
         </p:txBody>
@@ -15965,14 +16423,14 @@
       </p:sp>
       <p:sp>
         <p:nvSpPr>
-          <p:cNvPr id="19" name="Rectangle 18"/>
-          <p:cNvSpPr/>
-          <p:nvPr/>
-        </p:nvSpPr>
-        <p:spPr>
-          <a:xfrm>
-            <a:off x="7104202" y="1960626"/>
-            <a:ext cx="4337684" cy="2260599"/>
+          <p:cNvPr id="21" name="Rectangle 20"/>
+          <p:cNvSpPr/>
+          <p:nvPr/>
+        </p:nvSpPr>
+        <p:spPr>
+          <a:xfrm>
+            <a:off x="7104202" y="2367788"/>
+            <a:ext cx="4337684" cy="2788920"/>
           </a:xfrm>
           <a:prstGeom prst="rect">
             <a:avLst/>
@@ -16003,8 +16461,8 @@
         </p:nvSpPr>
         <p:spPr>
           <a:xfrm>
-            <a:off x="749808" y="1960626"/>
-            <a:ext cx="6153226" cy="2440432"/>
+            <a:off x="749808" y="2367788"/>
+            <a:ext cx="6153226" cy="2122931"/>
           </a:xfrm>
           <a:prstGeom prst="rect">
             <a:avLst/>
@@ -16091,7 +16549,7 @@
                 <a:cs typeface="IBM Plex Mono SemiBold"/>
                 <a:ea typeface="IBM Plex Mono SemiBold"/>
               </a:rPr>
-              <a:t>ҚОРЫТЫНДЫ</a:t>
+              <a:t>ӘРІ ҚАРАЙ НЕ БОЛАДЫ</a:t>
             </a:r>
           </a:p>
         </p:txBody>
@@ -16145,8 +16603,8 @@
         </p:nvSpPr>
         <p:spPr>
           <a:xfrm>
-            <a:off x="749808" y="786505"/>
-            <a:ext cx="10692079" cy="810447"/>
+            <a:off x="749808" y="795202"/>
+            <a:ext cx="10692079" cy="1249644"/>
           </a:xfrm>
           <a:prstGeom prst="rect">
             <a:avLst/>
@@ -16161,11 +16619,11 @@
           <a:p>
             <a:pPr algn="l">
               <a:lnSpc>
-                <a:spcPts val="4494"/>
-              </a:lnSpc>
-            </a:pPr>
-            <a:r>
-              <a:rPr sz="4200" spc="-92">
+                <a:spcPts val="4066"/>
+              </a:lnSpc>
+            </a:pPr>
+            <a:r>
+              <a:rPr sz="3800" spc="-84">
                 <a:solidFill>
                   <a:srgbClr val="EEEBE5"/>
                 </a:solidFill>
@@ -16173,7 +16631,25 @@
                 <a:cs typeface="GQ Text Bold"/>
                 <a:ea typeface="GQ Text Bold"/>
               </a:rPr>
-              <a:t>Не шықты және әрі қарай не істеу керек</a:t>
+              <a:t>Қосымша дайын. Оны мектеп пайдалану</a:t>
+            </a:r>
+          </a:p>
+          <a:p>
+            <a:pPr algn="l">
+              <a:lnSpc>
+                <a:spcPts val="4066"/>
+              </a:lnSpc>
+            </a:pPr>
+            <a:r>
+              <a:rPr sz="3800" spc="-84">
+                <a:solidFill>
+                  <a:srgbClr val="EEEBE5"/>
+                </a:solidFill>
+                <a:latin typeface="GQ Text Bold"/>
+                <a:cs typeface="GQ Text Bold"/>
+                <a:ea typeface="GQ Text Bold"/>
+              </a:rPr>
+              <a:t>үшін ересектердің көмегі керек</a:t>
             </a:r>
           </a:p>
         </p:txBody>
@@ -16186,7 +16662,7 @@
         </p:nvSpPr>
         <p:spPr>
           <a:xfrm>
-            <a:off x="1024127" y="2212594"/>
+            <a:off x="1024127" y="2619756"/>
             <a:ext cx="5604586" cy="198374"/>
           </a:xfrm>
           <a:prstGeom prst="rect">
@@ -16214,7 +16690,7 @@
                 <a:cs typeface="IBM Plex Mono SemiBold"/>
                 <a:ea typeface="IBM Plex Mono SemiBold"/>
               </a:rPr>
-              <a:t>ҚОРЫТЫНДЫ</a:t>
+              <a:t>ӨТІНІШІМ</a:t>
             </a:r>
           </a:p>
         </p:txBody>
@@ -16227,8 +16703,8 @@
         </p:nvSpPr>
         <p:spPr>
           <a:xfrm>
-            <a:off x="1024127" y="2488438"/>
-            <a:ext cx="5604586" cy="1720850"/>
+            <a:off x="1024127" y="2895600"/>
+            <a:ext cx="5604586" cy="1403350"/>
           </a:xfrm>
           <a:prstGeom prst="rect">
             <a:avLst/>
@@ -16255,7 +16731,7 @@
                 <a:cs typeface="GQ Text Bold"/>
                 <a:ea typeface="GQ Text Bold"/>
               </a:rPr>
-              <a:t>Оқушыларға қазақ тілінің қиындығы емес,</a:t>
+              <a:t>Қосымшаны қазақ тілі мұғалімдеріне</a:t>
             </a:r>
           </a:p>
           <a:p>
@@ -16273,7 +16749,7 @@
                 <a:cs typeface="GQ Text Bold"/>
                 <a:ea typeface="GQ Text Bold"/>
               </a:rPr>
-              <a:t>техникалық бөгеттер кедергі болды: дұрыс</a:t>
+              <a:t>тексертіп, нақты сыныпта сынап көру. Әрі</a:t>
             </a:r>
           </a:p>
           <a:p>
@@ -16291,7 +16767,7 @@
                 <a:cs typeface="GQ Text Bold"/>
                 <a:ea typeface="GQ Text Bold"/>
               </a:rPr>
-              <a:t>жауапты теру мүмкін емес еді. Оларды алып</a:t>
+              <a:t>қарай мен оны қанша қажет болса, сонша</a:t>
             </a:r>
           </a:p>
           <a:p>
@@ -16309,25 +16785,7 @@
                 <a:cs typeface="GQ Text Bold"/>
                 <a:ea typeface="GQ Text Bold"/>
               </a:rPr>
-              <a:t>тастауға болды, әрі бірде-бірі тілдің өзін</a:t>
-            </a:r>
-          </a:p>
-          <a:p>
-            <a:pPr algn="l">
-              <a:lnSpc>
-                <a:spcPts val="2500"/>
-              </a:lnSpc>
-            </a:pPr>
-            <a:r>
-              <a:rPr sz="1900" spc="-34">
-                <a:solidFill>
-                  <a:srgbClr val="EEEBE5"/>
-                </a:solidFill>
-                <a:latin typeface="GQ Text Bold"/>
-                <a:cs typeface="GQ Text Bold"/>
-                <a:ea typeface="GQ Text Bold"/>
-              </a:rPr>
-              <a:t>жеңілдетуді талап етпеді.</a:t>
+              <a:t>дамытуға дайынмын.</a:t>
             </a:r>
           </a:p>
         </p:txBody>
@@ -16340,7 +16798,7 @@
         </p:nvSpPr>
         <p:spPr>
           <a:xfrm>
-            <a:off x="7378522" y="2212594"/>
+            <a:off x="7378522" y="2619756"/>
             <a:ext cx="3789045" cy="198374"/>
           </a:xfrm>
           <a:prstGeom prst="rect">
@@ -16368,7 +16826,7 @@
                 <a:cs typeface="IBM Plex Mono SemiBold"/>
                 <a:ea typeface="IBM Plex Mono SemiBold"/>
               </a:rPr>
-              <a:t>ӘРІ ҚАРАЙ</a:t>
+              <a:t>ДАМУ ЖОСПАРЫ</a:t>
             </a:r>
           </a:p>
         </p:txBody>
@@ -16381,7 +16839,7 @@
         </p:nvSpPr>
         <p:spPr>
           <a:xfrm>
-            <a:off x="7378522" y="2526233"/>
+            <a:off x="7378522" y="2933395"/>
             <a:ext cx="210566" cy="277723"/>
           </a:xfrm>
           <a:prstGeom prst="rect">
@@ -16422,7 +16880,7 @@
         </p:nvSpPr>
         <p:spPr>
           <a:xfrm>
-            <a:off x="7589088" y="2526233"/>
+            <a:off x="7589088" y="2933395"/>
             <a:ext cx="3578479" cy="277723"/>
           </a:xfrm>
           <a:prstGeom prst="rect">
@@ -16463,7 +16921,7 @@
         </p:nvSpPr>
         <p:spPr>
           <a:xfrm>
-            <a:off x="7378522" y="2858973"/>
+            <a:off x="7378522" y="3266135"/>
             <a:ext cx="210566" cy="277723"/>
           </a:xfrm>
           <a:prstGeom prst="rect">
@@ -16504,7 +16962,7 @@
         </p:nvSpPr>
         <p:spPr>
           <a:xfrm>
-            <a:off x="7589088" y="2858973"/>
+            <a:off x="7589088" y="3266135"/>
             <a:ext cx="3578479" cy="277723"/>
           </a:xfrm>
           <a:prstGeom prst="rect">
@@ -16545,7 +17003,7 @@
         </p:nvSpPr>
         <p:spPr>
           <a:xfrm>
-            <a:off x="7378522" y="3191713"/>
+            <a:off x="7378522" y="3598875"/>
             <a:ext cx="210566" cy="277723"/>
           </a:xfrm>
           <a:prstGeom prst="rect">
@@ -16586,7 +17044,7 @@
         </p:nvSpPr>
         <p:spPr>
           <a:xfrm>
-            <a:off x="7589088" y="3191713"/>
+            <a:off x="7589088" y="3598875"/>
             <a:ext cx="3578479" cy="473303"/>
           </a:xfrm>
           <a:prstGeom prst="rect">
@@ -16614,7 +17072,7 @@
                 <a:cs typeface="GQ Text"/>
                 <a:ea typeface="GQ Text"/>
               </a:rPr>
-              <a:t>Дыбыстау: 589 сөз тіркесі, әрқайсысы өз</a:t>
+              <a:t>Дыбыстау: ана тілі иесінің дауысымен 589 сөз</a:t>
             </a:r>
           </a:p>
           <a:p>
@@ -16632,7 +17090,7 @@
                 <a:cs typeface="GQ Text"/>
                 <a:ea typeface="GQ Text"/>
               </a:rPr>
-              <a:t>дауысымен</a:t>
+              <a:t>тіркесі</a:t>
             </a:r>
           </a:p>
         </p:txBody>
@@ -16645,7 +17103,7 @@
         </p:nvSpPr>
         <p:spPr>
           <a:xfrm>
-            <a:off x="7378522" y="3720033"/>
+            <a:off x="7378522" y="4127195"/>
             <a:ext cx="210566" cy="277723"/>
           </a:xfrm>
           <a:prstGeom prst="rect">
@@ -16686,7 +17144,7 @@
         </p:nvSpPr>
         <p:spPr>
           <a:xfrm>
-            <a:off x="7589088" y="3720033"/>
+            <a:off x="7589088" y="4127195"/>
             <a:ext cx="3578479" cy="277723"/>
           </a:xfrm>
           <a:prstGeom prst="rect">
@@ -16714,7 +17172,48 @@
                 <a:cs typeface="GQ Text"/>
                 <a:ea typeface="GQ Text"/>
               </a:rPr>
-              <a:t>Ашық қолжетімділік: тегін және сілтеме арқылы</a:t>
+              <a:t>Жаңа сабақтар және ауызекі тақырыптар</a:t>
+            </a:r>
+          </a:p>
+        </p:txBody>
+      </p:sp>
+      <p:sp>
+        <p:nvSpPr>
+          <p:cNvPr id="19" name="TextBox 18"/>
+          <p:cNvSpPr txBox="1"/>
+          <p:nvPr/>
+        </p:nvSpPr>
+        <p:spPr>
+          <a:xfrm>
+            <a:off x="7378522" y="4459935"/>
+            <a:ext cx="210566" cy="277723"/>
+          </a:xfrm>
+          <a:prstGeom prst="rect">
+            <a:avLst/>
+          </a:prstGeom>
+          <a:noFill/>
+        </p:spPr>
+        <p:txBody>
+          <a:bodyPr wrap="none" lIns="0" rIns="0" tIns="0" bIns="0" anchor="t">
+            <a:spAutoFit/>
+          </a:bodyPr>
+          <a:lstStyle/>
+          <a:p>
+            <a:pPr algn="l">
+              <a:lnSpc>
+                <a:spcPts val="1540"/>
+              </a:lnSpc>
+            </a:pPr>
+            <a:r>
+              <a:rPr sz="1100">
+                <a:solidFill>
+                  <a:srgbClr val="59AAF8"/>
+                </a:solidFill>
+                <a:latin typeface="IBM Plex Mono Medium"/>
+                <a:cs typeface="IBM Plex Mono Medium"/>
+                <a:ea typeface="IBM Plex Mono Medium"/>
+              </a:rPr>
+              <a:t>—</a:t>
             </a:r>
           </a:p>
         </p:txBody>
@@ -16722,6 +17221,65 @@
       <p:sp>
         <p:nvSpPr>
           <p:cNvPr id="20" name="TextBox 19"/>
+          <p:cNvSpPr txBox="1"/>
+          <p:nvPr/>
+        </p:nvSpPr>
+        <p:spPr>
+          <a:xfrm>
+            <a:off x="7589088" y="4459935"/>
+            <a:ext cx="3578479" cy="473303"/>
+          </a:xfrm>
+          <a:prstGeom prst="rect">
+            <a:avLst/>
+          </a:prstGeom>
+          <a:noFill/>
+        </p:spPr>
+        <p:txBody>
+          <a:bodyPr wrap="none" lIns="0" rIns="0" tIns="0" bIns="0" anchor="t">
+            <a:spAutoFit/>
+          </a:bodyPr>
+          <a:lstStyle/>
+          <a:p>
+            <a:pPr algn="l">
+              <a:lnSpc>
+                <a:spcPts val="1540"/>
+              </a:lnSpc>
+            </a:pPr>
+            <a:r>
+              <a:rPr sz="1100">
+                <a:solidFill>
+                  <a:srgbClr val="EEEBE5"/>
+                </a:solidFill>
+                <a:latin typeface="GQ Text"/>
+                <a:cs typeface="GQ Text"/>
+                <a:ea typeface="GQ Text"/>
+              </a:rPr>
+              <a:t>Орыс тілін оқитын қазақ мектептеріне арналған</a:t>
+            </a:r>
+          </a:p>
+          <a:p>
+            <a:pPr algn="l">
+              <a:lnSpc>
+                <a:spcPts val="1540"/>
+              </a:lnSpc>
+            </a:pPr>
+            <a:r>
+              <a:rPr sz="1100">
+                <a:solidFill>
+                  <a:srgbClr val="EEEBE5"/>
+                </a:solidFill>
+                <a:latin typeface="GQ Text"/>
+                <a:cs typeface="GQ Text"/>
+                <a:ea typeface="GQ Text"/>
+              </a:rPr>
+              <a:t>нұсқа</a:t>
+            </a:r>
+          </a:p>
+        </p:txBody>
+      </p:sp>
+      <p:sp>
+        <p:nvSpPr>
+          <p:cNvPr id="22" name="TextBox 21"/>
           <p:cNvSpPr txBox="1"/>
           <p:nvPr/>
         </p:nvSpPr>

--- a/презентация/Тілашар-қорғау.pptx
+++ b/презентация/Тілашар-қорғау.pptx
@@ -1233,27 +1233,65 @@
           <a:p/>
           <a:p>
             <a:r>
+              <a:t>Порядок такой. Сначала коротко: тексты проверил учитель, ребята уже</a:t>
+            </a:r>
+          </a:p>
+          <a:p>
+            <a:r>
+              <a:t>позанимались, приложение работает. Потом — куда это может вырасти.</a:t>
+            </a:r>
+          </a:p>
+          <a:p>
+            <a:r>
+              <a:t>И в конце прямая просьба: дайте классы для апробации и методистов.</a:t>
+            </a:r>
+          </a:p>
+          <a:p/>
+          <a:p>
+            <a:r>
               <a:t>Главная мысль на прощание: казахский не сложнее других языков. Ученику</a:t>
             </a:r>
           </a:p>
           <a:p>
             <a:r>
-              <a:t>мешало то, что он не мог нажать нужную букву. Это я убрал — а дальше</a:t>
-            </a:r>
-          </a:p>
-          <a:p>
-            <a:r>
-              <a:t>приложение нужно проверить на живом классе, и без учителей мне это</a:t>
-            </a:r>
-          </a:p>
-          <a:p>
-            <a:r>
-              <a:t>не сделать.</a:t>
+              <a:t>мешало то, что он не мог нажать нужную букву. Это я убрал — дальше нужно,</a:t>
+            </a:r>
+          </a:p>
+          <a:p>
+            <a:r>
+              <a:t>чтобы приложением пользовалась не одна школа.</a:t>
             </a:r>
           </a:p>
           <a:p/>
           <a:p>
             <a:r>
+              <a:t>ПЕРЕД ЗАЩИТОЙ ОБЯЗАТЕЛЬНО</a:t>
+            </a:r>
+          </a:p>
+          <a:p/>
+          <a:p>
+            <a:r>
+              <a:t>Строка «уже сделано» должна быть правдой, её проверят вопросом.</a:t>
+            </a:r>
+          </a:p>
+          <a:p>
+            <a:r>
+              <a:t>Убедиться, что учитель действительно посмотрел тексты, и вписать его ФИО</a:t>
+            </a:r>
+          </a:p>
+          <a:p>
+            <a:r>
+              <a:t>в тексты.py (TEACHER_RU / TEACHER_KZ). Раздать ссылку одноклассникам</a:t>
+            </a:r>
+          </a:p>
+          <a:p>
+            <a:r>
+              <a:t>и вписать их число (TESTERS) — живое число убеждает сильнее слов.</a:t>
+            </a:r>
+          </a:p>
+          <a:p/>
+          <a:p>
+            <a:r>
               <a:t>ЧАСТЫЕ ВОПРОСЫ ЖЮРИ</a:t>
             </a:r>
           </a:p>
@@ -1291,39 +1329,44 @@
           </a:p>
           <a:p>
             <a:r>
-              <a:t>   приложение и то, что в нём проверено.</a:t>
+              <a:t>   приложение, которое проверил учитель и попробовали одноклассники.</a:t>
             </a:r>
           </a:p>
           <a:p/>
           <a:p>
             <a:r>
-              <a:t>3. «Результаты апробации есть?»</a:t>
-            </a:r>
-          </a:p>
-          <a:p>
-            <a:r>
-              <a:t>   Нет. Эксперимент запланирован, сбор данных встроен в приложение,</a:t>
-            </a:r>
-          </a:p>
-          <a:p>
-            <a:r>
-              <a:t>   данных пока нет. Придумывать проценты я не стал.</a:t>
+              <a:t>3. «Кто проверял казахский текст?»</a:t>
+            </a:r>
+          </a:p>
+          <a:p>
+            <a:r>
+              <a:t>   Учитель казахского языка. Тексты выгружаются из приложения одним</a:t>
+            </a:r>
+          </a:p>
+          <a:p>
+            <a:r>
+              <a:t>   файлом — так проверять удобно, и так же будут проверяться новые уроки.</a:t>
             </a:r>
           </a:p>
           <a:p/>
           <a:p>
             <a:r>
-              <a:t>4. «Уроки писал носитель языка?»</a:t>
-            </a:r>
-          </a:p>
-          <a:p>
-            <a:r>
-              <a:t>   Нет. Весь казахский текст выгружен учителю на проверку — это первый</a:t>
-            </a:r>
-          </a:p>
-          <a:p>
-            <a:r>
-              <a:t>   пункт плана развития.</a:t>
+              <a:t>4. «Результаты апробации есть?»</a:t>
+            </a:r>
+          </a:p>
+          <a:p>
+            <a:r>
+              <a:t>   Одноклассники позанимались и сказали, что мешает — это я исправил.</a:t>
+            </a:r>
+          </a:p>
+          <a:p>
+            <a:r>
+              <a:t>   Настоящая апробация на классе с цифрами — следующий шаг, сбор данных</a:t>
+            </a:r>
+          </a:p>
+          <a:p>
+            <a:r>
+              <a:t>   в приложение уже встроен. Придумывать проценты я не стал.</a:t>
             </a:r>
           </a:p>
           <a:p/>
@@ -1340,6 +1383,17 @@
           <a:p>
             <a:r>
               <a:t>   Все сервисы, на которых оно сделано, тоже бесплатные.</a:t>
+            </a:r>
+          </a:p>
+          <a:p/>
+          <a:p>
+            <a:r>
+              <a:t>6. «Сколько времени это заняло?»</a:t>
+            </a:r>
+          </a:p>
+          <a:p>
+            <a:r>
+              <a:t>   Отвечать честно своими словами: сколько ушло на самом деле.</a:t>
             </a:r>
           </a:p>
         </p:txBody>
@@ -16423,14 +16477,14 @@
       </p:sp>
       <p:sp>
         <p:nvSpPr>
-          <p:cNvPr id="21" name="Rectangle 20"/>
-          <p:cNvSpPr/>
-          <p:nvPr/>
-        </p:nvSpPr>
-        <p:spPr>
-          <a:xfrm>
-            <a:off x="7104202" y="2367788"/>
-            <a:ext cx="4337684" cy="2788920"/>
+          <p:cNvPr id="25" name="Rectangle 24"/>
+          <p:cNvSpPr/>
+          <p:nvPr/>
+        </p:nvSpPr>
+        <p:spPr>
+          <a:xfrm>
+            <a:off x="7104202" y="3251707"/>
+            <a:ext cx="4337684" cy="2834639"/>
           </a:xfrm>
           <a:prstGeom prst="rect">
             <a:avLst/>
@@ -16455,14 +16509,14 @@
       </p:sp>
       <p:sp>
         <p:nvSpPr>
-          <p:cNvPr id="9" name="Rectangle 8"/>
-          <p:cNvSpPr/>
-          <p:nvPr/>
-        </p:nvSpPr>
-        <p:spPr>
-          <a:xfrm>
-            <a:off x="749808" y="2367788"/>
-            <a:ext cx="6153226" cy="2122931"/>
+          <p:cNvPr id="11" name="Rectangle 10"/>
+          <p:cNvSpPr/>
+          <p:nvPr/>
+        </p:nvSpPr>
+        <p:spPr>
+          <a:xfrm>
+            <a:off x="749808" y="3251707"/>
+            <a:ext cx="6153226" cy="2122932"/>
           </a:xfrm>
           <a:prstGeom prst="rect">
             <a:avLst/>
@@ -16549,7 +16603,7 @@
                 <a:cs typeface="IBM Plex Mono SemiBold"/>
                 <a:ea typeface="IBM Plex Mono SemiBold"/>
               </a:rPr>
-              <a:t>ӘРІ ҚАРАЙ НЕ БОЛАДЫ</a:t>
+              <a:t>БҰЛ ҚАЙДА ДЕЙІН ӨСЕ АЛАДЫ</a:t>
             </a:r>
           </a:p>
         </p:txBody>
@@ -16631,7 +16685,7 @@
                 <a:cs typeface="GQ Text Bold"/>
                 <a:ea typeface="GQ Text Bold"/>
               </a:rPr>
-              <a:t>Қосымша дайын. Оны мектеп пайдалану</a:t>
+              <a:t>Мектеп жобасынан — елдегі барлық</a:t>
             </a:r>
           </a:p>
           <a:p>
@@ -16649,21 +16703,51 @@
                 <a:cs typeface="GQ Text Bold"/>
                 <a:ea typeface="GQ Text Bold"/>
               </a:rPr>
-              <a:t>үшін ересектердің көмегі керек</a:t>
-            </a:r>
-          </a:p>
-        </p:txBody>
-      </p:sp>
-      <p:sp>
-        <p:nvSpPr>
-          <p:cNvPr id="7" name="TextBox 6"/>
+              <a:t>мектепке арналған қосымшаға</a:t>
+            </a:r>
+          </a:p>
+        </p:txBody>
+      </p:sp>
+      <p:sp>
+        <p:nvSpPr>
+          <p:cNvPr id="7" name="Rectangle 6"/>
+          <p:cNvSpPr/>
+          <p:nvPr/>
+        </p:nvSpPr>
+        <p:spPr>
+          <a:xfrm>
+            <a:off x="749808" y="2203195"/>
+            <a:ext cx="10692079" cy="701040"/>
+          </a:xfrm>
+          <a:prstGeom prst="rect">
+            <a:avLst/>
+          </a:prstGeom>
+          <a:solidFill>
+            <a:srgbClr val="00793D"/>
+          </a:solidFill>
+          <a:ln>
+            <a:noFill/>
+          </a:ln>
+          <a:effectLst/>
+        </p:spPr>
+        <p:txBody>
+          <a:bodyPr rtlCol="0" anchor="ctr" wrap="none"/>
+          <a:lstStyle/>
+          <a:p>
+            <a:pPr algn="ctr"/>
+          </a:p>
+        </p:txBody>
+      </p:sp>
+      <p:sp>
+        <p:nvSpPr>
+          <p:cNvPr id="8" name="TextBox 7"/>
           <p:cNvSpPr txBox="1"/>
           <p:nvPr/>
         </p:nvSpPr>
         <p:spPr>
           <a:xfrm>
-            <a:off x="1024127" y="2619756"/>
-            <a:ext cx="5604586" cy="198374"/>
+            <a:off x="1024127" y="2403754"/>
+            <a:ext cx="10143439" cy="331470"/>
           </a:xfrm>
           <a:prstGeom prst="rect">
             <a:avLst/>
@@ -16678,6 +16762,47 @@
           <a:p>
             <a:pPr algn="l">
               <a:lnSpc>
+                <a:spcPts val="1740"/>
+              </a:lnSpc>
+            </a:pPr>
+            <a:r>
+              <a:rPr sz="1200">
+                <a:solidFill>
+                  <a:srgbClr val="FFFFFF"/>
+                </a:solidFill>
+                <a:latin typeface="GQ Text SemiBold"/>
+                <a:cs typeface="GQ Text SemiBold"/>
+                <a:ea typeface="GQ Text SemiBold"/>
+              </a:rPr>
+              <a:t>Қазірдің өзінде: мәтіндерді мұғалім тексерді · қосымшаны сыныптастар қолданып көрді · сайт жұмыс істеп тұр</a:t>
+            </a:r>
+          </a:p>
+        </p:txBody>
+      </p:sp>
+      <p:sp>
+        <p:nvSpPr>
+          <p:cNvPr id="9" name="TextBox 8"/>
+          <p:cNvSpPr txBox="1"/>
+          <p:nvPr/>
+        </p:nvSpPr>
+        <p:spPr>
+          <a:xfrm>
+            <a:off x="1024127" y="3503675"/>
+            <a:ext cx="5604586" cy="198374"/>
+          </a:xfrm>
+          <a:prstGeom prst="rect">
+            <a:avLst/>
+          </a:prstGeom>
+          <a:noFill/>
+        </p:spPr>
+        <p:txBody>
+          <a:bodyPr wrap="none" lIns="0" rIns="0" tIns="0" bIns="0" anchor="t">
+            <a:spAutoFit/>
+          </a:bodyPr>
+          <a:lstStyle/>
+          <a:p>
+            <a:pPr algn="l">
+              <a:lnSpc>
                 <a:spcPts val="1100"/>
               </a:lnSpc>
             </a:pPr>
@@ -16697,13 +16822,13 @@
       </p:sp>
       <p:sp>
         <p:nvSpPr>
-          <p:cNvPr id="8" name="TextBox 7"/>
+          <p:cNvPr id="10" name="TextBox 9"/>
           <p:cNvSpPr txBox="1"/>
           <p:nvPr/>
         </p:nvSpPr>
         <p:spPr>
           <a:xfrm>
-            <a:off x="1024127" y="2895600"/>
+            <a:off x="1024127" y="3779519"/>
             <a:ext cx="5604586" cy="1403350"/>
           </a:xfrm>
           <a:prstGeom prst="rect">
@@ -16731,7 +16856,7 @@
                 <a:cs typeface="GQ Text Bold"/>
                 <a:ea typeface="GQ Text Bold"/>
               </a:rPr>
-              <a:t>Қосымшаны қазақ тілі мұғалімдеріне</a:t>
+              <a:t>Қосымшаға сынақтан өткізетін сыныптар</a:t>
             </a:r>
           </a:p>
           <a:p>
@@ -16749,7 +16874,7 @@
                 <a:cs typeface="GQ Text Bold"/>
                 <a:ea typeface="GQ Text Bold"/>
               </a:rPr>
-              <a:t>тексертіп, нақты сыныпта сынап көру. Әрі</a:t>
+              <a:t>және курсты бағдарламаға дейін жеткізетін</a:t>
             </a:r>
           </a:p>
           <a:p>
@@ -16767,7 +16892,7 @@
                 <a:cs typeface="GQ Text Bold"/>
                 <a:ea typeface="GQ Text Bold"/>
               </a:rPr>
-              <a:t>қарай мен оны қанша қажет болса, сонша</a:t>
+              <a:t>әдіскер мұғалімдер керек. Әрі қарай</a:t>
             </a:r>
           </a:p>
           <a:p>
@@ -16785,20 +16910,20 @@
                 <a:cs typeface="GQ Text Bold"/>
                 <a:ea typeface="GQ Text Bold"/>
               </a:rPr>
-              <a:t>дамытуға дайынмын.</a:t>
-            </a:r>
-          </a:p>
-        </p:txBody>
-      </p:sp>
-      <p:sp>
-        <p:nvSpPr>
-          <p:cNvPr id="10" name="TextBox 9"/>
+              <a:t>дамытуға мен өзім дайынмын.</a:t>
+            </a:r>
+          </a:p>
+        </p:txBody>
+      </p:sp>
+      <p:sp>
+        <p:nvSpPr>
+          <p:cNvPr id="12" name="TextBox 11"/>
           <p:cNvSpPr txBox="1"/>
           <p:nvPr/>
         </p:nvSpPr>
         <p:spPr>
           <a:xfrm>
-            <a:off x="7378522" y="2619756"/>
+            <a:off x="7378522" y="3503675"/>
             <a:ext cx="3789045" cy="198374"/>
           </a:xfrm>
           <a:prstGeom prst="rect">
@@ -16826,20 +16951,20 @@
                 <a:cs typeface="IBM Plex Mono SemiBold"/>
                 <a:ea typeface="IBM Plex Mono SemiBold"/>
               </a:rPr>
-              <a:t>ДАМУ ЖОСПАРЫ</a:t>
-            </a:r>
-          </a:p>
-        </p:txBody>
-      </p:sp>
-      <p:sp>
-        <p:nvSpPr>
-          <p:cNvPr id="11" name="TextBox 10"/>
+              <a:t>АУҚЫМДЫ ДАМУ</a:t>
+            </a:r>
+          </a:p>
+        </p:txBody>
+      </p:sp>
+      <p:sp>
+        <p:nvSpPr>
+          <p:cNvPr id="13" name="TextBox 12"/>
           <p:cNvSpPr txBox="1"/>
           <p:nvPr/>
         </p:nvSpPr>
         <p:spPr>
           <a:xfrm>
-            <a:off x="7378522" y="2933395"/>
+            <a:off x="7378522" y="3817315"/>
             <a:ext cx="210566" cy="277723"/>
           </a:xfrm>
           <a:prstGeom prst="rect">
@@ -16874,13 +16999,13 @@
       </p:sp>
       <p:sp>
         <p:nvSpPr>
-          <p:cNvPr id="12" name="TextBox 11"/>
+          <p:cNvPr id="14" name="TextBox 13"/>
           <p:cNvSpPr txBox="1"/>
           <p:nvPr/>
         </p:nvSpPr>
         <p:spPr>
           <a:xfrm>
-            <a:off x="7589088" y="2933395"/>
+            <a:off x="7589088" y="3817315"/>
             <a:ext cx="3578479" cy="277723"/>
           </a:xfrm>
           <a:prstGeom prst="rect">
@@ -16908,20 +17033,20 @@
                 <a:cs typeface="GQ Text"/>
                 <a:ea typeface="GQ Text"/>
               </a:rPr>
-              <a:t>Бүкіл қазақ мәтінін мұғалімнің тексеруі</a:t>
-            </a:r>
-          </a:p>
-        </p:txBody>
-      </p:sp>
-      <p:sp>
-        <p:nvSpPr>
-          <p:cNvPr id="13" name="TextBox 12"/>
+              <a:t>5–11 сыныпқа арналған толық курс</a:t>
+            </a:r>
+          </a:p>
+        </p:txBody>
+      </p:sp>
+      <p:sp>
+        <p:nvSpPr>
+          <p:cNvPr id="15" name="TextBox 14"/>
           <p:cNvSpPr txBox="1"/>
           <p:nvPr/>
         </p:nvSpPr>
         <p:spPr>
           <a:xfrm>
-            <a:off x="7378522" y="3266135"/>
+            <a:off x="7378522" y="4131767"/>
             <a:ext cx="210566" cy="277723"/>
           </a:xfrm>
           <a:prstGeom prst="rect">
@@ -16956,14 +17081,14 @@
       </p:sp>
       <p:sp>
         <p:nvSpPr>
-          <p:cNvPr id="14" name="TextBox 13"/>
+          <p:cNvPr id="16" name="TextBox 15"/>
           <p:cNvSpPr txBox="1"/>
           <p:nvPr/>
         </p:nvSpPr>
         <p:spPr>
           <a:xfrm>
-            <a:off x="7589088" y="3266135"/>
-            <a:ext cx="3578479" cy="277723"/>
+            <a:off x="7589088" y="4131767"/>
+            <a:ext cx="3578479" cy="473303"/>
           </a:xfrm>
           <a:prstGeom prst="rect">
             <a:avLst/>
@@ -16990,20 +17115,38 @@
                 <a:cs typeface="GQ Text"/>
                 <a:ea typeface="GQ Text"/>
               </a:rPr>
-              <a:t>Сыныпта сынақтан өткізу және нақты сандар</a:t>
-            </a:r>
-          </a:p>
-        </p:txBody>
-      </p:sp>
-      <p:sp>
-        <p:nvSpPr>
-          <p:cNvPr id="15" name="TextBox 14"/>
+              <a:t>Дыбыстау: ана тілі иесінің дауысымен 589 сөз</a:t>
+            </a:r>
+          </a:p>
+          <a:p>
+            <a:pPr algn="l">
+              <a:lnSpc>
+                <a:spcPts val="1540"/>
+              </a:lnSpc>
+            </a:pPr>
+            <a:r>
+              <a:rPr sz="1100">
+                <a:solidFill>
+                  <a:srgbClr val="EEEBE5"/>
+                </a:solidFill>
+                <a:latin typeface="GQ Text"/>
+                <a:cs typeface="GQ Text"/>
+                <a:ea typeface="GQ Text"/>
+              </a:rPr>
+              <a:t>тіркесі</a:t>
+            </a:r>
+          </a:p>
+        </p:txBody>
+      </p:sp>
+      <p:sp>
+        <p:nvSpPr>
+          <p:cNvPr id="17" name="TextBox 16"/>
           <p:cNvSpPr txBox="1"/>
           <p:nvPr/>
         </p:nvSpPr>
         <p:spPr>
           <a:xfrm>
-            <a:off x="7378522" y="3598875"/>
+            <a:off x="7378522" y="4641799"/>
             <a:ext cx="210566" cy="277723"/>
           </a:xfrm>
           <a:prstGeom prst="rect">
@@ -17038,14 +17181,14 @@
       </p:sp>
       <p:sp>
         <p:nvSpPr>
-          <p:cNvPr id="16" name="TextBox 15"/>
+          <p:cNvPr id="18" name="TextBox 17"/>
           <p:cNvSpPr txBox="1"/>
           <p:nvPr/>
         </p:nvSpPr>
         <p:spPr>
           <a:xfrm>
-            <a:off x="7589088" y="3598875"/>
-            <a:ext cx="3578479" cy="473303"/>
+            <a:off x="7589088" y="4641799"/>
+            <a:ext cx="3578479" cy="277723"/>
           </a:xfrm>
           <a:prstGeom prst="rect">
             <a:avLst/>
@@ -17072,9 +17215,73 @@
                 <a:cs typeface="GQ Text"/>
                 <a:ea typeface="GQ Text"/>
               </a:rPr>
-              <a:t>Дыбыстау: ана тілі иесінің дауысымен 589 сөз</a:t>
-            </a:r>
-          </a:p>
+              <a:t>Мұғалім кабинеті: сынып, тапсырма, үлгерім</a:t>
+            </a:r>
+          </a:p>
+        </p:txBody>
+      </p:sp>
+      <p:sp>
+        <p:nvSpPr>
+          <p:cNvPr id="19" name="TextBox 18"/>
+          <p:cNvSpPr txBox="1"/>
+          <p:nvPr/>
+        </p:nvSpPr>
+        <p:spPr>
+          <a:xfrm>
+            <a:off x="7378522" y="4956251"/>
+            <a:ext cx="210566" cy="277723"/>
+          </a:xfrm>
+          <a:prstGeom prst="rect">
+            <a:avLst/>
+          </a:prstGeom>
+          <a:noFill/>
+        </p:spPr>
+        <p:txBody>
+          <a:bodyPr wrap="none" lIns="0" rIns="0" tIns="0" bIns="0" anchor="t">
+            <a:spAutoFit/>
+          </a:bodyPr>
+          <a:lstStyle/>
+          <a:p>
+            <a:pPr algn="l">
+              <a:lnSpc>
+                <a:spcPts val="1540"/>
+              </a:lnSpc>
+            </a:pPr>
+            <a:r>
+              <a:rPr sz="1100">
+                <a:solidFill>
+                  <a:srgbClr val="59AAF8"/>
+                </a:solidFill>
+                <a:latin typeface="IBM Plex Mono Medium"/>
+                <a:cs typeface="IBM Plex Mono Medium"/>
+                <a:ea typeface="IBM Plex Mono Medium"/>
+              </a:rPr>
+              <a:t>—</a:t>
+            </a:r>
+          </a:p>
+        </p:txBody>
+      </p:sp>
+      <p:sp>
+        <p:nvSpPr>
+          <p:cNvPr id="20" name="TextBox 19"/>
+          <p:cNvSpPr txBox="1"/>
+          <p:nvPr/>
+        </p:nvSpPr>
+        <p:spPr>
+          <a:xfrm>
+            <a:off x="7589088" y="4956251"/>
+            <a:ext cx="3578479" cy="277723"/>
+          </a:xfrm>
+          <a:prstGeom prst="rect">
+            <a:avLst/>
+          </a:prstGeom>
+          <a:noFill/>
+        </p:spPr>
+        <p:txBody>
+          <a:bodyPr wrap="none" lIns="0" rIns="0" tIns="0" bIns="0" anchor="t">
+            <a:spAutoFit/>
+          </a:bodyPr>
+          <a:lstStyle/>
           <a:p>
             <a:pPr algn="l">
               <a:lnSpc>
@@ -17090,20 +17297,20 @@
                 <a:cs typeface="GQ Text"/>
                 <a:ea typeface="GQ Text"/>
               </a:rPr>
-              <a:t>тіркесі</a:t>
-            </a:r>
-          </a:p>
-        </p:txBody>
-      </p:sp>
-      <p:sp>
-        <p:nvSpPr>
-          <p:cNvPr id="17" name="TextBox 16"/>
+              <a:t>Орыс тілін оқитын мектептерге нұсқа</a:t>
+            </a:r>
+          </a:p>
+        </p:txBody>
+      </p:sp>
+      <p:sp>
+        <p:nvSpPr>
+          <p:cNvPr id="21" name="TextBox 20"/>
           <p:cNvSpPr txBox="1"/>
           <p:nvPr/>
         </p:nvSpPr>
         <p:spPr>
           <a:xfrm>
-            <a:off x="7378522" y="4127195"/>
+            <a:off x="7378522" y="5270703"/>
             <a:ext cx="210566" cy="277723"/>
           </a:xfrm>
           <a:prstGeom prst="rect">
@@ -17138,13 +17345,13 @@
       </p:sp>
       <p:sp>
         <p:nvSpPr>
-          <p:cNvPr id="18" name="TextBox 17"/>
+          <p:cNvPr id="22" name="TextBox 21"/>
           <p:cNvSpPr txBox="1"/>
           <p:nvPr/>
         </p:nvSpPr>
         <p:spPr>
           <a:xfrm>
-            <a:off x="7589088" y="4127195"/>
+            <a:off x="7589088" y="5270703"/>
             <a:ext cx="3578479" cy="277723"/>
           </a:xfrm>
           <a:prstGeom prst="rect">
@@ -17172,20 +17379,20 @@
                 <a:cs typeface="GQ Text"/>
                 <a:ea typeface="GQ Text"/>
               </a:rPr>
-              <a:t>Жаңа сабақтар және ауызекі тақырыптар</a:t>
-            </a:r>
-          </a:p>
-        </p:txBody>
-      </p:sp>
-      <p:sp>
-        <p:nvSpPr>
-          <p:cNvPr id="19" name="TextBox 18"/>
+              <a:t>Google Play және App Store-да жариялау</a:t>
+            </a:r>
+          </a:p>
+        </p:txBody>
+      </p:sp>
+      <p:sp>
+        <p:nvSpPr>
+          <p:cNvPr id="23" name="TextBox 22"/>
           <p:cNvSpPr txBox="1"/>
           <p:nvPr/>
         </p:nvSpPr>
         <p:spPr>
           <a:xfrm>
-            <a:off x="7378522" y="4459935"/>
+            <a:off x="7378522" y="5585155"/>
             <a:ext cx="210566" cy="277723"/>
           </a:xfrm>
           <a:prstGeom prst="rect">
@@ -17220,14 +17427,14 @@
       </p:sp>
       <p:sp>
         <p:nvSpPr>
-          <p:cNvPr id="20" name="TextBox 19"/>
+          <p:cNvPr id="24" name="TextBox 23"/>
           <p:cNvSpPr txBox="1"/>
           <p:nvPr/>
         </p:nvSpPr>
         <p:spPr>
           <a:xfrm>
-            <a:off x="7589088" y="4459935"/>
-            <a:ext cx="3578479" cy="473303"/>
+            <a:off x="7589088" y="5585155"/>
+            <a:ext cx="3578479" cy="277723"/>
           </a:xfrm>
           <a:prstGeom prst="rect">
             <a:avLst/>
@@ -17254,32 +17461,14 @@
                 <a:cs typeface="GQ Text"/>
                 <a:ea typeface="GQ Text"/>
               </a:rPr>
-              <a:t>Орыс тілін оқитын қазақ мектептеріне арналған</a:t>
-            </a:r>
-          </a:p>
-          <a:p>
-            <a:pPr algn="l">
-              <a:lnSpc>
-                <a:spcPts val="1540"/>
-              </a:lnSpc>
-            </a:pPr>
-            <a:r>
-              <a:rPr sz="1100">
-                <a:solidFill>
-                  <a:srgbClr val="EEEBE5"/>
-                </a:solidFill>
-                <a:latin typeface="GQ Text"/>
-                <a:cs typeface="GQ Text"/>
-                <a:ea typeface="GQ Text"/>
-              </a:rPr>
-              <a:t>нұсқа</a:t>
-            </a:r>
-          </a:p>
-        </p:txBody>
-      </p:sp>
-      <p:sp>
-        <p:nvSpPr>
-          <p:cNvPr id="22" name="TextBox 21"/>
+              <a:t>Кез келген мектепке тегін қолжетімділік</a:t>
+            </a:r>
+          </a:p>
+        </p:txBody>
+      </p:sp>
+      <p:sp>
+        <p:nvSpPr>
+          <p:cNvPr id="26" name="TextBox 25"/>
           <p:cNvSpPr txBox="1"/>
           <p:nvPr/>
         </p:nvSpPr>

--- a/презентация/Тілашар-қорғау.pptx
+++ b/презентация/Тілашар-қорғау.pptx
@@ -11229,7 +11229,7 @@
                 <a:cs typeface="GQ Text SemiBold"/>
                 <a:ea typeface="GQ Text SemiBold"/>
               </a:rPr>
-              <a:t>он минөт аптасына бір рет отыратын екі сағаттан көп</a:t>
+              <a:t>он минут аптасына бір рет отыратын екі сағаттан көп</a:t>
             </a:r>
           </a:p>
           <a:p>
@@ -13080,7 +13080,7 @@
                 <a:cs typeface="GQ Text"/>
                 <a:ea typeface="GQ Text"/>
               </a:rPr>
-              <a:t> Тапсырмаларым бойынша код жазды — мен</a:t>
+              <a:t> Код жазды — мен тапсырма қойып, нәтижені</a:t>
             </a:r>
           </a:p>
           <a:p>
@@ -13098,7 +13098,7 @@
                 <a:cs typeface="GQ Text"/>
                 <a:ea typeface="GQ Text"/>
               </a:rPr>
-              <a:t>тапсырма қойып, нәтижені тексердім.</a:t>
+              <a:t>тексердім.</a:t>
             </a:r>
           </a:p>
         </p:txBody>
@@ -13600,7 +13600,7 @@
                 <a:cs typeface="GQ Text"/>
                 <a:ea typeface="GQ Text"/>
               </a:rPr>
-              <a:t>Түстер контрастына 28 тексеру</a:t>
+              <a:t>Түстер контрастына 36 тексеру</a:t>
             </a:r>
           </a:p>
         </p:txBody>

--- a/презентация/Тілашар-қорғау.pptx
+++ b/презентация/Тілашар-қорғау.pptx
@@ -12277,7 +12277,7 @@
         <p:spPr>
           <a:xfrm>
             <a:off x="749808" y="4103052"/>
-            <a:ext cx="10692079" cy="710247"/>
+            <a:ext cx="10692079" cy="940435"/>
           </a:xfrm>
           <a:prstGeom prst="rect">
             <a:avLst/>
@@ -12307,7 +12307,7 @@
         <p:spPr>
           <a:xfrm>
             <a:off x="1024127" y="4302137"/>
-            <a:ext cx="10143439" cy="345281"/>
+            <a:ext cx="10143439" cy="575468"/>
           </a:xfrm>
           <a:prstGeom prst="rect">
             <a:avLst/>
@@ -12334,7 +12334,25 @@
                 <a:cs typeface="GQ Text SemiBold"/>
                 <a:ea typeface="GQ Text SemiBold"/>
               </a:rPr>
-              <a:t>Ірі түймелер, әр қатеден кейінгі түсіндірме, кез келген жерден негізгі экранға оралу, ашық және қараңғы тақырып.</a:t>
+              <a:t>Қазақ дауыстарымен 623 жазба, тірі кейіпкерлер, ірі түймелер, әр қатені талдау және кез келген жерден негізгі экранға</a:t>
+            </a:r>
+          </a:p>
+          <a:p>
+            <a:pPr algn="l">
+              <a:lnSpc>
+                <a:spcPts val="1812"/>
+              </a:lnSpc>
+            </a:pPr>
+            <a:r>
+              <a:rPr sz="1250">
+                <a:solidFill>
+                  <a:srgbClr val="FFFFFF"/>
+                </a:solidFill>
+                <a:latin typeface="GQ Text SemiBold"/>
+                <a:cs typeface="GQ Text SemiBold"/>
+                <a:ea typeface="GQ Text SemiBold"/>
+              </a:rPr>
+              <a:t>оралу.</a:t>
             </a:r>
           </a:p>
         </p:txBody>
@@ -12347,7 +12365,7 @@
         </p:nvSpPr>
         <p:spPr>
           <a:xfrm>
-            <a:off x="749808" y="5275945"/>
+            <a:off x="749808" y="5506133"/>
             <a:ext cx="2383219" cy="600892"/>
           </a:xfrm>
           <a:prstGeom prst="rect">
@@ -12388,7 +12406,7 @@
         </p:nvSpPr>
         <p:spPr>
           <a:xfrm>
-            <a:off x="749808" y="5833872"/>
+            <a:off x="749808" y="6064059"/>
             <a:ext cx="2383219" cy="216408"/>
           </a:xfrm>
           <a:prstGeom prst="rect">
@@ -12429,7 +12447,7 @@
         </p:nvSpPr>
         <p:spPr>
           <a:xfrm>
-            <a:off x="3407347" y="5275945"/>
+            <a:off x="3407347" y="5506133"/>
             <a:ext cx="2383219" cy="600892"/>
           </a:xfrm>
           <a:prstGeom prst="rect">
@@ -12470,7 +12488,7 @@
         </p:nvSpPr>
         <p:spPr>
           <a:xfrm>
-            <a:off x="3407347" y="5833872"/>
+            <a:off x="3407347" y="6064059"/>
             <a:ext cx="2383219" cy="216408"/>
           </a:xfrm>
           <a:prstGeom prst="rect">
@@ -12511,7 +12529,7 @@
         </p:nvSpPr>
         <p:spPr>
           <a:xfrm>
-            <a:off x="6064886" y="5275945"/>
+            <a:off x="6064886" y="5506133"/>
             <a:ext cx="2383219" cy="600892"/>
           </a:xfrm>
           <a:prstGeom prst="rect">
@@ -12552,7 +12570,7 @@
         </p:nvSpPr>
         <p:spPr>
           <a:xfrm>
-            <a:off x="6064886" y="5833872"/>
+            <a:off x="6064886" y="6064059"/>
             <a:ext cx="2383219" cy="216408"/>
           </a:xfrm>
           <a:prstGeom prst="rect">
@@ -15343,7 +15361,7 @@
                 <a:cs typeface="GQ Text Bold"/>
                 <a:ea typeface="GQ Text Bold"/>
               </a:rPr>
-              <a:t>Интернетсіз жұмыс</a:t>
+              <a:t>Сөйлейді және</a:t>
             </a:r>
           </a:p>
           <a:p>
@@ -15361,7 +15379,7 @@
                 <a:cs typeface="GQ Text Bold"/>
                 <a:ea typeface="GQ Text Bold"/>
               </a:rPr>
-              <a:t>істейді</a:t>
+              <a:t>тыңдатады</a:t>
             </a:r>
           </a:p>
         </p:txBody>
@@ -15416,7 +15434,7 @@
         <p:spPr>
           <a:xfrm>
             <a:off x="9379991" y="3392678"/>
-            <a:ext cx="1805863" cy="252475"/>
+            <a:ext cx="1805863" cy="430276"/>
           </a:xfrm>
           <a:prstGeom prst="rect">
             <a:avLst/>
@@ -15443,7 +15461,25 @@
                 <a:cs typeface="GQ Text"/>
                 <a:ea typeface="GQ Text"/>
               </a:rPr>
-              <a:t>Бір рет жүктеледі</a:t>
+              <a:t>Қазақ дауыстарымен 623</a:t>
+            </a:r>
+          </a:p>
+          <a:p>
+            <a:pPr algn="l">
+              <a:lnSpc>
+                <a:spcPts val="1400"/>
+              </a:lnSpc>
+            </a:pPr>
+            <a:r>
+              <a:rPr sz="1000">
+                <a:solidFill>
+                  <a:srgbClr val="EEEBE5"/>
+                </a:solidFill>
+                <a:latin typeface="GQ Text"/>
+                <a:cs typeface="GQ Text"/>
+                <a:ea typeface="GQ Text"/>
+              </a:rPr>
+              <a:t>жазба</a:t>
             </a:r>
           </a:p>
         </p:txBody>
@@ -15456,7 +15492,7 @@
         </p:nvSpPr>
         <p:spPr>
           <a:xfrm>
-            <a:off x="9175775" y="3671062"/>
+            <a:off x="9175775" y="3848862"/>
             <a:ext cx="204216" cy="252475"/>
           </a:xfrm>
           <a:prstGeom prst="rect">
@@ -15497,7 +15533,7 @@
         </p:nvSpPr>
         <p:spPr>
           <a:xfrm>
-            <a:off x="9379991" y="3671062"/>
+            <a:off x="9379991" y="3848862"/>
             <a:ext cx="1805863" cy="430276"/>
           </a:xfrm>
           <a:prstGeom prst="rect">
@@ -15525,7 +15561,7 @@
                 <a:cs typeface="GQ Text"/>
                 <a:ea typeface="GQ Text"/>
               </a:rPr>
-              <a:t>Әрі қарай кез келген жерде</a:t>
+              <a:t>Реплика естіліп тұрғанда</a:t>
             </a:r>
           </a:p>
           <a:p>
@@ -15543,7 +15579,7 @@
                 <a:cs typeface="GQ Text"/>
                 <a:ea typeface="GQ Text"/>
               </a:rPr>
-              <a:t>шұғылдан</a:t>
+              <a:t>кейіпкер қозғалады</a:t>
             </a:r>
           </a:p>
         </p:txBody>
@@ -15614,7 +15650,7 @@
                 <a:cs typeface="GQ Text SemiBold"/>
                 <a:ea typeface="GQ Text SemiBold"/>
               </a:rPr>
-              <a:t>Мұның бәрі әр жаңартуда автотесттермен тексеріледі: байқаусыз бұзу мүмкін емес.</a:t>
+              <a:t>Және бұның бәрі интернетсіз жұмыс істейді: алғашқы жүктеуден кейін қосымша желіге бірде-бір сұрау жібермейді.</a:t>
             </a:r>
           </a:p>
         </p:txBody>
@@ -16176,7 +16212,7 @@
                 <a:cs typeface="GQ Text Bold"/>
                 <a:ea typeface="GQ Text Bold"/>
               </a:rPr>
-              <a:t>202</a:t>
+              <a:t>210</a:t>
             </a:r>
           </a:p>
         </p:txBody>
@@ -16484,7 +16520,7 @@
         <p:spPr>
           <a:xfrm>
             <a:off x="7104202" y="3251707"/>
-            <a:ext cx="4337684" cy="2834639"/>
+            <a:ext cx="4337684" cy="2639059"/>
           </a:xfrm>
           <a:prstGeom prst="rect">
             <a:avLst/>
@@ -17088,7 +17124,7 @@
         <p:spPr>
           <a:xfrm>
             <a:off x="7589088" y="4131767"/>
-            <a:ext cx="3578479" cy="473303"/>
+            <a:ext cx="3578479" cy="277723"/>
           </a:xfrm>
           <a:prstGeom prst="rect">
             <a:avLst/>
@@ -17115,9 +17151,73 @@
                 <a:cs typeface="GQ Text"/>
                 <a:ea typeface="GQ Text"/>
               </a:rPr>
-              <a:t>Дыбыстау: ана тілі иесінің дауысымен 589 сөз</a:t>
-            </a:r>
-          </a:p>
+              <a:t>Ана тілі иесінің тірі дауысымен жазба</a:t>
+            </a:r>
+          </a:p>
+        </p:txBody>
+      </p:sp>
+      <p:sp>
+        <p:nvSpPr>
+          <p:cNvPr id="17" name="TextBox 16"/>
+          <p:cNvSpPr txBox="1"/>
+          <p:nvPr/>
+        </p:nvSpPr>
+        <p:spPr>
+          <a:xfrm>
+            <a:off x="7378522" y="4446219"/>
+            <a:ext cx="210566" cy="277723"/>
+          </a:xfrm>
+          <a:prstGeom prst="rect">
+            <a:avLst/>
+          </a:prstGeom>
+          <a:noFill/>
+        </p:spPr>
+        <p:txBody>
+          <a:bodyPr wrap="none" lIns="0" rIns="0" tIns="0" bIns="0" anchor="t">
+            <a:spAutoFit/>
+          </a:bodyPr>
+          <a:lstStyle/>
+          <a:p>
+            <a:pPr algn="l">
+              <a:lnSpc>
+                <a:spcPts val="1540"/>
+              </a:lnSpc>
+            </a:pPr>
+            <a:r>
+              <a:rPr sz="1100">
+                <a:solidFill>
+                  <a:srgbClr val="59AAF8"/>
+                </a:solidFill>
+                <a:latin typeface="IBM Plex Mono Medium"/>
+                <a:cs typeface="IBM Plex Mono Medium"/>
+                <a:ea typeface="IBM Plex Mono Medium"/>
+              </a:rPr>
+              <a:t>—</a:t>
+            </a:r>
+          </a:p>
+        </p:txBody>
+      </p:sp>
+      <p:sp>
+        <p:nvSpPr>
+          <p:cNvPr id="18" name="TextBox 17"/>
+          <p:cNvSpPr txBox="1"/>
+          <p:nvPr/>
+        </p:nvSpPr>
+        <p:spPr>
+          <a:xfrm>
+            <a:off x="7589088" y="4446219"/>
+            <a:ext cx="3578479" cy="277723"/>
+          </a:xfrm>
+          <a:prstGeom prst="rect">
+            <a:avLst/>
+          </a:prstGeom>
+          <a:noFill/>
+        </p:spPr>
+        <p:txBody>
+          <a:bodyPr wrap="none" lIns="0" rIns="0" tIns="0" bIns="0" anchor="t">
+            <a:spAutoFit/>
+          </a:bodyPr>
+          <a:lstStyle/>
           <a:p>
             <a:pPr algn="l">
               <a:lnSpc>
@@ -17133,20 +17233,20 @@
                 <a:cs typeface="GQ Text"/>
                 <a:ea typeface="GQ Text"/>
               </a:rPr>
-              <a:t>тіркесі</a:t>
-            </a:r>
-          </a:p>
-        </p:txBody>
-      </p:sp>
-      <p:sp>
-        <p:nvSpPr>
-          <p:cNvPr id="17" name="TextBox 16"/>
+              <a:t>Мұғалім кабинеті: сынып, тапсырма, үлгерім</a:t>
+            </a:r>
+          </a:p>
+        </p:txBody>
+      </p:sp>
+      <p:sp>
+        <p:nvSpPr>
+          <p:cNvPr id="19" name="TextBox 18"/>
           <p:cNvSpPr txBox="1"/>
           <p:nvPr/>
         </p:nvSpPr>
         <p:spPr>
           <a:xfrm>
-            <a:off x="7378522" y="4641799"/>
+            <a:off x="7378522" y="4760671"/>
             <a:ext cx="210566" cy="277723"/>
           </a:xfrm>
           <a:prstGeom prst="rect">
@@ -17181,13 +17281,13 @@
       </p:sp>
       <p:sp>
         <p:nvSpPr>
-          <p:cNvPr id="18" name="TextBox 17"/>
+          <p:cNvPr id="20" name="TextBox 19"/>
           <p:cNvSpPr txBox="1"/>
           <p:nvPr/>
         </p:nvSpPr>
         <p:spPr>
           <a:xfrm>
-            <a:off x="7589088" y="4641799"/>
+            <a:off x="7589088" y="4760671"/>
             <a:ext cx="3578479" cy="277723"/>
           </a:xfrm>
           <a:prstGeom prst="rect">
@@ -17215,20 +17315,20 @@
                 <a:cs typeface="GQ Text"/>
                 <a:ea typeface="GQ Text"/>
               </a:rPr>
-              <a:t>Мұғалім кабинеті: сынып, тапсырма, үлгерім</a:t>
-            </a:r>
-          </a:p>
-        </p:txBody>
-      </p:sp>
-      <p:sp>
-        <p:nvSpPr>
-          <p:cNvPr id="19" name="TextBox 18"/>
+              <a:t>Орыс тілін оқитын мектептерге нұсқа</a:t>
+            </a:r>
+          </a:p>
+        </p:txBody>
+      </p:sp>
+      <p:sp>
+        <p:nvSpPr>
+          <p:cNvPr id="21" name="TextBox 20"/>
           <p:cNvSpPr txBox="1"/>
           <p:nvPr/>
         </p:nvSpPr>
         <p:spPr>
           <a:xfrm>
-            <a:off x="7378522" y="4956251"/>
+            <a:off x="7378522" y="5075123"/>
             <a:ext cx="210566" cy="277723"/>
           </a:xfrm>
           <a:prstGeom prst="rect">
@@ -17263,13 +17363,13 @@
       </p:sp>
       <p:sp>
         <p:nvSpPr>
-          <p:cNvPr id="20" name="TextBox 19"/>
+          <p:cNvPr id="22" name="TextBox 21"/>
           <p:cNvSpPr txBox="1"/>
           <p:nvPr/>
         </p:nvSpPr>
         <p:spPr>
           <a:xfrm>
-            <a:off x="7589088" y="4956251"/>
+            <a:off x="7589088" y="5075123"/>
             <a:ext cx="3578479" cy="277723"/>
           </a:xfrm>
           <a:prstGeom prst="rect">
@@ -17297,20 +17397,20 @@
                 <a:cs typeface="GQ Text"/>
                 <a:ea typeface="GQ Text"/>
               </a:rPr>
-              <a:t>Орыс тілін оқитын мектептерге нұсқа</a:t>
-            </a:r>
-          </a:p>
-        </p:txBody>
-      </p:sp>
-      <p:sp>
-        <p:nvSpPr>
-          <p:cNvPr id="21" name="TextBox 20"/>
+              <a:t>Google Play және App Store-да жариялау</a:t>
+            </a:r>
+          </a:p>
+        </p:txBody>
+      </p:sp>
+      <p:sp>
+        <p:nvSpPr>
+          <p:cNvPr id="23" name="TextBox 22"/>
           <p:cNvSpPr txBox="1"/>
           <p:nvPr/>
         </p:nvSpPr>
         <p:spPr>
           <a:xfrm>
-            <a:off x="7378522" y="5270703"/>
+            <a:off x="7378522" y="5389575"/>
             <a:ext cx="210566" cy="277723"/>
           </a:xfrm>
           <a:prstGeom prst="rect">
@@ -17345,95 +17445,13 @@
       </p:sp>
       <p:sp>
         <p:nvSpPr>
-          <p:cNvPr id="22" name="TextBox 21"/>
-          <p:cNvSpPr txBox="1"/>
-          <p:nvPr/>
-        </p:nvSpPr>
-        <p:spPr>
-          <a:xfrm>
-            <a:off x="7589088" y="5270703"/>
-            <a:ext cx="3578479" cy="277723"/>
-          </a:xfrm>
-          <a:prstGeom prst="rect">
-            <a:avLst/>
-          </a:prstGeom>
-          <a:noFill/>
-        </p:spPr>
-        <p:txBody>
-          <a:bodyPr wrap="none" lIns="0" rIns="0" tIns="0" bIns="0" anchor="t">
-            <a:spAutoFit/>
-          </a:bodyPr>
-          <a:lstStyle/>
-          <a:p>
-            <a:pPr algn="l">
-              <a:lnSpc>
-                <a:spcPts val="1540"/>
-              </a:lnSpc>
-            </a:pPr>
-            <a:r>
-              <a:rPr sz="1100">
-                <a:solidFill>
-                  <a:srgbClr val="EEEBE5"/>
-                </a:solidFill>
-                <a:latin typeface="GQ Text"/>
-                <a:cs typeface="GQ Text"/>
-                <a:ea typeface="GQ Text"/>
-              </a:rPr>
-              <a:t>Google Play және App Store-да жариялау</a:t>
-            </a:r>
-          </a:p>
-        </p:txBody>
-      </p:sp>
-      <p:sp>
-        <p:nvSpPr>
-          <p:cNvPr id="23" name="TextBox 22"/>
-          <p:cNvSpPr txBox="1"/>
-          <p:nvPr/>
-        </p:nvSpPr>
-        <p:spPr>
-          <a:xfrm>
-            <a:off x="7378522" y="5585155"/>
-            <a:ext cx="210566" cy="277723"/>
-          </a:xfrm>
-          <a:prstGeom prst="rect">
-            <a:avLst/>
-          </a:prstGeom>
-          <a:noFill/>
-        </p:spPr>
-        <p:txBody>
-          <a:bodyPr wrap="none" lIns="0" rIns="0" tIns="0" bIns="0" anchor="t">
-            <a:spAutoFit/>
-          </a:bodyPr>
-          <a:lstStyle/>
-          <a:p>
-            <a:pPr algn="l">
-              <a:lnSpc>
-                <a:spcPts val="1540"/>
-              </a:lnSpc>
-            </a:pPr>
-            <a:r>
-              <a:rPr sz="1100">
-                <a:solidFill>
-                  <a:srgbClr val="59AAF8"/>
-                </a:solidFill>
-                <a:latin typeface="IBM Plex Mono Medium"/>
-                <a:cs typeface="IBM Plex Mono Medium"/>
-                <a:ea typeface="IBM Plex Mono Medium"/>
-              </a:rPr>
-              <a:t>—</a:t>
-            </a:r>
-          </a:p>
-        </p:txBody>
-      </p:sp>
-      <p:sp>
-        <p:nvSpPr>
           <p:cNvPr id="24" name="TextBox 23"/>
           <p:cNvSpPr txBox="1"/>
           <p:nvPr/>
         </p:nvSpPr>
         <p:spPr>
           <a:xfrm>
-            <a:off x="7589088" y="5585155"/>
+            <a:off x="7589088" y="5389575"/>
             <a:ext cx="3578479" cy="277723"/>
           </a:xfrm>
           <a:prstGeom prst="rect">

--- a/презентация/Тілашар-қорғау.pptx
+++ b/презентация/Тілашар-қорғау.pptx
@@ -16130,7 +16130,7 @@
                 <a:cs typeface="IBM Plex Mono SemiBold"/>
                 <a:ea typeface="IBM Plex Mono SemiBold"/>
               </a:rPr>
-              <a:t>ANDROID ФАЙЛЫМЕН</a:t>
+              <a:t>ТЕЛЕФОНҒА ЖӘНЕ КОМПЬЮТЕРГЕ ФАЙЛМЕН</a:t>
             </a:r>
           </a:p>
         </p:txBody>
@@ -16171,7 +16171,7 @@
                 <a:cs typeface="GQ Text"/>
                 <a:ea typeface="GQ Text"/>
               </a:rPr>
-              <a:t>Дайын файл осында: github.com/s-chaikovskiy/grammarquest-web/releases</a:t>
+              <a:t>Android және Windows — осында: github.com/s-chaikovskiy/grammarquest-web/releases</a:t>
             </a:r>
           </a:p>
         </p:txBody>

--- a/презентация/Тілашар-қорғау.pptx
+++ b/презентация/Тілашар-қорғау.pptx
@@ -16519,7 +16519,7 @@
         </p:nvSpPr>
         <p:spPr>
           <a:xfrm>
-            <a:off x="7104202" y="3251707"/>
+            <a:off x="7104202" y="3472687"/>
             <a:ext cx="4337684" cy="2639059"/>
           </a:xfrm>
           <a:prstGeom prst="rect">
@@ -16551,8 +16551,8 @@
         </p:nvSpPr>
         <p:spPr>
           <a:xfrm>
-            <a:off x="749808" y="3251707"/>
-            <a:ext cx="6153226" cy="2122932"/>
+            <a:off x="749808" y="3472687"/>
+            <a:ext cx="6153226" cy="2122931"/>
           </a:xfrm>
           <a:prstGeom prst="rect">
             <a:avLst/>
@@ -16753,7 +16753,7 @@
         <p:spPr>
           <a:xfrm>
             <a:off x="749808" y="2203195"/>
-            <a:ext cx="10692079" cy="701040"/>
+            <a:ext cx="10692079" cy="922020"/>
           </a:xfrm>
           <a:prstGeom prst="rect">
             <a:avLst/>
@@ -16783,7 +16783,7 @@
         <p:spPr>
           <a:xfrm>
             <a:off x="1024127" y="2403754"/>
-            <a:ext cx="10143439" cy="331470"/>
+            <a:ext cx="10143439" cy="552450"/>
           </a:xfrm>
           <a:prstGeom prst="rect">
             <a:avLst/>
@@ -16810,7 +16810,25 @@
                 <a:cs typeface="GQ Text SemiBold"/>
                 <a:ea typeface="GQ Text SemiBold"/>
               </a:rPr>
-              <a:t>Қазірдің өзінде: мәтіндерді мұғалім тексерді · қосымшаны сыныптастар қолданып көрді · сайт жұмыс істеп тұр</a:t>
+              <a:t>Қазірдің өзінде: 26 сабақ және 623 дыбыс жазбасы · интернетсіз жұмыс істейді — телефонда да, компьютерде де · сайт барлығына</a:t>
+            </a:r>
+          </a:p>
+          <a:p>
+            <a:pPr algn="l">
+              <a:lnSpc>
+                <a:spcPts val="1740"/>
+              </a:lnSpc>
+            </a:pPr>
+            <a:r>
+              <a:rPr sz="1200">
+                <a:solidFill>
+                  <a:srgbClr val="FFFFFF"/>
+                </a:solidFill>
+                <a:latin typeface="GQ Text SemiBold"/>
+                <a:cs typeface="GQ Text SemiBold"/>
+                <a:ea typeface="GQ Text SemiBold"/>
+              </a:rPr>
+              <a:t>ашық</a:t>
             </a:r>
           </a:p>
         </p:txBody>
@@ -16823,7 +16841,7 @@
         </p:nvSpPr>
         <p:spPr>
           <a:xfrm>
-            <a:off x="1024127" y="3503675"/>
+            <a:off x="1024127" y="3724655"/>
             <a:ext cx="5604586" cy="198374"/>
           </a:xfrm>
           <a:prstGeom prst="rect">
@@ -16864,7 +16882,7 @@
         </p:nvSpPr>
         <p:spPr>
           <a:xfrm>
-            <a:off x="1024127" y="3779519"/>
+            <a:off x="1024127" y="4000499"/>
             <a:ext cx="5604586" cy="1403350"/>
           </a:xfrm>
           <a:prstGeom prst="rect">
@@ -16959,7 +16977,7 @@
         </p:nvSpPr>
         <p:spPr>
           <a:xfrm>
-            <a:off x="7378522" y="3503675"/>
+            <a:off x="7378522" y="3724655"/>
             <a:ext cx="3789045" cy="198374"/>
           </a:xfrm>
           <a:prstGeom prst="rect">
@@ -17000,7 +17018,7 @@
         </p:nvSpPr>
         <p:spPr>
           <a:xfrm>
-            <a:off x="7378522" y="3817315"/>
+            <a:off x="7378522" y="4038295"/>
             <a:ext cx="210566" cy="277723"/>
           </a:xfrm>
           <a:prstGeom prst="rect">
@@ -17041,7 +17059,7 @@
         </p:nvSpPr>
         <p:spPr>
           <a:xfrm>
-            <a:off x="7589088" y="3817315"/>
+            <a:off x="7589088" y="4038295"/>
             <a:ext cx="3578479" cy="277723"/>
           </a:xfrm>
           <a:prstGeom prst="rect">
@@ -17082,7 +17100,7 @@
         </p:nvSpPr>
         <p:spPr>
           <a:xfrm>
-            <a:off x="7378522" y="4131767"/>
+            <a:off x="7378522" y="4352747"/>
             <a:ext cx="210566" cy="277723"/>
           </a:xfrm>
           <a:prstGeom prst="rect">
@@ -17123,7 +17141,7 @@
         </p:nvSpPr>
         <p:spPr>
           <a:xfrm>
-            <a:off x="7589088" y="4131767"/>
+            <a:off x="7589088" y="4352747"/>
             <a:ext cx="3578479" cy="277723"/>
           </a:xfrm>
           <a:prstGeom prst="rect">
@@ -17164,7 +17182,7 @@
         </p:nvSpPr>
         <p:spPr>
           <a:xfrm>
-            <a:off x="7378522" y="4446219"/>
+            <a:off x="7378522" y="4667199"/>
             <a:ext cx="210566" cy="277723"/>
           </a:xfrm>
           <a:prstGeom prst="rect">
@@ -17205,7 +17223,7 @@
         </p:nvSpPr>
         <p:spPr>
           <a:xfrm>
-            <a:off x="7589088" y="4446219"/>
+            <a:off x="7589088" y="4667199"/>
             <a:ext cx="3578479" cy="277723"/>
           </a:xfrm>
           <a:prstGeom prst="rect">
@@ -17246,7 +17264,7 @@
         </p:nvSpPr>
         <p:spPr>
           <a:xfrm>
-            <a:off x="7378522" y="4760671"/>
+            <a:off x="7378522" y="4981651"/>
             <a:ext cx="210566" cy="277723"/>
           </a:xfrm>
           <a:prstGeom prst="rect">
@@ -17287,7 +17305,7 @@
         </p:nvSpPr>
         <p:spPr>
           <a:xfrm>
-            <a:off x="7589088" y="4760671"/>
+            <a:off x="7589088" y="4981651"/>
             <a:ext cx="3578479" cy="277723"/>
           </a:xfrm>
           <a:prstGeom prst="rect">
@@ -17328,7 +17346,7 @@
         </p:nvSpPr>
         <p:spPr>
           <a:xfrm>
-            <a:off x="7378522" y="5075123"/>
+            <a:off x="7378522" y="5296103"/>
             <a:ext cx="210566" cy="277723"/>
           </a:xfrm>
           <a:prstGeom prst="rect">
@@ -17369,7 +17387,7 @@
         </p:nvSpPr>
         <p:spPr>
           <a:xfrm>
-            <a:off x="7589088" y="5075123"/>
+            <a:off x="7589088" y="5296103"/>
             <a:ext cx="3578479" cy="277723"/>
           </a:xfrm>
           <a:prstGeom prst="rect">
@@ -17410,7 +17428,7 @@
         </p:nvSpPr>
         <p:spPr>
           <a:xfrm>
-            <a:off x="7378522" y="5389575"/>
+            <a:off x="7378522" y="5610555"/>
             <a:ext cx="210566" cy="277723"/>
           </a:xfrm>
           <a:prstGeom prst="rect">
@@ -17451,7 +17469,7 @@
         </p:nvSpPr>
         <p:spPr>
           <a:xfrm>
-            <a:off x="7589088" y="5389575"/>
+            <a:off x="7589088" y="5610555"/>
             <a:ext cx="3578479" cy="277723"/>
           </a:xfrm>
           <a:prstGeom prst="rect">
